--- a/courses/apcsp/lect19.pptx
+++ b/courses/apcsp/lect19.pptx
@@ -5,7 +5,7 @@
     <p:sldMasterId id="2147483791" r:id="rId1"/>
   </p:sldMasterIdLst>
   <p:notesMasterIdLst>
-    <p:notesMasterId r:id="rId32"/>
+    <p:notesMasterId r:id="rId36"/>
   </p:notesMasterIdLst>
   <p:sldIdLst>
     <p:sldId id="256" r:id="rId2"/>
@@ -17,27 +17,31 @@
     <p:sldId id="620" r:id="rId8"/>
     <p:sldId id="630" r:id="rId9"/>
     <p:sldId id="631" r:id="rId10"/>
-    <p:sldId id="632" r:id="rId11"/>
-    <p:sldId id="623" r:id="rId12"/>
-    <p:sldId id="633" r:id="rId13"/>
-    <p:sldId id="624" r:id="rId14"/>
-    <p:sldId id="600" r:id="rId15"/>
-    <p:sldId id="601" r:id="rId16"/>
-    <p:sldId id="634" r:id="rId17"/>
-    <p:sldId id="626" r:id="rId18"/>
-    <p:sldId id="635" r:id="rId19"/>
-    <p:sldId id="529" r:id="rId20"/>
-    <p:sldId id="560" r:id="rId21"/>
-    <p:sldId id="564" r:id="rId22"/>
-    <p:sldId id="532" r:id="rId23"/>
-    <p:sldId id="636" r:id="rId24"/>
-    <p:sldId id="637" r:id="rId25"/>
-    <p:sldId id="638" r:id="rId26"/>
-    <p:sldId id="639" r:id="rId27"/>
-    <p:sldId id="537" r:id="rId28"/>
-    <p:sldId id="541" r:id="rId29"/>
-    <p:sldId id="556" r:id="rId30"/>
-    <p:sldId id="612" r:id="rId31"/>
+    <p:sldId id="640" r:id="rId11"/>
+    <p:sldId id="641" r:id="rId12"/>
+    <p:sldId id="642" r:id="rId13"/>
+    <p:sldId id="643" r:id="rId14"/>
+    <p:sldId id="632" r:id="rId15"/>
+    <p:sldId id="623" r:id="rId16"/>
+    <p:sldId id="633" r:id="rId17"/>
+    <p:sldId id="624" r:id="rId18"/>
+    <p:sldId id="600" r:id="rId19"/>
+    <p:sldId id="601" r:id="rId20"/>
+    <p:sldId id="634" r:id="rId21"/>
+    <p:sldId id="626" r:id="rId22"/>
+    <p:sldId id="635" r:id="rId23"/>
+    <p:sldId id="529" r:id="rId24"/>
+    <p:sldId id="560" r:id="rId25"/>
+    <p:sldId id="564" r:id="rId26"/>
+    <p:sldId id="532" r:id="rId27"/>
+    <p:sldId id="636" r:id="rId28"/>
+    <p:sldId id="637" r:id="rId29"/>
+    <p:sldId id="638" r:id="rId30"/>
+    <p:sldId id="639" r:id="rId31"/>
+    <p:sldId id="537" r:id="rId32"/>
+    <p:sldId id="541" r:id="rId33"/>
+    <p:sldId id="556" r:id="rId34"/>
+    <p:sldId id="612" r:id="rId35"/>
   </p:sldIdLst>
   <p:sldSz cx="9144000" cy="5715000" type="screen16x10"/>
   <p:notesSz cx="6858000" cy="9144000"/>
@@ -147,7 +151,7 @@
 <file path=ppt/revisionInfo.xml><?xml version="1.0" encoding="utf-8"?>
 <p1510:revInfo xmlns:a="http://schemas.openxmlformats.org/drawingml/2006/main" xmlns:r="http://schemas.openxmlformats.org/officeDocument/2006/relationships" xmlns:p1510="http://schemas.microsoft.com/office/powerpoint/2015/10/main">
   <p1510:revLst>
-    <p1510:client id="{BFF36CE0-60EF-8B47-B70B-E2DD14C37FCA}" v="31" dt="2023-03-22T12:29:31.491"/>
+    <p1510:client id="{88884C21-6661-214B-9E40-9D10EB0E6CB3}" v="10" dt="2026-04-02T12:25:50.698"/>
   </p1510:revLst>
 </p1510:revInfo>
 </file>
@@ -155,4618 +159,102 @@
 <file path=ppt/changesInfos/changesInfo1.xml><?xml version="1.0" encoding="utf-8"?>
 <pc:chgInfo xmlns:a="http://schemas.openxmlformats.org/drawingml/2006/main" xmlns:r="http://schemas.openxmlformats.org/officeDocument/2006/relationships" xmlns:ac="http://schemas.microsoft.com/office/drawing/2013/main/command" xmlns:pc="http://schemas.microsoft.com/office/powerpoint/2013/main/command">
   <pc:docChgLst>
-    <pc:chgData name="Long B Nguyen" userId="f59fb8f3-a021-417a-8bc1-65c8d471c621" providerId="ADAL" clId="{B5860C40-AA08-4447-A918-2D2782E0FC0B}"/>
-    <pc:docChg chg="delSld modSld">
-      <pc:chgData name="Long B Nguyen" userId="f59fb8f3-a021-417a-8bc1-65c8d471c621" providerId="ADAL" clId="{B5860C40-AA08-4447-A918-2D2782E0FC0B}" dt="2019-09-16T13:59:20.091" v="35" actId="2696"/>
+    <pc:chgData name="Long B Nguyen" userId="f59fb8f3-a021-417a-8bc1-65c8d471c621" providerId="ADAL" clId="{93BE87BA-F8CA-5C1F-82FF-B4CAB5F485A1}"/>
+    <pc:docChg chg="custSel addSld delSld modSld">
+      <pc:chgData name="Long B Nguyen" userId="f59fb8f3-a021-417a-8bc1-65c8d471c621" providerId="ADAL" clId="{93BE87BA-F8CA-5C1F-82FF-B4CAB5F485A1}" dt="2026-04-02T12:25:50.697" v="18"/>
       <pc:docMkLst>
         <pc:docMk/>
       </pc:docMkLst>
-      <pc:sldChg chg="modSp">
-        <pc:chgData name="Long B Nguyen" userId="f59fb8f3-a021-417a-8bc1-65c8d471c621" providerId="ADAL" clId="{B5860C40-AA08-4447-A918-2D2782E0FC0B}" dt="2019-09-16T13:58:36.640" v="18" actId="20577"/>
+      <pc:sldChg chg="addSp delSp add del">
+        <pc:chgData name="Long B Nguyen" userId="f59fb8f3-a021-417a-8bc1-65c8d471c621" providerId="ADAL" clId="{93BE87BA-F8CA-5C1F-82FF-B4CAB5F485A1}" dt="2026-04-02T12:03:59.158" v="3"/>
         <pc:sldMkLst>
           <pc:docMk/>
-          <pc:sldMk cId="4247104139" sldId="256"/>
+          <pc:sldMk cId="1563106740" sldId="640"/>
         </pc:sldMkLst>
-        <pc:spChg chg="mod">
-          <ac:chgData name="Long B Nguyen" userId="f59fb8f3-a021-417a-8bc1-65c8d471c621" providerId="ADAL" clId="{B5860C40-AA08-4447-A918-2D2782E0FC0B}" dt="2019-09-16T13:58:36.640" v="18" actId="20577"/>
-          <ac:spMkLst>
-            <pc:docMk/>
-            <pc:sldMk cId="4247104139" sldId="256"/>
-            <ac:spMk id="3" creationId="{1BDC47C8-6776-7B44-9CD4-95FC91452D62}"/>
-          </ac:spMkLst>
-        </pc:spChg>
-      </pc:sldChg>
-    </pc:docChg>
-  </pc:docChgLst>
-  <pc:docChgLst>
-    <pc:chgData name="Long B Nguyen" userId="f59fb8f3-a021-417a-8bc1-65c8d471c621" providerId="ADAL" clId="{4BE6A6D3-80E1-E648-9A65-3053C53C3489}"/>
-    <pc:docChg chg="addSld delSld modSld">
-      <pc:chgData name="Long B Nguyen" userId="f59fb8f3-a021-417a-8bc1-65c8d471c621" providerId="ADAL" clId="{4BE6A6D3-80E1-E648-9A65-3053C53C3489}" dt="2020-01-13T13:50:20.439" v="74" actId="2696"/>
-      <pc:docMkLst>
-        <pc:docMk/>
-      </pc:docMkLst>
-      <pc:sldChg chg="modSp">
-        <pc:chgData name="Long B Nguyen" userId="f59fb8f3-a021-417a-8bc1-65c8d471c621" providerId="ADAL" clId="{4BE6A6D3-80E1-E648-9A65-3053C53C3489}" dt="2020-01-13T13:50:08.533" v="40" actId="20577"/>
-        <pc:sldMkLst>
-          <pc:docMk/>
-          <pc:sldMk cId="4247104139" sldId="256"/>
-        </pc:sldMkLst>
-        <pc:spChg chg="mod">
-          <ac:chgData name="Long B Nguyen" userId="f59fb8f3-a021-417a-8bc1-65c8d471c621" providerId="ADAL" clId="{4BE6A6D3-80E1-E648-9A65-3053C53C3489}" dt="2020-01-13T13:50:08.533" v="40" actId="20577"/>
-          <ac:spMkLst>
-            <pc:docMk/>
-            <pc:sldMk cId="4247104139" sldId="256"/>
-            <ac:spMk id="3" creationId="{1BDC47C8-6776-7B44-9CD4-95FC91452D62}"/>
-          </ac:spMkLst>
-        </pc:spChg>
-      </pc:sldChg>
-      <pc:sldChg chg="del">
-        <pc:chgData name="Long B Nguyen" userId="f59fb8f3-a021-417a-8bc1-65c8d471c621" providerId="ADAL" clId="{4BE6A6D3-80E1-E648-9A65-3053C53C3489}" dt="2020-01-13T13:50:20.439" v="74" actId="2696"/>
-        <pc:sldMkLst>
-          <pc:docMk/>
-          <pc:sldMk cId="1758448129" sldId="309"/>
-        </pc:sldMkLst>
-      </pc:sldChg>
-      <pc:sldChg chg="del">
-        <pc:chgData name="Long B Nguyen" userId="f59fb8f3-a021-417a-8bc1-65c8d471c621" providerId="ADAL" clId="{4BE6A6D3-80E1-E648-9A65-3053C53C3489}" dt="2020-01-13T13:50:12.196" v="42" actId="2696"/>
-        <pc:sldMkLst>
-          <pc:docMk/>
-          <pc:sldMk cId="3947558204" sldId="313"/>
-        </pc:sldMkLst>
-      </pc:sldChg>
-      <pc:sldChg chg="del">
-        <pc:chgData name="Long B Nguyen" userId="f59fb8f3-a021-417a-8bc1-65c8d471c621" providerId="ADAL" clId="{4BE6A6D3-80E1-E648-9A65-3053C53C3489}" dt="2020-01-13T13:50:19.961" v="43" actId="2696"/>
-        <pc:sldMkLst>
-          <pc:docMk/>
-          <pc:sldMk cId="2054265466" sldId="314"/>
-        </pc:sldMkLst>
-      </pc:sldChg>
-      <pc:sldChg chg="del">
-        <pc:chgData name="Long B Nguyen" userId="f59fb8f3-a021-417a-8bc1-65c8d471c621" providerId="ADAL" clId="{4BE6A6D3-80E1-E648-9A65-3053C53C3489}" dt="2020-01-13T13:50:19.999" v="45" actId="2696"/>
-        <pc:sldMkLst>
-          <pc:docMk/>
-          <pc:sldMk cId="917461937" sldId="315"/>
-        </pc:sldMkLst>
-      </pc:sldChg>
-      <pc:sldChg chg="del">
-        <pc:chgData name="Long B Nguyen" userId="f59fb8f3-a021-417a-8bc1-65c8d471c621" providerId="ADAL" clId="{4BE6A6D3-80E1-E648-9A65-3053C53C3489}" dt="2020-01-13T13:50:20.011" v="46" actId="2696"/>
-        <pc:sldMkLst>
-          <pc:docMk/>
-          <pc:sldMk cId="3266234076" sldId="316"/>
-        </pc:sldMkLst>
-      </pc:sldChg>
-      <pc:sldChg chg="del">
-        <pc:chgData name="Long B Nguyen" userId="f59fb8f3-a021-417a-8bc1-65c8d471c621" providerId="ADAL" clId="{4BE6A6D3-80E1-E648-9A65-3053C53C3489}" dt="2020-01-13T13:50:19.977" v="44" actId="2696"/>
-        <pc:sldMkLst>
-          <pc:docMk/>
-          <pc:sldMk cId="2886319738" sldId="317"/>
-        </pc:sldMkLst>
-      </pc:sldChg>
-      <pc:sldChg chg="del">
-        <pc:chgData name="Long B Nguyen" userId="f59fb8f3-a021-417a-8bc1-65c8d471c621" providerId="ADAL" clId="{4BE6A6D3-80E1-E648-9A65-3053C53C3489}" dt="2020-01-13T13:50:20.047" v="48" actId="2696"/>
-        <pc:sldMkLst>
-          <pc:docMk/>
-          <pc:sldMk cId="3906700287" sldId="319"/>
-        </pc:sldMkLst>
-      </pc:sldChg>
-      <pc:sldChg chg="del">
-        <pc:chgData name="Long B Nguyen" userId="f59fb8f3-a021-417a-8bc1-65c8d471c621" providerId="ADAL" clId="{4BE6A6D3-80E1-E648-9A65-3053C53C3489}" dt="2020-01-13T13:50:20.082" v="50" actId="2696"/>
-        <pc:sldMkLst>
-          <pc:docMk/>
-          <pc:sldMk cId="1810541734" sldId="320"/>
-        </pc:sldMkLst>
-      </pc:sldChg>
-      <pc:sldChg chg="del">
-        <pc:chgData name="Long B Nguyen" userId="f59fb8f3-a021-417a-8bc1-65c8d471c621" providerId="ADAL" clId="{4BE6A6D3-80E1-E648-9A65-3053C53C3489}" dt="2020-01-13T13:50:20.093" v="51" actId="2696"/>
-        <pc:sldMkLst>
-          <pc:docMk/>
-          <pc:sldMk cId="1359731776" sldId="321"/>
-        </pc:sldMkLst>
-      </pc:sldChg>
-      <pc:sldChg chg="del">
-        <pc:chgData name="Long B Nguyen" userId="f59fb8f3-a021-417a-8bc1-65c8d471c621" providerId="ADAL" clId="{4BE6A6D3-80E1-E648-9A65-3053C53C3489}" dt="2020-01-13T13:50:20.107" v="52" actId="2696"/>
-        <pc:sldMkLst>
-          <pc:docMk/>
-          <pc:sldMk cId="3651577480" sldId="322"/>
-        </pc:sldMkLst>
-      </pc:sldChg>
-      <pc:sldChg chg="del">
-        <pc:chgData name="Long B Nguyen" userId="f59fb8f3-a021-417a-8bc1-65c8d471c621" providerId="ADAL" clId="{4BE6A6D3-80E1-E648-9A65-3053C53C3489}" dt="2020-01-13T13:50:20.069" v="49" actId="2696"/>
-        <pc:sldMkLst>
-          <pc:docMk/>
-          <pc:sldMk cId="1496564367" sldId="323"/>
-        </pc:sldMkLst>
-      </pc:sldChg>
-      <pc:sldChg chg="del">
-        <pc:chgData name="Long B Nguyen" userId="f59fb8f3-a021-417a-8bc1-65c8d471c621" providerId="ADAL" clId="{4BE6A6D3-80E1-E648-9A65-3053C53C3489}" dt="2020-01-13T13:50:20.420" v="73" actId="2696"/>
-        <pc:sldMkLst>
-          <pc:docMk/>
-          <pc:sldMk cId="771866096" sldId="324"/>
-        </pc:sldMkLst>
-      </pc:sldChg>
-      <pc:sldChg chg="del">
-        <pc:chgData name="Long B Nguyen" userId="f59fb8f3-a021-417a-8bc1-65c8d471c621" providerId="ADAL" clId="{4BE6A6D3-80E1-E648-9A65-3053C53C3489}" dt="2020-01-13T13:50:20.162" v="56" actId="2696"/>
-        <pc:sldMkLst>
-          <pc:docMk/>
-          <pc:sldMk cId="1025355635" sldId="325"/>
-        </pc:sldMkLst>
-      </pc:sldChg>
-      <pc:sldChg chg="del">
-        <pc:chgData name="Long B Nguyen" userId="f59fb8f3-a021-417a-8bc1-65c8d471c621" providerId="ADAL" clId="{4BE6A6D3-80E1-E648-9A65-3053C53C3489}" dt="2020-01-13T13:50:20.149" v="55" actId="2696"/>
-        <pc:sldMkLst>
-          <pc:docMk/>
-          <pc:sldMk cId="4174920299" sldId="327"/>
-        </pc:sldMkLst>
-      </pc:sldChg>
-      <pc:sldChg chg="del">
-        <pc:chgData name="Long B Nguyen" userId="f59fb8f3-a021-417a-8bc1-65c8d471c621" providerId="ADAL" clId="{4BE6A6D3-80E1-E648-9A65-3053C53C3489}" dt="2020-01-13T13:50:20.176" v="57" actId="2696"/>
-        <pc:sldMkLst>
-          <pc:docMk/>
-          <pc:sldMk cId="2756462650" sldId="328"/>
-        </pc:sldMkLst>
-      </pc:sldChg>
-      <pc:sldChg chg="del">
-        <pc:chgData name="Long B Nguyen" userId="f59fb8f3-a021-417a-8bc1-65c8d471c621" providerId="ADAL" clId="{4BE6A6D3-80E1-E648-9A65-3053C53C3489}" dt="2020-01-13T13:50:20.191" v="58" actId="2696"/>
-        <pc:sldMkLst>
-          <pc:docMk/>
-          <pc:sldMk cId="3080714931" sldId="329"/>
-        </pc:sldMkLst>
-      </pc:sldChg>
-      <pc:sldChg chg="del">
-        <pc:chgData name="Long B Nguyen" userId="f59fb8f3-a021-417a-8bc1-65c8d471c621" providerId="ADAL" clId="{4BE6A6D3-80E1-E648-9A65-3053C53C3489}" dt="2020-01-13T13:50:20.204" v="59" actId="2696"/>
-        <pc:sldMkLst>
-          <pc:docMk/>
-          <pc:sldMk cId="532184546" sldId="330"/>
-        </pc:sldMkLst>
-      </pc:sldChg>
-      <pc:sldChg chg="del">
-        <pc:chgData name="Long B Nguyen" userId="f59fb8f3-a021-417a-8bc1-65c8d471c621" providerId="ADAL" clId="{4BE6A6D3-80E1-E648-9A65-3053C53C3489}" dt="2020-01-13T13:50:20.219" v="60" actId="2696"/>
-        <pc:sldMkLst>
-          <pc:docMk/>
-          <pc:sldMk cId="3264629021" sldId="331"/>
-        </pc:sldMkLst>
-      </pc:sldChg>
-      <pc:sldChg chg="del">
-        <pc:chgData name="Long B Nguyen" userId="f59fb8f3-a021-417a-8bc1-65c8d471c621" providerId="ADAL" clId="{4BE6A6D3-80E1-E648-9A65-3053C53C3489}" dt="2020-01-13T13:50:20.261" v="63" actId="2696"/>
-        <pc:sldMkLst>
-          <pc:docMk/>
-          <pc:sldMk cId="4022722016" sldId="332"/>
-        </pc:sldMkLst>
-      </pc:sldChg>
-      <pc:sldChg chg="del">
-        <pc:chgData name="Long B Nguyen" userId="f59fb8f3-a021-417a-8bc1-65c8d471c621" providerId="ADAL" clId="{4BE6A6D3-80E1-E648-9A65-3053C53C3489}" dt="2020-01-13T13:50:20.283" v="64" actId="2696"/>
-        <pc:sldMkLst>
-          <pc:docMk/>
-          <pc:sldMk cId="1710208723" sldId="333"/>
-        </pc:sldMkLst>
-      </pc:sldChg>
-      <pc:sldChg chg="del">
-        <pc:chgData name="Long B Nguyen" userId="f59fb8f3-a021-417a-8bc1-65c8d471c621" providerId="ADAL" clId="{4BE6A6D3-80E1-E648-9A65-3053C53C3489}" dt="2020-01-13T13:50:20.251" v="62" actId="2696"/>
-        <pc:sldMkLst>
-          <pc:docMk/>
-          <pc:sldMk cId="3404583044" sldId="334"/>
-        </pc:sldMkLst>
-      </pc:sldChg>
-      <pc:sldChg chg="del">
-        <pc:chgData name="Long B Nguyen" userId="f59fb8f3-a021-417a-8bc1-65c8d471c621" providerId="ADAL" clId="{4BE6A6D3-80E1-E648-9A65-3053C53C3489}" dt="2020-01-13T13:50:20.304" v="65" actId="2696"/>
-        <pc:sldMkLst>
-          <pc:docMk/>
-          <pc:sldMk cId="3866550465" sldId="335"/>
-        </pc:sldMkLst>
-      </pc:sldChg>
-      <pc:sldChg chg="del">
-        <pc:chgData name="Long B Nguyen" userId="f59fb8f3-a021-417a-8bc1-65c8d471c621" providerId="ADAL" clId="{4BE6A6D3-80E1-E648-9A65-3053C53C3489}" dt="2020-01-13T13:50:20.324" v="66" actId="2696"/>
-        <pc:sldMkLst>
-          <pc:docMk/>
-          <pc:sldMk cId="3749436800" sldId="336"/>
-        </pc:sldMkLst>
-      </pc:sldChg>
-      <pc:sldChg chg="del">
-        <pc:chgData name="Long B Nguyen" userId="f59fb8f3-a021-417a-8bc1-65c8d471c621" providerId="ADAL" clId="{4BE6A6D3-80E1-E648-9A65-3053C53C3489}" dt="2020-01-13T13:50:20.336" v="67" actId="2696"/>
-        <pc:sldMkLst>
-          <pc:docMk/>
-          <pc:sldMk cId="461704868" sldId="337"/>
-        </pc:sldMkLst>
-      </pc:sldChg>
-      <pc:sldChg chg="del">
-        <pc:chgData name="Long B Nguyen" userId="f59fb8f3-a021-417a-8bc1-65c8d471c621" providerId="ADAL" clId="{4BE6A6D3-80E1-E648-9A65-3053C53C3489}" dt="2020-01-13T13:50:20.351" v="68" actId="2696"/>
-        <pc:sldMkLst>
-          <pc:docMk/>
-          <pc:sldMk cId="545386500" sldId="338"/>
-        </pc:sldMkLst>
-      </pc:sldChg>
-      <pc:sldChg chg="del">
-        <pc:chgData name="Long B Nguyen" userId="f59fb8f3-a021-417a-8bc1-65c8d471c621" providerId="ADAL" clId="{4BE6A6D3-80E1-E648-9A65-3053C53C3489}" dt="2020-01-13T13:50:20.380" v="70" actId="2696"/>
-        <pc:sldMkLst>
-          <pc:docMk/>
-          <pc:sldMk cId="1791361008" sldId="339"/>
-        </pc:sldMkLst>
-      </pc:sldChg>
-      <pc:sldChg chg="del">
-        <pc:chgData name="Long B Nguyen" userId="f59fb8f3-a021-417a-8bc1-65c8d471c621" providerId="ADAL" clId="{4BE6A6D3-80E1-E648-9A65-3053C53C3489}" dt="2020-01-13T13:50:20.367" v="69" actId="2696"/>
-        <pc:sldMkLst>
-          <pc:docMk/>
-          <pc:sldMk cId="678299524" sldId="340"/>
-        </pc:sldMkLst>
-      </pc:sldChg>
-      <pc:sldChg chg="del">
-        <pc:chgData name="Long B Nguyen" userId="f59fb8f3-a021-417a-8bc1-65c8d471c621" providerId="ADAL" clId="{4BE6A6D3-80E1-E648-9A65-3053C53C3489}" dt="2020-01-13T13:50:20.393" v="71" actId="2696"/>
-        <pc:sldMkLst>
-          <pc:docMk/>
-          <pc:sldMk cId="225127645" sldId="341"/>
-        </pc:sldMkLst>
-      </pc:sldChg>
-      <pc:sldChg chg="del">
-        <pc:chgData name="Long B Nguyen" userId="f59fb8f3-a021-417a-8bc1-65c8d471c621" providerId="ADAL" clId="{4BE6A6D3-80E1-E648-9A65-3053C53C3489}" dt="2020-01-13T13:50:20.133" v="54" actId="2696"/>
-        <pc:sldMkLst>
-          <pc:docMk/>
-          <pc:sldMk cId="2214326257" sldId="342"/>
-        </pc:sldMkLst>
-      </pc:sldChg>
-      <pc:sldChg chg="del">
-        <pc:chgData name="Long B Nguyen" userId="f59fb8f3-a021-417a-8bc1-65c8d471c621" providerId="ADAL" clId="{4BE6A6D3-80E1-E648-9A65-3053C53C3489}" dt="2020-01-13T13:50:20.121" v="53" actId="2696"/>
-        <pc:sldMkLst>
-          <pc:docMk/>
-          <pc:sldMk cId="1356056044" sldId="343"/>
-        </pc:sldMkLst>
-      </pc:sldChg>
-      <pc:sldChg chg="del">
-        <pc:chgData name="Long B Nguyen" userId="f59fb8f3-a021-417a-8bc1-65c8d471c621" providerId="ADAL" clId="{4BE6A6D3-80E1-E648-9A65-3053C53C3489}" dt="2020-01-13T13:50:20.028" v="47" actId="2696"/>
-        <pc:sldMkLst>
-          <pc:docMk/>
-          <pc:sldMk cId="902308803" sldId="345"/>
-        </pc:sldMkLst>
-      </pc:sldChg>
-      <pc:sldChg chg="del">
-        <pc:chgData name="Long B Nguyen" userId="f59fb8f3-a021-417a-8bc1-65c8d471c621" providerId="ADAL" clId="{4BE6A6D3-80E1-E648-9A65-3053C53C3489}" dt="2020-01-13T13:50:20.235" v="61" actId="2696"/>
-        <pc:sldMkLst>
-          <pc:docMk/>
-          <pc:sldMk cId="2271372051" sldId="346"/>
-        </pc:sldMkLst>
-      </pc:sldChg>
-      <pc:sldChg chg="del">
-        <pc:chgData name="Long B Nguyen" userId="f59fb8f3-a021-417a-8bc1-65c8d471c621" providerId="ADAL" clId="{4BE6A6D3-80E1-E648-9A65-3053C53C3489}" dt="2020-01-13T13:50:20.403" v="72" actId="2696"/>
-        <pc:sldMkLst>
-          <pc:docMk/>
-          <pc:sldMk cId="198078322" sldId="347"/>
-        </pc:sldMkLst>
-      </pc:sldChg>
-      <pc:sldChg chg="add">
-        <pc:chgData name="Long B Nguyen" userId="f59fb8f3-a021-417a-8bc1-65c8d471c621" providerId="ADAL" clId="{4BE6A6D3-80E1-E648-9A65-3053C53C3489}" dt="2020-01-13T13:50:10.483" v="41"/>
-        <pc:sldMkLst>
-          <pc:docMk/>
-          <pc:sldMk cId="2218591065" sldId="348"/>
-        </pc:sldMkLst>
-      </pc:sldChg>
-      <pc:sldChg chg="add">
-        <pc:chgData name="Long B Nguyen" userId="f59fb8f3-a021-417a-8bc1-65c8d471c621" providerId="ADAL" clId="{4BE6A6D3-80E1-E648-9A65-3053C53C3489}" dt="2020-01-13T13:50:10.483" v="41"/>
-        <pc:sldMkLst>
-          <pc:docMk/>
-          <pc:sldMk cId="2191981710" sldId="349"/>
-        </pc:sldMkLst>
-      </pc:sldChg>
-    </pc:docChg>
-  </pc:docChgLst>
-  <pc:docChgLst>
-    <pc:chgData name="Long B Nguyen" userId="f59fb8f3-a021-417a-8bc1-65c8d471c621" providerId="ADAL" clId="{AA9102B5-DACA-D841-B260-AEEBF90FC60A}"/>
-    <pc:docChg chg="custSel addSld delSld modSld">
-      <pc:chgData name="Long B Nguyen" userId="f59fb8f3-a021-417a-8bc1-65c8d471c621" providerId="ADAL" clId="{AA9102B5-DACA-D841-B260-AEEBF90FC60A}" dt="2020-01-06T17:07:10.515" v="1519" actId="2711"/>
-      <pc:docMkLst>
-        <pc:docMk/>
-      </pc:docMkLst>
-      <pc:sldChg chg="modSp">
-        <pc:chgData name="Long B Nguyen" userId="f59fb8f3-a021-417a-8bc1-65c8d471c621" providerId="ADAL" clId="{AA9102B5-DACA-D841-B260-AEEBF90FC60A}" dt="2020-01-05T22:05:23.536" v="23" actId="20577"/>
-        <pc:sldMkLst>
-          <pc:docMk/>
-          <pc:sldMk cId="4247104139" sldId="256"/>
-        </pc:sldMkLst>
-        <pc:spChg chg="mod">
-          <ac:chgData name="Long B Nguyen" userId="f59fb8f3-a021-417a-8bc1-65c8d471c621" providerId="ADAL" clId="{AA9102B5-DACA-D841-B260-AEEBF90FC60A}" dt="2020-01-05T22:05:23.536" v="23" actId="20577"/>
-          <ac:spMkLst>
-            <pc:docMk/>
-            <pc:sldMk cId="4247104139" sldId="256"/>
-            <ac:spMk id="3" creationId="{1BDC47C8-6776-7B44-9CD4-95FC91452D62}"/>
-          </ac:spMkLst>
-        </pc:spChg>
-      </pc:sldChg>
-      <pc:sldChg chg="del">
-        <pc:chgData name="Long B Nguyen" userId="f59fb8f3-a021-417a-8bc1-65c8d471c621" providerId="ADAL" clId="{AA9102B5-DACA-D841-B260-AEEBF90FC60A}" dt="2020-01-05T22:05:52.483" v="41" actId="2696"/>
-        <pc:sldMkLst>
-          <pc:docMk/>
-          <pc:sldMk cId="1438711869" sldId="284"/>
-        </pc:sldMkLst>
-      </pc:sldChg>
-      <pc:sldChg chg="del">
-        <pc:chgData name="Long B Nguyen" userId="f59fb8f3-a021-417a-8bc1-65c8d471c621" providerId="ADAL" clId="{AA9102B5-DACA-D841-B260-AEEBF90FC60A}" dt="2020-01-05T22:05:52.199" v="24" actId="2696"/>
-        <pc:sldMkLst>
-          <pc:docMk/>
-          <pc:sldMk cId="131840209" sldId="286"/>
-        </pc:sldMkLst>
-      </pc:sldChg>
-      <pc:sldChg chg="del">
-        <pc:chgData name="Long B Nguyen" userId="f59fb8f3-a021-417a-8bc1-65c8d471c621" providerId="ADAL" clId="{AA9102B5-DACA-D841-B260-AEEBF90FC60A}" dt="2020-01-05T22:05:52.214" v="25" actId="2696"/>
-        <pc:sldMkLst>
-          <pc:docMk/>
-          <pc:sldMk cId="1816941262" sldId="295"/>
-        </pc:sldMkLst>
-      </pc:sldChg>
-      <pc:sldChg chg="del">
-        <pc:chgData name="Long B Nguyen" userId="f59fb8f3-a021-417a-8bc1-65c8d471c621" providerId="ADAL" clId="{AA9102B5-DACA-D841-B260-AEEBF90FC60A}" dt="2020-01-05T22:05:52.246" v="27" actId="2696"/>
-        <pc:sldMkLst>
-          <pc:docMk/>
-          <pc:sldMk cId="553003360" sldId="296"/>
-        </pc:sldMkLst>
-      </pc:sldChg>
-      <pc:sldChg chg="del">
-        <pc:chgData name="Long B Nguyen" userId="f59fb8f3-a021-417a-8bc1-65c8d471c621" providerId="ADAL" clId="{AA9102B5-DACA-D841-B260-AEEBF90FC60A}" dt="2020-01-05T22:05:52.268" v="28" actId="2696"/>
-        <pc:sldMkLst>
-          <pc:docMk/>
-          <pc:sldMk cId="3006175481" sldId="297"/>
-        </pc:sldMkLst>
-      </pc:sldChg>
-      <pc:sldChg chg="del">
-        <pc:chgData name="Long B Nguyen" userId="f59fb8f3-a021-417a-8bc1-65c8d471c621" providerId="ADAL" clId="{AA9102B5-DACA-D841-B260-AEEBF90FC60A}" dt="2020-01-05T22:05:52.287" v="29" actId="2696"/>
-        <pc:sldMkLst>
-          <pc:docMk/>
-          <pc:sldMk cId="3150557076" sldId="298"/>
-        </pc:sldMkLst>
-      </pc:sldChg>
-      <pc:sldChg chg="del">
-        <pc:chgData name="Long B Nguyen" userId="f59fb8f3-a021-417a-8bc1-65c8d471c621" providerId="ADAL" clId="{AA9102B5-DACA-D841-B260-AEEBF90FC60A}" dt="2020-01-05T22:05:52.442" v="38" actId="2696"/>
-        <pc:sldMkLst>
-          <pc:docMk/>
-          <pc:sldMk cId="128704095" sldId="302"/>
-        </pc:sldMkLst>
-      </pc:sldChg>
-      <pc:sldChg chg="del">
-        <pc:chgData name="Long B Nguyen" userId="f59fb8f3-a021-417a-8bc1-65c8d471c621" providerId="ADAL" clId="{AA9102B5-DACA-D841-B260-AEEBF90FC60A}" dt="2020-01-05T22:05:52.305" v="30" actId="2696"/>
-        <pc:sldMkLst>
-          <pc:docMk/>
-          <pc:sldMk cId="3275945509" sldId="303"/>
-        </pc:sldMkLst>
-      </pc:sldChg>
-      <pc:sldChg chg="del">
-        <pc:chgData name="Long B Nguyen" userId="f59fb8f3-a021-417a-8bc1-65c8d471c621" providerId="ADAL" clId="{AA9102B5-DACA-D841-B260-AEEBF90FC60A}" dt="2020-01-05T22:05:52.321" v="31" actId="2696"/>
-        <pc:sldMkLst>
-          <pc:docMk/>
-          <pc:sldMk cId="406772024" sldId="304"/>
-        </pc:sldMkLst>
-      </pc:sldChg>
-      <pc:sldChg chg="del">
-        <pc:chgData name="Long B Nguyen" userId="f59fb8f3-a021-417a-8bc1-65c8d471c621" providerId="ADAL" clId="{AA9102B5-DACA-D841-B260-AEEBF90FC60A}" dt="2020-01-05T22:05:52.334" v="32" actId="2696"/>
-        <pc:sldMkLst>
-          <pc:docMk/>
-          <pc:sldMk cId="1703902501" sldId="305"/>
-        </pc:sldMkLst>
-      </pc:sldChg>
-      <pc:sldChg chg="del">
-        <pc:chgData name="Long B Nguyen" userId="f59fb8f3-a021-417a-8bc1-65c8d471c621" providerId="ADAL" clId="{AA9102B5-DACA-D841-B260-AEEBF90FC60A}" dt="2020-01-05T22:05:52.461" v="39" actId="2696"/>
-        <pc:sldMkLst>
-          <pc:docMk/>
-          <pc:sldMk cId="3614829039" sldId="306"/>
-        </pc:sldMkLst>
-      </pc:sldChg>
-      <pc:sldChg chg="del">
-        <pc:chgData name="Long B Nguyen" userId="f59fb8f3-a021-417a-8bc1-65c8d471c621" providerId="ADAL" clId="{AA9102B5-DACA-D841-B260-AEEBF90FC60A}" dt="2020-01-05T22:05:52.471" v="40" actId="2696"/>
-        <pc:sldMkLst>
-          <pc:docMk/>
-          <pc:sldMk cId="295911327" sldId="307"/>
-        </pc:sldMkLst>
-      </pc:sldChg>
-      <pc:sldChg chg="del">
-        <pc:chgData name="Long B Nguyen" userId="f59fb8f3-a021-417a-8bc1-65c8d471c621" providerId="ADAL" clId="{AA9102B5-DACA-D841-B260-AEEBF90FC60A}" dt="2020-01-05T22:05:52.353" v="33" actId="2696"/>
-        <pc:sldMkLst>
-          <pc:docMk/>
-          <pc:sldMk cId="67957925" sldId="308"/>
-        </pc:sldMkLst>
-      </pc:sldChg>
-      <pc:sldChg chg="del">
-        <pc:chgData name="Long B Nguyen" userId="f59fb8f3-a021-417a-8bc1-65c8d471c621" providerId="ADAL" clId="{AA9102B5-DACA-D841-B260-AEEBF90FC60A}" dt="2020-01-05T22:05:52.365" v="34" actId="2696"/>
-        <pc:sldMkLst>
-          <pc:docMk/>
-          <pc:sldMk cId="1872435103" sldId="309"/>
-        </pc:sldMkLst>
-      </pc:sldChg>
-      <pc:sldChg chg="del">
-        <pc:chgData name="Long B Nguyen" userId="f59fb8f3-a021-417a-8bc1-65c8d471c621" providerId="ADAL" clId="{AA9102B5-DACA-D841-B260-AEEBF90FC60A}" dt="2020-01-05T22:05:52.385" v="35" actId="2696"/>
-        <pc:sldMkLst>
-          <pc:docMk/>
-          <pc:sldMk cId="4088965571" sldId="310"/>
-        </pc:sldMkLst>
-      </pc:sldChg>
-      <pc:sldChg chg="del">
-        <pc:chgData name="Long B Nguyen" userId="f59fb8f3-a021-417a-8bc1-65c8d471c621" providerId="ADAL" clId="{AA9102B5-DACA-D841-B260-AEEBF90FC60A}" dt="2020-01-05T22:05:52.404" v="36" actId="2696"/>
-        <pc:sldMkLst>
-          <pc:docMk/>
-          <pc:sldMk cId="2255846137" sldId="311"/>
-        </pc:sldMkLst>
-      </pc:sldChg>
-      <pc:sldChg chg="del">
-        <pc:chgData name="Long B Nguyen" userId="f59fb8f3-a021-417a-8bc1-65c8d471c621" providerId="ADAL" clId="{AA9102B5-DACA-D841-B260-AEEBF90FC60A}" dt="2020-01-05T22:05:52.423" v="37" actId="2696"/>
-        <pc:sldMkLst>
-          <pc:docMk/>
-          <pc:sldMk cId="1513627164" sldId="312"/>
-        </pc:sldMkLst>
-      </pc:sldChg>
-      <pc:sldChg chg="del">
-        <pc:chgData name="Long B Nguyen" userId="f59fb8f3-a021-417a-8bc1-65c8d471c621" providerId="ADAL" clId="{AA9102B5-DACA-D841-B260-AEEBF90FC60A}" dt="2020-01-05T22:05:52.231" v="26" actId="2696"/>
-        <pc:sldMkLst>
-          <pc:docMk/>
-          <pc:sldMk cId="2097059918" sldId="313"/>
-        </pc:sldMkLst>
-      </pc:sldChg>
-      <pc:sldChg chg="modSp">
-        <pc:chgData name="Long B Nguyen" userId="f59fb8f3-a021-417a-8bc1-65c8d471c621" providerId="ADAL" clId="{AA9102B5-DACA-D841-B260-AEEBF90FC60A}" dt="2020-01-06T15:37:30.346" v="948" actId="20577"/>
-        <pc:sldMkLst>
-          <pc:docMk/>
-          <pc:sldMk cId="1452600724" sldId="316"/>
-        </pc:sldMkLst>
-        <pc:spChg chg="mod">
-          <ac:chgData name="Long B Nguyen" userId="f59fb8f3-a021-417a-8bc1-65c8d471c621" providerId="ADAL" clId="{AA9102B5-DACA-D841-B260-AEEBF90FC60A}" dt="2020-01-06T15:37:30.346" v="948" actId="20577"/>
-          <ac:spMkLst>
-            <pc:docMk/>
-            <pc:sldMk cId="1452600724" sldId="316"/>
-            <ac:spMk id="9" creationId="{E3B2E017-30B2-884B-A113-B419A2ED51AD}"/>
-          </ac:spMkLst>
-        </pc:spChg>
-      </pc:sldChg>
-      <pc:sldChg chg="del">
-        <pc:chgData name="Long B Nguyen" userId="f59fb8f3-a021-417a-8bc1-65c8d471c621" providerId="ADAL" clId="{AA9102B5-DACA-D841-B260-AEEBF90FC60A}" dt="2020-01-06T15:03:11.354" v="848" actId="2696"/>
-        <pc:sldMkLst>
-          <pc:docMk/>
-          <pc:sldMk cId="1787114790" sldId="317"/>
-        </pc:sldMkLst>
-      </pc:sldChg>
-      <pc:sldChg chg="del">
-        <pc:chgData name="Long B Nguyen" userId="f59fb8f3-a021-417a-8bc1-65c8d471c621" providerId="ADAL" clId="{AA9102B5-DACA-D841-B260-AEEBF90FC60A}" dt="2020-01-05T22:06:12.101" v="42" actId="2696"/>
-        <pc:sldMkLst>
-          <pc:docMk/>
-          <pc:sldMk cId="1215229427" sldId="318"/>
-        </pc:sldMkLst>
-      </pc:sldChg>
-      <pc:sldChg chg="modSp">
-        <pc:chgData name="Long B Nguyen" userId="f59fb8f3-a021-417a-8bc1-65c8d471c621" providerId="ADAL" clId="{AA9102B5-DACA-D841-B260-AEEBF90FC60A}" dt="2020-01-06T01:48:03.413" v="110" actId="20577"/>
-        <pc:sldMkLst>
-          <pc:docMk/>
-          <pc:sldMk cId="924617162" sldId="319"/>
-        </pc:sldMkLst>
-        <pc:spChg chg="mod">
-          <ac:chgData name="Long B Nguyen" userId="f59fb8f3-a021-417a-8bc1-65c8d471c621" providerId="ADAL" clId="{AA9102B5-DACA-D841-B260-AEEBF90FC60A}" dt="2020-01-06T01:48:03.413" v="110" actId="20577"/>
-          <ac:spMkLst>
-            <pc:docMk/>
-            <pc:sldMk cId="924617162" sldId="319"/>
-            <ac:spMk id="9" creationId="{E3B2E017-30B2-884B-A113-B419A2ED51AD}"/>
-          </ac:spMkLst>
-        </pc:spChg>
-      </pc:sldChg>
-      <pc:sldChg chg="modSp">
-        <pc:chgData name="Long B Nguyen" userId="f59fb8f3-a021-417a-8bc1-65c8d471c621" providerId="ADAL" clId="{AA9102B5-DACA-D841-B260-AEEBF90FC60A}" dt="2020-01-06T01:56:11.549" v="712" actId="1076"/>
-        <pc:sldMkLst>
-          <pc:docMk/>
-          <pc:sldMk cId="1310010799" sldId="324"/>
-        </pc:sldMkLst>
-        <pc:spChg chg="mod">
-          <ac:chgData name="Long B Nguyen" userId="f59fb8f3-a021-417a-8bc1-65c8d471c621" providerId="ADAL" clId="{AA9102B5-DACA-D841-B260-AEEBF90FC60A}" dt="2020-01-06T01:56:11.549" v="712" actId="1076"/>
-          <ac:spMkLst>
-            <pc:docMk/>
-            <pc:sldMk cId="1310010799" sldId="324"/>
-            <ac:spMk id="9" creationId="{E3B2E017-30B2-884B-A113-B419A2ED51AD}"/>
-          </ac:spMkLst>
-        </pc:spChg>
-      </pc:sldChg>
-      <pc:sldChg chg="modSp">
-        <pc:chgData name="Long B Nguyen" userId="f59fb8f3-a021-417a-8bc1-65c8d471c621" providerId="ADAL" clId="{AA9102B5-DACA-D841-B260-AEEBF90FC60A}" dt="2020-01-06T15:35:11.658" v="853" actId="20577"/>
-        <pc:sldMkLst>
-          <pc:docMk/>
-          <pc:sldMk cId="3314372952" sldId="325"/>
-        </pc:sldMkLst>
-        <pc:spChg chg="mod">
-          <ac:chgData name="Long B Nguyen" userId="f59fb8f3-a021-417a-8bc1-65c8d471c621" providerId="ADAL" clId="{AA9102B5-DACA-D841-B260-AEEBF90FC60A}" dt="2020-01-06T15:35:11.658" v="853" actId="20577"/>
-          <ac:spMkLst>
-            <pc:docMk/>
-            <pc:sldMk cId="3314372952" sldId="325"/>
-            <ac:spMk id="2" creationId="{AA3A228F-61D0-D949-A5E7-F83756230BF8}"/>
-          </ac:spMkLst>
-        </pc:spChg>
-        <pc:spChg chg="mod">
-          <ac:chgData name="Long B Nguyen" userId="f59fb8f3-a021-417a-8bc1-65c8d471c621" providerId="ADAL" clId="{AA9102B5-DACA-D841-B260-AEEBF90FC60A}" dt="2020-01-06T15:02:45.351" v="846" actId="20577"/>
-          <ac:spMkLst>
-            <pc:docMk/>
-            <pc:sldMk cId="3314372952" sldId="325"/>
-            <ac:spMk id="9" creationId="{E3B2E017-30B2-884B-A113-B419A2ED51AD}"/>
-          </ac:spMkLst>
-        </pc:spChg>
-      </pc:sldChg>
-      <pc:sldChg chg="del">
-        <pc:chgData name="Long B Nguyen" userId="f59fb8f3-a021-417a-8bc1-65c8d471c621" providerId="ADAL" clId="{AA9102B5-DACA-D841-B260-AEEBF90FC60A}" dt="2020-01-06T15:03:07.580" v="847" actId="2696"/>
-        <pc:sldMkLst>
-          <pc:docMk/>
-          <pc:sldMk cId="3117943122" sldId="326"/>
-        </pc:sldMkLst>
-      </pc:sldChg>
-      <pc:sldChg chg="del">
-        <pc:chgData name="Long B Nguyen" userId="f59fb8f3-a021-417a-8bc1-65c8d471c621" providerId="ADAL" clId="{AA9102B5-DACA-D841-B260-AEEBF90FC60A}" dt="2020-01-06T01:49:27.456" v="111" actId="2696"/>
-        <pc:sldMkLst>
-          <pc:docMk/>
-          <pc:sldMk cId="1025618360" sldId="327"/>
-        </pc:sldMkLst>
-      </pc:sldChg>
-      <pc:sldChg chg="modSp add">
-        <pc:chgData name="Long B Nguyen" userId="f59fb8f3-a021-417a-8bc1-65c8d471c621" providerId="ADAL" clId="{AA9102B5-DACA-D841-B260-AEEBF90FC60A}" dt="2020-01-06T15:00:48.763" v="818" actId="113"/>
-        <pc:sldMkLst>
-          <pc:docMk/>
-          <pc:sldMk cId="1724104636" sldId="327"/>
-        </pc:sldMkLst>
-        <pc:spChg chg="mod">
-          <ac:chgData name="Long B Nguyen" userId="f59fb8f3-a021-417a-8bc1-65c8d471c621" providerId="ADAL" clId="{AA9102B5-DACA-D841-B260-AEEBF90FC60A}" dt="2020-01-06T15:00:48.763" v="818" actId="113"/>
-          <ac:spMkLst>
-            <pc:docMk/>
-            <pc:sldMk cId="1724104636" sldId="327"/>
-            <ac:spMk id="9" creationId="{E3B2E017-30B2-884B-A113-B419A2ED51AD}"/>
-          </ac:spMkLst>
-        </pc:spChg>
-      </pc:sldChg>
-      <pc:sldChg chg="modSp">
-        <pc:chgData name="Long B Nguyen" userId="f59fb8f3-a021-417a-8bc1-65c8d471c621" providerId="ADAL" clId="{AA9102B5-DACA-D841-B260-AEEBF90FC60A}" dt="2020-01-06T01:55:34.369" v="708" actId="20577"/>
-        <pc:sldMkLst>
-          <pc:docMk/>
-          <pc:sldMk cId="4294143140" sldId="329"/>
-        </pc:sldMkLst>
-        <pc:spChg chg="mod">
-          <ac:chgData name="Long B Nguyen" userId="f59fb8f3-a021-417a-8bc1-65c8d471c621" providerId="ADAL" clId="{AA9102B5-DACA-D841-B260-AEEBF90FC60A}" dt="2020-01-06T01:55:34.369" v="708" actId="20577"/>
-          <ac:spMkLst>
-            <pc:docMk/>
-            <pc:sldMk cId="4294143140" sldId="329"/>
-            <ac:spMk id="9" creationId="{E3B2E017-30B2-884B-A113-B419A2ED51AD}"/>
-          </ac:spMkLst>
-        </pc:spChg>
-      </pc:sldChg>
-      <pc:sldChg chg="modSp add">
-        <pc:chgData name="Long B Nguyen" userId="f59fb8f3-a021-417a-8bc1-65c8d471c621" providerId="ADAL" clId="{AA9102B5-DACA-D841-B260-AEEBF90FC60A}" dt="2020-01-06T15:01:01.638" v="819" actId="2711"/>
-        <pc:sldMkLst>
-          <pc:docMk/>
-          <pc:sldMk cId="3594730708" sldId="330"/>
-        </pc:sldMkLst>
-        <pc:spChg chg="mod">
-          <ac:chgData name="Long B Nguyen" userId="f59fb8f3-a021-417a-8bc1-65c8d471c621" providerId="ADAL" clId="{AA9102B5-DACA-D841-B260-AEEBF90FC60A}" dt="2020-01-06T15:01:01.638" v="819" actId="2711"/>
-          <ac:spMkLst>
-            <pc:docMk/>
-            <pc:sldMk cId="3594730708" sldId="330"/>
-            <ac:spMk id="9" creationId="{E3B2E017-30B2-884B-A113-B419A2ED51AD}"/>
-          </ac:spMkLst>
-        </pc:spChg>
-      </pc:sldChg>
-      <pc:sldChg chg="modSp add">
-        <pc:chgData name="Long B Nguyen" userId="f59fb8f3-a021-417a-8bc1-65c8d471c621" providerId="ADAL" clId="{AA9102B5-DACA-D841-B260-AEEBF90FC60A}" dt="2020-01-06T02:00:17.493" v="815" actId="255"/>
-        <pc:sldMkLst>
-          <pc:docMk/>
-          <pc:sldMk cId="3870816631" sldId="331"/>
-        </pc:sldMkLst>
-        <pc:spChg chg="mod">
-          <ac:chgData name="Long B Nguyen" userId="f59fb8f3-a021-417a-8bc1-65c8d471c621" providerId="ADAL" clId="{AA9102B5-DACA-D841-B260-AEEBF90FC60A}" dt="2020-01-06T02:00:17.493" v="815" actId="255"/>
-          <ac:spMkLst>
-            <pc:docMk/>
-            <pc:sldMk cId="3870816631" sldId="331"/>
-            <ac:spMk id="9" creationId="{E3B2E017-30B2-884B-A113-B419A2ED51AD}"/>
-          </ac:spMkLst>
-        </pc:spChg>
-      </pc:sldChg>
-      <pc:sldChg chg="modSp add">
-        <pc:chgData name="Long B Nguyen" userId="f59fb8f3-a021-417a-8bc1-65c8d471c621" providerId="ADAL" clId="{AA9102B5-DACA-D841-B260-AEEBF90FC60A}" dt="2020-01-06T17:07:10.515" v="1519" actId="2711"/>
-        <pc:sldMkLst>
-          <pc:docMk/>
-          <pc:sldMk cId="3124353102" sldId="332"/>
-        </pc:sldMkLst>
-        <pc:spChg chg="mod">
-          <ac:chgData name="Long B Nguyen" userId="f59fb8f3-a021-417a-8bc1-65c8d471c621" providerId="ADAL" clId="{AA9102B5-DACA-D841-B260-AEEBF90FC60A}" dt="2020-01-06T17:03:36.721" v="1332" actId="20577"/>
-          <ac:spMkLst>
-            <pc:docMk/>
-            <pc:sldMk cId="3124353102" sldId="332"/>
-            <ac:spMk id="2" creationId="{AA3A228F-61D0-D949-A5E7-F83756230BF8}"/>
-          </ac:spMkLst>
-        </pc:spChg>
-        <pc:spChg chg="mod">
-          <ac:chgData name="Long B Nguyen" userId="f59fb8f3-a021-417a-8bc1-65c8d471c621" providerId="ADAL" clId="{AA9102B5-DACA-D841-B260-AEEBF90FC60A}" dt="2020-01-06T17:07:10.515" v="1519" actId="2711"/>
-          <ac:spMkLst>
-            <pc:docMk/>
-            <pc:sldMk cId="3124353102" sldId="332"/>
-            <ac:spMk id="9" creationId="{E3B2E017-30B2-884B-A113-B419A2ED51AD}"/>
-          </ac:spMkLst>
-        </pc:spChg>
-      </pc:sldChg>
-    </pc:docChg>
-  </pc:docChgLst>
-  <pc:docChgLst>
-    <pc:chgData name="Long B Nguyen" userId="f59fb8f3-a021-417a-8bc1-65c8d471c621" providerId="ADAL" clId="{6AC26564-89E3-E046-BFB4-F80582D7E17B}"/>
-    <pc:docChg chg="custSel addSld delSld modSld">
-      <pc:chgData name="Long B Nguyen" userId="f59fb8f3-a021-417a-8bc1-65c8d471c621" providerId="ADAL" clId="{6AC26564-89E3-E046-BFB4-F80582D7E17B}" dt="2020-01-13T13:46:56.810" v="92" actId="2696"/>
-      <pc:docMkLst>
-        <pc:docMk/>
-      </pc:docMkLst>
-      <pc:sldChg chg="modSp">
-        <pc:chgData name="Long B Nguyen" userId="f59fb8f3-a021-417a-8bc1-65c8d471c621" providerId="ADAL" clId="{6AC26564-89E3-E046-BFB4-F80582D7E17B}" dt="2020-01-13T13:44:20.464" v="85" actId="20577"/>
-        <pc:sldMkLst>
-          <pc:docMk/>
-          <pc:sldMk cId="4247104139" sldId="256"/>
-        </pc:sldMkLst>
-        <pc:spChg chg="mod">
-          <ac:chgData name="Long B Nguyen" userId="f59fb8f3-a021-417a-8bc1-65c8d471c621" providerId="ADAL" clId="{6AC26564-89E3-E046-BFB4-F80582D7E17B}" dt="2020-01-13T13:43:45.441" v="40" actId="20577"/>
-          <ac:spMkLst>
-            <pc:docMk/>
-            <pc:sldMk cId="4247104139" sldId="256"/>
-            <ac:spMk id="2" creationId="{6117A749-B1BA-E24B-8FB0-0604EF651FB3}"/>
-          </ac:spMkLst>
-        </pc:spChg>
-        <pc:spChg chg="mod">
-          <ac:chgData name="Long B Nguyen" userId="f59fb8f3-a021-417a-8bc1-65c8d471c621" providerId="ADAL" clId="{6AC26564-89E3-E046-BFB4-F80582D7E17B}" dt="2020-01-13T13:44:20.464" v="85" actId="20577"/>
-          <ac:spMkLst>
-            <pc:docMk/>
-            <pc:sldMk cId="4247104139" sldId="256"/>
-            <ac:spMk id="3" creationId="{1BDC47C8-6776-7B44-9CD4-95FC91452D62}"/>
-          </ac:spMkLst>
-        </pc:spChg>
-      </pc:sldChg>
-      <pc:sldChg chg="add del">
-        <pc:chgData name="Long B Nguyen" userId="f59fb8f3-a021-417a-8bc1-65c8d471c621" providerId="ADAL" clId="{6AC26564-89E3-E046-BFB4-F80582D7E17B}" dt="2020-01-13T13:46:54.924" v="89" actId="2696"/>
-        <pc:sldMkLst>
-          <pc:docMk/>
-          <pc:sldMk cId="2869331202" sldId="257"/>
-        </pc:sldMkLst>
-      </pc:sldChg>
-      <pc:sldChg chg="add">
-        <pc:chgData name="Long B Nguyen" userId="f59fb8f3-a021-417a-8bc1-65c8d471c621" providerId="ADAL" clId="{6AC26564-89E3-E046-BFB4-F80582D7E17B}" dt="2020-01-13T13:43:29.420" v="22"/>
-        <pc:sldMkLst>
-          <pc:docMk/>
-          <pc:sldMk cId="1758448129" sldId="309"/>
-        </pc:sldMkLst>
-      </pc:sldChg>
-      <pc:sldChg chg="modSp add del">
-        <pc:chgData name="Long B Nguyen" userId="f59fb8f3-a021-417a-8bc1-65c8d471c621" providerId="ADAL" clId="{6AC26564-89E3-E046-BFB4-F80582D7E17B}" dt="2020-01-13T13:46:55.484" v="90" actId="2696"/>
-        <pc:sldMkLst>
-          <pc:docMk/>
-          <pc:sldMk cId="174202529" sldId="310"/>
-        </pc:sldMkLst>
-        <pc:spChg chg="mod">
-          <ac:chgData name="Long B Nguyen" userId="f59fb8f3-a021-417a-8bc1-65c8d471c621" providerId="ADAL" clId="{6AC26564-89E3-E046-BFB4-F80582D7E17B}" dt="2020-01-13T13:44:35.816" v="86" actId="20577"/>
-          <ac:spMkLst>
-            <pc:docMk/>
-            <pc:sldMk cId="174202529" sldId="310"/>
-            <ac:spMk id="18434" creationId="{72F3E48A-CDFA-CE46-B991-D35BF55EC8E6}"/>
-          </ac:spMkLst>
-        </pc:spChg>
-      </pc:sldChg>
-      <pc:sldChg chg="add del">
-        <pc:chgData name="Long B Nguyen" userId="f59fb8f3-a021-417a-8bc1-65c8d471c621" providerId="ADAL" clId="{6AC26564-89E3-E046-BFB4-F80582D7E17B}" dt="2020-01-13T13:46:56.092" v="91" actId="2696"/>
-        <pc:sldMkLst>
-          <pc:docMk/>
-          <pc:sldMk cId="1098579697" sldId="311"/>
-        </pc:sldMkLst>
-      </pc:sldChg>
-      <pc:sldChg chg="add del">
-        <pc:chgData name="Long B Nguyen" userId="f59fb8f3-a021-417a-8bc1-65c8d471c621" providerId="ADAL" clId="{6AC26564-89E3-E046-BFB4-F80582D7E17B}" dt="2020-01-13T13:46:56.810" v="92" actId="2696"/>
-        <pc:sldMkLst>
-          <pc:docMk/>
-          <pc:sldMk cId="585175195" sldId="312"/>
-        </pc:sldMkLst>
-      </pc:sldChg>
-      <pc:sldChg chg="add">
-        <pc:chgData name="Long B Nguyen" userId="f59fb8f3-a021-417a-8bc1-65c8d471c621" providerId="ADAL" clId="{6AC26564-89E3-E046-BFB4-F80582D7E17B}" dt="2020-01-13T13:43:29.420" v="22"/>
-        <pc:sldMkLst>
-          <pc:docMk/>
-          <pc:sldMk cId="3947558204" sldId="313"/>
-        </pc:sldMkLst>
-      </pc:sldChg>
-      <pc:sldChg chg="add">
-        <pc:chgData name="Long B Nguyen" userId="f59fb8f3-a021-417a-8bc1-65c8d471c621" providerId="ADAL" clId="{6AC26564-89E3-E046-BFB4-F80582D7E17B}" dt="2020-01-13T13:43:29.420" v="22"/>
-        <pc:sldMkLst>
-          <pc:docMk/>
-          <pc:sldMk cId="2054265466" sldId="314"/>
-        </pc:sldMkLst>
-      </pc:sldChg>
-      <pc:sldChg chg="add">
-        <pc:chgData name="Long B Nguyen" userId="f59fb8f3-a021-417a-8bc1-65c8d471c621" providerId="ADAL" clId="{6AC26564-89E3-E046-BFB4-F80582D7E17B}" dt="2020-01-13T13:43:29.420" v="22"/>
-        <pc:sldMkLst>
-          <pc:docMk/>
-          <pc:sldMk cId="917461937" sldId="315"/>
-        </pc:sldMkLst>
-      </pc:sldChg>
-      <pc:sldChg chg="del">
-        <pc:chgData name="Long B Nguyen" userId="f59fb8f3-a021-417a-8bc1-65c8d471c621" providerId="ADAL" clId="{6AC26564-89E3-E046-BFB4-F80582D7E17B}" dt="2020-01-13T13:43:17.195" v="13" actId="2696"/>
-        <pc:sldMkLst>
-          <pc:docMk/>
-          <pc:sldMk cId="1452600724" sldId="316"/>
-        </pc:sldMkLst>
-      </pc:sldChg>
-      <pc:sldChg chg="add">
-        <pc:chgData name="Long B Nguyen" userId="f59fb8f3-a021-417a-8bc1-65c8d471c621" providerId="ADAL" clId="{6AC26564-89E3-E046-BFB4-F80582D7E17B}" dt="2020-01-13T13:43:29.420" v="22"/>
-        <pc:sldMkLst>
-          <pc:docMk/>
-          <pc:sldMk cId="3266234076" sldId="316"/>
-        </pc:sldMkLst>
-      </pc:sldChg>
-      <pc:sldChg chg="add">
-        <pc:chgData name="Long B Nguyen" userId="f59fb8f3-a021-417a-8bc1-65c8d471c621" providerId="ADAL" clId="{6AC26564-89E3-E046-BFB4-F80582D7E17B}" dt="2020-01-13T13:43:29.420" v="22"/>
-        <pc:sldMkLst>
-          <pc:docMk/>
-          <pc:sldMk cId="2886319738" sldId="317"/>
-        </pc:sldMkLst>
-      </pc:sldChg>
-      <pc:sldChg chg="del">
-        <pc:chgData name="Long B Nguyen" userId="f59fb8f3-a021-417a-8bc1-65c8d471c621" providerId="ADAL" clId="{6AC26564-89E3-E046-BFB4-F80582D7E17B}" dt="2020-01-13T13:43:16.993" v="0" actId="2696"/>
-        <pc:sldMkLst>
-          <pc:docMk/>
-          <pc:sldMk cId="924617162" sldId="319"/>
-        </pc:sldMkLst>
-      </pc:sldChg>
-      <pc:sldChg chg="add">
-        <pc:chgData name="Long B Nguyen" userId="f59fb8f3-a021-417a-8bc1-65c8d471c621" providerId="ADAL" clId="{6AC26564-89E3-E046-BFB4-F80582D7E17B}" dt="2020-01-13T13:43:29.420" v="22"/>
-        <pc:sldMkLst>
-          <pc:docMk/>
-          <pc:sldMk cId="3906700287" sldId="319"/>
-        </pc:sldMkLst>
-      </pc:sldChg>
-      <pc:sldChg chg="add">
-        <pc:chgData name="Long B Nguyen" userId="f59fb8f3-a021-417a-8bc1-65c8d471c621" providerId="ADAL" clId="{6AC26564-89E3-E046-BFB4-F80582D7E17B}" dt="2020-01-13T13:43:29.420" v="22"/>
-        <pc:sldMkLst>
-          <pc:docMk/>
-          <pc:sldMk cId="1810541734" sldId="320"/>
-        </pc:sldMkLst>
-      </pc:sldChg>
-      <pc:sldChg chg="del">
-        <pc:chgData name="Long B Nguyen" userId="f59fb8f3-a021-417a-8bc1-65c8d471c621" providerId="ADAL" clId="{6AC26564-89E3-E046-BFB4-F80582D7E17B}" dt="2020-01-13T13:43:17.009" v="1" actId="2696"/>
-        <pc:sldMkLst>
-          <pc:docMk/>
-          <pc:sldMk cId="3758830494" sldId="320"/>
-        </pc:sldMkLst>
-      </pc:sldChg>
-      <pc:sldChg chg="del">
-        <pc:chgData name="Long B Nguyen" userId="f59fb8f3-a021-417a-8bc1-65c8d471c621" providerId="ADAL" clId="{6AC26564-89E3-E046-BFB4-F80582D7E17B}" dt="2020-01-13T13:43:17.029" v="2" actId="2696"/>
-        <pc:sldMkLst>
-          <pc:docMk/>
-          <pc:sldMk cId="1022945305" sldId="321"/>
-        </pc:sldMkLst>
-      </pc:sldChg>
-      <pc:sldChg chg="add">
-        <pc:chgData name="Long B Nguyen" userId="f59fb8f3-a021-417a-8bc1-65c8d471c621" providerId="ADAL" clId="{6AC26564-89E3-E046-BFB4-F80582D7E17B}" dt="2020-01-13T13:43:29.420" v="22"/>
-        <pc:sldMkLst>
-          <pc:docMk/>
-          <pc:sldMk cId="1359731776" sldId="321"/>
-        </pc:sldMkLst>
-      </pc:sldChg>
-      <pc:sldChg chg="del">
-        <pc:chgData name="Long B Nguyen" userId="f59fb8f3-a021-417a-8bc1-65c8d471c621" providerId="ADAL" clId="{6AC26564-89E3-E046-BFB4-F80582D7E17B}" dt="2020-01-13T13:43:17.080" v="5" actId="2696"/>
-        <pc:sldMkLst>
-          <pc:docMk/>
-          <pc:sldMk cId="3456840474" sldId="322"/>
-        </pc:sldMkLst>
-      </pc:sldChg>
-      <pc:sldChg chg="add">
-        <pc:chgData name="Long B Nguyen" userId="f59fb8f3-a021-417a-8bc1-65c8d471c621" providerId="ADAL" clId="{6AC26564-89E3-E046-BFB4-F80582D7E17B}" dt="2020-01-13T13:43:29.420" v="22"/>
-        <pc:sldMkLst>
-          <pc:docMk/>
-          <pc:sldMk cId="3651577480" sldId="322"/>
-        </pc:sldMkLst>
-      </pc:sldChg>
-      <pc:sldChg chg="del">
-        <pc:chgData name="Long B Nguyen" userId="f59fb8f3-a021-417a-8bc1-65c8d471c621" providerId="ADAL" clId="{6AC26564-89E3-E046-BFB4-F80582D7E17B}" dt="2020-01-13T13:43:17.097" v="6" actId="2696"/>
-        <pc:sldMkLst>
-          <pc:docMk/>
-          <pc:sldMk cId="1062075874" sldId="323"/>
-        </pc:sldMkLst>
-      </pc:sldChg>
-      <pc:sldChg chg="add">
-        <pc:chgData name="Long B Nguyen" userId="f59fb8f3-a021-417a-8bc1-65c8d471c621" providerId="ADAL" clId="{6AC26564-89E3-E046-BFB4-F80582D7E17B}" dt="2020-01-13T13:43:29.420" v="22"/>
-        <pc:sldMkLst>
-          <pc:docMk/>
-          <pc:sldMk cId="1496564367" sldId="323"/>
-        </pc:sldMkLst>
-      </pc:sldChg>
-      <pc:sldChg chg="add">
-        <pc:chgData name="Long B Nguyen" userId="f59fb8f3-a021-417a-8bc1-65c8d471c621" providerId="ADAL" clId="{6AC26564-89E3-E046-BFB4-F80582D7E17B}" dt="2020-01-13T13:46:19.952" v="88"/>
-        <pc:sldMkLst>
-          <pc:docMk/>
-          <pc:sldMk cId="771866096" sldId="324"/>
-        </pc:sldMkLst>
-      </pc:sldChg>
-      <pc:sldChg chg="del">
-        <pc:chgData name="Long B Nguyen" userId="f59fb8f3-a021-417a-8bc1-65c8d471c621" providerId="ADAL" clId="{6AC26564-89E3-E046-BFB4-F80582D7E17B}" dt="2020-01-13T13:43:17.152" v="9" actId="2696"/>
-        <pc:sldMkLst>
-          <pc:docMk/>
-          <pc:sldMk cId="1310010799" sldId="324"/>
-        </pc:sldMkLst>
-      </pc:sldChg>
-      <pc:sldChg chg="add del">
-        <pc:chgData name="Long B Nguyen" userId="f59fb8f3-a021-417a-8bc1-65c8d471c621" providerId="ADAL" clId="{6AC26564-89E3-E046-BFB4-F80582D7E17B}" dt="2020-01-13T13:46:07.690" v="87" actId="2696"/>
-        <pc:sldMkLst>
-          <pc:docMk/>
-          <pc:sldMk cId="3999804732" sldId="324"/>
-        </pc:sldMkLst>
-      </pc:sldChg>
-      <pc:sldChg chg="add">
-        <pc:chgData name="Long B Nguyen" userId="f59fb8f3-a021-417a-8bc1-65c8d471c621" providerId="ADAL" clId="{6AC26564-89E3-E046-BFB4-F80582D7E17B}" dt="2020-01-13T13:43:29.420" v="22"/>
-        <pc:sldMkLst>
-          <pc:docMk/>
-          <pc:sldMk cId="1025355635" sldId="325"/>
-        </pc:sldMkLst>
-      </pc:sldChg>
-      <pc:sldChg chg="del">
-        <pc:chgData name="Long B Nguyen" userId="f59fb8f3-a021-417a-8bc1-65c8d471c621" providerId="ADAL" clId="{6AC26564-89E3-E046-BFB4-F80582D7E17B}" dt="2020-01-13T13:43:17.177" v="11" actId="2696"/>
-        <pc:sldMkLst>
-          <pc:docMk/>
-          <pc:sldMk cId="3314372952" sldId="325"/>
-        </pc:sldMkLst>
-      </pc:sldChg>
-      <pc:sldChg chg="del">
-        <pc:chgData name="Long B Nguyen" userId="f59fb8f3-a021-417a-8bc1-65c8d471c621" providerId="ADAL" clId="{6AC26564-89E3-E046-BFB4-F80582D7E17B}" dt="2020-01-13T13:43:17.116" v="7" actId="2696"/>
-        <pc:sldMkLst>
-          <pc:docMk/>
-          <pc:sldMk cId="1724104636" sldId="327"/>
-        </pc:sldMkLst>
-      </pc:sldChg>
-      <pc:sldChg chg="add">
-        <pc:chgData name="Long B Nguyen" userId="f59fb8f3-a021-417a-8bc1-65c8d471c621" providerId="ADAL" clId="{6AC26564-89E3-E046-BFB4-F80582D7E17B}" dt="2020-01-13T13:43:29.420" v="22"/>
-        <pc:sldMkLst>
-          <pc:docMk/>
-          <pc:sldMk cId="4174920299" sldId="327"/>
-        </pc:sldMkLst>
-      </pc:sldChg>
-      <pc:sldChg chg="add">
-        <pc:chgData name="Long B Nguyen" userId="f59fb8f3-a021-417a-8bc1-65c8d471c621" providerId="ADAL" clId="{6AC26564-89E3-E046-BFB4-F80582D7E17B}" dt="2020-01-13T13:43:29.420" v="22"/>
-        <pc:sldMkLst>
-          <pc:docMk/>
-          <pc:sldMk cId="2756462650" sldId="328"/>
-        </pc:sldMkLst>
-      </pc:sldChg>
-      <pc:sldChg chg="del">
-        <pc:chgData name="Long B Nguyen" userId="f59fb8f3-a021-417a-8bc1-65c8d471c621" providerId="ADAL" clId="{6AC26564-89E3-E046-BFB4-F80582D7E17B}" dt="2020-01-13T13:43:17.045" v="3" actId="2696"/>
-        <pc:sldMkLst>
-          <pc:docMk/>
-          <pc:sldMk cId="3894299887" sldId="328"/>
-        </pc:sldMkLst>
-      </pc:sldChg>
-      <pc:sldChg chg="add">
-        <pc:chgData name="Long B Nguyen" userId="f59fb8f3-a021-417a-8bc1-65c8d471c621" providerId="ADAL" clId="{6AC26564-89E3-E046-BFB4-F80582D7E17B}" dt="2020-01-13T13:43:29.420" v="22"/>
-        <pc:sldMkLst>
-          <pc:docMk/>
-          <pc:sldMk cId="3080714931" sldId="329"/>
-        </pc:sldMkLst>
-      </pc:sldChg>
-      <pc:sldChg chg="del">
-        <pc:chgData name="Long B Nguyen" userId="f59fb8f3-a021-417a-8bc1-65c8d471c621" providerId="ADAL" clId="{6AC26564-89E3-E046-BFB4-F80582D7E17B}" dt="2020-01-13T13:43:17.064" v="4" actId="2696"/>
-        <pc:sldMkLst>
-          <pc:docMk/>
-          <pc:sldMk cId="4294143140" sldId="329"/>
-        </pc:sldMkLst>
-      </pc:sldChg>
-      <pc:sldChg chg="add">
-        <pc:chgData name="Long B Nguyen" userId="f59fb8f3-a021-417a-8bc1-65c8d471c621" providerId="ADAL" clId="{6AC26564-89E3-E046-BFB4-F80582D7E17B}" dt="2020-01-13T13:43:29.420" v="22"/>
-        <pc:sldMkLst>
-          <pc:docMk/>
-          <pc:sldMk cId="532184546" sldId="330"/>
-        </pc:sldMkLst>
-      </pc:sldChg>
-      <pc:sldChg chg="del">
-        <pc:chgData name="Long B Nguyen" userId="f59fb8f3-a021-417a-8bc1-65c8d471c621" providerId="ADAL" clId="{6AC26564-89E3-E046-BFB4-F80582D7E17B}" dt="2020-01-13T13:43:17.136" v="8" actId="2696"/>
-        <pc:sldMkLst>
-          <pc:docMk/>
-          <pc:sldMk cId="3594730708" sldId="330"/>
-        </pc:sldMkLst>
-      </pc:sldChg>
-      <pc:sldChg chg="add">
-        <pc:chgData name="Long B Nguyen" userId="f59fb8f3-a021-417a-8bc1-65c8d471c621" providerId="ADAL" clId="{6AC26564-89E3-E046-BFB4-F80582D7E17B}" dt="2020-01-13T13:43:29.420" v="22"/>
-        <pc:sldMkLst>
-          <pc:docMk/>
-          <pc:sldMk cId="3264629021" sldId="331"/>
-        </pc:sldMkLst>
-      </pc:sldChg>
-      <pc:sldChg chg="del">
-        <pc:chgData name="Long B Nguyen" userId="f59fb8f3-a021-417a-8bc1-65c8d471c621" providerId="ADAL" clId="{6AC26564-89E3-E046-BFB4-F80582D7E17B}" dt="2020-01-13T13:43:17.188" v="12" actId="2696"/>
-        <pc:sldMkLst>
-          <pc:docMk/>
-          <pc:sldMk cId="3870816631" sldId="331"/>
-        </pc:sldMkLst>
-      </pc:sldChg>
-      <pc:sldChg chg="del">
-        <pc:chgData name="Long B Nguyen" userId="f59fb8f3-a021-417a-8bc1-65c8d471c621" providerId="ADAL" clId="{6AC26564-89E3-E046-BFB4-F80582D7E17B}" dt="2020-01-13T13:43:17.163" v="10" actId="2696"/>
-        <pc:sldMkLst>
-          <pc:docMk/>
-          <pc:sldMk cId="3124353102" sldId="332"/>
-        </pc:sldMkLst>
-      </pc:sldChg>
-      <pc:sldChg chg="add">
-        <pc:chgData name="Long B Nguyen" userId="f59fb8f3-a021-417a-8bc1-65c8d471c621" providerId="ADAL" clId="{6AC26564-89E3-E046-BFB4-F80582D7E17B}" dt="2020-01-13T13:43:29.420" v="22"/>
-        <pc:sldMkLst>
-          <pc:docMk/>
-          <pc:sldMk cId="4022722016" sldId="332"/>
-        </pc:sldMkLst>
-      </pc:sldChg>
-      <pc:sldChg chg="add">
-        <pc:chgData name="Long B Nguyen" userId="f59fb8f3-a021-417a-8bc1-65c8d471c621" providerId="ADAL" clId="{6AC26564-89E3-E046-BFB4-F80582D7E17B}" dt="2020-01-13T13:43:29.420" v="22"/>
-        <pc:sldMkLst>
-          <pc:docMk/>
-          <pc:sldMk cId="1710208723" sldId="333"/>
-        </pc:sldMkLst>
-      </pc:sldChg>
-      <pc:sldChg chg="add">
-        <pc:chgData name="Long B Nguyen" userId="f59fb8f3-a021-417a-8bc1-65c8d471c621" providerId="ADAL" clId="{6AC26564-89E3-E046-BFB4-F80582D7E17B}" dt="2020-01-13T13:43:29.420" v="22"/>
-        <pc:sldMkLst>
-          <pc:docMk/>
-          <pc:sldMk cId="3404583044" sldId="334"/>
-        </pc:sldMkLst>
-      </pc:sldChg>
-      <pc:sldChg chg="add">
-        <pc:chgData name="Long B Nguyen" userId="f59fb8f3-a021-417a-8bc1-65c8d471c621" providerId="ADAL" clId="{6AC26564-89E3-E046-BFB4-F80582D7E17B}" dt="2020-01-13T13:43:29.420" v="22"/>
-        <pc:sldMkLst>
-          <pc:docMk/>
-          <pc:sldMk cId="3866550465" sldId="335"/>
-        </pc:sldMkLst>
-      </pc:sldChg>
-      <pc:sldChg chg="add">
-        <pc:chgData name="Long B Nguyen" userId="f59fb8f3-a021-417a-8bc1-65c8d471c621" providerId="ADAL" clId="{6AC26564-89E3-E046-BFB4-F80582D7E17B}" dt="2020-01-13T13:43:29.420" v="22"/>
-        <pc:sldMkLst>
-          <pc:docMk/>
-          <pc:sldMk cId="3749436800" sldId="336"/>
-        </pc:sldMkLst>
-      </pc:sldChg>
-      <pc:sldChg chg="add">
-        <pc:chgData name="Long B Nguyen" userId="f59fb8f3-a021-417a-8bc1-65c8d471c621" providerId="ADAL" clId="{6AC26564-89E3-E046-BFB4-F80582D7E17B}" dt="2020-01-13T13:43:29.420" v="22"/>
-        <pc:sldMkLst>
-          <pc:docMk/>
-          <pc:sldMk cId="461704868" sldId="337"/>
-        </pc:sldMkLst>
-      </pc:sldChg>
-      <pc:sldChg chg="add">
-        <pc:chgData name="Long B Nguyen" userId="f59fb8f3-a021-417a-8bc1-65c8d471c621" providerId="ADAL" clId="{6AC26564-89E3-E046-BFB4-F80582D7E17B}" dt="2020-01-13T13:43:29.420" v="22"/>
-        <pc:sldMkLst>
-          <pc:docMk/>
-          <pc:sldMk cId="545386500" sldId="338"/>
-        </pc:sldMkLst>
-      </pc:sldChg>
-      <pc:sldChg chg="add">
-        <pc:chgData name="Long B Nguyen" userId="f59fb8f3-a021-417a-8bc1-65c8d471c621" providerId="ADAL" clId="{6AC26564-89E3-E046-BFB4-F80582D7E17B}" dt="2020-01-13T13:43:29.420" v="22"/>
-        <pc:sldMkLst>
-          <pc:docMk/>
-          <pc:sldMk cId="1791361008" sldId="339"/>
-        </pc:sldMkLst>
-      </pc:sldChg>
-      <pc:sldChg chg="add">
-        <pc:chgData name="Long B Nguyen" userId="f59fb8f3-a021-417a-8bc1-65c8d471c621" providerId="ADAL" clId="{6AC26564-89E3-E046-BFB4-F80582D7E17B}" dt="2020-01-13T13:43:29.420" v="22"/>
-        <pc:sldMkLst>
-          <pc:docMk/>
-          <pc:sldMk cId="678299524" sldId="340"/>
-        </pc:sldMkLst>
-      </pc:sldChg>
-      <pc:sldChg chg="add">
-        <pc:chgData name="Long B Nguyen" userId="f59fb8f3-a021-417a-8bc1-65c8d471c621" providerId="ADAL" clId="{6AC26564-89E3-E046-BFB4-F80582D7E17B}" dt="2020-01-13T13:43:29.420" v="22"/>
-        <pc:sldMkLst>
-          <pc:docMk/>
-          <pc:sldMk cId="225127645" sldId="341"/>
-        </pc:sldMkLst>
-      </pc:sldChg>
-      <pc:sldChg chg="add">
-        <pc:chgData name="Long B Nguyen" userId="f59fb8f3-a021-417a-8bc1-65c8d471c621" providerId="ADAL" clId="{6AC26564-89E3-E046-BFB4-F80582D7E17B}" dt="2020-01-13T13:43:29.420" v="22"/>
-        <pc:sldMkLst>
-          <pc:docMk/>
-          <pc:sldMk cId="2214326257" sldId="342"/>
-        </pc:sldMkLst>
-      </pc:sldChg>
-      <pc:sldChg chg="add">
-        <pc:chgData name="Long B Nguyen" userId="f59fb8f3-a021-417a-8bc1-65c8d471c621" providerId="ADAL" clId="{6AC26564-89E3-E046-BFB4-F80582D7E17B}" dt="2020-01-13T13:43:29.420" v="22"/>
-        <pc:sldMkLst>
-          <pc:docMk/>
-          <pc:sldMk cId="1356056044" sldId="343"/>
-        </pc:sldMkLst>
-      </pc:sldChg>
-      <pc:sldChg chg="add">
-        <pc:chgData name="Long B Nguyen" userId="f59fb8f3-a021-417a-8bc1-65c8d471c621" providerId="ADAL" clId="{6AC26564-89E3-E046-BFB4-F80582D7E17B}" dt="2020-01-13T13:43:29.420" v="22"/>
-        <pc:sldMkLst>
-          <pc:docMk/>
-          <pc:sldMk cId="1270247652" sldId="344"/>
-        </pc:sldMkLst>
-      </pc:sldChg>
-      <pc:sldChg chg="add">
-        <pc:chgData name="Long B Nguyen" userId="f59fb8f3-a021-417a-8bc1-65c8d471c621" providerId="ADAL" clId="{6AC26564-89E3-E046-BFB4-F80582D7E17B}" dt="2020-01-13T13:43:29.420" v="22"/>
-        <pc:sldMkLst>
-          <pc:docMk/>
-          <pc:sldMk cId="902308803" sldId="345"/>
-        </pc:sldMkLst>
-      </pc:sldChg>
-      <pc:sldChg chg="add">
-        <pc:chgData name="Long B Nguyen" userId="f59fb8f3-a021-417a-8bc1-65c8d471c621" providerId="ADAL" clId="{6AC26564-89E3-E046-BFB4-F80582D7E17B}" dt="2020-01-13T13:43:29.420" v="22"/>
-        <pc:sldMkLst>
-          <pc:docMk/>
-          <pc:sldMk cId="2271372051" sldId="346"/>
-        </pc:sldMkLst>
-      </pc:sldChg>
-      <pc:sldChg chg="add">
-        <pc:chgData name="Long B Nguyen" userId="f59fb8f3-a021-417a-8bc1-65c8d471c621" providerId="ADAL" clId="{6AC26564-89E3-E046-BFB4-F80582D7E17B}" dt="2020-01-13T13:43:29.420" v="22"/>
-        <pc:sldMkLst>
-          <pc:docMk/>
-          <pc:sldMk cId="198078322" sldId="347"/>
-        </pc:sldMkLst>
-      </pc:sldChg>
-    </pc:docChg>
-  </pc:docChgLst>
-  <pc:docChgLst>
-    <pc:chgData name="Long Nguyen" userId="f59fb8f3-a021-417a-8bc1-65c8d471c621" providerId="ADAL" clId="{9E9E5F5A-7190-2943-95D4-1A1ED8423A79}"/>
-    <pc:docChg chg="custSel addSld delSld modSld">
-      <pc:chgData name="Long Nguyen" userId="f59fb8f3-a021-417a-8bc1-65c8d471c621" providerId="ADAL" clId="{9E9E5F5A-7190-2943-95D4-1A1ED8423A79}" dt="2022-03-24T14:36:35.941" v="247" actId="20577"/>
-      <pc:docMkLst>
-        <pc:docMk/>
-      </pc:docMkLst>
-      <pc:sldChg chg="del">
-        <pc:chgData name="Long Nguyen" userId="f59fb8f3-a021-417a-8bc1-65c8d471c621" providerId="ADAL" clId="{9E9E5F5A-7190-2943-95D4-1A1ED8423A79}" dt="2022-03-24T11:49:40.523" v="169" actId="2696"/>
-        <pc:sldMkLst>
-          <pc:docMk/>
-          <pc:sldMk cId="2588250059" sldId="527"/>
-        </pc:sldMkLst>
-      </pc:sldChg>
-      <pc:sldChg chg="modSp mod">
-        <pc:chgData name="Long Nguyen" userId="f59fb8f3-a021-417a-8bc1-65c8d471c621" providerId="ADAL" clId="{9E9E5F5A-7190-2943-95D4-1A1ED8423A79}" dt="2022-03-24T11:26:31.830" v="3" actId="27636"/>
-        <pc:sldMkLst>
-          <pc:docMk/>
-          <pc:sldMk cId="351843145" sldId="529"/>
-        </pc:sldMkLst>
-        <pc:spChg chg="mod">
-          <ac:chgData name="Long Nguyen" userId="f59fb8f3-a021-417a-8bc1-65c8d471c621" providerId="ADAL" clId="{9E9E5F5A-7190-2943-95D4-1A1ED8423A79}" dt="2022-03-24T11:26:31.830" v="3" actId="27636"/>
-          <ac:spMkLst>
-            <pc:docMk/>
-            <pc:sldMk cId="351843145" sldId="529"/>
-            <ac:spMk id="16386" creationId="{842B05C2-DFA8-F84D-AEF8-C43D6277D764}"/>
-          </ac:spMkLst>
-        </pc:spChg>
-      </pc:sldChg>
-      <pc:sldChg chg="modSp mod">
-        <pc:chgData name="Long Nguyen" userId="f59fb8f3-a021-417a-8bc1-65c8d471c621" providerId="ADAL" clId="{9E9E5F5A-7190-2943-95D4-1A1ED8423A79}" dt="2022-03-24T11:26:31.812" v="2" actId="27636"/>
-        <pc:sldMkLst>
-          <pc:docMk/>
-          <pc:sldMk cId="3478205103" sldId="542"/>
-        </pc:sldMkLst>
-        <pc:spChg chg="mod">
-          <ac:chgData name="Long Nguyen" userId="f59fb8f3-a021-417a-8bc1-65c8d471c621" providerId="ADAL" clId="{9E9E5F5A-7190-2943-95D4-1A1ED8423A79}" dt="2022-03-24T11:26:31.812" v="2" actId="27636"/>
-          <ac:spMkLst>
-            <pc:docMk/>
-            <pc:sldMk cId="3478205103" sldId="542"/>
-            <ac:spMk id="16386" creationId="{9A30423C-6B4C-234F-9526-1365818F2724}"/>
-          </ac:spMkLst>
-        </pc:spChg>
-      </pc:sldChg>
-      <pc:sldChg chg="modSp modAnim">
-        <pc:chgData name="Long Nguyen" userId="f59fb8f3-a021-417a-8bc1-65c8d471c621" providerId="ADAL" clId="{9E9E5F5A-7190-2943-95D4-1A1ED8423A79}" dt="2022-03-24T11:45:49.062" v="168" actId="20577"/>
-        <pc:sldMkLst>
-          <pc:docMk/>
-          <pc:sldMk cId="154962666" sldId="556"/>
-        </pc:sldMkLst>
-        <pc:spChg chg="mod">
-          <ac:chgData name="Long Nguyen" userId="f59fb8f3-a021-417a-8bc1-65c8d471c621" providerId="ADAL" clId="{9E9E5F5A-7190-2943-95D4-1A1ED8423A79}" dt="2022-03-24T11:45:49.062" v="168" actId="20577"/>
-          <ac:spMkLst>
-            <pc:docMk/>
-            <pc:sldMk cId="154962666" sldId="556"/>
-            <ac:spMk id="47106" creationId="{64F0002E-82C3-5B47-91CB-42BC1288860E}"/>
-          </ac:spMkLst>
-        </pc:spChg>
-      </pc:sldChg>
-      <pc:sldChg chg="del">
-        <pc:chgData name="Long Nguyen" userId="f59fb8f3-a021-417a-8bc1-65c8d471c621" providerId="ADAL" clId="{9E9E5F5A-7190-2943-95D4-1A1ED8423A79}" dt="2022-03-24T11:59:00.858" v="246" actId="2696"/>
-        <pc:sldMkLst>
-          <pc:docMk/>
-          <pc:sldMk cId="14307870" sldId="561"/>
-        </pc:sldMkLst>
-      </pc:sldChg>
-      <pc:sldChg chg="modSp mod">
-        <pc:chgData name="Long Nguyen" userId="f59fb8f3-a021-417a-8bc1-65c8d471c621" providerId="ADAL" clId="{9E9E5F5A-7190-2943-95D4-1A1ED8423A79}" dt="2022-03-24T11:26:31.839" v="4" actId="27636"/>
-        <pc:sldMkLst>
-          <pc:docMk/>
-          <pc:sldMk cId="1419761718" sldId="564"/>
-        </pc:sldMkLst>
-        <pc:spChg chg="mod">
-          <ac:chgData name="Long Nguyen" userId="f59fb8f3-a021-417a-8bc1-65c8d471c621" providerId="ADAL" clId="{9E9E5F5A-7190-2943-95D4-1A1ED8423A79}" dt="2022-03-24T11:26:31.839" v="4" actId="27636"/>
-          <ac:spMkLst>
-            <pc:docMk/>
-            <pc:sldMk cId="1419761718" sldId="564"/>
-            <ac:spMk id="22529" creationId="{AB5898CD-F946-4C42-9C46-A05451CBE2CF}"/>
-          </ac:spMkLst>
-        </pc:spChg>
-      </pc:sldChg>
-      <pc:sldChg chg="modSp mod">
-        <pc:chgData name="Long Nguyen" userId="f59fb8f3-a021-417a-8bc1-65c8d471c621" providerId="ADAL" clId="{9E9E5F5A-7190-2943-95D4-1A1ED8423A79}" dt="2022-03-24T11:26:31.879" v="5" actId="27636"/>
-        <pc:sldMkLst>
-          <pc:docMk/>
-          <pc:sldMk cId="4205479306" sldId="594"/>
-        </pc:sldMkLst>
-        <pc:spChg chg="mod">
-          <ac:chgData name="Long Nguyen" userId="f59fb8f3-a021-417a-8bc1-65c8d471c621" providerId="ADAL" clId="{9E9E5F5A-7190-2943-95D4-1A1ED8423A79}" dt="2022-03-24T11:26:31.879" v="5" actId="27636"/>
-          <ac:spMkLst>
-            <pc:docMk/>
-            <pc:sldMk cId="4205479306" sldId="594"/>
-            <ac:spMk id="16386" creationId="{AC84324A-3724-874B-82A1-71A36E0BBD8D}"/>
-          </ac:spMkLst>
-        </pc:spChg>
-      </pc:sldChg>
-      <pc:sldChg chg="modSp mod modAnim">
-        <pc:chgData name="Long Nguyen" userId="f59fb8f3-a021-417a-8bc1-65c8d471c621" providerId="ADAL" clId="{9E9E5F5A-7190-2943-95D4-1A1ED8423A79}" dt="2022-03-24T11:43:38.092" v="163"/>
-        <pc:sldMkLst>
-          <pc:docMk/>
-          <pc:sldMk cId="2135983872" sldId="599"/>
-        </pc:sldMkLst>
-        <pc:spChg chg="mod">
-          <ac:chgData name="Long Nguyen" userId="f59fb8f3-a021-417a-8bc1-65c8d471c621" providerId="ADAL" clId="{9E9E5F5A-7190-2943-95D4-1A1ED8423A79}" dt="2022-03-24T11:43:38.092" v="163"/>
-          <ac:spMkLst>
-            <pc:docMk/>
-            <pc:sldMk cId="2135983872" sldId="599"/>
-            <ac:spMk id="16386" creationId="{2CA53A1D-0CFC-9346-9F25-D3084700DDD8}"/>
-          </ac:spMkLst>
-        </pc:spChg>
-      </pc:sldChg>
-      <pc:sldChg chg="modSp mod modAnim">
-        <pc:chgData name="Long Nguyen" userId="f59fb8f3-a021-417a-8bc1-65c8d471c621" providerId="ADAL" clId="{9E9E5F5A-7190-2943-95D4-1A1ED8423A79}" dt="2022-03-24T11:44:39.964" v="167" actId="20577"/>
-        <pc:sldMkLst>
-          <pc:docMk/>
-          <pc:sldMk cId="3082545194" sldId="600"/>
-        </pc:sldMkLst>
-        <pc:spChg chg="mod">
-          <ac:chgData name="Long Nguyen" userId="f59fb8f3-a021-417a-8bc1-65c8d471c621" providerId="ADAL" clId="{9E9E5F5A-7190-2943-95D4-1A1ED8423A79}" dt="2022-03-24T11:44:39.964" v="167" actId="20577"/>
-          <ac:spMkLst>
-            <pc:docMk/>
-            <pc:sldMk cId="3082545194" sldId="600"/>
-            <ac:spMk id="16386" creationId="{1068C3F6-2B68-0147-A043-67BE3D946ECF}"/>
-          </ac:spMkLst>
-        </pc:spChg>
-        <pc:spChg chg="mod">
-          <ac:chgData name="Long Nguyen" userId="f59fb8f3-a021-417a-8bc1-65c8d471c621" providerId="ADAL" clId="{9E9E5F5A-7190-2943-95D4-1A1ED8423A79}" dt="2022-03-24T11:35:48.657" v="156" actId="20577"/>
-          <ac:spMkLst>
-            <pc:docMk/>
-            <pc:sldMk cId="3082545194" sldId="600"/>
-            <ac:spMk id="28673" creationId="{907EFF68-9C71-F04B-B369-88AED7B7A835}"/>
-          </ac:spMkLst>
-        </pc:spChg>
-      </pc:sldChg>
-      <pc:sldChg chg="modSp mod">
-        <pc:chgData name="Long Nguyen" userId="f59fb8f3-a021-417a-8bc1-65c8d471c621" providerId="ADAL" clId="{9E9E5F5A-7190-2943-95D4-1A1ED8423A79}" dt="2022-03-24T14:36:35.941" v="247" actId="20577"/>
-        <pc:sldMkLst>
-          <pc:docMk/>
-          <pc:sldMk cId="186989517" sldId="612"/>
-        </pc:sldMkLst>
-        <pc:spChg chg="mod">
-          <ac:chgData name="Long Nguyen" userId="f59fb8f3-a021-417a-8bc1-65c8d471c621" providerId="ADAL" clId="{9E9E5F5A-7190-2943-95D4-1A1ED8423A79}" dt="2022-03-24T14:36:35.941" v="247" actId="20577"/>
-          <ac:spMkLst>
-            <pc:docMk/>
-            <pc:sldMk cId="186989517" sldId="612"/>
-            <ac:spMk id="50178" creationId="{327CB0B4-2578-5740-B0E0-F346965CCB10}"/>
-          </ac:spMkLst>
-        </pc:spChg>
-      </pc:sldChg>
-      <pc:sldChg chg="del">
-        <pc:chgData name="Long Nguyen" userId="f59fb8f3-a021-417a-8bc1-65c8d471c621" providerId="ADAL" clId="{9E9E5F5A-7190-2943-95D4-1A1ED8423A79}" dt="2022-03-24T11:31:12.401" v="20" actId="2696"/>
-        <pc:sldMkLst>
-          <pc:docMk/>
-          <pc:sldMk cId="3787391085" sldId="613"/>
-        </pc:sldMkLst>
-      </pc:sldChg>
-      <pc:sldChg chg="modSp">
-        <pc:chgData name="Long Nguyen" userId="f59fb8f3-a021-417a-8bc1-65c8d471c621" providerId="ADAL" clId="{9E9E5F5A-7190-2943-95D4-1A1ED8423A79}" dt="2022-03-24T11:32:04.114" v="22" actId="20577"/>
-        <pc:sldMkLst>
-          <pc:docMk/>
-          <pc:sldMk cId="75961963" sldId="617"/>
-        </pc:sldMkLst>
-        <pc:spChg chg="mod">
-          <ac:chgData name="Long Nguyen" userId="f59fb8f3-a021-417a-8bc1-65c8d471c621" providerId="ADAL" clId="{9E9E5F5A-7190-2943-95D4-1A1ED8423A79}" dt="2022-03-24T11:32:04.114" v="22" actId="20577"/>
-          <ac:spMkLst>
-            <pc:docMk/>
-            <pc:sldMk cId="75961963" sldId="617"/>
-            <ac:spMk id="5" creationId="{CB3C2E60-75CB-B041-B771-A1F63CE8B021}"/>
-          </ac:spMkLst>
-        </pc:spChg>
-      </pc:sldChg>
-      <pc:sldChg chg="modSp modAnim">
-        <pc:chgData name="Long Nguyen" userId="f59fb8f3-a021-417a-8bc1-65c8d471c621" providerId="ADAL" clId="{9E9E5F5A-7190-2943-95D4-1A1ED8423A79}" dt="2022-03-24T11:26:35.894" v="6" actId="5793"/>
-        <pc:sldMkLst>
-          <pc:docMk/>
-          <pc:sldMk cId="876878470" sldId="618"/>
-        </pc:sldMkLst>
-        <pc:spChg chg="mod">
-          <ac:chgData name="Long Nguyen" userId="f59fb8f3-a021-417a-8bc1-65c8d471c621" providerId="ADAL" clId="{9E9E5F5A-7190-2943-95D4-1A1ED8423A79}" dt="2022-03-24T11:26:35.894" v="6" actId="5793"/>
-          <ac:spMkLst>
-            <pc:docMk/>
-            <pc:sldMk cId="876878470" sldId="618"/>
-            <ac:spMk id="5" creationId="{CB3C2E60-75CB-B041-B771-A1F63CE8B021}"/>
-          </ac:spMkLst>
-        </pc:spChg>
-      </pc:sldChg>
-      <pc:sldChg chg="modSp mod modAnim">
-        <pc:chgData name="Long Nguyen" userId="f59fb8f3-a021-417a-8bc1-65c8d471c621" providerId="ADAL" clId="{9E9E5F5A-7190-2943-95D4-1A1ED8423A79}" dt="2022-03-24T11:28:19.148" v="19" actId="20577"/>
-        <pc:sldMkLst>
-          <pc:docMk/>
-          <pc:sldMk cId="410101940" sldId="622"/>
-        </pc:sldMkLst>
-        <pc:spChg chg="mod">
-          <ac:chgData name="Long Nguyen" userId="f59fb8f3-a021-417a-8bc1-65c8d471c621" providerId="ADAL" clId="{9E9E5F5A-7190-2943-95D4-1A1ED8423A79}" dt="2022-03-24T11:28:19.148" v="19" actId="20577"/>
-          <ac:spMkLst>
-            <pc:docMk/>
-            <pc:sldMk cId="410101940" sldId="622"/>
-            <ac:spMk id="16386" creationId="{E697184B-7A3C-5841-8B49-9041842B0E9B}"/>
-          </ac:spMkLst>
-        </pc:spChg>
-      </pc:sldChg>
-      <pc:sldChg chg="modSp mod">
-        <pc:chgData name="Long Nguyen" userId="f59fb8f3-a021-417a-8bc1-65c8d471c621" providerId="ADAL" clId="{9E9E5F5A-7190-2943-95D4-1A1ED8423A79}" dt="2022-03-24T11:26:31.774" v="1" actId="27636"/>
-        <pc:sldMkLst>
-          <pc:docMk/>
-          <pc:sldMk cId="2025038453" sldId="623"/>
-        </pc:sldMkLst>
-        <pc:spChg chg="mod">
-          <ac:chgData name="Long Nguyen" userId="f59fb8f3-a021-417a-8bc1-65c8d471c621" providerId="ADAL" clId="{9E9E5F5A-7190-2943-95D4-1A1ED8423A79}" dt="2022-03-24T11:26:31.774" v="1" actId="27636"/>
-          <ac:spMkLst>
-            <pc:docMk/>
-            <pc:sldMk cId="2025038453" sldId="623"/>
-            <ac:spMk id="22529" creationId="{393BE6F3-36DE-4449-89F7-53FFEB793FE6}"/>
-          </ac:spMkLst>
-        </pc:spChg>
-      </pc:sldChg>
-      <pc:sldChg chg="modSp modAnim">
-        <pc:chgData name="Long Nguyen" userId="f59fb8f3-a021-417a-8bc1-65c8d471c621" providerId="ADAL" clId="{9E9E5F5A-7190-2943-95D4-1A1ED8423A79}" dt="2022-03-24T11:55:25.084" v="215" actId="255"/>
-        <pc:sldMkLst>
-          <pc:docMk/>
-          <pc:sldMk cId="2080393952" sldId="625"/>
-        </pc:sldMkLst>
-        <pc:spChg chg="mod">
-          <ac:chgData name="Long Nguyen" userId="f59fb8f3-a021-417a-8bc1-65c8d471c621" providerId="ADAL" clId="{9E9E5F5A-7190-2943-95D4-1A1ED8423A79}" dt="2022-03-24T11:55:25.084" v="215" actId="255"/>
-          <ac:spMkLst>
-            <pc:docMk/>
-            <pc:sldMk cId="2080393952" sldId="625"/>
-            <ac:spMk id="16386" creationId="{37FDCEEA-1952-6C42-8C6C-2F8F8FE3796F}"/>
-          </ac:spMkLst>
-        </pc:spChg>
-      </pc:sldChg>
-      <pc:sldChg chg="modSp add mod modAnim">
-        <pc:chgData name="Long Nguyen" userId="f59fb8f3-a021-417a-8bc1-65c8d471c621" providerId="ADAL" clId="{9E9E5F5A-7190-2943-95D4-1A1ED8423A79}" dt="2022-03-24T11:57:50.388" v="245" actId="20577"/>
-        <pc:sldMkLst>
-          <pc:docMk/>
-          <pc:sldMk cId="2104582088" sldId="626"/>
-        </pc:sldMkLst>
-        <pc:spChg chg="mod">
-          <ac:chgData name="Long Nguyen" userId="f59fb8f3-a021-417a-8bc1-65c8d471c621" providerId="ADAL" clId="{9E9E5F5A-7190-2943-95D4-1A1ED8423A79}" dt="2022-03-24T11:57:50.388" v="245" actId="20577"/>
-          <ac:spMkLst>
-            <pc:docMk/>
-            <pc:sldMk cId="2104582088" sldId="626"/>
-            <ac:spMk id="16386" creationId="{37FDCEEA-1952-6C42-8C6C-2F8F8FE3796F}"/>
-          </ac:spMkLst>
-        </pc:spChg>
-        <pc:spChg chg="mod">
-          <ac:chgData name="Long Nguyen" userId="f59fb8f3-a021-417a-8bc1-65c8d471c621" providerId="ADAL" clId="{9E9E5F5A-7190-2943-95D4-1A1ED8423A79}" dt="2022-03-24T11:50:52.092" v="194" actId="20577"/>
-          <ac:spMkLst>
-            <pc:docMk/>
-            <pc:sldMk cId="2104582088" sldId="626"/>
-            <ac:spMk id="30721" creationId="{CABE8826-3A78-A04B-B3F1-70BBDCFEB024}"/>
-          </ac:spMkLst>
-        </pc:spChg>
-      </pc:sldChg>
-    </pc:docChg>
-  </pc:docChgLst>
-  <pc:docChgLst>
-    <pc:chgData name="Long B Nguyen" userId="f59fb8f3-a021-417a-8bc1-65c8d471c621" providerId="ADAL" clId="{A54A5039-9BC6-1548-AC61-7314DB675A9D}"/>
-    <pc:docChg chg="undo custSel addSld delSld modSld">
-      <pc:chgData name="Long B Nguyen" userId="f59fb8f3-a021-417a-8bc1-65c8d471c621" providerId="ADAL" clId="{A54A5039-9BC6-1548-AC61-7314DB675A9D}" dt="2019-09-25T14:26:33.714" v="2899" actId="20577"/>
-      <pc:docMkLst>
-        <pc:docMk/>
-      </pc:docMkLst>
-      <pc:sldChg chg="modSp">
-        <pc:chgData name="Long B Nguyen" userId="f59fb8f3-a021-417a-8bc1-65c8d471c621" providerId="ADAL" clId="{A54A5039-9BC6-1548-AC61-7314DB675A9D}" dt="2019-09-25T14:17:33.020" v="2843" actId="20577"/>
-        <pc:sldMkLst>
-          <pc:docMk/>
-          <pc:sldMk cId="4247104139" sldId="256"/>
-        </pc:sldMkLst>
-        <pc:spChg chg="mod">
-          <ac:chgData name="Long B Nguyen" userId="f59fb8f3-a021-417a-8bc1-65c8d471c621" providerId="ADAL" clId="{A54A5039-9BC6-1548-AC61-7314DB675A9D}" dt="2019-09-25T14:17:33.020" v="2843" actId="20577"/>
-          <ac:spMkLst>
-            <pc:docMk/>
-            <pc:sldMk cId="4247104139" sldId="256"/>
-            <ac:spMk id="3" creationId="{1BDC47C8-6776-7B44-9CD4-95FC91452D62}"/>
-          </ac:spMkLst>
-        </pc:spChg>
-      </pc:sldChg>
-      <pc:sldChg chg="modSp modAnim">
-        <pc:chgData name="Long B Nguyen" userId="f59fb8f3-a021-417a-8bc1-65c8d471c621" providerId="ADAL" clId="{A54A5039-9BC6-1548-AC61-7314DB675A9D}" dt="2019-09-24T11:45:26.007" v="2185" actId="20577"/>
-        <pc:sldMkLst>
-          <pc:docMk/>
-          <pc:sldMk cId="1438711869" sldId="284"/>
-        </pc:sldMkLst>
-        <pc:spChg chg="mod">
-          <ac:chgData name="Long B Nguyen" userId="f59fb8f3-a021-417a-8bc1-65c8d471c621" providerId="ADAL" clId="{A54A5039-9BC6-1548-AC61-7314DB675A9D}" dt="2019-09-24T11:43:23.898" v="2145" actId="20577"/>
-          <ac:spMkLst>
-            <pc:docMk/>
-            <pc:sldMk cId="1438711869" sldId="284"/>
-            <ac:spMk id="2" creationId="{AA3A228F-61D0-D949-A5E7-F83756230BF8}"/>
-          </ac:spMkLst>
-        </pc:spChg>
-        <pc:spChg chg="mod">
-          <ac:chgData name="Long B Nguyen" userId="f59fb8f3-a021-417a-8bc1-65c8d471c621" providerId="ADAL" clId="{A54A5039-9BC6-1548-AC61-7314DB675A9D}" dt="2019-09-24T11:45:26.007" v="2185" actId="20577"/>
-          <ac:spMkLst>
-            <pc:docMk/>
-            <pc:sldMk cId="1438711869" sldId="284"/>
-            <ac:spMk id="9" creationId="{E3B2E017-30B2-884B-A113-B419A2ED51AD}"/>
-          </ac:spMkLst>
-        </pc:spChg>
-      </pc:sldChg>
-      <pc:sldChg chg="modSp">
-        <pc:chgData name="Long B Nguyen" userId="f59fb8f3-a021-417a-8bc1-65c8d471c621" providerId="ADAL" clId="{A54A5039-9BC6-1548-AC61-7314DB675A9D}" dt="2019-09-19T14:18:56.959" v="28" actId="20577"/>
-        <pc:sldMkLst>
-          <pc:docMk/>
-          <pc:sldMk cId="131840209" sldId="286"/>
-        </pc:sldMkLst>
-        <pc:spChg chg="mod">
-          <ac:chgData name="Long B Nguyen" userId="f59fb8f3-a021-417a-8bc1-65c8d471c621" providerId="ADAL" clId="{A54A5039-9BC6-1548-AC61-7314DB675A9D}" dt="2019-09-19T14:18:56.959" v="28" actId="20577"/>
-          <ac:spMkLst>
-            <pc:docMk/>
-            <pc:sldMk cId="131840209" sldId="286"/>
-            <ac:spMk id="9" creationId="{E3B2E017-30B2-884B-A113-B419A2ED51AD}"/>
-          </ac:spMkLst>
-        </pc:spChg>
-      </pc:sldChg>
-      <pc:sldChg chg="modSp add del modAnim">
-        <pc:chgData name="Long B Nguyen" userId="f59fb8f3-a021-417a-8bc1-65c8d471c621" providerId="ADAL" clId="{A54A5039-9BC6-1548-AC61-7314DB675A9D}" dt="2019-09-24T11:43:26.738" v="2146" actId="2696"/>
-        <pc:sldMkLst>
-          <pc:docMk/>
-          <pc:sldMk cId="3439768680" sldId="294"/>
-        </pc:sldMkLst>
-        <pc:spChg chg="mod">
-          <ac:chgData name="Long B Nguyen" userId="f59fb8f3-a021-417a-8bc1-65c8d471c621" providerId="ADAL" clId="{A54A5039-9BC6-1548-AC61-7314DB675A9D}" dt="2019-09-24T11:40:12.100" v="2004"/>
-          <ac:spMkLst>
-            <pc:docMk/>
-            <pc:sldMk cId="3439768680" sldId="294"/>
-            <ac:spMk id="40963" creationId="{66AA56B3-AB86-6341-92AC-3BDB5774CCA3}"/>
-          </ac:spMkLst>
-        </pc:spChg>
-      </pc:sldChg>
-      <pc:sldChg chg="addSp modSp modAnim">
-        <pc:chgData name="Long B Nguyen" userId="f59fb8f3-a021-417a-8bc1-65c8d471c621" providerId="ADAL" clId="{A54A5039-9BC6-1548-AC61-7314DB675A9D}" dt="2019-09-23T12:04:10.373" v="1911"/>
-        <pc:sldMkLst>
-          <pc:docMk/>
-          <pc:sldMk cId="1816941262" sldId="295"/>
-        </pc:sldMkLst>
-        <pc:spChg chg="add mod">
-          <ac:chgData name="Long B Nguyen" userId="f59fb8f3-a021-417a-8bc1-65c8d471c621" providerId="ADAL" clId="{A54A5039-9BC6-1548-AC61-7314DB675A9D}" dt="2019-09-23T12:03:30.239" v="1901" actId="1076"/>
-          <ac:spMkLst>
-            <pc:docMk/>
-            <pc:sldMk cId="1816941262" sldId="295"/>
-            <ac:spMk id="3" creationId="{53AD888D-2F6F-BB43-86CA-1A3B376061A2}"/>
-          </ac:spMkLst>
-        </pc:spChg>
-        <pc:spChg chg="mod">
-          <ac:chgData name="Long B Nguyen" userId="f59fb8f3-a021-417a-8bc1-65c8d471c621" providerId="ADAL" clId="{A54A5039-9BC6-1548-AC61-7314DB675A9D}" dt="2019-09-23T11:58:12.789" v="1765" actId="20577"/>
-          <ac:spMkLst>
-            <pc:docMk/>
-            <pc:sldMk cId="1816941262" sldId="295"/>
-            <ac:spMk id="9" creationId="{E3B2E017-30B2-884B-A113-B419A2ED51AD}"/>
-          </ac:spMkLst>
-        </pc:spChg>
-        <pc:cxnChg chg="add mod">
-          <ac:chgData name="Long B Nguyen" userId="f59fb8f3-a021-417a-8bc1-65c8d471c621" providerId="ADAL" clId="{A54A5039-9BC6-1548-AC61-7314DB675A9D}" dt="2019-09-23T12:03:49.489" v="1909" actId="692"/>
-          <ac:cxnSpMkLst>
-            <pc:docMk/>
-            <pc:sldMk cId="1816941262" sldId="295"/>
-            <ac:cxnSpMk id="5" creationId="{0FA56ED4-EC25-B14C-B73E-DC4E17ADBF86}"/>
-          </ac:cxnSpMkLst>
-        </pc:cxnChg>
-      </pc:sldChg>
-      <pc:sldChg chg="modSp modAnim">
-        <pc:chgData name="Long B Nguyen" userId="f59fb8f3-a021-417a-8bc1-65c8d471c621" providerId="ADAL" clId="{A54A5039-9BC6-1548-AC61-7314DB675A9D}" dt="2019-09-23T11:59:17.508" v="1794"/>
-        <pc:sldMkLst>
-          <pc:docMk/>
-          <pc:sldMk cId="553003360" sldId="296"/>
-        </pc:sldMkLst>
-        <pc:spChg chg="mod">
-          <ac:chgData name="Long B Nguyen" userId="f59fb8f3-a021-417a-8bc1-65c8d471c621" providerId="ADAL" clId="{A54A5039-9BC6-1548-AC61-7314DB675A9D}" dt="2019-09-23T11:59:10.982" v="1792" actId="20577"/>
-          <ac:spMkLst>
-            <pc:docMk/>
-            <pc:sldMk cId="553003360" sldId="296"/>
-            <ac:spMk id="9" creationId="{E3B2E017-30B2-884B-A113-B419A2ED51AD}"/>
-          </ac:spMkLst>
-        </pc:spChg>
-      </pc:sldChg>
-      <pc:sldChg chg="modSp modAnim">
-        <pc:chgData name="Long B Nguyen" userId="f59fb8f3-a021-417a-8bc1-65c8d471c621" providerId="ADAL" clId="{A54A5039-9BC6-1548-AC61-7314DB675A9D}" dt="2019-09-23T11:59:34.632" v="1798"/>
-        <pc:sldMkLst>
-          <pc:docMk/>
-          <pc:sldMk cId="3006175481" sldId="297"/>
-        </pc:sldMkLst>
-        <pc:spChg chg="mod">
-          <ac:chgData name="Long B Nguyen" userId="f59fb8f3-a021-417a-8bc1-65c8d471c621" providerId="ADAL" clId="{A54A5039-9BC6-1548-AC61-7314DB675A9D}" dt="2019-09-23T11:59:28.174" v="1796" actId="20577"/>
-          <ac:spMkLst>
-            <pc:docMk/>
-            <pc:sldMk cId="3006175481" sldId="297"/>
-            <ac:spMk id="9" creationId="{E3B2E017-30B2-884B-A113-B419A2ED51AD}"/>
-          </ac:spMkLst>
-        </pc:spChg>
-      </pc:sldChg>
-      <pc:sldChg chg="modSp modAnim">
-        <pc:chgData name="Long B Nguyen" userId="f59fb8f3-a021-417a-8bc1-65c8d471c621" providerId="ADAL" clId="{A54A5039-9BC6-1548-AC61-7314DB675A9D}" dt="2019-09-23T12:06:41.861" v="1992"/>
-        <pc:sldMkLst>
-          <pc:docMk/>
-          <pc:sldMk cId="3150557076" sldId="298"/>
-        </pc:sldMkLst>
-        <pc:spChg chg="mod">
-          <ac:chgData name="Long B Nguyen" userId="f59fb8f3-a021-417a-8bc1-65c8d471c621" providerId="ADAL" clId="{A54A5039-9BC6-1548-AC61-7314DB675A9D}" dt="2019-09-23T12:05:19.573" v="1985" actId="20577"/>
-          <ac:spMkLst>
-            <pc:docMk/>
-            <pc:sldMk cId="3150557076" sldId="298"/>
-            <ac:spMk id="9" creationId="{E3B2E017-30B2-884B-A113-B419A2ED51AD}"/>
-          </ac:spMkLst>
-        </pc:spChg>
-      </pc:sldChg>
-      <pc:sldChg chg="addSp delSp modSp modAnim">
-        <pc:chgData name="Long B Nguyen" userId="f59fb8f3-a021-417a-8bc1-65c8d471c621" providerId="ADAL" clId="{A54A5039-9BC6-1548-AC61-7314DB675A9D}" dt="2019-09-23T12:01:44.436" v="1840"/>
-        <pc:sldMkLst>
-          <pc:docMk/>
-          <pc:sldMk cId="128704095" sldId="302"/>
-        </pc:sldMkLst>
-        <pc:spChg chg="add del">
-          <ac:chgData name="Long B Nguyen" userId="f59fb8f3-a021-417a-8bc1-65c8d471c621" providerId="ADAL" clId="{A54A5039-9BC6-1548-AC61-7314DB675A9D}" dt="2019-09-19T16:47:34.465" v="464"/>
-          <ac:spMkLst>
-            <pc:docMk/>
-            <pc:sldMk cId="128704095" sldId="302"/>
-            <ac:spMk id="3" creationId="{EA19F625-AB76-8A4B-B39A-0F2D018DC68D}"/>
-          </ac:spMkLst>
-        </pc:spChg>
-        <pc:spChg chg="mod">
-          <ac:chgData name="Long B Nguyen" userId="f59fb8f3-a021-417a-8bc1-65c8d471c621" providerId="ADAL" clId="{A54A5039-9BC6-1548-AC61-7314DB675A9D}" dt="2019-09-23T12:01:36.243" v="1838" actId="20577"/>
-          <ac:spMkLst>
-            <pc:docMk/>
-            <pc:sldMk cId="128704095" sldId="302"/>
-            <ac:spMk id="9" creationId="{E3B2E017-30B2-884B-A113-B419A2ED51AD}"/>
-          </ac:spMkLst>
-        </pc:spChg>
-      </pc:sldChg>
-      <pc:sldChg chg="modSp add modAnim">
-        <pc:chgData name="Long B Nguyen" userId="f59fb8f3-a021-417a-8bc1-65c8d471c621" providerId="ADAL" clId="{A54A5039-9BC6-1548-AC61-7314DB675A9D}" dt="2019-09-23T12:00:26.516" v="1826" actId="20577"/>
-        <pc:sldMkLst>
-          <pc:docMk/>
-          <pc:sldMk cId="3275945509" sldId="303"/>
-        </pc:sldMkLst>
-        <pc:spChg chg="mod">
-          <ac:chgData name="Long B Nguyen" userId="f59fb8f3-a021-417a-8bc1-65c8d471c621" providerId="ADAL" clId="{A54A5039-9BC6-1548-AC61-7314DB675A9D}" dt="2019-09-23T12:00:26.516" v="1826" actId="20577"/>
-          <ac:spMkLst>
-            <pc:docMk/>
-            <pc:sldMk cId="3275945509" sldId="303"/>
-            <ac:spMk id="9" creationId="{E3B2E017-30B2-884B-A113-B419A2ED51AD}"/>
-          </ac:spMkLst>
-        </pc:spChg>
-      </pc:sldChg>
-      <pc:sldChg chg="modSp add modAnim">
-        <pc:chgData name="Long B Nguyen" userId="f59fb8f3-a021-417a-8bc1-65c8d471c621" providerId="ADAL" clId="{A54A5039-9BC6-1548-AC61-7314DB675A9D}" dt="2019-09-23T12:00:38.314" v="1827"/>
-        <pc:sldMkLst>
-          <pc:docMk/>
-          <pc:sldMk cId="406772024" sldId="304"/>
-        </pc:sldMkLst>
-        <pc:spChg chg="mod">
-          <ac:chgData name="Long B Nguyen" userId="f59fb8f3-a021-417a-8bc1-65c8d471c621" providerId="ADAL" clId="{A54A5039-9BC6-1548-AC61-7314DB675A9D}" dt="2019-09-23T12:00:12.500" v="1808" actId="20577"/>
-          <ac:spMkLst>
-            <pc:docMk/>
-            <pc:sldMk cId="406772024" sldId="304"/>
-            <ac:spMk id="9" creationId="{E3B2E017-30B2-884B-A113-B419A2ED51AD}"/>
-          </ac:spMkLst>
-        </pc:spChg>
-      </pc:sldChg>
-      <pc:sldChg chg="modSp add modAnim">
-        <pc:chgData name="Long B Nguyen" userId="f59fb8f3-a021-417a-8bc1-65c8d471c621" providerId="ADAL" clId="{A54A5039-9BC6-1548-AC61-7314DB675A9D}" dt="2019-09-23T13:27:58.707" v="2000" actId="20577"/>
-        <pc:sldMkLst>
-          <pc:docMk/>
-          <pc:sldMk cId="1703902501" sldId="305"/>
-        </pc:sldMkLst>
-        <pc:spChg chg="mod">
-          <ac:chgData name="Long B Nguyen" userId="f59fb8f3-a021-417a-8bc1-65c8d471c621" providerId="ADAL" clId="{A54A5039-9BC6-1548-AC61-7314DB675A9D}" dt="2019-09-19T14:31:00.333" v="110" actId="20577"/>
-          <ac:spMkLst>
-            <pc:docMk/>
-            <pc:sldMk cId="1703902501" sldId="305"/>
-            <ac:spMk id="2" creationId="{AA3A228F-61D0-D949-A5E7-F83756230BF8}"/>
-          </ac:spMkLst>
-        </pc:spChg>
-        <pc:spChg chg="mod">
-          <ac:chgData name="Long B Nguyen" userId="f59fb8f3-a021-417a-8bc1-65c8d471c621" providerId="ADAL" clId="{A54A5039-9BC6-1548-AC61-7314DB675A9D}" dt="2019-09-23T13:27:58.707" v="2000" actId="20577"/>
-          <ac:spMkLst>
-            <pc:docMk/>
-            <pc:sldMk cId="1703902501" sldId="305"/>
-            <ac:spMk id="9" creationId="{E3B2E017-30B2-884B-A113-B419A2ED51AD}"/>
-          </ac:spMkLst>
-        </pc:spChg>
-      </pc:sldChg>
-      <pc:sldChg chg="modSp add modAnim">
-        <pc:chgData name="Long B Nguyen" userId="f59fb8f3-a021-417a-8bc1-65c8d471c621" providerId="ADAL" clId="{A54A5039-9BC6-1548-AC61-7314DB675A9D}" dt="2019-09-23T12:01:58.728" v="1843"/>
-        <pc:sldMkLst>
-          <pc:docMk/>
-          <pc:sldMk cId="3614829039" sldId="306"/>
-        </pc:sldMkLst>
-        <pc:spChg chg="mod">
-          <ac:chgData name="Long B Nguyen" userId="f59fb8f3-a021-417a-8bc1-65c8d471c621" providerId="ADAL" clId="{A54A5039-9BC6-1548-AC61-7314DB675A9D}" dt="2019-09-19T16:51:57.917" v="536" actId="20577"/>
-          <ac:spMkLst>
-            <pc:docMk/>
-            <pc:sldMk cId="3614829039" sldId="306"/>
-            <ac:spMk id="2" creationId="{AA3A228F-61D0-D949-A5E7-F83756230BF8}"/>
-          </ac:spMkLst>
-        </pc:spChg>
-        <pc:spChg chg="mod">
-          <ac:chgData name="Long B Nguyen" userId="f59fb8f3-a021-417a-8bc1-65c8d471c621" providerId="ADAL" clId="{A54A5039-9BC6-1548-AC61-7314DB675A9D}" dt="2019-09-23T12:01:50.092" v="1842" actId="20577"/>
-          <ac:spMkLst>
-            <pc:docMk/>
-            <pc:sldMk cId="3614829039" sldId="306"/>
-            <ac:spMk id="9" creationId="{E3B2E017-30B2-884B-A113-B419A2ED51AD}"/>
-          </ac:spMkLst>
-        </pc:spChg>
-      </pc:sldChg>
-      <pc:sldChg chg="modSp add modAnim">
-        <pc:chgData name="Long B Nguyen" userId="f59fb8f3-a021-417a-8bc1-65c8d471c621" providerId="ADAL" clId="{A54A5039-9BC6-1548-AC61-7314DB675A9D}" dt="2019-09-23T12:02:15.154" v="1846"/>
-        <pc:sldMkLst>
-          <pc:docMk/>
-          <pc:sldMk cId="295911327" sldId="307"/>
-        </pc:sldMkLst>
-        <pc:spChg chg="mod">
-          <ac:chgData name="Long B Nguyen" userId="f59fb8f3-a021-417a-8bc1-65c8d471c621" providerId="ADAL" clId="{A54A5039-9BC6-1548-AC61-7314DB675A9D}" dt="2019-09-19T17:17:25.590" v="539" actId="20577"/>
-          <ac:spMkLst>
-            <pc:docMk/>
-            <pc:sldMk cId="295911327" sldId="307"/>
-            <ac:spMk id="2" creationId="{AA3A228F-61D0-D949-A5E7-F83756230BF8}"/>
-          </ac:spMkLst>
-        </pc:spChg>
-        <pc:spChg chg="mod">
-          <ac:chgData name="Long B Nguyen" userId="f59fb8f3-a021-417a-8bc1-65c8d471c621" providerId="ADAL" clId="{A54A5039-9BC6-1548-AC61-7314DB675A9D}" dt="2019-09-23T12:02:10.526" v="1845" actId="20577"/>
-          <ac:spMkLst>
-            <pc:docMk/>
-            <pc:sldMk cId="295911327" sldId="307"/>
-            <ac:spMk id="9" creationId="{E3B2E017-30B2-884B-A113-B419A2ED51AD}"/>
-          </ac:spMkLst>
-        </pc:spChg>
-      </pc:sldChg>
-      <pc:sldChg chg="modSp add modAnim">
-        <pc:chgData name="Long B Nguyen" userId="f59fb8f3-a021-417a-8bc1-65c8d471c621" providerId="ADAL" clId="{A54A5039-9BC6-1548-AC61-7314DB675A9D}" dt="2019-09-23T12:01:05.311" v="1832"/>
-        <pc:sldMkLst>
-          <pc:docMk/>
-          <pc:sldMk cId="67957925" sldId="308"/>
-        </pc:sldMkLst>
-        <pc:spChg chg="mod">
-          <ac:chgData name="Long B Nguyen" userId="f59fb8f3-a021-417a-8bc1-65c8d471c621" providerId="ADAL" clId="{A54A5039-9BC6-1548-AC61-7314DB675A9D}" dt="2019-09-20T12:22:34.233" v="599" actId="20577"/>
-          <ac:spMkLst>
-            <pc:docMk/>
-            <pc:sldMk cId="67957925" sldId="308"/>
-            <ac:spMk id="2" creationId="{AA3A228F-61D0-D949-A5E7-F83756230BF8}"/>
-          </ac:spMkLst>
-        </pc:spChg>
-        <pc:spChg chg="mod">
-          <ac:chgData name="Long B Nguyen" userId="f59fb8f3-a021-417a-8bc1-65c8d471c621" providerId="ADAL" clId="{A54A5039-9BC6-1548-AC61-7314DB675A9D}" dt="2019-09-20T12:37:26.490" v="1123" actId="20577"/>
-          <ac:spMkLst>
-            <pc:docMk/>
-            <pc:sldMk cId="67957925" sldId="308"/>
-            <ac:spMk id="9" creationId="{E3B2E017-30B2-884B-A113-B419A2ED51AD}"/>
-          </ac:spMkLst>
-        </pc:spChg>
-      </pc:sldChg>
-      <pc:sldChg chg="modSp add modAnim">
-        <pc:chgData name="Long B Nguyen" userId="f59fb8f3-a021-417a-8bc1-65c8d471c621" providerId="ADAL" clId="{A54A5039-9BC6-1548-AC61-7314DB675A9D}" dt="2019-09-23T12:01:18.117" v="1835"/>
-        <pc:sldMkLst>
-          <pc:docMk/>
-          <pc:sldMk cId="1872435103" sldId="309"/>
-        </pc:sldMkLst>
-        <pc:spChg chg="mod">
-          <ac:chgData name="Long B Nguyen" userId="f59fb8f3-a021-417a-8bc1-65c8d471c621" providerId="ADAL" clId="{A54A5039-9BC6-1548-AC61-7314DB675A9D}" dt="2019-09-20T12:24:39.851" v="793" actId="20577"/>
-          <ac:spMkLst>
-            <pc:docMk/>
-            <pc:sldMk cId="1872435103" sldId="309"/>
-            <ac:spMk id="2" creationId="{AA3A228F-61D0-D949-A5E7-F83756230BF8}"/>
-          </ac:spMkLst>
-        </pc:spChg>
-        <pc:spChg chg="mod">
-          <ac:chgData name="Long B Nguyen" userId="f59fb8f3-a021-417a-8bc1-65c8d471c621" providerId="ADAL" clId="{A54A5039-9BC6-1548-AC61-7314DB675A9D}" dt="2019-09-20T12:37:20.580" v="1117" actId="20577"/>
-          <ac:spMkLst>
-            <pc:docMk/>
-            <pc:sldMk cId="1872435103" sldId="309"/>
-            <ac:spMk id="9" creationId="{E3B2E017-30B2-884B-A113-B419A2ED51AD}"/>
-          </ac:spMkLst>
-        </pc:spChg>
-      </pc:sldChg>
-      <pc:sldChg chg="modSp add">
-        <pc:chgData name="Long B Nguyen" userId="f59fb8f3-a021-417a-8bc1-65c8d471c621" providerId="ADAL" clId="{A54A5039-9BC6-1548-AC61-7314DB675A9D}" dt="2019-09-20T12:40:48.118" v="1409" actId="20577"/>
-        <pc:sldMkLst>
-          <pc:docMk/>
-          <pc:sldMk cId="4088965571" sldId="310"/>
-        </pc:sldMkLst>
-        <pc:spChg chg="mod">
-          <ac:chgData name="Long B Nguyen" userId="f59fb8f3-a021-417a-8bc1-65c8d471c621" providerId="ADAL" clId="{A54A5039-9BC6-1548-AC61-7314DB675A9D}" dt="2019-09-20T12:40:48.118" v="1409" actId="20577"/>
-          <ac:spMkLst>
-            <pc:docMk/>
-            <pc:sldMk cId="4088965571" sldId="310"/>
-            <ac:spMk id="2" creationId="{AA3A228F-61D0-D949-A5E7-F83756230BF8}"/>
-          </ac:spMkLst>
-        </pc:spChg>
-        <pc:spChg chg="mod">
-          <ac:chgData name="Long B Nguyen" userId="f59fb8f3-a021-417a-8bc1-65c8d471c621" providerId="ADAL" clId="{A54A5039-9BC6-1548-AC61-7314DB675A9D}" dt="2019-09-20T12:40:27.809" v="1394" actId="255"/>
-          <ac:spMkLst>
-            <pc:docMk/>
-            <pc:sldMk cId="4088965571" sldId="310"/>
-            <ac:spMk id="9" creationId="{E3B2E017-30B2-884B-A113-B419A2ED51AD}"/>
-          </ac:spMkLst>
-        </pc:spChg>
-      </pc:sldChg>
-      <pc:sldChg chg="modSp add modAnim">
-        <pc:chgData name="Long B Nguyen" userId="f59fb8f3-a021-417a-8bc1-65c8d471c621" providerId="ADAL" clId="{A54A5039-9BC6-1548-AC61-7314DB675A9D}" dt="2019-09-23T12:01:26.997" v="1836"/>
-        <pc:sldMkLst>
-          <pc:docMk/>
-          <pc:sldMk cId="2255846137" sldId="311"/>
-        </pc:sldMkLst>
-        <pc:spChg chg="mod">
-          <ac:chgData name="Long B Nguyen" userId="f59fb8f3-a021-417a-8bc1-65c8d471c621" providerId="ADAL" clId="{A54A5039-9BC6-1548-AC61-7314DB675A9D}" dt="2019-09-20T12:42:38.115" v="1565" actId="20577"/>
-          <ac:spMkLst>
-            <pc:docMk/>
-            <pc:sldMk cId="2255846137" sldId="311"/>
-            <ac:spMk id="2" creationId="{AA3A228F-61D0-D949-A5E7-F83756230BF8}"/>
-          </ac:spMkLst>
-        </pc:spChg>
-        <pc:spChg chg="mod">
-          <ac:chgData name="Long B Nguyen" userId="f59fb8f3-a021-417a-8bc1-65c8d471c621" providerId="ADAL" clId="{A54A5039-9BC6-1548-AC61-7314DB675A9D}" dt="2019-09-20T12:43:18.312" v="1623" actId="20577"/>
-          <ac:spMkLst>
-            <pc:docMk/>
-            <pc:sldMk cId="2255846137" sldId="311"/>
-            <ac:spMk id="9" creationId="{E3B2E017-30B2-884B-A113-B419A2ED51AD}"/>
-          </ac:spMkLst>
-        </pc:spChg>
-      </pc:sldChg>
-      <pc:sldChg chg="modSp add">
-        <pc:chgData name="Long B Nguyen" userId="f59fb8f3-a021-417a-8bc1-65c8d471c621" providerId="ADAL" clId="{A54A5039-9BC6-1548-AC61-7314DB675A9D}" dt="2019-09-23T11:49:40.764" v="1759" actId="20577"/>
-        <pc:sldMkLst>
-          <pc:docMk/>
-          <pc:sldMk cId="1513627164" sldId="312"/>
-        </pc:sldMkLst>
-        <pc:spChg chg="mod">
-          <ac:chgData name="Long B Nguyen" userId="f59fb8f3-a021-417a-8bc1-65c8d471c621" providerId="ADAL" clId="{A54A5039-9BC6-1548-AC61-7314DB675A9D}" dt="2019-09-20T12:44:10.623" v="1625" actId="20577"/>
-          <ac:spMkLst>
-            <pc:docMk/>
-            <pc:sldMk cId="1513627164" sldId="312"/>
-            <ac:spMk id="2" creationId="{AA3A228F-61D0-D949-A5E7-F83756230BF8}"/>
-          </ac:spMkLst>
-        </pc:spChg>
-        <pc:spChg chg="mod">
-          <ac:chgData name="Long B Nguyen" userId="f59fb8f3-a021-417a-8bc1-65c8d471c621" providerId="ADAL" clId="{A54A5039-9BC6-1548-AC61-7314DB675A9D}" dt="2019-09-23T11:49:40.764" v="1759" actId="20577"/>
-          <ac:spMkLst>
-            <pc:docMk/>
-            <pc:sldMk cId="1513627164" sldId="312"/>
-            <ac:spMk id="9" creationId="{E3B2E017-30B2-884B-A113-B419A2ED51AD}"/>
-          </ac:spMkLst>
-        </pc:spChg>
-      </pc:sldChg>
-      <pc:sldChg chg="modSp add modAnim">
-        <pc:chgData name="Long B Nguyen" userId="f59fb8f3-a021-417a-8bc1-65c8d471c621" providerId="ADAL" clId="{A54A5039-9BC6-1548-AC61-7314DB675A9D}" dt="2019-09-23T11:58:57.499" v="1789"/>
-        <pc:sldMkLst>
-          <pc:docMk/>
-          <pc:sldMk cId="2097059918" sldId="313"/>
-        </pc:sldMkLst>
-        <pc:spChg chg="mod">
-          <ac:chgData name="Long B Nguyen" userId="f59fb8f3-a021-417a-8bc1-65c8d471c621" providerId="ADAL" clId="{A54A5039-9BC6-1548-AC61-7314DB675A9D}" dt="2019-09-23T11:58:47.576" v="1783" actId="20577"/>
-          <ac:spMkLst>
-            <pc:docMk/>
-            <pc:sldMk cId="2097059918" sldId="313"/>
-            <ac:spMk id="9" creationId="{E3B2E017-30B2-884B-A113-B419A2ED51AD}"/>
-          </ac:spMkLst>
-        </pc:spChg>
-      </pc:sldChg>
-      <pc:sldChg chg="modSp add del">
-        <pc:chgData name="Long B Nguyen" userId="f59fb8f3-a021-417a-8bc1-65c8d471c621" providerId="ADAL" clId="{A54A5039-9BC6-1548-AC61-7314DB675A9D}" dt="2019-09-24T11:43:27.284" v="2147" actId="2696"/>
-        <pc:sldMkLst>
-          <pc:docMk/>
-          <pc:sldMk cId="3916896519" sldId="314"/>
-        </pc:sldMkLst>
-        <pc:spChg chg="mod">
-          <ac:chgData name="Long B Nguyen" userId="f59fb8f3-a021-417a-8bc1-65c8d471c621" providerId="ADAL" clId="{A54A5039-9BC6-1548-AC61-7314DB675A9D}" dt="2019-09-24T11:40:07.514" v="2003"/>
-          <ac:spMkLst>
-            <pc:docMk/>
-            <pc:sldMk cId="3916896519" sldId="314"/>
-            <ac:spMk id="2" creationId="{AA3A228F-61D0-D949-A5E7-F83756230BF8}"/>
-          </ac:spMkLst>
-        </pc:spChg>
-        <pc:spChg chg="mod">
-          <ac:chgData name="Long B Nguyen" userId="f59fb8f3-a021-417a-8bc1-65c8d471c621" providerId="ADAL" clId="{A54A5039-9BC6-1548-AC61-7314DB675A9D}" dt="2019-09-24T11:41:32.486" v="2043"/>
-          <ac:spMkLst>
-            <pc:docMk/>
-            <pc:sldMk cId="3916896519" sldId="314"/>
-            <ac:spMk id="9" creationId="{E3B2E017-30B2-884B-A113-B419A2ED51AD}"/>
-          </ac:spMkLst>
-        </pc:spChg>
-      </pc:sldChg>
-      <pc:sldChg chg="modSp add del">
-        <pc:chgData name="Long B Nguyen" userId="f59fb8f3-a021-417a-8bc1-65c8d471c621" providerId="ADAL" clId="{A54A5039-9BC6-1548-AC61-7314DB675A9D}" dt="2019-09-24T14:05:24.942" v="2839" actId="2696"/>
-        <pc:sldMkLst>
-          <pc:docMk/>
-          <pc:sldMk cId="2798321153" sldId="315"/>
-        </pc:sldMkLst>
-        <pc:spChg chg="mod">
-          <ac:chgData name="Long B Nguyen" userId="f59fb8f3-a021-417a-8bc1-65c8d471c621" providerId="ADAL" clId="{A54A5039-9BC6-1548-AC61-7314DB675A9D}" dt="2019-09-24T11:47:07.801" v="2189" actId="20577"/>
-          <ac:spMkLst>
-            <pc:docMk/>
-            <pc:sldMk cId="2798321153" sldId="315"/>
-            <ac:spMk id="2" creationId="{AA3A228F-61D0-D949-A5E7-F83756230BF8}"/>
-          </ac:spMkLst>
-        </pc:spChg>
-        <pc:spChg chg="mod">
-          <ac:chgData name="Long B Nguyen" userId="f59fb8f3-a021-417a-8bc1-65c8d471c621" providerId="ADAL" clId="{A54A5039-9BC6-1548-AC61-7314DB675A9D}" dt="2019-09-24T11:53:13.884" v="2630" actId="20577"/>
-          <ac:spMkLst>
-            <pc:docMk/>
-            <pc:sldMk cId="2798321153" sldId="315"/>
-            <ac:spMk id="9" creationId="{E3B2E017-30B2-884B-A113-B419A2ED51AD}"/>
-          </ac:spMkLst>
-        </pc:spChg>
-      </pc:sldChg>
-      <pc:sldChg chg="add">
-        <pc:chgData name="Long B Nguyen" userId="f59fb8f3-a021-417a-8bc1-65c8d471c621" providerId="ADAL" clId="{A54A5039-9BC6-1548-AC61-7314DB675A9D}" dt="2019-09-24T11:47:01.081" v="2186"/>
-        <pc:sldMkLst>
-          <pc:docMk/>
-          <pc:sldMk cId="1452600724" sldId="316"/>
-        </pc:sldMkLst>
-      </pc:sldChg>
-      <pc:sldChg chg="modSp add">
-        <pc:chgData name="Long B Nguyen" userId="f59fb8f3-a021-417a-8bc1-65c8d471c621" providerId="ADAL" clId="{A54A5039-9BC6-1548-AC61-7314DB675A9D}" dt="2019-09-25T14:26:33.714" v="2899" actId="20577"/>
-        <pc:sldMkLst>
-          <pc:docMk/>
-          <pc:sldMk cId="1787114790" sldId="317"/>
-        </pc:sldMkLst>
-        <pc:spChg chg="mod">
-          <ac:chgData name="Long B Nguyen" userId="f59fb8f3-a021-417a-8bc1-65c8d471c621" providerId="ADAL" clId="{A54A5039-9BC6-1548-AC61-7314DB675A9D}" dt="2019-09-24T11:53:24.383" v="2634" actId="20577"/>
-          <ac:spMkLst>
-            <pc:docMk/>
-            <pc:sldMk cId="1787114790" sldId="317"/>
-            <ac:spMk id="2" creationId="{AA3A228F-61D0-D949-A5E7-F83756230BF8}"/>
-          </ac:spMkLst>
-        </pc:spChg>
-        <pc:spChg chg="mod">
-          <ac:chgData name="Long B Nguyen" userId="f59fb8f3-a021-417a-8bc1-65c8d471c621" providerId="ADAL" clId="{A54A5039-9BC6-1548-AC61-7314DB675A9D}" dt="2019-09-25T14:26:33.714" v="2899" actId="20577"/>
-          <ac:spMkLst>
-            <pc:docMk/>
-            <pc:sldMk cId="1787114790" sldId="317"/>
-            <ac:spMk id="9" creationId="{E3B2E017-30B2-884B-A113-B419A2ED51AD}"/>
-          </ac:spMkLst>
-        </pc:spChg>
-      </pc:sldChg>
-      <pc:sldChg chg="modSp add">
-        <pc:chgData name="Long B Nguyen" userId="f59fb8f3-a021-417a-8bc1-65c8d471c621" providerId="ADAL" clId="{A54A5039-9BC6-1548-AC61-7314DB675A9D}" dt="2019-09-24T13:44:10.963" v="2838" actId="20577"/>
-        <pc:sldMkLst>
-          <pc:docMk/>
-          <pc:sldMk cId="1215229427" sldId="318"/>
-        </pc:sldMkLst>
-        <pc:spChg chg="mod">
-          <ac:chgData name="Long B Nguyen" userId="f59fb8f3-a021-417a-8bc1-65c8d471c621" providerId="ADAL" clId="{A54A5039-9BC6-1548-AC61-7314DB675A9D}" dt="2019-09-24T13:44:10.963" v="2838" actId="20577"/>
-          <ac:spMkLst>
-            <pc:docMk/>
-            <pc:sldMk cId="1215229427" sldId="318"/>
-            <ac:spMk id="9" creationId="{E3B2E017-30B2-884B-A113-B419A2ED51AD}"/>
-          </ac:spMkLst>
-        </pc:spChg>
-      </pc:sldChg>
-    </pc:docChg>
-  </pc:docChgLst>
-  <pc:docChgLst>
-    <pc:chgData name="Long B Nguyen" userId="f59fb8f3-a021-417a-8bc1-65c8d471c621" providerId="ADAL" clId="{EAA1E8DF-C35C-6A46-BAE7-931DFAE42A5E}"/>
-    <pc:docChg chg="undo custSel addSld delSld modSld">
-      <pc:chgData name="Long B Nguyen" userId="f59fb8f3-a021-417a-8bc1-65c8d471c621" providerId="ADAL" clId="{EAA1E8DF-C35C-6A46-BAE7-931DFAE42A5E}" dt="2021-04-06T12:29:43.353" v="3259" actId="20577"/>
-      <pc:docMkLst>
-        <pc:docMk/>
-      </pc:docMkLst>
-      <pc:sldChg chg="modSp mod">
-        <pc:chgData name="Long B Nguyen" userId="f59fb8f3-a021-417a-8bc1-65c8d471c621" providerId="ADAL" clId="{EAA1E8DF-C35C-6A46-BAE7-931DFAE42A5E}" dt="2021-03-26T15:53:01.557" v="435" actId="20577"/>
-        <pc:sldMkLst>
-          <pc:docMk/>
-          <pc:sldMk cId="4247104139" sldId="256"/>
-        </pc:sldMkLst>
-        <pc:spChg chg="mod">
-          <ac:chgData name="Long B Nguyen" userId="f59fb8f3-a021-417a-8bc1-65c8d471c621" providerId="ADAL" clId="{EAA1E8DF-C35C-6A46-BAE7-931DFAE42A5E}" dt="2021-03-26T15:53:01.557" v="435" actId="20577"/>
-          <ac:spMkLst>
-            <pc:docMk/>
-            <pc:sldMk cId="4247104139" sldId="256"/>
-            <ac:spMk id="2" creationId="{6117A749-B1BA-E24B-8FB0-0604EF651FB3}"/>
-          </ac:spMkLst>
-        </pc:spChg>
-      </pc:sldChg>
-      <pc:sldChg chg="del">
-        <pc:chgData name="Long B Nguyen" userId="f59fb8f3-a021-417a-8bc1-65c8d471c621" providerId="ADAL" clId="{EAA1E8DF-C35C-6A46-BAE7-931DFAE42A5E}" dt="2021-04-05T12:47:20.397" v="2760" actId="2696"/>
-        <pc:sldMkLst>
-          <pc:docMk/>
-          <pc:sldMk cId="2902676313" sldId="485"/>
-        </pc:sldMkLst>
-      </pc:sldChg>
-      <pc:sldChg chg="modSp add">
-        <pc:chgData name="Long B Nguyen" userId="f59fb8f3-a021-417a-8bc1-65c8d471c621" providerId="ADAL" clId="{EAA1E8DF-C35C-6A46-BAE7-931DFAE42A5E}" dt="2021-04-05T12:36:37.968" v="2617" actId="20577"/>
-        <pc:sldMkLst>
-          <pc:docMk/>
-          <pc:sldMk cId="2588250059" sldId="527"/>
-        </pc:sldMkLst>
-        <pc:spChg chg="mod">
-          <ac:chgData name="Long B Nguyen" userId="f59fb8f3-a021-417a-8bc1-65c8d471c621" providerId="ADAL" clId="{EAA1E8DF-C35C-6A46-BAE7-931DFAE42A5E}" dt="2021-04-05T12:36:37.968" v="2617" actId="20577"/>
-          <ac:spMkLst>
-            <pc:docMk/>
-            <pc:sldMk cId="2588250059" sldId="527"/>
-            <ac:spMk id="16386" creationId="{60062ACF-10D9-6E42-9C85-ED9949A40D46}"/>
-          </ac:spMkLst>
-        </pc:spChg>
-      </pc:sldChg>
-      <pc:sldChg chg="add del">
-        <pc:chgData name="Long B Nguyen" userId="f59fb8f3-a021-417a-8bc1-65c8d471c621" providerId="ADAL" clId="{EAA1E8DF-C35C-6A46-BAE7-931DFAE42A5E}" dt="2021-03-31T02:44:19.867" v="2354" actId="2696"/>
-        <pc:sldMkLst>
-          <pc:docMk/>
-          <pc:sldMk cId="2307872610" sldId="528"/>
-        </pc:sldMkLst>
-      </pc:sldChg>
-      <pc:sldChg chg="modSp add mod modAnim">
-        <pc:chgData name="Long B Nguyen" userId="f59fb8f3-a021-417a-8bc1-65c8d471c621" providerId="ADAL" clId="{EAA1E8DF-C35C-6A46-BAE7-931DFAE42A5E}" dt="2021-04-05T12:56:00.499" v="2931" actId="20577"/>
-        <pc:sldMkLst>
-          <pc:docMk/>
-          <pc:sldMk cId="351843145" sldId="529"/>
-        </pc:sldMkLst>
-        <pc:spChg chg="mod">
-          <ac:chgData name="Long B Nguyen" userId="f59fb8f3-a021-417a-8bc1-65c8d471c621" providerId="ADAL" clId="{EAA1E8DF-C35C-6A46-BAE7-931DFAE42A5E}" dt="2021-04-05T12:56:00.499" v="2931" actId="20577"/>
-          <ac:spMkLst>
-            <pc:docMk/>
-            <pc:sldMk cId="351843145" sldId="529"/>
-            <ac:spMk id="16386" creationId="{842B05C2-DFA8-F84D-AEF8-C43D6277D764}"/>
-          </ac:spMkLst>
-        </pc:spChg>
-        <pc:spChg chg="mod">
-          <ac:chgData name="Long B Nguyen" userId="f59fb8f3-a021-417a-8bc1-65c8d471c621" providerId="ADAL" clId="{EAA1E8DF-C35C-6A46-BAE7-931DFAE42A5E}" dt="2021-04-05T12:54:00.435" v="2799" actId="20577"/>
-          <ac:spMkLst>
-            <pc:docMk/>
-            <pc:sldMk cId="351843145" sldId="529"/>
-            <ac:spMk id="20481" creationId="{092A6AB6-AD55-584E-9437-58A5F134C771}"/>
-          </ac:spMkLst>
-        </pc:spChg>
-      </pc:sldChg>
-      <pc:sldChg chg="modSp add mod modAnim">
-        <pc:chgData name="Long B Nguyen" userId="f59fb8f3-a021-417a-8bc1-65c8d471c621" providerId="ADAL" clId="{EAA1E8DF-C35C-6A46-BAE7-931DFAE42A5E}" dt="2021-03-31T02:55:23.763" v="2387" actId="14100"/>
-        <pc:sldMkLst>
-          <pc:docMk/>
-          <pc:sldMk cId="1670205627" sldId="532"/>
-        </pc:sldMkLst>
-        <pc:spChg chg="mod">
-          <ac:chgData name="Long B Nguyen" userId="f59fb8f3-a021-417a-8bc1-65c8d471c621" providerId="ADAL" clId="{EAA1E8DF-C35C-6A46-BAE7-931DFAE42A5E}" dt="2021-03-31T02:55:23.763" v="2387" actId="14100"/>
-          <ac:spMkLst>
-            <pc:docMk/>
-            <pc:sldMk cId="1670205627" sldId="532"/>
-            <ac:spMk id="24578" creationId="{7FE88632-6B99-894F-84CB-A05376DE67C2}"/>
-          </ac:spMkLst>
-        </pc:spChg>
-        <pc:spChg chg="mod">
-          <ac:chgData name="Long B Nguyen" userId="f59fb8f3-a021-417a-8bc1-65c8d471c621" providerId="ADAL" clId="{EAA1E8DF-C35C-6A46-BAE7-931DFAE42A5E}" dt="2021-03-31T02:55:19.657" v="2386" actId="1076"/>
-          <ac:spMkLst>
-            <pc:docMk/>
-            <pc:sldMk cId="1670205627" sldId="532"/>
-            <ac:spMk id="26625" creationId="{E77A49A2-7BAC-B340-88A5-3CB13A30B8E2}"/>
-          </ac:spMkLst>
-        </pc:spChg>
-      </pc:sldChg>
-      <pc:sldChg chg="modSp add mod">
-        <pc:chgData name="Long B Nguyen" userId="f59fb8f3-a021-417a-8bc1-65c8d471c621" providerId="ADAL" clId="{EAA1E8DF-C35C-6A46-BAE7-931DFAE42A5E}" dt="2021-03-31T02:48:38.497" v="2380" actId="20577"/>
-        <pc:sldMkLst>
-          <pc:docMk/>
-          <pc:sldMk cId="3446925122" sldId="533"/>
-        </pc:sldMkLst>
-        <pc:spChg chg="mod">
-          <ac:chgData name="Long B Nguyen" userId="f59fb8f3-a021-417a-8bc1-65c8d471c621" providerId="ADAL" clId="{EAA1E8DF-C35C-6A46-BAE7-931DFAE42A5E}" dt="2021-03-31T02:48:38.497" v="2380" actId="20577"/>
-          <ac:spMkLst>
-            <pc:docMk/>
-            <pc:sldMk cId="3446925122" sldId="533"/>
-            <ac:spMk id="16386" creationId="{E6DB08E6-2B6C-614E-98C5-6D5039F16767}"/>
-          </ac:spMkLst>
-        </pc:spChg>
-        <pc:spChg chg="mod">
-          <ac:chgData name="Long B Nguyen" userId="f59fb8f3-a021-417a-8bc1-65c8d471c621" providerId="ADAL" clId="{EAA1E8DF-C35C-6A46-BAE7-931DFAE42A5E}" dt="2021-03-31T02:47:58.992" v="2372" actId="1076"/>
-          <ac:spMkLst>
-            <pc:docMk/>
-            <pc:sldMk cId="3446925122" sldId="533"/>
-            <ac:spMk id="28673" creationId="{DAC429E0-CE8D-044C-8A99-B90568C28427}"/>
-          </ac:spMkLst>
-        </pc:spChg>
-      </pc:sldChg>
-      <pc:sldChg chg="modSp add modAnim">
-        <pc:chgData name="Long B Nguyen" userId="f59fb8f3-a021-417a-8bc1-65c8d471c621" providerId="ADAL" clId="{EAA1E8DF-C35C-6A46-BAE7-931DFAE42A5E}" dt="2021-04-05T12:21:00.829" v="2476" actId="20577"/>
-        <pc:sldMkLst>
-          <pc:docMk/>
-          <pc:sldMk cId="3875593504" sldId="534"/>
-        </pc:sldMkLst>
-        <pc:spChg chg="mod">
-          <ac:chgData name="Long B Nguyen" userId="f59fb8f3-a021-417a-8bc1-65c8d471c621" providerId="ADAL" clId="{EAA1E8DF-C35C-6A46-BAE7-931DFAE42A5E}" dt="2021-04-05T12:21:00.829" v="2476" actId="20577"/>
-          <ac:spMkLst>
-            <pc:docMk/>
-            <pc:sldMk cId="3875593504" sldId="534"/>
-            <ac:spMk id="16386" creationId="{91DE3741-D2BB-1448-AD1A-57B4E92EA22E}"/>
-          </ac:spMkLst>
-        </pc:spChg>
-      </pc:sldChg>
-      <pc:sldChg chg="add">
-        <pc:chgData name="Long B Nguyen" userId="f59fb8f3-a021-417a-8bc1-65c8d471c621" providerId="ADAL" clId="{EAA1E8DF-C35C-6A46-BAE7-931DFAE42A5E}" dt="2021-03-31T02:44:06.151" v="2353"/>
-        <pc:sldMkLst>
-          <pc:docMk/>
-          <pc:sldMk cId="2948095790" sldId="535"/>
-        </pc:sldMkLst>
-      </pc:sldChg>
-      <pc:sldChg chg="add">
-        <pc:chgData name="Long B Nguyen" userId="f59fb8f3-a021-417a-8bc1-65c8d471c621" providerId="ADAL" clId="{EAA1E8DF-C35C-6A46-BAE7-931DFAE42A5E}" dt="2021-03-31T02:44:06.151" v="2353"/>
-        <pc:sldMkLst>
-          <pc:docMk/>
-          <pc:sldMk cId="4036192861" sldId="536"/>
-        </pc:sldMkLst>
-      </pc:sldChg>
-      <pc:sldChg chg="add">
-        <pc:chgData name="Long B Nguyen" userId="f59fb8f3-a021-417a-8bc1-65c8d471c621" providerId="ADAL" clId="{EAA1E8DF-C35C-6A46-BAE7-931DFAE42A5E}" dt="2021-03-31T02:44:06.151" v="2353"/>
-        <pc:sldMkLst>
-          <pc:docMk/>
-          <pc:sldMk cId="3142622071" sldId="537"/>
-        </pc:sldMkLst>
-      </pc:sldChg>
-      <pc:sldChg chg="add del">
-        <pc:chgData name="Long B Nguyen" userId="f59fb8f3-a021-417a-8bc1-65c8d471c621" providerId="ADAL" clId="{EAA1E8DF-C35C-6A46-BAE7-931DFAE42A5E}" dt="2021-03-31T02:44:57.489" v="2356" actId="2696"/>
-        <pc:sldMkLst>
-          <pc:docMk/>
-          <pc:sldMk cId="3619996000" sldId="538"/>
-        </pc:sldMkLst>
-      </pc:sldChg>
-      <pc:sldChg chg="add del">
-        <pc:chgData name="Long B Nguyen" userId="f59fb8f3-a021-417a-8bc1-65c8d471c621" providerId="ADAL" clId="{EAA1E8DF-C35C-6A46-BAE7-931DFAE42A5E}" dt="2021-03-31T02:44:59.200" v="2357" actId="2696"/>
-        <pc:sldMkLst>
-          <pc:docMk/>
-          <pc:sldMk cId="3857431137" sldId="539"/>
-        </pc:sldMkLst>
-      </pc:sldChg>
-      <pc:sldChg chg="add del">
-        <pc:chgData name="Long B Nguyen" userId="f59fb8f3-a021-417a-8bc1-65c8d471c621" providerId="ADAL" clId="{EAA1E8DF-C35C-6A46-BAE7-931DFAE42A5E}" dt="2021-03-31T02:45:08.886" v="2358" actId="2696"/>
-        <pc:sldMkLst>
-          <pc:docMk/>
-          <pc:sldMk cId="3789707816" sldId="540"/>
-        </pc:sldMkLst>
-      </pc:sldChg>
-      <pc:sldChg chg="add">
-        <pc:chgData name="Long B Nguyen" userId="f59fb8f3-a021-417a-8bc1-65c8d471c621" providerId="ADAL" clId="{EAA1E8DF-C35C-6A46-BAE7-931DFAE42A5E}" dt="2021-03-31T02:44:06.151" v="2353"/>
-        <pc:sldMkLst>
-          <pc:docMk/>
-          <pc:sldMk cId="17648697" sldId="541"/>
-        </pc:sldMkLst>
-      </pc:sldChg>
-      <pc:sldChg chg="modSp add mod modAnim">
-        <pc:chgData name="Long B Nguyen" userId="f59fb8f3-a021-417a-8bc1-65c8d471c621" providerId="ADAL" clId="{EAA1E8DF-C35C-6A46-BAE7-931DFAE42A5E}" dt="2021-04-05T12:54:55.563" v="2811" actId="20577"/>
-        <pc:sldMkLst>
-          <pc:docMk/>
-          <pc:sldMk cId="3478205103" sldId="542"/>
-        </pc:sldMkLst>
-        <pc:spChg chg="mod">
-          <ac:chgData name="Long B Nguyen" userId="f59fb8f3-a021-417a-8bc1-65c8d471c621" providerId="ADAL" clId="{EAA1E8DF-C35C-6A46-BAE7-931DFAE42A5E}" dt="2021-04-05T12:54:55.563" v="2811" actId="20577"/>
-          <ac:spMkLst>
-            <pc:docMk/>
-            <pc:sldMk cId="3478205103" sldId="542"/>
-            <ac:spMk id="16386" creationId="{9A30423C-6B4C-234F-9526-1365818F2724}"/>
-          </ac:spMkLst>
-        </pc:spChg>
-        <pc:spChg chg="mod">
-          <ac:chgData name="Long B Nguyen" userId="f59fb8f3-a021-417a-8bc1-65c8d471c621" providerId="ADAL" clId="{EAA1E8DF-C35C-6A46-BAE7-931DFAE42A5E}" dt="2021-04-05T12:53:48.481" v="2782" actId="1076"/>
-          <ac:spMkLst>
-            <pc:docMk/>
-            <pc:sldMk cId="3478205103" sldId="542"/>
-            <ac:spMk id="49153" creationId="{E509825C-AE08-2A49-9ED7-6F6BA260A8C1}"/>
-          </ac:spMkLst>
-        </pc:spChg>
-      </pc:sldChg>
-      <pc:sldChg chg="modSp add del mod modAnim">
-        <pc:chgData name="Long B Nguyen" userId="f59fb8f3-a021-417a-8bc1-65c8d471c621" providerId="ADAL" clId="{EAA1E8DF-C35C-6A46-BAE7-931DFAE42A5E}" dt="2021-04-01T12:13:18.014" v="2427" actId="2696"/>
-        <pc:sldMkLst>
-          <pc:docMk/>
-          <pc:sldMk cId="3821874163" sldId="542"/>
-        </pc:sldMkLst>
-        <pc:spChg chg="mod">
-          <ac:chgData name="Long B Nguyen" userId="f59fb8f3-a021-417a-8bc1-65c8d471c621" providerId="ADAL" clId="{EAA1E8DF-C35C-6A46-BAE7-931DFAE42A5E}" dt="2021-03-31T02:56:50.121" v="2391" actId="21"/>
-          <ac:spMkLst>
-            <pc:docMk/>
-            <pc:sldMk cId="3821874163" sldId="542"/>
-            <ac:spMk id="16386" creationId="{9A30423C-6B4C-234F-9526-1365818F2724}"/>
-          </ac:spMkLst>
-        </pc:spChg>
-      </pc:sldChg>
-      <pc:sldChg chg="add del">
-        <pc:chgData name="Long B Nguyen" userId="f59fb8f3-a021-417a-8bc1-65c8d471c621" providerId="ADAL" clId="{EAA1E8DF-C35C-6A46-BAE7-931DFAE42A5E}" dt="2021-03-31T02:44:30.355" v="2355" actId="2696"/>
-        <pc:sldMkLst>
-          <pc:docMk/>
-          <pc:sldMk cId="463024783" sldId="546"/>
-        </pc:sldMkLst>
-      </pc:sldChg>
-      <pc:sldChg chg="modSp add del mod modAnim">
-        <pc:chgData name="Long B Nguyen" userId="f59fb8f3-a021-417a-8bc1-65c8d471c621" providerId="ADAL" clId="{EAA1E8DF-C35C-6A46-BAE7-931DFAE42A5E}" dt="2021-03-31T02:55:48.083" v="2388" actId="2696"/>
-        <pc:sldMkLst>
-          <pc:docMk/>
-          <pc:sldMk cId="4167644653" sldId="548"/>
-        </pc:sldMkLst>
-        <pc:spChg chg="mod">
-          <ac:chgData name="Long B Nguyen" userId="f59fb8f3-a021-417a-8bc1-65c8d471c621" providerId="ADAL" clId="{EAA1E8DF-C35C-6A46-BAE7-931DFAE42A5E}" dt="2021-03-30T16:47:11.913" v="2223"/>
-          <ac:spMkLst>
-            <pc:docMk/>
-            <pc:sldMk cId="4167644653" sldId="548"/>
-            <ac:spMk id="55298" creationId="{020E9827-16F0-CA46-ACAA-8AC63681536C}"/>
-          </ac:spMkLst>
-        </pc:spChg>
-        <pc:spChg chg="mod">
-          <ac:chgData name="Long B Nguyen" userId="f59fb8f3-a021-417a-8bc1-65c8d471c621" providerId="ADAL" clId="{EAA1E8DF-C35C-6A46-BAE7-931DFAE42A5E}" dt="2021-03-30T16:46:50.220" v="2213" actId="1076"/>
-          <ac:spMkLst>
-            <pc:docMk/>
-            <pc:sldMk cId="4167644653" sldId="548"/>
-            <ac:spMk id="63489" creationId="{3BDE358D-E53A-9545-A59D-9E78D4EA9347}"/>
-          </ac:spMkLst>
-        </pc:spChg>
-      </pc:sldChg>
-      <pc:sldChg chg="modSp add">
-        <pc:chgData name="Long B Nguyen" userId="f59fb8f3-a021-417a-8bc1-65c8d471c621" providerId="ADAL" clId="{EAA1E8DF-C35C-6A46-BAE7-931DFAE42A5E}" dt="2021-04-05T12:23:15.073" v="2477" actId="113"/>
-        <pc:sldMkLst>
-          <pc:docMk/>
-          <pc:sldMk cId="154962666" sldId="556"/>
-        </pc:sldMkLst>
-        <pc:spChg chg="mod">
-          <ac:chgData name="Long B Nguyen" userId="f59fb8f3-a021-417a-8bc1-65c8d471c621" providerId="ADAL" clId="{EAA1E8DF-C35C-6A46-BAE7-931DFAE42A5E}" dt="2021-04-05T12:23:15.073" v="2477" actId="113"/>
-          <ac:spMkLst>
-            <pc:docMk/>
-            <pc:sldMk cId="154962666" sldId="556"/>
-            <ac:spMk id="47106" creationId="{64F0002E-82C3-5B47-91CB-42BC1288860E}"/>
-          </ac:spMkLst>
-        </pc:spChg>
-      </pc:sldChg>
-      <pc:sldChg chg="add">
-        <pc:chgData name="Long B Nguyen" userId="f59fb8f3-a021-417a-8bc1-65c8d471c621" providerId="ADAL" clId="{EAA1E8DF-C35C-6A46-BAE7-931DFAE42A5E}" dt="2021-03-31T02:44:06.151" v="2353"/>
-        <pc:sldMkLst>
-          <pc:docMk/>
-          <pc:sldMk cId="517847088" sldId="560"/>
-        </pc:sldMkLst>
-      </pc:sldChg>
-      <pc:sldChg chg="add">
-        <pc:chgData name="Long B Nguyen" userId="f59fb8f3-a021-417a-8bc1-65c8d471c621" providerId="ADAL" clId="{EAA1E8DF-C35C-6A46-BAE7-931DFAE42A5E}" dt="2021-03-31T02:44:06.151" v="2353"/>
-        <pc:sldMkLst>
-          <pc:docMk/>
-          <pc:sldMk cId="14307870" sldId="561"/>
-        </pc:sldMkLst>
-      </pc:sldChg>
-      <pc:sldChg chg="modSp add mod">
-        <pc:chgData name="Long B Nguyen" userId="f59fb8f3-a021-417a-8bc1-65c8d471c621" providerId="ADAL" clId="{EAA1E8DF-C35C-6A46-BAE7-931DFAE42A5E}" dt="2021-03-31T02:55:04.555" v="2384" actId="1076"/>
-        <pc:sldMkLst>
-          <pc:docMk/>
-          <pc:sldMk cId="1419761718" sldId="564"/>
-        </pc:sldMkLst>
-        <pc:spChg chg="mod">
-          <ac:chgData name="Long B Nguyen" userId="f59fb8f3-a021-417a-8bc1-65c8d471c621" providerId="ADAL" clId="{EAA1E8DF-C35C-6A46-BAE7-931DFAE42A5E}" dt="2021-03-31T02:55:01.295" v="2383" actId="14100"/>
-          <ac:spMkLst>
-            <pc:docMk/>
-            <pc:sldMk cId="1419761718" sldId="564"/>
-            <ac:spMk id="16386" creationId="{03A0D23C-A18F-DF4A-B9B7-3996FF7B9734}"/>
-          </ac:spMkLst>
-        </pc:spChg>
-        <pc:spChg chg="mod">
-          <ac:chgData name="Long B Nguyen" userId="f59fb8f3-a021-417a-8bc1-65c8d471c621" providerId="ADAL" clId="{EAA1E8DF-C35C-6A46-BAE7-931DFAE42A5E}" dt="2021-03-31T02:54:57.894" v="2382" actId="1076"/>
-          <ac:spMkLst>
-            <pc:docMk/>
-            <pc:sldMk cId="1419761718" sldId="564"/>
-            <ac:spMk id="22529" creationId="{AB5898CD-F946-4C42-9C46-A05451CBE2CF}"/>
-          </ac:spMkLst>
-        </pc:spChg>
-        <pc:picChg chg="mod">
-          <ac:chgData name="Long B Nguyen" userId="f59fb8f3-a021-417a-8bc1-65c8d471c621" providerId="ADAL" clId="{EAA1E8DF-C35C-6A46-BAE7-931DFAE42A5E}" dt="2021-03-31T02:55:04.555" v="2384" actId="1076"/>
+        <pc:picChg chg="add del">
+          <ac:chgData name="Long B Nguyen" userId="f59fb8f3-a021-417a-8bc1-65c8d471c621" providerId="ADAL" clId="{93BE87BA-F8CA-5C1F-82FF-B4CAB5F485A1}" dt="2026-04-02T12:03:58.570" v="2" actId="478"/>
           <ac:picMkLst>
             <pc:docMk/>
-            <pc:sldMk cId="1419761718" sldId="564"/>
-            <ac:picMk id="22531" creationId="{763BAB40-9BBA-4845-AA34-A54BA83C1A75}"/>
+            <pc:sldMk cId="1563106740" sldId="640"/>
+            <ac:picMk id="7170" creationId="{68114603-C438-4ABF-5A38-05837D4DF15B}"/>
           </ac:picMkLst>
         </pc:picChg>
       </pc:sldChg>
-      <pc:sldChg chg="modSp mod modAnim">
-        <pc:chgData name="Long B Nguyen" userId="f59fb8f3-a021-417a-8bc1-65c8d471c621" providerId="ADAL" clId="{EAA1E8DF-C35C-6A46-BAE7-931DFAE42A5E}" dt="2021-04-06T12:29:43.353" v="3259" actId="20577"/>
+      <pc:sldChg chg="addSp new">
+        <pc:chgData name="Long B Nguyen" userId="f59fb8f3-a021-417a-8bc1-65c8d471c621" providerId="ADAL" clId="{93BE87BA-F8CA-5C1F-82FF-B4CAB5F485A1}" dt="2026-04-02T12:24:04.968" v="5"/>
         <pc:sldMkLst>
           <pc:docMk/>
-          <pc:sldMk cId="4205479306" sldId="594"/>
+          <pc:sldMk cId="3004482787" sldId="640"/>
         </pc:sldMkLst>
-        <pc:spChg chg="mod">
-          <ac:chgData name="Long B Nguyen" userId="f59fb8f3-a021-417a-8bc1-65c8d471c621" providerId="ADAL" clId="{EAA1E8DF-C35C-6A46-BAE7-931DFAE42A5E}" dt="2021-03-26T15:38:43.900" v="46" actId="20577"/>
-          <ac:spMkLst>
-            <pc:docMk/>
-            <pc:sldMk cId="4205479306" sldId="594"/>
-            <ac:spMk id="16385" creationId="{8FAE8CA6-5EB1-544B-9637-4627ADA36986}"/>
-          </ac:spMkLst>
-        </pc:spChg>
-        <pc:spChg chg="mod">
-          <ac:chgData name="Long B Nguyen" userId="f59fb8f3-a021-417a-8bc1-65c8d471c621" providerId="ADAL" clId="{EAA1E8DF-C35C-6A46-BAE7-931DFAE42A5E}" dt="2021-04-06T12:29:43.353" v="3259" actId="20577"/>
-          <ac:spMkLst>
-            <pc:docMk/>
-            <pc:sldMk cId="4205479306" sldId="594"/>
-            <ac:spMk id="16386" creationId="{AC84324A-3724-874B-82A1-71A36E0BBD8D}"/>
-          </ac:spMkLst>
-        </pc:spChg>
-      </pc:sldChg>
-      <pc:sldChg chg="del">
-        <pc:chgData name="Long B Nguyen" userId="f59fb8f3-a021-417a-8bc1-65c8d471c621" providerId="ADAL" clId="{EAA1E8DF-C35C-6A46-BAE7-931DFAE42A5E}" dt="2021-03-30T16:24:41.181" v="1929" actId="2696"/>
-        <pc:sldMkLst>
-          <pc:docMk/>
-          <pc:sldMk cId="1994033935" sldId="595"/>
-        </pc:sldMkLst>
-      </pc:sldChg>
-      <pc:sldChg chg="modSp del mod">
-        <pc:chgData name="Long B Nguyen" userId="f59fb8f3-a021-417a-8bc1-65c8d471c621" providerId="ADAL" clId="{EAA1E8DF-C35C-6A46-BAE7-931DFAE42A5E}" dt="2021-03-30T16:24:43.280" v="1930" actId="2696"/>
-        <pc:sldMkLst>
-          <pc:docMk/>
-          <pc:sldMk cId="3986464372" sldId="596"/>
-        </pc:sldMkLst>
-        <pc:spChg chg="mod">
-          <ac:chgData name="Long B Nguyen" userId="f59fb8f3-a021-417a-8bc1-65c8d471c621" providerId="ADAL" clId="{EAA1E8DF-C35C-6A46-BAE7-931DFAE42A5E}" dt="2021-03-30T16:24:09.240" v="1921" actId="21"/>
-          <ac:spMkLst>
-            <pc:docMk/>
-            <pc:sldMk cId="3986464372" sldId="596"/>
-            <ac:spMk id="16386" creationId="{FD72951F-2D30-6F40-A9B8-7104B7D451EB}"/>
-          </ac:spMkLst>
-        </pc:spChg>
-      </pc:sldChg>
-      <pc:sldChg chg="del">
-        <pc:chgData name="Long B Nguyen" userId="f59fb8f3-a021-417a-8bc1-65c8d471c621" providerId="ADAL" clId="{EAA1E8DF-C35C-6A46-BAE7-931DFAE42A5E}" dt="2021-03-29T13:25:22.500" v="1522" actId="2696"/>
-        <pc:sldMkLst>
-          <pc:docMk/>
-          <pc:sldMk cId="2566405133" sldId="597"/>
-        </pc:sldMkLst>
-      </pc:sldChg>
-      <pc:sldChg chg="del">
-        <pc:chgData name="Long B Nguyen" userId="f59fb8f3-a021-417a-8bc1-65c8d471c621" providerId="ADAL" clId="{EAA1E8DF-C35C-6A46-BAE7-931DFAE42A5E}" dt="2021-03-29T13:25:24.700" v="1523" actId="2696"/>
-        <pc:sldMkLst>
-          <pc:docMk/>
-          <pc:sldMk cId="1098067599" sldId="598"/>
-        </pc:sldMkLst>
-      </pc:sldChg>
-      <pc:sldChg chg="delSp modSp mod modAnim">
-        <pc:chgData name="Long B Nguyen" userId="f59fb8f3-a021-417a-8bc1-65c8d471c621" providerId="ADAL" clId="{EAA1E8DF-C35C-6A46-BAE7-931DFAE42A5E}" dt="2021-03-30T16:28:04.028" v="1996" actId="21"/>
-        <pc:sldMkLst>
-          <pc:docMk/>
-          <pc:sldMk cId="2135983872" sldId="599"/>
-        </pc:sldMkLst>
-        <pc:spChg chg="mod">
-          <ac:chgData name="Long B Nguyen" userId="f59fb8f3-a021-417a-8bc1-65c8d471c621" providerId="ADAL" clId="{EAA1E8DF-C35C-6A46-BAE7-931DFAE42A5E}" dt="2021-03-30T16:28:04.028" v="1996" actId="21"/>
-          <ac:spMkLst>
-            <pc:docMk/>
-            <pc:sldMk cId="2135983872" sldId="599"/>
-            <ac:spMk id="16386" creationId="{2CA53A1D-0CFC-9346-9F25-D3084700DDD8}"/>
-          </ac:spMkLst>
-        </pc:spChg>
-        <pc:spChg chg="mod">
-          <ac:chgData name="Long B Nguyen" userId="f59fb8f3-a021-417a-8bc1-65c8d471c621" providerId="ADAL" clId="{EAA1E8DF-C35C-6A46-BAE7-931DFAE42A5E}" dt="2021-03-30T16:26:21.011" v="1960" actId="1076"/>
-          <ac:spMkLst>
-            <pc:docMk/>
-            <pc:sldMk cId="2135983872" sldId="599"/>
-            <ac:spMk id="26625" creationId="{D38D7ADF-E686-184F-A04A-069F9601FE24}"/>
-          </ac:spMkLst>
-        </pc:spChg>
-        <pc:spChg chg="del mod">
-          <ac:chgData name="Long B Nguyen" userId="f59fb8f3-a021-417a-8bc1-65c8d471c621" providerId="ADAL" clId="{EAA1E8DF-C35C-6A46-BAE7-931DFAE42A5E}" dt="2021-03-30T16:27:56.725" v="1994" actId="478"/>
-          <ac:spMkLst>
-            <pc:docMk/>
-            <pc:sldMk cId="2135983872" sldId="599"/>
-            <ac:spMk id="26630" creationId="{672F2BC1-5427-3747-BA9D-8CE15AA370E3}"/>
-          </ac:spMkLst>
-        </pc:spChg>
-        <pc:spChg chg="del">
-          <ac:chgData name="Long B Nguyen" userId="f59fb8f3-a021-417a-8bc1-65c8d471c621" providerId="ADAL" clId="{EAA1E8DF-C35C-6A46-BAE7-931DFAE42A5E}" dt="2021-03-30T16:27:52.853" v="1992" actId="478"/>
-          <ac:spMkLst>
-            <pc:docMk/>
-            <pc:sldMk cId="2135983872" sldId="599"/>
-            <ac:spMk id="26631" creationId="{DD7FEF02-BF15-B943-8B30-0CAF8C1C95CA}"/>
-          </ac:spMkLst>
-        </pc:spChg>
-        <pc:picChg chg="del">
-          <ac:chgData name="Long B Nguyen" userId="f59fb8f3-a021-417a-8bc1-65c8d471c621" providerId="ADAL" clId="{EAA1E8DF-C35C-6A46-BAE7-931DFAE42A5E}" dt="2021-03-30T16:27:49.739" v="1990" actId="478"/>
+        <pc:picChg chg="add">
+          <ac:chgData name="Long B Nguyen" userId="f59fb8f3-a021-417a-8bc1-65c8d471c621" providerId="ADAL" clId="{93BE87BA-F8CA-5C1F-82FF-B4CAB5F485A1}" dt="2026-04-02T12:24:04.968" v="5"/>
           <ac:picMkLst>
             <pc:docMk/>
-            <pc:sldMk cId="2135983872" sldId="599"/>
-            <ac:picMk id="26627" creationId="{8E500075-EA97-AA49-B495-75D97CC93715}"/>
-          </ac:picMkLst>
-        </pc:picChg>
-        <pc:picChg chg="del">
-          <ac:chgData name="Long B Nguyen" userId="f59fb8f3-a021-417a-8bc1-65c8d471c621" providerId="ADAL" clId="{EAA1E8DF-C35C-6A46-BAE7-931DFAE42A5E}" dt="2021-03-30T16:27:48.603" v="1989" actId="478"/>
-          <ac:picMkLst>
-            <pc:docMk/>
-            <pc:sldMk cId="2135983872" sldId="599"/>
-            <ac:picMk id="26628" creationId="{B1446CB5-AD27-4C43-9004-B6922BC9B7A5}"/>
-          </ac:picMkLst>
-        </pc:picChg>
-        <pc:picChg chg="del">
-          <ac:chgData name="Long B Nguyen" userId="f59fb8f3-a021-417a-8bc1-65c8d471c621" providerId="ADAL" clId="{EAA1E8DF-C35C-6A46-BAE7-931DFAE42A5E}" dt="2021-03-30T16:27:50.731" v="1991" actId="478"/>
-          <ac:picMkLst>
-            <pc:docMk/>
-            <pc:sldMk cId="2135983872" sldId="599"/>
-            <ac:picMk id="26629" creationId="{9B31DD18-EA56-DD47-95FC-383AD8B4C321}"/>
+            <pc:sldMk cId="3004482787" sldId="640"/>
+            <ac:picMk id="4" creationId="{AE9E390D-4CE1-DDD3-BDC1-3E7FFDD3C700}"/>
           </ac:picMkLst>
         </pc:picChg>
       </pc:sldChg>
-      <pc:sldChg chg="modSp mod modAnim">
-        <pc:chgData name="Long B Nguyen" userId="f59fb8f3-a021-417a-8bc1-65c8d471c621" providerId="ADAL" clId="{EAA1E8DF-C35C-6A46-BAE7-931DFAE42A5E}" dt="2021-03-30T16:37:00.677" v="2156" actId="255"/>
+      <pc:sldChg chg="addSp delSp add mod">
+        <pc:chgData name="Long B Nguyen" userId="f59fb8f3-a021-417a-8bc1-65c8d471c621" providerId="ADAL" clId="{93BE87BA-F8CA-5C1F-82FF-B4CAB5F485A1}" dt="2026-04-02T12:25:50.697" v="18"/>
         <pc:sldMkLst>
           <pc:docMk/>
-          <pc:sldMk cId="3082545194" sldId="600"/>
+          <pc:sldMk cId="3414285246" sldId="641"/>
         </pc:sldMkLst>
-        <pc:spChg chg="mod">
-          <ac:chgData name="Long B Nguyen" userId="f59fb8f3-a021-417a-8bc1-65c8d471c621" providerId="ADAL" clId="{EAA1E8DF-C35C-6A46-BAE7-931DFAE42A5E}" dt="2021-03-30T16:37:00.677" v="2156" actId="255"/>
-          <ac:spMkLst>
-            <pc:docMk/>
-            <pc:sldMk cId="3082545194" sldId="600"/>
-            <ac:spMk id="16386" creationId="{1068C3F6-2B68-0147-A043-67BE3D946ECF}"/>
-          </ac:spMkLst>
-        </pc:spChg>
-        <pc:spChg chg="mod">
-          <ac:chgData name="Long B Nguyen" userId="f59fb8f3-a021-417a-8bc1-65c8d471c621" providerId="ADAL" clId="{EAA1E8DF-C35C-6A46-BAE7-931DFAE42A5E}" dt="2021-03-30T16:35:11.106" v="2148" actId="1076"/>
-          <ac:spMkLst>
-            <pc:docMk/>
-            <pc:sldMk cId="3082545194" sldId="600"/>
-            <ac:spMk id="28673" creationId="{907EFF68-9C71-F04B-B369-88AED7B7A835}"/>
-          </ac:spMkLst>
-        </pc:spChg>
-      </pc:sldChg>
-      <pc:sldChg chg="modSp modAnim">
-        <pc:chgData name="Long B Nguyen" userId="f59fb8f3-a021-417a-8bc1-65c8d471c621" providerId="ADAL" clId="{EAA1E8DF-C35C-6A46-BAE7-931DFAE42A5E}" dt="2021-03-31T02:32:31.492" v="2342" actId="113"/>
-        <pc:sldMkLst>
-          <pc:docMk/>
-          <pc:sldMk cId="3805116294" sldId="601"/>
-        </pc:sldMkLst>
-        <pc:spChg chg="mod">
-          <ac:chgData name="Long B Nguyen" userId="f59fb8f3-a021-417a-8bc1-65c8d471c621" providerId="ADAL" clId="{EAA1E8DF-C35C-6A46-BAE7-931DFAE42A5E}" dt="2021-03-31T02:32:31.492" v="2342" actId="113"/>
-          <ac:spMkLst>
-            <pc:docMk/>
-            <pc:sldMk cId="3805116294" sldId="601"/>
-            <ac:spMk id="16386" creationId="{37FDCEEA-1952-6C42-8C6C-2F8F8FE3796F}"/>
-          </ac:spMkLst>
-        </pc:spChg>
-      </pc:sldChg>
-      <pc:sldChg chg="del">
-        <pc:chgData name="Long B Nguyen" userId="f59fb8f3-a021-417a-8bc1-65c8d471c621" providerId="ADAL" clId="{EAA1E8DF-C35C-6A46-BAE7-931DFAE42A5E}" dt="2021-03-30T16:40:48.457" v="2157" actId="2696"/>
-        <pc:sldMkLst>
-          <pc:docMk/>
-          <pc:sldMk cId="2482297390" sldId="602"/>
-        </pc:sldMkLst>
-      </pc:sldChg>
-      <pc:sldChg chg="modSp del mod">
-        <pc:chgData name="Long B Nguyen" userId="f59fb8f3-a021-417a-8bc1-65c8d471c621" providerId="ADAL" clId="{EAA1E8DF-C35C-6A46-BAE7-931DFAE42A5E}" dt="2021-04-05T12:16:39.560" v="2471" actId="2696"/>
-        <pc:sldMkLst>
-          <pc:docMk/>
-          <pc:sldMk cId="3316801220" sldId="603"/>
-        </pc:sldMkLst>
-        <pc:spChg chg="mod">
-          <ac:chgData name="Long B Nguyen" userId="f59fb8f3-a021-417a-8bc1-65c8d471c621" providerId="ADAL" clId="{EAA1E8DF-C35C-6A46-BAE7-931DFAE42A5E}" dt="2021-03-30T16:44:03.511" v="2166" actId="1076"/>
-          <ac:spMkLst>
-            <pc:docMk/>
-            <pc:sldMk cId="3316801220" sldId="603"/>
-            <ac:spMk id="16386" creationId="{62F9A7B8-3A42-B54D-9D39-DC0EC3FB546A}"/>
-          </ac:spMkLst>
-        </pc:spChg>
-        <pc:spChg chg="mod">
-          <ac:chgData name="Long B Nguyen" userId="f59fb8f3-a021-417a-8bc1-65c8d471c621" providerId="ADAL" clId="{EAA1E8DF-C35C-6A46-BAE7-931DFAE42A5E}" dt="2021-03-30T16:44:01.112" v="2165" actId="1076"/>
-          <ac:spMkLst>
-            <pc:docMk/>
-            <pc:sldMk cId="3316801220" sldId="603"/>
-            <ac:spMk id="34817" creationId="{0DBE2AEE-399E-404E-BC68-4C2DA6AAC63B}"/>
-          </ac:spMkLst>
-        </pc:spChg>
-      </pc:sldChg>
-      <pc:sldChg chg="del">
-        <pc:chgData name="Long B Nguyen" userId="f59fb8f3-a021-417a-8bc1-65c8d471c621" providerId="ADAL" clId="{EAA1E8DF-C35C-6A46-BAE7-931DFAE42A5E}" dt="2021-03-30T16:41:32.473" v="2158" actId="2696"/>
-        <pc:sldMkLst>
-          <pc:docMk/>
-          <pc:sldMk cId="1665439849" sldId="605"/>
-        </pc:sldMkLst>
-      </pc:sldChg>
-      <pc:sldChg chg="del">
-        <pc:chgData name="Long B Nguyen" userId="f59fb8f3-a021-417a-8bc1-65c8d471c621" providerId="ADAL" clId="{EAA1E8DF-C35C-6A46-BAE7-931DFAE42A5E}" dt="2021-03-30T16:41:37.650" v="2159" actId="2696"/>
-        <pc:sldMkLst>
-          <pc:docMk/>
-          <pc:sldMk cId="1196991583" sldId="606"/>
-        </pc:sldMkLst>
-      </pc:sldChg>
-      <pc:sldChg chg="modSp del mod">
-        <pc:chgData name="Long B Nguyen" userId="f59fb8f3-a021-417a-8bc1-65c8d471c621" providerId="ADAL" clId="{EAA1E8DF-C35C-6A46-BAE7-931DFAE42A5E}" dt="2021-03-30T16:43:13.878" v="2162" actId="2696"/>
-        <pc:sldMkLst>
-          <pc:docMk/>
-          <pc:sldMk cId="2747083858" sldId="607"/>
-        </pc:sldMkLst>
-        <pc:spChg chg="mod">
-          <ac:chgData name="Long B Nguyen" userId="f59fb8f3-a021-417a-8bc1-65c8d471c621" providerId="ADAL" clId="{EAA1E8DF-C35C-6A46-BAE7-931DFAE42A5E}" dt="2021-03-30T16:34:54.836" v="2146" actId="14100"/>
-          <ac:spMkLst>
-            <pc:docMk/>
-            <pc:sldMk cId="2747083858" sldId="607"/>
-            <ac:spMk id="16386" creationId="{482D60F1-187C-864B-B43D-577485A40C08}"/>
-          </ac:spMkLst>
-        </pc:spChg>
-        <pc:spChg chg="mod">
-          <ac:chgData name="Long B Nguyen" userId="f59fb8f3-a021-417a-8bc1-65c8d471c621" providerId="ADAL" clId="{EAA1E8DF-C35C-6A46-BAE7-931DFAE42A5E}" dt="2021-03-30T16:34:52.586" v="2145" actId="1076"/>
-          <ac:spMkLst>
-            <pc:docMk/>
-            <pc:sldMk cId="2747083858" sldId="607"/>
-            <ac:spMk id="40961" creationId="{8FBF48B6-53FB-2C49-A153-963914EAEB88}"/>
-          </ac:spMkLst>
-        </pc:spChg>
-      </pc:sldChg>
-      <pc:sldChg chg="modSp del mod">
-        <pc:chgData name="Long B Nguyen" userId="f59fb8f3-a021-417a-8bc1-65c8d471c621" providerId="ADAL" clId="{EAA1E8DF-C35C-6A46-BAE7-931DFAE42A5E}" dt="2021-03-30T16:42:56.998" v="2160" actId="2696"/>
-        <pc:sldMkLst>
-          <pc:docMk/>
-          <pc:sldMk cId="2430561500" sldId="609"/>
-        </pc:sldMkLst>
-        <pc:spChg chg="mod">
-          <ac:chgData name="Long B Nguyen" userId="f59fb8f3-a021-417a-8bc1-65c8d471c621" providerId="ADAL" clId="{EAA1E8DF-C35C-6A46-BAE7-931DFAE42A5E}" dt="2021-03-30T16:34:39.861" v="2141" actId="14100"/>
-          <ac:spMkLst>
-            <pc:docMk/>
-            <pc:sldMk cId="2430561500" sldId="609"/>
-            <ac:spMk id="16386" creationId="{976F1699-B5AC-2F45-8AD2-94EE6D9AAFEA}"/>
-          </ac:spMkLst>
-        </pc:spChg>
-        <pc:spChg chg="mod">
-          <ac:chgData name="Long B Nguyen" userId="f59fb8f3-a021-417a-8bc1-65c8d471c621" providerId="ADAL" clId="{EAA1E8DF-C35C-6A46-BAE7-931DFAE42A5E}" dt="2021-03-30T16:34:44.033" v="2143" actId="1076"/>
-          <ac:spMkLst>
-            <pc:docMk/>
-            <pc:sldMk cId="2430561500" sldId="609"/>
-            <ac:spMk id="43009" creationId="{5AF8924E-8D8B-8140-81EA-8C0E4EE57514}"/>
-          </ac:spMkLst>
-        </pc:spChg>
-      </pc:sldChg>
-      <pc:sldChg chg="del">
-        <pc:chgData name="Long B Nguyen" userId="f59fb8f3-a021-417a-8bc1-65c8d471c621" providerId="ADAL" clId="{EAA1E8DF-C35C-6A46-BAE7-931DFAE42A5E}" dt="2021-03-30T16:42:57.782" v="2161" actId="2696"/>
-        <pc:sldMkLst>
-          <pc:docMk/>
-          <pc:sldMk cId="1660288031" sldId="610"/>
-        </pc:sldMkLst>
-      </pc:sldChg>
-      <pc:sldChg chg="del">
-        <pc:chgData name="Long B Nguyen" userId="f59fb8f3-a021-417a-8bc1-65c8d471c621" providerId="ADAL" clId="{EAA1E8DF-C35C-6A46-BAE7-931DFAE42A5E}" dt="2021-03-30T16:34:13.037" v="2140" actId="2696"/>
-        <pc:sldMkLst>
-          <pc:docMk/>
-          <pc:sldMk cId="1203333742" sldId="611"/>
-        </pc:sldMkLst>
-      </pc:sldChg>
-      <pc:sldChg chg="modSp mod">
-        <pc:chgData name="Long B Nguyen" userId="f59fb8f3-a021-417a-8bc1-65c8d471c621" providerId="ADAL" clId="{EAA1E8DF-C35C-6A46-BAE7-931DFAE42A5E}" dt="2021-04-05T12:47:23.052" v="2764" actId="20577"/>
-        <pc:sldMkLst>
-          <pc:docMk/>
-          <pc:sldMk cId="186989517" sldId="612"/>
-        </pc:sldMkLst>
-        <pc:spChg chg="mod">
-          <ac:chgData name="Long B Nguyen" userId="f59fb8f3-a021-417a-8bc1-65c8d471c621" providerId="ADAL" clId="{EAA1E8DF-C35C-6A46-BAE7-931DFAE42A5E}" dt="2021-04-05T12:47:23.052" v="2764" actId="20577"/>
-          <ac:spMkLst>
-            <pc:docMk/>
-            <pc:sldMk cId="186989517" sldId="612"/>
-            <ac:spMk id="50178" creationId="{327CB0B4-2578-5740-B0E0-F346965CCB10}"/>
-          </ac:spMkLst>
-        </pc:spChg>
-      </pc:sldChg>
-      <pc:sldChg chg="modSp add modAnim">
-        <pc:chgData name="Long B Nguyen" userId="f59fb8f3-a021-417a-8bc1-65c8d471c621" providerId="ADAL" clId="{EAA1E8DF-C35C-6A46-BAE7-931DFAE42A5E}" dt="2021-03-30T16:24:37.113" v="1928"/>
-        <pc:sldMkLst>
-          <pc:docMk/>
-          <pc:sldMk cId="3787391085" sldId="613"/>
-        </pc:sldMkLst>
-        <pc:spChg chg="mod">
-          <ac:chgData name="Long B Nguyen" userId="f59fb8f3-a021-417a-8bc1-65c8d471c621" providerId="ADAL" clId="{EAA1E8DF-C35C-6A46-BAE7-931DFAE42A5E}" dt="2021-03-30T16:24:37.113" v="1928"/>
-          <ac:spMkLst>
-            <pc:docMk/>
-            <pc:sldMk cId="3787391085" sldId="613"/>
-            <ac:spMk id="16386" creationId="{AC84324A-3724-874B-82A1-71A36E0BBD8D}"/>
-          </ac:spMkLst>
-        </pc:spChg>
-      </pc:sldChg>
-      <pc:sldChg chg="modSp new del mod">
-        <pc:chgData name="Long B Nguyen" userId="f59fb8f3-a021-417a-8bc1-65c8d471c621" providerId="ADAL" clId="{EAA1E8DF-C35C-6A46-BAE7-931DFAE42A5E}" dt="2021-03-26T15:45:20.841" v="188" actId="2696"/>
-        <pc:sldMkLst>
-          <pc:docMk/>
-          <pc:sldMk cId="1554224443" sldId="614"/>
-        </pc:sldMkLst>
-        <pc:spChg chg="mod">
-          <ac:chgData name="Long B Nguyen" userId="f59fb8f3-a021-417a-8bc1-65c8d471c621" providerId="ADAL" clId="{EAA1E8DF-C35C-6A46-BAE7-931DFAE42A5E}" dt="2021-03-26T15:45:19.635" v="187" actId="21"/>
-          <ac:spMkLst>
-            <pc:docMk/>
-            <pc:sldMk cId="1554224443" sldId="614"/>
-            <ac:spMk id="3" creationId="{5BF177CD-6869-2E44-BBC0-C9746DB11D0D}"/>
-          </ac:spMkLst>
-        </pc:spChg>
-      </pc:sldChg>
-      <pc:sldChg chg="modSp add mod modAnim">
-        <pc:chgData name="Long B Nguyen" userId="f59fb8f3-a021-417a-8bc1-65c8d471c621" providerId="ADAL" clId="{EAA1E8DF-C35C-6A46-BAE7-931DFAE42A5E}" dt="2021-04-05T12:11:43.238" v="2453"/>
-        <pc:sldMkLst>
-          <pc:docMk/>
-          <pc:sldMk cId="3965959204" sldId="615"/>
-        </pc:sldMkLst>
-        <pc:spChg chg="mod">
-          <ac:chgData name="Long B Nguyen" userId="f59fb8f3-a021-417a-8bc1-65c8d471c621" providerId="ADAL" clId="{EAA1E8DF-C35C-6A46-BAE7-931DFAE42A5E}" dt="2021-03-26T16:04:07.020" v="471" actId="20577"/>
-          <ac:spMkLst>
-            <pc:docMk/>
-            <pc:sldMk cId="3965959204" sldId="615"/>
-            <ac:spMk id="16385" creationId="{8FAE8CA6-5EB1-544B-9637-4627ADA36986}"/>
-          </ac:spMkLst>
-        </pc:spChg>
-        <pc:spChg chg="mod">
-          <ac:chgData name="Long B Nguyen" userId="f59fb8f3-a021-417a-8bc1-65c8d471c621" providerId="ADAL" clId="{EAA1E8DF-C35C-6A46-BAE7-931DFAE42A5E}" dt="2021-04-05T12:09:19.473" v="2436" actId="20577"/>
-          <ac:spMkLst>
-            <pc:docMk/>
-            <pc:sldMk cId="3965959204" sldId="615"/>
-            <ac:spMk id="16386" creationId="{AC84324A-3724-874B-82A1-71A36E0BBD8D}"/>
-          </ac:spMkLst>
-        </pc:spChg>
-      </pc:sldChg>
-      <pc:sldChg chg="modSp add del mod">
-        <pc:chgData name="Long B Nguyen" userId="f59fb8f3-a021-417a-8bc1-65c8d471c621" providerId="ADAL" clId="{EAA1E8DF-C35C-6A46-BAE7-931DFAE42A5E}" dt="2021-03-26T16:48:57.633" v="1183" actId="2696"/>
-        <pc:sldMkLst>
-          <pc:docMk/>
-          <pc:sldMk cId="2946099104" sldId="616"/>
-        </pc:sldMkLst>
-        <pc:spChg chg="mod">
-          <ac:chgData name="Long B Nguyen" userId="f59fb8f3-a021-417a-8bc1-65c8d471c621" providerId="ADAL" clId="{EAA1E8DF-C35C-6A46-BAE7-931DFAE42A5E}" dt="2021-03-26T16:03:46.821" v="437" actId="20577"/>
-          <ac:spMkLst>
-            <pc:docMk/>
-            <pc:sldMk cId="2946099104" sldId="616"/>
-            <ac:spMk id="16386" creationId="{AC84324A-3724-874B-82A1-71A36E0BBD8D}"/>
-          </ac:spMkLst>
-        </pc:spChg>
-      </pc:sldChg>
-      <pc:sldChg chg="addSp delSp modSp add mod modAnim">
-        <pc:chgData name="Long B Nguyen" userId="f59fb8f3-a021-417a-8bc1-65c8d471c621" providerId="ADAL" clId="{EAA1E8DF-C35C-6A46-BAE7-931DFAE42A5E}" dt="2021-04-05T12:09:45.217" v="2440"/>
-        <pc:sldMkLst>
-          <pc:docMk/>
-          <pc:sldMk cId="75961963" sldId="617"/>
-        </pc:sldMkLst>
-        <pc:spChg chg="add del mod">
-          <ac:chgData name="Long B Nguyen" userId="f59fb8f3-a021-417a-8bc1-65c8d471c621" providerId="ADAL" clId="{EAA1E8DF-C35C-6A46-BAE7-931DFAE42A5E}" dt="2021-03-26T16:09:11.898" v="833" actId="478"/>
-          <ac:spMkLst>
-            <pc:docMk/>
-            <pc:sldMk cId="75961963" sldId="617"/>
-            <ac:spMk id="2" creationId="{301671D4-216D-DB4B-8BEE-773223B07D9F}"/>
-          </ac:spMkLst>
-        </pc:spChg>
-        <pc:spChg chg="add mod">
-          <ac:chgData name="Long B Nguyen" userId="f59fb8f3-a021-417a-8bc1-65c8d471c621" providerId="ADAL" clId="{EAA1E8DF-C35C-6A46-BAE7-931DFAE42A5E}" dt="2021-03-29T12:58:44.272" v="1185" actId="1076"/>
-          <ac:spMkLst>
-            <pc:docMk/>
-            <pc:sldMk cId="75961963" sldId="617"/>
-            <ac:spMk id="5" creationId="{CB3C2E60-75CB-B041-B771-A1F63CE8B021}"/>
-          </ac:spMkLst>
-        </pc:spChg>
-        <pc:spChg chg="mod">
-          <ac:chgData name="Long B Nguyen" userId="f59fb8f3-a021-417a-8bc1-65c8d471c621" providerId="ADAL" clId="{EAA1E8DF-C35C-6A46-BAE7-931DFAE42A5E}" dt="2021-03-26T16:08:44.699" v="800" actId="20577"/>
-          <ac:spMkLst>
-            <pc:docMk/>
-            <pc:sldMk cId="75961963" sldId="617"/>
-            <ac:spMk id="16386" creationId="{AC84324A-3724-874B-82A1-71A36E0BBD8D}"/>
-          </ac:spMkLst>
-        </pc:spChg>
-      </pc:sldChg>
-      <pc:sldChg chg="modSp add mod modAnim">
-        <pc:chgData name="Long B Nguyen" userId="f59fb8f3-a021-417a-8bc1-65c8d471c621" providerId="ADAL" clId="{EAA1E8DF-C35C-6A46-BAE7-931DFAE42A5E}" dt="2021-04-05T12:45:13.739" v="2618" actId="113"/>
-        <pc:sldMkLst>
-          <pc:docMk/>
-          <pc:sldMk cId="876878470" sldId="618"/>
-        </pc:sldMkLst>
-        <pc:spChg chg="mod">
-          <ac:chgData name="Long B Nguyen" userId="f59fb8f3-a021-417a-8bc1-65c8d471c621" providerId="ADAL" clId="{EAA1E8DF-C35C-6A46-BAE7-931DFAE42A5E}" dt="2021-04-05T12:45:13.739" v="2618" actId="113"/>
-          <ac:spMkLst>
-            <pc:docMk/>
-            <pc:sldMk cId="876878470" sldId="618"/>
-            <ac:spMk id="5" creationId="{CB3C2E60-75CB-B041-B771-A1F63CE8B021}"/>
-          </ac:spMkLst>
-        </pc:spChg>
-        <pc:spChg chg="mod">
-          <ac:chgData name="Long B Nguyen" userId="f59fb8f3-a021-417a-8bc1-65c8d471c621" providerId="ADAL" clId="{EAA1E8DF-C35C-6A46-BAE7-931DFAE42A5E}" dt="2021-03-26T16:47:11.354" v="1160" actId="12"/>
-          <ac:spMkLst>
-            <pc:docMk/>
-            <pc:sldMk cId="876878470" sldId="618"/>
-            <ac:spMk id="16386" creationId="{AC84324A-3724-874B-82A1-71A36E0BBD8D}"/>
-          </ac:spMkLst>
-        </pc:spChg>
-      </pc:sldChg>
-      <pc:sldChg chg="modSp add mod modAnim">
-        <pc:chgData name="Long B Nguyen" userId="f59fb8f3-a021-417a-8bc1-65c8d471c621" providerId="ADAL" clId="{EAA1E8DF-C35C-6A46-BAE7-931DFAE42A5E}" dt="2021-03-31T02:26:24.762" v="2320" actId="14100"/>
-        <pc:sldMkLst>
-          <pc:docMk/>
-          <pc:sldMk cId="316487430" sldId="619"/>
-        </pc:sldMkLst>
-        <pc:spChg chg="mod">
-          <ac:chgData name="Long B Nguyen" userId="f59fb8f3-a021-417a-8bc1-65c8d471c621" providerId="ADAL" clId="{EAA1E8DF-C35C-6A46-BAE7-931DFAE42A5E}" dt="2021-03-31T02:26:24.762" v="2320" actId="14100"/>
-          <ac:spMkLst>
-            <pc:docMk/>
-            <pc:sldMk cId="316487430" sldId="619"/>
-            <ac:spMk id="16386" creationId="{8A97D40A-E6BF-E14C-B07D-5BAE101CB071}"/>
-          </ac:spMkLst>
-        </pc:spChg>
-        <pc:spChg chg="mod">
-          <ac:chgData name="Long B Nguyen" userId="f59fb8f3-a021-417a-8bc1-65c8d471c621" providerId="ADAL" clId="{EAA1E8DF-C35C-6A46-BAE7-931DFAE42A5E}" dt="2021-03-31T02:26:22.347" v="2319" actId="14100"/>
-          <ac:spMkLst>
-            <pc:docMk/>
-            <pc:sldMk cId="316487430" sldId="619"/>
-            <ac:spMk id="47105" creationId="{0ACC1611-F859-5B48-9867-1C1AB1970564}"/>
-          </ac:spMkLst>
-        </pc:spChg>
-      </pc:sldChg>
-      <pc:sldChg chg="addSp modSp add mod modAnim">
-        <pc:chgData name="Long B Nguyen" userId="f59fb8f3-a021-417a-8bc1-65c8d471c621" providerId="ADAL" clId="{EAA1E8DF-C35C-6A46-BAE7-931DFAE42A5E}" dt="2021-04-06T12:22:55.418" v="3254"/>
-        <pc:sldMkLst>
-          <pc:docMk/>
-          <pc:sldMk cId="655231489" sldId="620"/>
-        </pc:sldMkLst>
-        <pc:spChg chg="mod">
-          <ac:chgData name="Long B Nguyen" userId="f59fb8f3-a021-417a-8bc1-65c8d471c621" providerId="ADAL" clId="{EAA1E8DF-C35C-6A46-BAE7-931DFAE42A5E}" dt="2021-04-06T12:22:16.259" v="3247" actId="20577"/>
-          <ac:spMkLst>
-            <pc:docMk/>
-            <pc:sldMk cId="655231489" sldId="620"/>
-            <ac:spMk id="16386" creationId="{8A97D40A-E6BF-E14C-B07D-5BAE101CB071}"/>
-          </ac:spMkLst>
-        </pc:spChg>
-        <pc:spChg chg="mod">
-          <ac:chgData name="Long B Nguyen" userId="f59fb8f3-a021-417a-8bc1-65c8d471c621" providerId="ADAL" clId="{EAA1E8DF-C35C-6A46-BAE7-931DFAE42A5E}" dt="2021-04-06T12:20:41.053" v="3139" actId="1076"/>
-          <ac:spMkLst>
-            <pc:docMk/>
-            <pc:sldMk cId="655231489" sldId="620"/>
-            <ac:spMk id="47105" creationId="{0ACC1611-F859-5B48-9867-1C1AB1970564}"/>
-          </ac:spMkLst>
-        </pc:spChg>
-        <pc:picChg chg="add mod">
-          <ac:chgData name="Long B Nguyen" userId="f59fb8f3-a021-417a-8bc1-65c8d471c621" providerId="ADAL" clId="{EAA1E8DF-C35C-6A46-BAE7-931DFAE42A5E}" dt="2021-04-06T12:21:57.915" v="3220" actId="1076"/>
+        <pc:picChg chg="del">
+          <ac:chgData name="Long B Nguyen" userId="f59fb8f3-a021-417a-8bc1-65c8d471c621" providerId="ADAL" clId="{93BE87BA-F8CA-5C1F-82FF-B4CAB5F485A1}" dt="2026-04-02T12:25:49.937" v="17" actId="478"/>
           <ac:picMkLst>
             <pc:docMk/>
-            <pc:sldMk cId="655231489" sldId="620"/>
-            <ac:picMk id="2" creationId="{7BE00A55-B3BA-C04F-A546-A852FD66FF22}"/>
+            <pc:sldMk cId="3414285246" sldId="641"/>
+            <ac:picMk id="4" creationId="{D39A9A8D-422B-D4CF-9EB0-3010D96DB1EF}"/>
+          </ac:picMkLst>
+        </pc:picChg>
+        <pc:picChg chg="add">
+          <ac:chgData name="Long B Nguyen" userId="f59fb8f3-a021-417a-8bc1-65c8d471c621" providerId="ADAL" clId="{93BE87BA-F8CA-5C1F-82FF-B4CAB5F485A1}" dt="2026-04-02T12:25:50.697" v="18"/>
+          <ac:picMkLst>
+            <pc:docMk/>
+            <pc:sldMk cId="3414285246" sldId="641"/>
+            <ac:picMk id="5" creationId="{B8D50A5A-7054-5B58-FA01-2B673391F3DE}"/>
           </ac:picMkLst>
         </pc:picChg>
       </pc:sldChg>
-      <pc:sldChg chg="modSp add mod modAnim">
-        <pc:chgData name="Long B Nguyen" userId="f59fb8f3-a021-417a-8bc1-65c8d471c621" providerId="ADAL" clId="{EAA1E8DF-C35C-6A46-BAE7-931DFAE42A5E}" dt="2021-03-30T16:14:07.647" v="1766" actId="20577"/>
+      <pc:sldChg chg="addSp delSp new mod">
+        <pc:chgData name="Long B Nguyen" userId="f59fb8f3-a021-417a-8bc1-65c8d471c621" providerId="ADAL" clId="{93BE87BA-F8CA-5C1F-82FF-B4CAB5F485A1}" dt="2026-04-02T12:25:37.077" v="16"/>
         <pc:sldMkLst>
           <pc:docMk/>
-          <pc:sldMk cId="3767073501" sldId="621"/>
+          <pc:sldMk cId="2944438595" sldId="642"/>
         </pc:sldMkLst>
-        <pc:spChg chg="mod">
-          <ac:chgData name="Long B Nguyen" userId="f59fb8f3-a021-417a-8bc1-65c8d471c621" providerId="ADAL" clId="{EAA1E8DF-C35C-6A46-BAE7-931DFAE42A5E}" dt="2021-03-30T16:14:07.647" v="1766" actId="20577"/>
-          <ac:spMkLst>
-            <pc:docMk/>
-            <pc:sldMk cId="3767073501" sldId="621"/>
-            <ac:spMk id="16386" creationId="{8AED6484-1413-8C45-B6F1-BD8A0459A082}"/>
-          </ac:spMkLst>
-        </pc:spChg>
-        <pc:spChg chg="mod">
-          <ac:chgData name="Long B Nguyen" userId="f59fb8f3-a021-417a-8bc1-65c8d471c621" providerId="ADAL" clId="{EAA1E8DF-C35C-6A46-BAE7-931DFAE42A5E}" dt="2021-03-30T16:11:38.362" v="1741" actId="1076"/>
-          <ac:spMkLst>
-            <pc:docMk/>
-            <pc:sldMk cId="3767073501" sldId="621"/>
-            <ac:spMk id="22529" creationId="{393BE6F3-36DE-4449-89F7-53FFEB793FE6}"/>
-          </ac:spMkLst>
-        </pc:spChg>
-      </pc:sldChg>
-      <pc:sldChg chg="modSp add mod modAnim">
-        <pc:chgData name="Long B Nguyen" userId="f59fb8f3-a021-417a-8bc1-65c8d471c621" providerId="ADAL" clId="{EAA1E8DF-C35C-6A46-BAE7-931DFAE42A5E}" dt="2021-03-29T13:24:38.699" v="1512" actId="21"/>
-        <pc:sldMkLst>
-          <pc:docMk/>
-          <pc:sldMk cId="410101940" sldId="622"/>
-        </pc:sldMkLst>
-        <pc:spChg chg="mod">
-          <ac:chgData name="Long B Nguyen" userId="f59fb8f3-a021-417a-8bc1-65c8d471c621" providerId="ADAL" clId="{EAA1E8DF-C35C-6A46-BAE7-931DFAE42A5E}" dt="2021-03-29T13:24:38.699" v="1512" actId="21"/>
-          <ac:spMkLst>
-            <pc:docMk/>
-            <pc:sldMk cId="410101940" sldId="622"/>
-            <ac:spMk id="16386" creationId="{E697184B-7A3C-5841-8B49-9041842B0E9B}"/>
-          </ac:spMkLst>
-        </pc:spChg>
-        <pc:spChg chg="mod">
-          <ac:chgData name="Long B Nguyen" userId="f59fb8f3-a021-417a-8bc1-65c8d471c621" providerId="ADAL" clId="{EAA1E8DF-C35C-6A46-BAE7-931DFAE42A5E}" dt="2021-03-29T13:11:29.110" v="1474" actId="1076"/>
-          <ac:spMkLst>
-            <pc:docMk/>
-            <pc:sldMk cId="410101940" sldId="622"/>
-            <ac:spMk id="24577" creationId="{20CDAB21-9A2E-EC4D-B621-9FE5A26D2AED}"/>
-          </ac:spMkLst>
-        </pc:spChg>
-      </pc:sldChg>
-      <pc:sldChg chg="modSp add del mod">
-        <pc:chgData name="Long B Nguyen" userId="f59fb8f3-a021-417a-8bc1-65c8d471c621" providerId="ADAL" clId="{EAA1E8DF-C35C-6A46-BAE7-931DFAE42A5E}" dt="2021-03-29T13:11:17.391" v="1470" actId="2696"/>
-        <pc:sldMkLst>
-          <pc:docMk/>
-          <pc:sldMk cId="2722469093" sldId="622"/>
-        </pc:sldMkLst>
-        <pc:spChg chg="mod">
-          <ac:chgData name="Long B Nguyen" userId="f59fb8f3-a021-417a-8bc1-65c8d471c621" providerId="ADAL" clId="{EAA1E8DF-C35C-6A46-BAE7-931DFAE42A5E}" dt="2021-03-29T13:11:15.754" v="1469" actId="20577"/>
-          <ac:spMkLst>
-            <pc:docMk/>
-            <pc:sldMk cId="2722469093" sldId="622"/>
-            <ac:spMk id="24577" creationId="{20CDAB21-9A2E-EC4D-B621-9FE5A26D2AED}"/>
-          </ac:spMkLst>
-        </pc:spChg>
-      </pc:sldChg>
-      <pc:sldChg chg="addSp modSp add mod modAnim">
-        <pc:chgData name="Long B Nguyen" userId="f59fb8f3-a021-417a-8bc1-65c8d471c621" providerId="ADAL" clId="{EAA1E8DF-C35C-6A46-BAE7-931DFAE42A5E}" dt="2021-04-05T12:13:52.530" v="2470" actId="20577"/>
-        <pc:sldMkLst>
-          <pc:docMk/>
-          <pc:sldMk cId="2025038453" sldId="623"/>
-        </pc:sldMkLst>
-        <pc:spChg chg="mod">
-          <ac:chgData name="Long B Nguyen" userId="f59fb8f3-a021-417a-8bc1-65c8d471c621" providerId="ADAL" clId="{EAA1E8DF-C35C-6A46-BAE7-931DFAE42A5E}" dt="2021-04-05T12:13:52.530" v="2470" actId="20577"/>
-          <ac:spMkLst>
-            <pc:docMk/>
-            <pc:sldMk cId="2025038453" sldId="623"/>
-            <ac:spMk id="16386" creationId="{8AED6484-1413-8C45-B6F1-BD8A0459A082}"/>
-          </ac:spMkLst>
-        </pc:spChg>
-        <pc:spChg chg="mod">
-          <ac:chgData name="Long B Nguyen" userId="f59fb8f3-a021-417a-8bc1-65c8d471c621" providerId="ADAL" clId="{EAA1E8DF-C35C-6A46-BAE7-931DFAE42A5E}" dt="2021-03-31T02:27:40.172" v="2330" actId="14100"/>
-          <ac:spMkLst>
-            <pc:docMk/>
-            <pc:sldMk cId="2025038453" sldId="623"/>
-            <ac:spMk id="22529" creationId="{393BE6F3-36DE-4449-89F7-53FFEB793FE6}"/>
-          </ac:spMkLst>
-        </pc:spChg>
-        <pc:picChg chg="add mod">
-          <ac:chgData name="Long B Nguyen" userId="f59fb8f3-a021-417a-8bc1-65c8d471c621" providerId="ADAL" clId="{EAA1E8DF-C35C-6A46-BAE7-931DFAE42A5E}" dt="2021-03-31T02:27:52.252" v="2335" actId="14100"/>
+        <pc:picChg chg="add del">
+          <ac:chgData name="Long B Nguyen" userId="f59fb8f3-a021-417a-8bc1-65c8d471c621" providerId="ADAL" clId="{93BE87BA-F8CA-5C1F-82FF-B4CAB5F485A1}" dt="2026-04-02T12:25:36.477" v="15" actId="478"/>
           <ac:picMkLst>
             <pc:docMk/>
-            <pc:sldMk cId="2025038453" sldId="623"/>
-            <ac:picMk id="1026" creationId="{468679D5-539E-A844-9364-E578D7B64D53}"/>
+            <pc:sldMk cId="2944438595" sldId="642"/>
+            <ac:picMk id="4" creationId="{A1580C9C-56B6-F100-2BDF-63C4B367B3B9}"/>
+          </ac:picMkLst>
+        </pc:picChg>
+        <pc:picChg chg="add">
+          <ac:chgData name="Long B Nguyen" userId="f59fb8f3-a021-417a-8bc1-65c8d471c621" providerId="ADAL" clId="{93BE87BA-F8CA-5C1F-82FF-B4CAB5F485A1}" dt="2026-04-02T12:25:37.077" v="16"/>
+          <ac:picMkLst>
+            <pc:docMk/>
+            <pc:sldMk cId="2944438595" sldId="642"/>
+            <ac:picMk id="5" creationId="{7E9F7FAB-A030-72E0-F361-22F35C060712}"/>
           </ac:picMkLst>
         </pc:picChg>
       </pc:sldChg>
-      <pc:sldChg chg="delSp modSp add mod modAnim">
-        <pc:chgData name="Long B Nguyen" userId="f59fb8f3-a021-417a-8bc1-65c8d471c621" providerId="ADAL" clId="{EAA1E8DF-C35C-6A46-BAE7-931DFAE42A5E}" dt="2021-04-05T12:11:30.280" v="2452"/>
+      <pc:sldChg chg="addSp modSp new mod">
+        <pc:chgData name="Long B Nguyen" userId="f59fb8f3-a021-417a-8bc1-65c8d471c621" providerId="ADAL" clId="{93BE87BA-F8CA-5C1F-82FF-B4CAB5F485A1}" dt="2026-04-02T12:25:11.367" v="14" actId="1076"/>
         <pc:sldMkLst>
           <pc:docMk/>
-          <pc:sldMk cId="3330740156" sldId="624"/>
+          <pc:sldMk cId="1671303719" sldId="643"/>
         </pc:sldMkLst>
-        <pc:spChg chg="mod">
-          <ac:chgData name="Long B Nguyen" userId="f59fb8f3-a021-417a-8bc1-65c8d471c621" providerId="ADAL" clId="{EAA1E8DF-C35C-6A46-BAE7-931DFAE42A5E}" dt="2021-03-31T02:28:25.778" v="2340" actId="113"/>
-          <ac:spMkLst>
-            <pc:docMk/>
-            <pc:sldMk cId="3330740156" sldId="624"/>
-            <ac:spMk id="16386" creationId="{2CA53A1D-0CFC-9346-9F25-D3084700DDD8}"/>
-          </ac:spMkLst>
-        </pc:spChg>
-        <pc:spChg chg="mod">
-          <ac:chgData name="Long B Nguyen" userId="f59fb8f3-a021-417a-8bc1-65c8d471c621" providerId="ADAL" clId="{EAA1E8DF-C35C-6A46-BAE7-931DFAE42A5E}" dt="2021-03-30T16:31:11.092" v="2130" actId="1076"/>
-          <ac:spMkLst>
-            <pc:docMk/>
-            <pc:sldMk cId="3330740156" sldId="624"/>
-            <ac:spMk id="26630" creationId="{672F2BC1-5427-3747-BA9D-8CE15AA370E3}"/>
-          </ac:spMkLst>
-        </pc:spChg>
-        <pc:spChg chg="del mod">
-          <ac:chgData name="Long B Nguyen" userId="f59fb8f3-a021-417a-8bc1-65c8d471c621" providerId="ADAL" clId="{EAA1E8DF-C35C-6A46-BAE7-931DFAE42A5E}" dt="2021-03-30T16:27:42.098" v="1988" actId="478"/>
-          <ac:spMkLst>
-            <pc:docMk/>
-            <pc:sldMk cId="3330740156" sldId="624"/>
-            <ac:spMk id="26631" creationId="{DD7FEF02-BF15-B943-8B30-0CAF8C1C95CA}"/>
-          </ac:spMkLst>
-        </pc:spChg>
-        <pc:picChg chg="mod">
-          <ac:chgData name="Long B Nguyen" userId="f59fb8f3-a021-417a-8bc1-65c8d471c621" providerId="ADAL" clId="{EAA1E8DF-C35C-6A46-BAE7-931DFAE42A5E}" dt="2021-03-30T16:31:00.441" v="2125" actId="1076"/>
+        <pc:picChg chg="add mod">
+          <ac:chgData name="Long B Nguyen" userId="f59fb8f3-a021-417a-8bc1-65c8d471c621" providerId="ADAL" clId="{93BE87BA-F8CA-5C1F-82FF-B4CAB5F485A1}" dt="2026-04-02T12:25:11.367" v="14" actId="1076"/>
           <ac:picMkLst>
             <pc:docMk/>
-            <pc:sldMk cId="3330740156" sldId="624"/>
-            <ac:picMk id="26627" creationId="{8E500075-EA97-AA49-B495-75D97CC93715}"/>
+            <pc:sldMk cId="1671303719" sldId="643"/>
+            <ac:picMk id="4" creationId="{6A2E8AFE-A934-FAAA-7097-58EF363C84C2}"/>
           </ac:picMkLst>
         </pc:picChg>
-        <pc:picChg chg="del">
-          <ac:chgData name="Long B Nguyen" userId="f59fb8f3-a021-417a-8bc1-65c8d471c621" providerId="ADAL" clId="{EAA1E8DF-C35C-6A46-BAE7-931DFAE42A5E}" dt="2021-03-30T16:27:37.500" v="1986" actId="478"/>
-          <ac:picMkLst>
-            <pc:docMk/>
-            <pc:sldMk cId="3330740156" sldId="624"/>
-            <ac:picMk id="26628" creationId="{B1446CB5-AD27-4C43-9004-B6922BC9B7A5}"/>
-          </ac:picMkLst>
-        </pc:picChg>
-        <pc:picChg chg="mod">
-          <ac:chgData name="Long B Nguyen" userId="f59fb8f3-a021-417a-8bc1-65c8d471c621" providerId="ADAL" clId="{EAA1E8DF-C35C-6A46-BAE7-931DFAE42A5E}" dt="2021-03-30T16:31:15.177" v="2138" actId="1036"/>
-          <ac:picMkLst>
-            <pc:docMk/>
-            <pc:sldMk cId="3330740156" sldId="624"/>
-            <ac:picMk id="26629" creationId="{9B31DD18-EA56-DD47-95FC-383AD8B4C321}"/>
-          </ac:picMkLst>
-        </pc:picChg>
-      </pc:sldChg>
-      <pc:sldChg chg="delSp modSp add mod modAnim">
-        <pc:chgData name="Long B Nguyen" userId="f59fb8f3-a021-417a-8bc1-65c8d471c621" providerId="ADAL" clId="{EAA1E8DF-C35C-6A46-BAE7-931DFAE42A5E}" dt="2021-03-31T02:38:55.533" v="2352" actId="1076"/>
-        <pc:sldMkLst>
-          <pc:docMk/>
-          <pc:sldMk cId="2080393952" sldId="625"/>
-        </pc:sldMkLst>
-        <pc:spChg chg="mod">
-          <ac:chgData name="Long B Nguyen" userId="f59fb8f3-a021-417a-8bc1-65c8d471c621" providerId="ADAL" clId="{EAA1E8DF-C35C-6A46-BAE7-931DFAE42A5E}" dt="2021-03-31T02:38:25.394" v="2350" actId="20577"/>
-          <ac:spMkLst>
-            <pc:docMk/>
-            <pc:sldMk cId="2080393952" sldId="625"/>
-            <ac:spMk id="16386" creationId="{37FDCEEA-1952-6C42-8C6C-2F8F8FE3796F}"/>
-          </ac:spMkLst>
-        </pc:spChg>
-        <pc:spChg chg="mod">
-          <ac:chgData name="Long B Nguyen" userId="f59fb8f3-a021-417a-8bc1-65c8d471c621" providerId="ADAL" clId="{EAA1E8DF-C35C-6A46-BAE7-931DFAE42A5E}" dt="2021-03-31T02:38:55.533" v="2352" actId="1076"/>
-          <ac:spMkLst>
-            <pc:docMk/>
-            <pc:sldMk cId="2080393952" sldId="625"/>
-            <ac:spMk id="30721" creationId="{CABE8826-3A78-A04B-B3F1-70BBDCFEB024}"/>
-          </ac:spMkLst>
-        </pc:spChg>
-        <pc:picChg chg="del">
-          <ac:chgData name="Long B Nguyen" userId="f59fb8f3-a021-417a-8bc1-65c8d471c621" providerId="ADAL" clId="{EAA1E8DF-C35C-6A46-BAE7-931DFAE42A5E}" dt="2021-03-30T16:44:57.668" v="2168" actId="478"/>
-          <ac:picMkLst>
-            <pc:docMk/>
-            <pc:sldMk cId="2080393952" sldId="625"/>
-            <ac:picMk id="30723" creationId="{A19A7F4E-C334-2D45-8068-393FDB2C3A04}"/>
-          </ac:picMkLst>
-        </pc:picChg>
-      </pc:sldChg>
-    </pc:docChg>
-  </pc:docChgLst>
-  <pc:docChgLst>
-    <pc:chgData name="Long B Nguyen" userId="f59fb8f3-a021-417a-8bc1-65c8d471c621" providerId="ADAL" clId="{20E1AE71-974B-2D41-AC34-69C850DFDC19}"/>
-    <pc:docChg chg="addSld delSld modSld">
-      <pc:chgData name="Long B Nguyen" userId="f59fb8f3-a021-417a-8bc1-65c8d471c621" providerId="ADAL" clId="{20E1AE71-974B-2D41-AC34-69C850DFDC19}" dt="2020-03-16T17:50:12.029" v="624"/>
-      <pc:docMkLst>
-        <pc:docMk/>
-      </pc:docMkLst>
-      <pc:sldChg chg="modSp">
-        <pc:chgData name="Long B Nguyen" userId="f59fb8f3-a021-417a-8bc1-65c8d471c621" providerId="ADAL" clId="{20E1AE71-974B-2D41-AC34-69C850DFDC19}" dt="2020-03-08T12:15:22.499" v="64" actId="20577"/>
-        <pc:sldMkLst>
-          <pc:docMk/>
-          <pc:sldMk cId="4247104139" sldId="256"/>
-        </pc:sldMkLst>
-        <pc:spChg chg="mod">
-          <ac:chgData name="Long B Nguyen" userId="f59fb8f3-a021-417a-8bc1-65c8d471c621" providerId="ADAL" clId="{20E1AE71-974B-2D41-AC34-69C850DFDC19}" dt="2020-03-08T12:15:19.156" v="63" actId="20577"/>
-          <ac:spMkLst>
-            <pc:docMk/>
-            <pc:sldMk cId="4247104139" sldId="256"/>
-            <ac:spMk id="2" creationId="{6117A749-B1BA-E24B-8FB0-0604EF651FB3}"/>
-          </ac:spMkLst>
-        </pc:spChg>
-        <pc:spChg chg="mod">
-          <ac:chgData name="Long B Nguyen" userId="f59fb8f3-a021-417a-8bc1-65c8d471c621" providerId="ADAL" clId="{20E1AE71-974B-2D41-AC34-69C850DFDC19}" dt="2020-03-08T12:15:22.499" v="64" actId="20577"/>
-          <ac:spMkLst>
-            <pc:docMk/>
-            <pc:sldMk cId="4247104139" sldId="256"/>
-            <ac:spMk id="3" creationId="{1BDC47C8-6776-7B44-9CD4-95FC91452D62}"/>
-          </ac:spMkLst>
-        </pc:spChg>
-      </pc:sldChg>
-      <pc:sldChg chg="add del setBg">
-        <pc:chgData name="Long B Nguyen" userId="f59fb8f3-a021-417a-8bc1-65c8d471c621" providerId="ADAL" clId="{20E1AE71-974B-2D41-AC34-69C850DFDC19}" dt="2020-03-08T12:15:06.174" v="50" actId="2696"/>
-        <pc:sldMkLst>
-          <pc:docMk/>
-          <pc:sldMk cId="1569266242" sldId="257"/>
-        </pc:sldMkLst>
-      </pc:sldChg>
-      <pc:sldChg chg="modSp add">
-        <pc:chgData name="Long B Nguyen" userId="f59fb8f3-a021-417a-8bc1-65c8d471c621" providerId="ADAL" clId="{20E1AE71-974B-2D41-AC34-69C850DFDC19}" dt="2020-03-08T12:39:57.384" v="218" actId="20577"/>
-        <pc:sldMkLst>
-          <pc:docMk/>
-          <pc:sldMk cId="2902676313" sldId="485"/>
-        </pc:sldMkLst>
-        <pc:spChg chg="mod">
-          <ac:chgData name="Long B Nguyen" userId="f59fb8f3-a021-417a-8bc1-65c8d471c621" providerId="ADAL" clId="{20E1AE71-974B-2D41-AC34-69C850DFDC19}" dt="2020-03-08T12:39:41.672" v="215" actId="1076"/>
-          <ac:spMkLst>
-            <pc:docMk/>
-            <pc:sldMk cId="2902676313" sldId="485"/>
-            <ac:spMk id="49153" creationId="{EB0E2C77-F129-0A43-B733-0C0ECA4DFBCB}"/>
-          </ac:spMkLst>
-        </pc:spChg>
-        <pc:spChg chg="mod">
-          <ac:chgData name="Long B Nguyen" userId="f59fb8f3-a021-417a-8bc1-65c8d471c621" providerId="ADAL" clId="{20E1AE71-974B-2D41-AC34-69C850DFDC19}" dt="2020-03-08T12:39:57.384" v="218" actId="20577"/>
-          <ac:spMkLst>
-            <pc:docMk/>
-            <pc:sldMk cId="2902676313" sldId="485"/>
-            <ac:spMk id="49154" creationId="{1463BEFF-3714-A141-A066-C1AF638C6417}"/>
-          </ac:spMkLst>
-        </pc:spChg>
-      </pc:sldChg>
-      <pc:sldChg chg="del">
-        <pc:chgData name="Long B Nguyen" userId="f59fb8f3-a021-417a-8bc1-65c8d471c621" providerId="ADAL" clId="{20E1AE71-974B-2D41-AC34-69C850DFDC19}" dt="2020-03-08T12:14:33.604" v="13" actId="2696"/>
-        <pc:sldMkLst>
-          <pc:docMk/>
-          <pc:sldMk cId="3813527744" sldId="527"/>
-        </pc:sldMkLst>
-      </pc:sldChg>
-      <pc:sldChg chg="del">
-        <pc:chgData name="Long B Nguyen" userId="f59fb8f3-a021-417a-8bc1-65c8d471c621" providerId="ADAL" clId="{20E1AE71-974B-2D41-AC34-69C850DFDC19}" dt="2020-03-08T12:14:33.688" v="18" actId="2696"/>
-        <pc:sldMkLst>
-          <pc:docMk/>
-          <pc:sldMk cId="1445950413" sldId="528"/>
-        </pc:sldMkLst>
-      </pc:sldChg>
-      <pc:sldChg chg="del">
-        <pc:chgData name="Long B Nguyen" userId="f59fb8f3-a021-417a-8bc1-65c8d471c621" providerId="ADAL" clId="{20E1AE71-974B-2D41-AC34-69C850DFDC19}" dt="2020-03-08T12:14:33.708" v="19" actId="2696"/>
-        <pc:sldMkLst>
-          <pc:docMk/>
-          <pc:sldMk cId="1720314276" sldId="566"/>
-        </pc:sldMkLst>
-      </pc:sldChg>
-      <pc:sldChg chg="del">
-        <pc:chgData name="Long B Nguyen" userId="f59fb8f3-a021-417a-8bc1-65c8d471c621" providerId="ADAL" clId="{20E1AE71-974B-2D41-AC34-69C850DFDC19}" dt="2020-03-08T12:14:33.726" v="20" actId="2696"/>
-        <pc:sldMkLst>
-          <pc:docMk/>
-          <pc:sldMk cId="198395083" sldId="567"/>
-        </pc:sldMkLst>
-      </pc:sldChg>
-      <pc:sldChg chg="del">
-        <pc:chgData name="Long B Nguyen" userId="f59fb8f3-a021-417a-8bc1-65c8d471c621" providerId="ADAL" clId="{20E1AE71-974B-2D41-AC34-69C850DFDC19}" dt="2020-03-08T12:14:33.743" v="21" actId="2696"/>
-        <pc:sldMkLst>
-          <pc:docMk/>
-          <pc:sldMk cId="1070622160" sldId="568"/>
-        </pc:sldMkLst>
-      </pc:sldChg>
-      <pc:sldChg chg="del">
-        <pc:chgData name="Long B Nguyen" userId="f59fb8f3-a021-417a-8bc1-65c8d471c621" providerId="ADAL" clId="{20E1AE71-974B-2D41-AC34-69C850DFDC19}" dt="2020-03-08T12:14:33.830" v="26" actId="2696"/>
-        <pc:sldMkLst>
-          <pc:docMk/>
-          <pc:sldMk cId="4001486838" sldId="570"/>
-        </pc:sldMkLst>
-      </pc:sldChg>
-      <pc:sldChg chg="del">
-        <pc:chgData name="Long B Nguyen" userId="f59fb8f3-a021-417a-8bc1-65c8d471c621" providerId="ADAL" clId="{20E1AE71-974B-2D41-AC34-69C850DFDC19}" dt="2020-03-08T12:14:33.760" v="22" actId="2696"/>
-        <pc:sldMkLst>
-          <pc:docMk/>
-          <pc:sldMk cId="2901569448" sldId="571"/>
-        </pc:sldMkLst>
-      </pc:sldChg>
-      <pc:sldChg chg="del">
-        <pc:chgData name="Long B Nguyen" userId="f59fb8f3-a021-417a-8bc1-65c8d471c621" providerId="ADAL" clId="{20E1AE71-974B-2D41-AC34-69C850DFDC19}" dt="2020-03-08T12:14:33.814" v="25" actId="2696"/>
-        <pc:sldMkLst>
-          <pc:docMk/>
-          <pc:sldMk cId="2135159274" sldId="573"/>
-        </pc:sldMkLst>
-      </pc:sldChg>
-      <pc:sldChg chg="del">
-        <pc:chgData name="Long B Nguyen" userId="f59fb8f3-a021-417a-8bc1-65c8d471c621" providerId="ADAL" clId="{20E1AE71-974B-2D41-AC34-69C850DFDC19}" dt="2020-03-08T12:14:33.887" v="29" actId="2696"/>
-        <pc:sldMkLst>
-          <pc:docMk/>
-          <pc:sldMk cId="3391101355" sldId="575"/>
-        </pc:sldMkLst>
-      </pc:sldChg>
-      <pc:sldChg chg="del">
-        <pc:chgData name="Long B Nguyen" userId="f59fb8f3-a021-417a-8bc1-65c8d471c621" providerId="ADAL" clId="{20E1AE71-974B-2D41-AC34-69C850DFDC19}" dt="2020-03-08T12:14:33.850" v="27" actId="2696"/>
-        <pc:sldMkLst>
-          <pc:docMk/>
-          <pc:sldMk cId="3275116272" sldId="576"/>
-        </pc:sldMkLst>
-      </pc:sldChg>
-      <pc:sldChg chg="del">
-        <pc:chgData name="Long B Nguyen" userId="f59fb8f3-a021-417a-8bc1-65c8d471c621" providerId="ADAL" clId="{20E1AE71-974B-2D41-AC34-69C850DFDC19}" dt="2020-03-08T12:14:33.775" v="23" actId="2696"/>
-        <pc:sldMkLst>
-          <pc:docMk/>
-          <pc:sldMk cId="1727266702" sldId="578"/>
-        </pc:sldMkLst>
-      </pc:sldChg>
-      <pc:sldChg chg="del">
-        <pc:chgData name="Long B Nguyen" userId="f59fb8f3-a021-417a-8bc1-65c8d471c621" providerId="ADAL" clId="{20E1AE71-974B-2D41-AC34-69C850DFDC19}" dt="2020-03-08T12:14:33.789" v="24" actId="2696"/>
-        <pc:sldMkLst>
-          <pc:docMk/>
-          <pc:sldMk cId="665490485" sldId="579"/>
-        </pc:sldMkLst>
-      </pc:sldChg>
-      <pc:sldChg chg="del">
-        <pc:chgData name="Long B Nguyen" userId="f59fb8f3-a021-417a-8bc1-65c8d471c621" providerId="ADAL" clId="{20E1AE71-974B-2D41-AC34-69C850DFDC19}" dt="2020-03-08T12:14:33.669" v="17" actId="2696"/>
-        <pc:sldMkLst>
-          <pc:docMk/>
-          <pc:sldMk cId="2801305812" sldId="580"/>
-        </pc:sldMkLst>
-      </pc:sldChg>
-      <pc:sldChg chg="del">
-        <pc:chgData name="Long B Nguyen" userId="f59fb8f3-a021-417a-8bc1-65c8d471c621" providerId="ADAL" clId="{20E1AE71-974B-2D41-AC34-69C850DFDC19}" dt="2020-03-08T12:14:33.654" v="16" actId="2696"/>
-        <pc:sldMkLst>
-          <pc:docMk/>
-          <pc:sldMk cId="156416513" sldId="581"/>
-        </pc:sldMkLst>
-      </pc:sldChg>
-      <pc:sldChg chg="del">
-        <pc:chgData name="Long B Nguyen" userId="f59fb8f3-a021-417a-8bc1-65c8d471c621" providerId="ADAL" clId="{20E1AE71-974B-2D41-AC34-69C850DFDC19}" dt="2020-03-08T12:14:33.870" v="28" actId="2696"/>
-        <pc:sldMkLst>
-          <pc:docMk/>
-          <pc:sldMk cId="1237537268" sldId="583"/>
-        </pc:sldMkLst>
-      </pc:sldChg>
-      <pc:sldChg chg="del">
-        <pc:chgData name="Long B Nguyen" userId="f59fb8f3-a021-417a-8bc1-65c8d471c621" providerId="ADAL" clId="{20E1AE71-974B-2D41-AC34-69C850DFDC19}" dt="2020-03-08T12:14:33.919" v="31" actId="2696"/>
-        <pc:sldMkLst>
-          <pc:docMk/>
-          <pc:sldMk cId="4256317276" sldId="584"/>
-        </pc:sldMkLst>
-      </pc:sldChg>
-      <pc:sldChg chg="del">
-        <pc:chgData name="Long B Nguyen" userId="f59fb8f3-a021-417a-8bc1-65c8d471c621" providerId="ADAL" clId="{20E1AE71-974B-2D41-AC34-69C850DFDC19}" dt="2020-03-08T12:14:33.969" v="34" actId="2696"/>
-        <pc:sldMkLst>
-          <pc:docMk/>
-          <pc:sldMk cId="3977893820" sldId="585"/>
-        </pc:sldMkLst>
-      </pc:sldChg>
-      <pc:sldChg chg="del">
-        <pc:chgData name="Long B Nguyen" userId="f59fb8f3-a021-417a-8bc1-65c8d471c621" providerId="ADAL" clId="{20E1AE71-974B-2D41-AC34-69C850DFDC19}" dt="2020-03-08T12:14:34.016" v="37" actId="2696"/>
-        <pc:sldMkLst>
-          <pc:docMk/>
-          <pc:sldMk cId="1319289224" sldId="586"/>
-        </pc:sldMkLst>
-      </pc:sldChg>
-      <pc:sldChg chg="del">
-        <pc:chgData name="Long B Nguyen" userId="f59fb8f3-a021-417a-8bc1-65c8d471c621" providerId="ADAL" clId="{20E1AE71-974B-2D41-AC34-69C850DFDC19}" dt="2020-03-08T12:14:34.026" v="38" actId="2696"/>
-        <pc:sldMkLst>
-          <pc:docMk/>
-          <pc:sldMk cId="2894020677" sldId="587"/>
-        </pc:sldMkLst>
-      </pc:sldChg>
-      <pc:sldChg chg="del">
-        <pc:chgData name="Long B Nguyen" userId="f59fb8f3-a021-417a-8bc1-65c8d471c621" providerId="ADAL" clId="{20E1AE71-974B-2D41-AC34-69C850DFDC19}" dt="2020-03-08T12:14:33.904" v="30" actId="2696"/>
-        <pc:sldMkLst>
-          <pc:docMk/>
-          <pc:sldMk cId="3609960584" sldId="588"/>
-        </pc:sldMkLst>
-      </pc:sldChg>
-      <pc:sldChg chg="del">
-        <pc:chgData name="Long B Nguyen" userId="f59fb8f3-a021-417a-8bc1-65c8d471c621" providerId="ADAL" clId="{20E1AE71-974B-2D41-AC34-69C850DFDC19}" dt="2020-03-08T12:14:34.036" v="39" actId="2696"/>
-        <pc:sldMkLst>
-          <pc:docMk/>
-          <pc:sldMk cId="2527578196" sldId="589"/>
-        </pc:sldMkLst>
-      </pc:sldChg>
-      <pc:sldChg chg="del">
-        <pc:chgData name="Long B Nguyen" userId="f59fb8f3-a021-417a-8bc1-65c8d471c621" providerId="ADAL" clId="{20E1AE71-974B-2D41-AC34-69C850DFDC19}" dt="2020-03-08T12:14:34.059" v="41" actId="2696"/>
-        <pc:sldMkLst>
-          <pc:docMk/>
-          <pc:sldMk cId="3609937493" sldId="590"/>
-        </pc:sldMkLst>
-      </pc:sldChg>
-      <pc:sldChg chg="del">
-        <pc:chgData name="Long B Nguyen" userId="f59fb8f3-a021-417a-8bc1-65c8d471c621" providerId="ADAL" clId="{20E1AE71-974B-2D41-AC34-69C850DFDC19}" dt="2020-03-08T12:14:34.046" v="40" actId="2696"/>
-        <pc:sldMkLst>
-          <pc:docMk/>
-          <pc:sldMk cId="4266553646" sldId="591"/>
-        </pc:sldMkLst>
-      </pc:sldChg>
-      <pc:sldChg chg="modSp add modAnim">
-        <pc:chgData name="Long B Nguyen" userId="f59fb8f3-a021-417a-8bc1-65c8d471c621" providerId="ADAL" clId="{20E1AE71-974B-2D41-AC34-69C850DFDC19}" dt="2020-03-08T12:15:55.975" v="72" actId="20577"/>
-        <pc:sldMkLst>
-          <pc:docMk/>
-          <pc:sldMk cId="4205479306" sldId="594"/>
-        </pc:sldMkLst>
-        <pc:spChg chg="mod">
-          <ac:chgData name="Long B Nguyen" userId="f59fb8f3-a021-417a-8bc1-65c8d471c621" providerId="ADAL" clId="{20E1AE71-974B-2D41-AC34-69C850DFDC19}" dt="2020-03-08T12:15:38.234" v="67" actId="1076"/>
-          <ac:spMkLst>
-            <pc:docMk/>
-            <pc:sldMk cId="4205479306" sldId="594"/>
-            <ac:spMk id="16385" creationId="{8FAE8CA6-5EB1-544B-9637-4627ADA36986}"/>
-          </ac:spMkLst>
-        </pc:spChg>
-        <pc:spChg chg="mod">
-          <ac:chgData name="Long B Nguyen" userId="f59fb8f3-a021-417a-8bc1-65c8d471c621" providerId="ADAL" clId="{20E1AE71-974B-2D41-AC34-69C850DFDC19}" dt="2020-03-08T12:15:55.975" v="72" actId="20577"/>
-          <ac:spMkLst>
-            <pc:docMk/>
-            <pc:sldMk cId="4205479306" sldId="594"/>
-            <ac:spMk id="16386" creationId="{AC84324A-3724-874B-82A1-71A36E0BBD8D}"/>
-          </ac:spMkLst>
-        </pc:spChg>
-      </pc:sldChg>
-      <pc:sldChg chg="modSp add modAnim">
-        <pc:chgData name="Long B Nguyen" userId="f59fb8f3-a021-417a-8bc1-65c8d471c621" providerId="ADAL" clId="{20E1AE71-974B-2D41-AC34-69C850DFDC19}" dt="2020-03-08T12:16:42.405" v="78" actId="5793"/>
-        <pc:sldMkLst>
-          <pc:docMk/>
-          <pc:sldMk cId="1994033935" sldId="595"/>
-        </pc:sldMkLst>
-        <pc:spChg chg="mod">
-          <ac:chgData name="Long B Nguyen" userId="f59fb8f3-a021-417a-8bc1-65c8d471c621" providerId="ADAL" clId="{20E1AE71-974B-2D41-AC34-69C850DFDC19}" dt="2020-03-08T12:16:42.405" v="78" actId="5793"/>
-          <ac:spMkLst>
-            <pc:docMk/>
-            <pc:sldMk cId="1994033935" sldId="595"/>
-            <ac:spMk id="16386" creationId="{36A84E53-DF55-DE47-BCAA-A26F73181744}"/>
-          </ac:spMkLst>
-        </pc:spChg>
-        <pc:spChg chg="mod">
-          <ac:chgData name="Long B Nguyen" userId="f59fb8f3-a021-417a-8bc1-65c8d471c621" providerId="ADAL" clId="{20E1AE71-974B-2D41-AC34-69C850DFDC19}" dt="2020-03-08T12:16:35.733" v="75" actId="1076"/>
-          <ac:spMkLst>
-            <pc:docMk/>
-            <pc:sldMk cId="1994033935" sldId="595"/>
-            <ac:spMk id="18433" creationId="{9B931521-A580-614B-B405-91EC138B5B42}"/>
-          </ac:spMkLst>
-        </pc:spChg>
-      </pc:sldChg>
-      <pc:sldChg chg="modSp add modAnim">
-        <pc:chgData name="Long B Nguyen" userId="f59fb8f3-a021-417a-8bc1-65c8d471c621" providerId="ADAL" clId="{20E1AE71-974B-2D41-AC34-69C850DFDC19}" dt="2020-03-08T12:17:14.150" v="86" actId="20577"/>
-        <pc:sldMkLst>
-          <pc:docMk/>
-          <pc:sldMk cId="3986464372" sldId="596"/>
-        </pc:sldMkLst>
-        <pc:spChg chg="mod">
-          <ac:chgData name="Long B Nguyen" userId="f59fb8f3-a021-417a-8bc1-65c8d471c621" providerId="ADAL" clId="{20E1AE71-974B-2D41-AC34-69C850DFDC19}" dt="2020-03-08T12:17:14.150" v="86" actId="20577"/>
-          <ac:spMkLst>
-            <pc:docMk/>
-            <pc:sldMk cId="3986464372" sldId="596"/>
-            <ac:spMk id="16386" creationId="{FD72951F-2D30-6F40-A9B8-7104B7D451EB}"/>
-          </ac:spMkLst>
-        </pc:spChg>
-        <pc:spChg chg="mod">
-          <ac:chgData name="Long B Nguyen" userId="f59fb8f3-a021-417a-8bc1-65c8d471c621" providerId="ADAL" clId="{20E1AE71-974B-2D41-AC34-69C850DFDC19}" dt="2020-03-08T12:16:55.229" v="81" actId="1076"/>
-          <ac:spMkLst>
-            <pc:docMk/>
-            <pc:sldMk cId="3986464372" sldId="596"/>
-            <ac:spMk id="20481" creationId="{86757440-FF2F-FC47-B284-FE903228C9F4}"/>
-          </ac:spMkLst>
-        </pc:spChg>
-      </pc:sldChg>
-      <pc:sldChg chg="modSp add modAnim">
-        <pc:chgData name="Long B Nguyen" userId="f59fb8f3-a021-417a-8bc1-65c8d471c621" providerId="ADAL" clId="{20E1AE71-974B-2D41-AC34-69C850DFDC19}" dt="2020-03-08T14:02:24.971" v="621" actId="20577"/>
-        <pc:sldMkLst>
-          <pc:docMk/>
-          <pc:sldMk cId="2566405133" sldId="597"/>
-        </pc:sldMkLst>
-        <pc:spChg chg="mod">
-          <ac:chgData name="Long B Nguyen" userId="f59fb8f3-a021-417a-8bc1-65c8d471c621" providerId="ADAL" clId="{20E1AE71-974B-2D41-AC34-69C850DFDC19}" dt="2020-03-08T14:02:24.971" v="621" actId="20577"/>
-          <ac:spMkLst>
-            <pc:docMk/>
-            <pc:sldMk cId="2566405133" sldId="597"/>
-            <ac:spMk id="16386" creationId="{8AED6484-1413-8C45-B6F1-BD8A0459A082}"/>
-          </ac:spMkLst>
-        </pc:spChg>
-        <pc:spChg chg="mod">
-          <ac:chgData name="Long B Nguyen" userId="f59fb8f3-a021-417a-8bc1-65c8d471c621" providerId="ADAL" clId="{20E1AE71-974B-2D41-AC34-69C850DFDC19}" dt="2020-03-08T12:17:42.044" v="89" actId="1076"/>
-          <ac:spMkLst>
-            <pc:docMk/>
-            <pc:sldMk cId="2566405133" sldId="597"/>
-            <ac:spMk id="22529" creationId="{393BE6F3-36DE-4449-89F7-53FFEB793FE6}"/>
-          </ac:spMkLst>
-        </pc:spChg>
-      </pc:sldChg>
-      <pc:sldChg chg="modSp add modAnim">
-        <pc:chgData name="Long B Nguyen" userId="f59fb8f3-a021-417a-8bc1-65c8d471c621" providerId="ADAL" clId="{20E1AE71-974B-2D41-AC34-69C850DFDC19}" dt="2020-03-08T12:23:10.036" v="98" actId="20577"/>
-        <pc:sldMkLst>
-          <pc:docMk/>
-          <pc:sldMk cId="1098067599" sldId="598"/>
-        </pc:sldMkLst>
-        <pc:spChg chg="mod">
-          <ac:chgData name="Long B Nguyen" userId="f59fb8f3-a021-417a-8bc1-65c8d471c621" providerId="ADAL" clId="{20E1AE71-974B-2D41-AC34-69C850DFDC19}" dt="2020-03-08T12:23:10.036" v="98" actId="20577"/>
-          <ac:spMkLst>
-            <pc:docMk/>
-            <pc:sldMk cId="1098067599" sldId="598"/>
-            <ac:spMk id="16386" creationId="{E697184B-7A3C-5841-8B49-9041842B0E9B}"/>
-          </ac:spMkLst>
-        </pc:spChg>
-        <pc:spChg chg="mod">
-          <ac:chgData name="Long B Nguyen" userId="f59fb8f3-a021-417a-8bc1-65c8d471c621" providerId="ADAL" clId="{20E1AE71-974B-2D41-AC34-69C850DFDC19}" dt="2020-03-08T12:23:03.944" v="95" actId="1076"/>
-          <ac:spMkLst>
-            <pc:docMk/>
-            <pc:sldMk cId="1098067599" sldId="598"/>
-            <ac:spMk id="24577" creationId="{20CDAB21-9A2E-EC4D-B621-9FE5A26D2AED}"/>
-          </ac:spMkLst>
-        </pc:spChg>
-      </pc:sldChg>
-      <pc:sldChg chg="modSp add modAnim">
-        <pc:chgData name="Long B Nguyen" userId="f59fb8f3-a021-417a-8bc1-65c8d471c621" providerId="ADAL" clId="{20E1AE71-974B-2D41-AC34-69C850DFDC19}" dt="2020-03-08T12:28:38.490" v="119" actId="20577"/>
-        <pc:sldMkLst>
-          <pc:docMk/>
-          <pc:sldMk cId="2135983872" sldId="599"/>
-        </pc:sldMkLst>
-        <pc:spChg chg="mod">
-          <ac:chgData name="Long B Nguyen" userId="f59fb8f3-a021-417a-8bc1-65c8d471c621" providerId="ADAL" clId="{20E1AE71-974B-2D41-AC34-69C850DFDC19}" dt="2020-03-08T12:28:38.490" v="119" actId="20577"/>
-          <ac:spMkLst>
-            <pc:docMk/>
-            <pc:sldMk cId="2135983872" sldId="599"/>
-            <ac:spMk id="16386" creationId="{2CA53A1D-0CFC-9346-9F25-D3084700DDD8}"/>
-          </ac:spMkLst>
-        </pc:spChg>
-        <pc:spChg chg="mod">
-          <ac:chgData name="Long B Nguyen" userId="f59fb8f3-a021-417a-8bc1-65c8d471c621" providerId="ADAL" clId="{20E1AE71-974B-2D41-AC34-69C850DFDC19}" dt="2020-03-08T12:23:21.222" v="101" actId="1076"/>
-          <ac:spMkLst>
-            <pc:docMk/>
-            <pc:sldMk cId="2135983872" sldId="599"/>
-            <ac:spMk id="26625" creationId="{D38D7ADF-E686-184F-A04A-069F9601FE24}"/>
-          </ac:spMkLst>
-        </pc:spChg>
-        <pc:spChg chg="mod">
-          <ac:chgData name="Long B Nguyen" userId="f59fb8f3-a021-417a-8bc1-65c8d471c621" providerId="ADAL" clId="{20E1AE71-974B-2D41-AC34-69C850DFDC19}" dt="2020-03-08T12:23:42.313" v="112" actId="1076"/>
-          <ac:spMkLst>
-            <pc:docMk/>
-            <pc:sldMk cId="2135983872" sldId="599"/>
-            <ac:spMk id="26631" creationId="{DD7FEF02-BF15-B943-8B30-0CAF8C1C95CA}"/>
-          </ac:spMkLst>
-        </pc:spChg>
-        <pc:picChg chg="mod">
-          <ac:chgData name="Long B Nguyen" userId="f59fb8f3-a021-417a-8bc1-65c8d471c621" providerId="ADAL" clId="{20E1AE71-974B-2D41-AC34-69C850DFDC19}" dt="2020-03-08T12:23:57.417" v="116" actId="1076"/>
-          <ac:picMkLst>
-            <pc:docMk/>
-            <pc:sldMk cId="2135983872" sldId="599"/>
-            <ac:picMk id="26628" creationId="{B1446CB5-AD27-4C43-9004-B6922BC9B7A5}"/>
-          </ac:picMkLst>
-        </pc:picChg>
-      </pc:sldChg>
-      <pc:sldChg chg="modSp add modAnim">
-        <pc:chgData name="Long B Nguyen" userId="f59fb8f3-a021-417a-8bc1-65c8d471c621" providerId="ADAL" clId="{20E1AE71-974B-2D41-AC34-69C850DFDC19}" dt="2020-03-08T12:28:52.619" v="125" actId="20577"/>
-        <pc:sldMkLst>
-          <pc:docMk/>
-          <pc:sldMk cId="3082545194" sldId="600"/>
-        </pc:sldMkLst>
-        <pc:spChg chg="mod">
-          <ac:chgData name="Long B Nguyen" userId="f59fb8f3-a021-417a-8bc1-65c8d471c621" providerId="ADAL" clId="{20E1AE71-974B-2D41-AC34-69C850DFDC19}" dt="2020-03-08T12:28:52.619" v="125" actId="20577"/>
-          <ac:spMkLst>
-            <pc:docMk/>
-            <pc:sldMk cId="3082545194" sldId="600"/>
-            <ac:spMk id="16386" creationId="{1068C3F6-2B68-0147-A043-67BE3D946ECF}"/>
-          </ac:spMkLst>
-        </pc:spChg>
-        <pc:spChg chg="mod">
-          <ac:chgData name="Long B Nguyen" userId="f59fb8f3-a021-417a-8bc1-65c8d471c621" providerId="ADAL" clId="{20E1AE71-974B-2D41-AC34-69C850DFDC19}" dt="2020-03-08T12:28:48.700" v="122" actId="1076"/>
-          <ac:spMkLst>
-            <pc:docMk/>
-            <pc:sldMk cId="3082545194" sldId="600"/>
-            <ac:spMk id="28673" creationId="{907EFF68-9C71-F04B-B369-88AED7B7A835}"/>
-          </ac:spMkLst>
-        </pc:spChg>
-      </pc:sldChg>
-      <pc:sldChg chg="modSp add modAnim">
-        <pc:chgData name="Long B Nguyen" userId="f59fb8f3-a021-417a-8bc1-65c8d471c621" providerId="ADAL" clId="{20E1AE71-974B-2D41-AC34-69C850DFDC19}" dt="2020-03-08T13:57:55.124" v="509" actId="20577"/>
-        <pc:sldMkLst>
-          <pc:docMk/>
-          <pc:sldMk cId="3805116294" sldId="601"/>
-        </pc:sldMkLst>
-        <pc:spChg chg="mod">
-          <ac:chgData name="Long B Nguyen" userId="f59fb8f3-a021-417a-8bc1-65c8d471c621" providerId="ADAL" clId="{20E1AE71-974B-2D41-AC34-69C850DFDC19}" dt="2020-03-08T13:57:55.124" v="509" actId="20577"/>
-          <ac:spMkLst>
-            <pc:docMk/>
-            <pc:sldMk cId="3805116294" sldId="601"/>
-            <ac:spMk id="16386" creationId="{37FDCEEA-1952-6C42-8C6C-2F8F8FE3796F}"/>
-          </ac:spMkLst>
-        </pc:spChg>
-        <pc:spChg chg="mod">
-          <ac:chgData name="Long B Nguyen" userId="f59fb8f3-a021-417a-8bc1-65c8d471c621" providerId="ADAL" clId="{20E1AE71-974B-2D41-AC34-69C850DFDC19}" dt="2020-03-08T13:55:44.761" v="273" actId="1076"/>
-          <ac:spMkLst>
-            <pc:docMk/>
-            <pc:sldMk cId="3805116294" sldId="601"/>
-            <ac:spMk id="30721" creationId="{CABE8826-3A78-A04B-B3F1-70BBDCFEB024}"/>
-          </ac:spMkLst>
-        </pc:spChg>
-        <pc:picChg chg="mod">
-          <ac:chgData name="Long B Nguyen" userId="f59fb8f3-a021-417a-8bc1-65c8d471c621" providerId="ADAL" clId="{20E1AE71-974B-2D41-AC34-69C850DFDC19}" dt="2020-03-08T13:57:28.589" v="500" actId="1076"/>
-          <ac:picMkLst>
-            <pc:docMk/>
-            <pc:sldMk cId="3805116294" sldId="601"/>
-            <ac:picMk id="30723" creationId="{A19A7F4E-C334-2D45-8068-393FDB2C3A04}"/>
-          </ac:picMkLst>
-        </pc:picChg>
-      </pc:sldChg>
-      <pc:sldChg chg="modSp add">
-        <pc:chgData name="Long B Nguyen" userId="f59fb8f3-a021-417a-8bc1-65c8d471c621" providerId="ADAL" clId="{20E1AE71-974B-2D41-AC34-69C850DFDC19}" dt="2020-03-08T12:29:32.575" v="133" actId="5793"/>
-        <pc:sldMkLst>
-          <pc:docMk/>
-          <pc:sldMk cId="2482297390" sldId="602"/>
-        </pc:sldMkLst>
-        <pc:spChg chg="mod">
-          <ac:chgData name="Long B Nguyen" userId="f59fb8f3-a021-417a-8bc1-65c8d471c621" providerId="ADAL" clId="{20E1AE71-974B-2D41-AC34-69C850DFDC19}" dt="2020-03-08T12:29:32.575" v="133" actId="5793"/>
-          <ac:spMkLst>
-            <pc:docMk/>
-            <pc:sldMk cId="2482297390" sldId="602"/>
-            <ac:spMk id="16386" creationId="{65F76040-0096-2148-BECD-C70AB371E337}"/>
-          </ac:spMkLst>
-        </pc:spChg>
-        <pc:spChg chg="mod">
-          <ac:chgData name="Long B Nguyen" userId="f59fb8f3-a021-417a-8bc1-65c8d471c621" providerId="ADAL" clId="{20E1AE71-974B-2D41-AC34-69C850DFDC19}" dt="2020-03-08T12:29:30.039" v="132" actId="1076"/>
-          <ac:spMkLst>
-            <pc:docMk/>
-            <pc:sldMk cId="2482297390" sldId="602"/>
-            <ac:spMk id="32769" creationId="{4EBBA52F-9DF1-B246-9431-8A81100C5EEF}"/>
-          </ac:spMkLst>
-        </pc:spChg>
-      </pc:sldChg>
-      <pc:sldChg chg="modSp add modAnim">
-        <pc:chgData name="Long B Nguyen" userId="f59fb8f3-a021-417a-8bc1-65c8d471c621" providerId="ADAL" clId="{20E1AE71-974B-2D41-AC34-69C850DFDC19}" dt="2020-03-08T12:30:37.102" v="153" actId="20577"/>
-        <pc:sldMkLst>
-          <pc:docMk/>
-          <pc:sldMk cId="3316801220" sldId="603"/>
-        </pc:sldMkLst>
-        <pc:spChg chg="mod">
-          <ac:chgData name="Long B Nguyen" userId="f59fb8f3-a021-417a-8bc1-65c8d471c621" providerId="ADAL" clId="{20E1AE71-974B-2D41-AC34-69C850DFDC19}" dt="2020-03-08T12:30:37.102" v="153" actId="20577"/>
-          <ac:spMkLst>
-            <pc:docMk/>
-            <pc:sldMk cId="3316801220" sldId="603"/>
-            <ac:spMk id="16386" creationId="{62F9A7B8-3A42-B54D-9D39-DC0EC3FB546A}"/>
-          </ac:spMkLst>
-        </pc:spChg>
-        <pc:spChg chg="mod">
-          <ac:chgData name="Long B Nguyen" userId="f59fb8f3-a021-417a-8bc1-65c8d471c621" providerId="ADAL" clId="{20E1AE71-974B-2D41-AC34-69C850DFDC19}" dt="2020-03-08T12:29:44.488" v="136" actId="1076"/>
-          <ac:spMkLst>
-            <pc:docMk/>
-            <pc:sldMk cId="3316801220" sldId="603"/>
-            <ac:spMk id="34817" creationId="{0DBE2AEE-399E-404E-BC68-4C2DA6AAC63B}"/>
-          </ac:spMkLst>
-        </pc:spChg>
-      </pc:sldChg>
-      <pc:sldChg chg="modSp add">
-        <pc:chgData name="Long B Nguyen" userId="f59fb8f3-a021-417a-8bc1-65c8d471c621" providerId="ADAL" clId="{20E1AE71-974B-2D41-AC34-69C850DFDC19}" dt="2020-03-08T12:31:12.108" v="157" actId="5793"/>
-        <pc:sldMkLst>
-          <pc:docMk/>
-          <pc:sldMk cId="1665439849" sldId="605"/>
-        </pc:sldMkLst>
-        <pc:spChg chg="mod">
-          <ac:chgData name="Long B Nguyen" userId="f59fb8f3-a021-417a-8bc1-65c8d471c621" providerId="ADAL" clId="{20E1AE71-974B-2D41-AC34-69C850DFDC19}" dt="2020-03-08T12:31:12.108" v="157" actId="5793"/>
-          <ac:spMkLst>
-            <pc:docMk/>
-            <pc:sldMk cId="1665439849" sldId="605"/>
-            <ac:spMk id="16386" creationId="{A254C108-CD79-104D-9573-479E5F1E9C53}"/>
-          </ac:spMkLst>
-        </pc:spChg>
-        <pc:spChg chg="mod">
-          <ac:chgData name="Long B Nguyen" userId="f59fb8f3-a021-417a-8bc1-65c8d471c621" providerId="ADAL" clId="{20E1AE71-974B-2D41-AC34-69C850DFDC19}" dt="2020-03-08T12:31:09.246" v="156" actId="1076"/>
-          <ac:spMkLst>
-            <pc:docMk/>
-            <pc:sldMk cId="1665439849" sldId="605"/>
-            <ac:spMk id="36865" creationId="{3FB39C93-22A3-5C43-BE4F-FEE2C42AF6FA}"/>
-          </ac:spMkLst>
-        </pc:spChg>
-      </pc:sldChg>
-      <pc:sldChg chg="modSp add modAnim">
-        <pc:chgData name="Long B Nguyen" userId="f59fb8f3-a021-417a-8bc1-65c8d471c621" providerId="ADAL" clId="{20E1AE71-974B-2D41-AC34-69C850DFDC19}" dt="2020-03-08T12:32:02.124" v="164" actId="20577"/>
-        <pc:sldMkLst>
-          <pc:docMk/>
-          <pc:sldMk cId="1196991583" sldId="606"/>
-        </pc:sldMkLst>
-        <pc:spChg chg="mod">
-          <ac:chgData name="Long B Nguyen" userId="f59fb8f3-a021-417a-8bc1-65c8d471c621" providerId="ADAL" clId="{20E1AE71-974B-2D41-AC34-69C850DFDC19}" dt="2020-03-08T12:32:02.124" v="164" actId="20577"/>
-          <ac:spMkLst>
-            <pc:docMk/>
-            <pc:sldMk cId="1196991583" sldId="606"/>
-            <ac:spMk id="16386" creationId="{AE1781FA-9D5E-A349-85DF-1916B7AC6635}"/>
-          </ac:spMkLst>
-        </pc:spChg>
-        <pc:spChg chg="mod">
-          <ac:chgData name="Long B Nguyen" userId="f59fb8f3-a021-417a-8bc1-65c8d471c621" providerId="ADAL" clId="{20E1AE71-974B-2D41-AC34-69C850DFDC19}" dt="2020-03-08T12:31:48.463" v="160" actId="1076"/>
-          <ac:spMkLst>
-            <pc:docMk/>
-            <pc:sldMk cId="1196991583" sldId="606"/>
-            <ac:spMk id="38913" creationId="{3E233C7B-4CFF-104F-85AD-FB4583A5E86E}"/>
-          </ac:spMkLst>
-        </pc:spChg>
-      </pc:sldChg>
-      <pc:sldChg chg="modSp add modAnim">
-        <pc:chgData name="Long B Nguyen" userId="f59fb8f3-a021-417a-8bc1-65c8d471c621" providerId="ADAL" clId="{20E1AE71-974B-2D41-AC34-69C850DFDC19}" dt="2020-03-08T12:36:27.687" v="186" actId="113"/>
-        <pc:sldMkLst>
-          <pc:docMk/>
-          <pc:sldMk cId="2747083858" sldId="607"/>
-        </pc:sldMkLst>
-        <pc:spChg chg="mod">
-          <ac:chgData name="Long B Nguyen" userId="f59fb8f3-a021-417a-8bc1-65c8d471c621" providerId="ADAL" clId="{20E1AE71-974B-2D41-AC34-69C850DFDC19}" dt="2020-03-08T12:36:27.687" v="186" actId="113"/>
-          <ac:spMkLst>
-            <pc:docMk/>
-            <pc:sldMk cId="2747083858" sldId="607"/>
-            <ac:spMk id="16386" creationId="{482D60F1-187C-864B-B43D-577485A40C08}"/>
-          </ac:spMkLst>
-        </pc:spChg>
-        <pc:spChg chg="mod">
-          <ac:chgData name="Long B Nguyen" userId="f59fb8f3-a021-417a-8bc1-65c8d471c621" providerId="ADAL" clId="{20E1AE71-974B-2D41-AC34-69C850DFDC19}" dt="2020-03-08T12:36:08.893" v="180" actId="1076"/>
-          <ac:spMkLst>
-            <pc:docMk/>
-            <pc:sldMk cId="2747083858" sldId="607"/>
-            <ac:spMk id="40961" creationId="{8FBF48B6-53FB-2C49-A153-963914EAEB88}"/>
-          </ac:spMkLst>
-        </pc:spChg>
-      </pc:sldChg>
-      <pc:sldChg chg="addSp delSp modSp add modAnim">
-        <pc:chgData name="Long B Nguyen" userId="f59fb8f3-a021-417a-8bc1-65c8d471c621" providerId="ADAL" clId="{20E1AE71-974B-2D41-AC34-69C850DFDC19}" dt="2020-03-16T17:50:12.029" v="624"/>
-        <pc:sldMkLst>
-          <pc:docMk/>
-          <pc:sldMk cId="2430561500" sldId="609"/>
-        </pc:sldMkLst>
-        <pc:spChg chg="add del mod">
-          <ac:chgData name="Long B Nguyen" userId="f59fb8f3-a021-417a-8bc1-65c8d471c621" providerId="ADAL" clId="{20E1AE71-974B-2D41-AC34-69C850DFDC19}" dt="2020-03-16T17:50:12.029" v="624"/>
-          <ac:spMkLst>
-            <pc:docMk/>
-            <pc:sldMk cId="2430561500" sldId="609"/>
-            <ac:spMk id="2" creationId="{3D4C4230-2B39-5E4F-A592-6A2ECBBDF748}"/>
-          </ac:spMkLst>
-        </pc:spChg>
-        <pc:spChg chg="mod">
-          <ac:chgData name="Long B Nguyen" userId="f59fb8f3-a021-417a-8bc1-65c8d471c621" providerId="ADAL" clId="{20E1AE71-974B-2D41-AC34-69C850DFDC19}" dt="2020-03-08T12:36:43.699" v="192" actId="20577"/>
-          <ac:spMkLst>
-            <pc:docMk/>
-            <pc:sldMk cId="2430561500" sldId="609"/>
-            <ac:spMk id="16386" creationId="{976F1699-B5AC-2F45-8AD2-94EE6D9AAFEA}"/>
-          </ac:spMkLst>
-        </pc:spChg>
-        <pc:spChg chg="mod">
-          <ac:chgData name="Long B Nguyen" userId="f59fb8f3-a021-417a-8bc1-65c8d471c621" providerId="ADAL" clId="{20E1AE71-974B-2D41-AC34-69C850DFDC19}" dt="2020-03-08T12:36:39.581" v="189" actId="1076"/>
-          <ac:spMkLst>
-            <pc:docMk/>
-            <pc:sldMk cId="2430561500" sldId="609"/>
-            <ac:spMk id="43009" creationId="{5AF8924E-8D8B-8140-81EA-8C0E4EE57514}"/>
-          </ac:spMkLst>
-        </pc:spChg>
-      </pc:sldChg>
-      <pc:sldChg chg="modSp add modAnim">
-        <pc:chgData name="Long B Nguyen" userId="f59fb8f3-a021-417a-8bc1-65c8d471c621" providerId="ADAL" clId="{20E1AE71-974B-2D41-AC34-69C850DFDC19}" dt="2020-03-08T12:38:37.807" v="200" actId="20577"/>
-        <pc:sldMkLst>
-          <pc:docMk/>
-          <pc:sldMk cId="1660288031" sldId="610"/>
-        </pc:sldMkLst>
-        <pc:spChg chg="mod">
-          <ac:chgData name="Long B Nguyen" userId="f59fb8f3-a021-417a-8bc1-65c8d471c621" providerId="ADAL" clId="{20E1AE71-974B-2D41-AC34-69C850DFDC19}" dt="2020-03-08T12:38:37.807" v="200" actId="20577"/>
-          <ac:spMkLst>
-            <pc:docMk/>
-            <pc:sldMk cId="1660288031" sldId="610"/>
-            <ac:spMk id="16386" creationId="{5156306A-4FA5-3D45-9903-BA60307C88D6}"/>
-          </ac:spMkLst>
-        </pc:spChg>
-        <pc:spChg chg="mod">
-          <ac:chgData name="Long B Nguyen" userId="f59fb8f3-a021-417a-8bc1-65c8d471c621" providerId="ADAL" clId="{20E1AE71-974B-2D41-AC34-69C850DFDC19}" dt="2020-03-08T12:38:30.098" v="195" actId="1076"/>
-          <ac:spMkLst>
-            <pc:docMk/>
-            <pc:sldMk cId="1660288031" sldId="610"/>
-            <ac:spMk id="45057" creationId="{64971388-EC5B-404C-A187-A3FCE97E20E3}"/>
-          </ac:spMkLst>
-        </pc:spChg>
-      </pc:sldChg>
-      <pc:sldChg chg="del">
-        <pc:chgData name="Long B Nguyen" userId="f59fb8f3-a021-417a-8bc1-65c8d471c621" providerId="ADAL" clId="{20E1AE71-974B-2D41-AC34-69C850DFDC19}" dt="2020-03-08T12:14:34.140" v="48" actId="2696"/>
-        <pc:sldMkLst>
-          <pc:docMk/>
-          <pc:sldMk cId="2319263073" sldId="610"/>
-        </pc:sldMkLst>
-      </pc:sldChg>
-      <pc:sldChg chg="modSp add modAnim">
-        <pc:chgData name="Long B Nguyen" userId="f59fb8f3-a021-417a-8bc1-65c8d471c621" providerId="ADAL" clId="{20E1AE71-974B-2D41-AC34-69C850DFDC19}" dt="2020-03-08T13:58:18.579" v="510" actId="1076"/>
-        <pc:sldMkLst>
-          <pc:docMk/>
-          <pc:sldMk cId="1203333742" sldId="611"/>
-        </pc:sldMkLst>
-        <pc:spChg chg="mod">
-          <ac:chgData name="Long B Nguyen" userId="f59fb8f3-a021-417a-8bc1-65c8d471c621" providerId="ADAL" clId="{20E1AE71-974B-2D41-AC34-69C850DFDC19}" dt="2020-03-08T12:39:25.550" v="212" actId="20577"/>
-          <ac:spMkLst>
-            <pc:docMk/>
-            <pc:sldMk cId="1203333742" sldId="611"/>
-            <ac:spMk id="16386" creationId="{8A97D40A-E6BF-E14C-B07D-5BAE101CB071}"/>
-          </ac:spMkLst>
-        </pc:spChg>
-        <pc:spChg chg="mod">
-          <ac:chgData name="Long B Nguyen" userId="f59fb8f3-a021-417a-8bc1-65c8d471c621" providerId="ADAL" clId="{20E1AE71-974B-2D41-AC34-69C850DFDC19}" dt="2020-03-08T13:58:18.579" v="510" actId="1076"/>
-          <ac:spMkLst>
-            <pc:docMk/>
-            <pc:sldMk cId="1203333742" sldId="611"/>
-            <ac:spMk id="47105" creationId="{0ACC1611-F859-5B48-9867-1C1AB1970564}"/>
-          </ac:spMkLst>
-        </pc:spChg>
-      </pc:sldChg>
-      <pc:sldChg chg="del">
-        <pc:chgData name="Long B Nguyen" userId="f59fb8f3-a021-417a-8bc1-65c8d471c621" providerId="ADAL" clId="{20E1AE71-974B-2D41-AC34-69C850DFDC19}" dt="2020-03-08T12:14:33.642" v="15" actId="2696"/>
-        <pc:sldMkLst>
-          <pc:docMk/>
-          <pc:sldMk cId="2164029680" sldId="611"/>
-        </pc:sldMkLst>
-      </pc:sldChg>
-      <pc:sldChg chg="modSp add">
-        <pc:chgData name="Long B Nguyen" userId="f59fb8f3-a021-417a-8bc1-65c8d471c621" providerId="ADAL" clId="{20E1AE71-974B-2D41-AC34-69C850DFDC19}" dt="2020-03-08T12:40:17.189" v="226" actId="20577"/>
-        <pc:sldMkLst>
-          <pc:docMk/>
-          <pc:sldMk cId="186989517" sldId="612"/>
-        </pc:sldMkLst>
-        <pc:spChg chg="mod">
-          <ac:chgData name="Long B Nguyen" userId="f59fb8f3-a021-417a-8bc1-65c8d471c621" providerId="ADAL" clId="{20E1AE71-974B-2D41-AC34-69C850DFDC19}" dt="2020-03-08T12:40:17.189" v="226" actId="20577"/>
-          <ac:spMkLst>
-            <pc:docMk/>
-            <pc:sldMk cId="186989517" sldId="612"/>
-            <ac:spMk id="50178" creationId="{327CB0B4-2578-5740-B0E0-F346965CCB10}"/>
-          </ac:spMkLst>
-        </pc:spChg>
-      </pc:sldChg>
-      <pc:sldChg chg="del">
-        <pc:chgData name="Long B Nguyen" userId="f59fb8f3-a021-417a-8bc1-65c8d471c621" providerId="ADAL" clId="{20E1AE71-974B-2D41-AC34-69C850DFDC19}" dt="2020-03-08T12:14:33.624" v="14" actId="2696"/>
-        <pc:sldMkLst>
-          <pc:docMk/>
-          <pc:sldMk cId="2356037138" sldId="612"/>
-        </pc:sldMkLst>
-      </pc:sldChg>
-      <pc:sldChg chg="del">
-        <pc:chgData name="Long B Nguyen" userId="f59fb8f3-a021-417a-8bc1-65c8d471c621" providerId="ADAL" clId="{20E1AE71-974B-2D41-AC34-69C850DFDC19}" dt="2020-03-08T12:14:33.985" v="35" actId="2696"/>
-        <pc:sldMkLst>
-          <pc:docMk/>
-          <pc:sldMk cId="1558241323" sldId="613"/>
-        </pc:sldMkLst>
-      </pc:sldChg>
-      <pc:sldChg chg="del">
-        <pc:chgData name="Long B Nguyen" userId="f59fb8f3-a021-417a-8bc1-65c8d471c621" providerId="ADAL" clId="{20E1AE71-974B-2D41-AC34-69C850DFDC19}" dt="2020-03-08T12:14:34.001" v="36" actId="2696"/>
-        <pc:sldMkLst>
-          <pc:docMk/>
-          <pc:sldMk cId="1678415157" sldId="615"/>
-        </pc:sldMkLst>
-      </pc:sldChg>
-      <pc:sldChg chg="del">
-        <pc:chgData name="Long B Nguyen" userId="f59fb8f3-a021-417a-8bc1-65c8d471c621" providerId="ADAL" clId="{20E1AE71-974B-2D41-AC34-69C850DFDC19}" dt="2020-03-08T12:14:33.932" v="32" actId="2696"/>
-        <pc:sldMkLst>
-          <pc:docMk/>
-          <pc:sldMk cId="827202224" sldId="616"/>
-        </pc:sldMkLst>
-      </pc:sldChg>
-      <pc:sldChg chg="del">
-        <pc:chgData name="Long B Nguyen" userId="f59fb8f3-a021-417a-8bc1-65c8d471c621" providerId="ADAL" clId="{20E1AE71-974B-2D41-AC34-69C850DFDC19}" dt="2020-03-08T12:14:33.953" v="33" actId="2696"/>
-        <pc:sldMkLst>
-          <pc:docMk/>
-          <pc:sldMk cId="971732716" sldId="617"/>
-        </pc:sldMkLst>
-      </pc:sldChg>
-      <pc:sldChg chg="del">
-        <pc:chgData name="Long B Nguyen" userId="f59fb8f3-a021-417a-8bc1-65c8d471c621" providerId="ADAL" clId="{20E1AE71-974B-2D41-AC34-69C850DFDC19}" dt="2020-03-08T12:14:34.105" v="45" actId="2696"/>
-        <pc:sldMkLst>
-          <pc:docMk/>
-          <pc:sldMk cId="1047995035" sldId="618"/>
-        </pc:sldMkLst>
-      </pc:sldChg>
-      <pc:sldChg chg="del">
-        <pc:chgData name="Long B Nguyen" userId="f59fb8f3-a021-417a-8bc1-65c8d471c621" providerId="ADAL" clId="{20E1AE71-974B-2D41-AC34-69C850DFDC19}" dt="2020-03-08T12:14:34.069" v="42" actId="2696"/>
-        <pc:sldMkLst>
-          <pc:docMk/>
-          <pc:sldMk cId="1016158355" sldId="619"/>
-        </pc:sldMkLst>
-      </pc:sldChg>
-      <pc:sldChg chg="del">
-        <pc:chgData name="Long B Nguyen" userId="f59fb8f3-a021-417a-8bc1-65c8d471c621" providerId="ADAL" clId="{20E1AE71-974B-2D41-AC34-69C850DFDC19}" dt="2020-03-08T12:14:34.079" v="43" actId="2696"/>
-        <pc:sldMkLst>
-          <pc:docMk/>
-          <pc:sldMk cId="4204323314" sldId="620"/>
-        </pc:sldMkLst>
-      </pc:sldChg>
-      <pc:sldChg chg="del">
-        <pc:chgData name="Long B Nguyen" userId="f59fb8f3-a021-417a-8bc1-65c8d471c621" providerId="ADAL" clId="{20E1AE71-974B-2D41-AC34-69C850DFDC19}" dt="2020-03-08T12:14:34.093" v="44" actId="2696"/>
-        <pc:sldMkLst>
-          <pc:docMk/>
-          <pc:sldMk cId="1162857972" sldId="621"/>
-        </pc:sldMkLst>
-      </pc:sldChg>
-      <pc:sldChg chg="del">
-        <pc:chgData name="Long B Nguyen" userId="f59fb8f3-a021-417a-8bc1-65c8d471c621" providerId="ADAL" clId="{20E1AE71-974B-2D41-AC34-69C850DFDC19}" dt="2020-03-08T12:14:34.118" v="46" actId="2696"/>
-        <pc:sldMkLst>
-          <pc:docMk/>
-          <pc:sldMk cId="2765543401" sldId="622"/>
-        </pc:sldMkLst>
-      </pc:sldChg>
-      <pc:sldChg chg="del">
-        <pc:chgData name="Long B Nguyen" userId="f59fb8f3-a021-417a-8bc1-65c8d471c621" providerId="ADAL" clId="{20E1AE71-974B-2D41-AC34-69C850DFDC19}" dt="2020-03-08T12:14:34.132" v="47" actId="2696"/>
-        <pc:sldMkLst>
-          <pc:docMk/>
-          <pc:sldMk cId="3553270583" sldId="623"/>
-        </pc:sldMkLst>
-      </pc:sldChg>
-    </pc:docChg>
-  </pc:docChgLst>
-  <pc:docChgLst>
-    <pc:chgData name="Long B Nguyen" userId="f59fb8f3-a021-417a-8bc1-65c8d471c621" providerId="ADAL" clId="{CC9C9D9A-5149-2947-86C0-576F501F60DC}"/>
-    <pc:docChg chg="addSld modSld">
-      <pc:chgData name="Long B Nguyen" userId="f59fb8f3-a021-417a-8bc1-65c8d471c621" providerId="ADAL" clId="{CC9C9D9A-5149-2947-86C0-576F501F60DC}" dt="2020-01-05T21:59:55.597" v="2392" actId="14100"/>
-      <pc:docMkLst>
-        <pc:docMk/>
-      </pc:docMkLst>
-      <pc:sldChg chg="modSp add modAnim">
-        <pc:chgData name="Long B Nguyen" userId="f59fb8f3-a021-417a-8bc1-65c8d471c621" providerId="ADAL" clId="{CC9C9D9A-5149-2947-86C0-576F501F60DC}" dt="2020-01-04T15:49:37.373" v="563" actId="20577"/>
-        <pc:sldMkLst>
-          <pc:docMk/>
-          <pc:sldMk cId="924617162" sldId="319"/>
-        </pc:sldMkLst>
-        <pc:spChg chg="mod">
-          <ac:chgData name="Long B Nguyen" userId="f59fb8f3-a021-417a-8bc1-65c8d471c621" providerId="ADAL" clId="{CC9C9D9A-5149-2947-86C0-576F501F60DC}" dt="2020-01-04T15:45:14.876" v="4" actId="20577"/>
-          <ac:spMkLst>
-            <pc:docMk/>
-            <pc:sldMk cId="924617162" sldId="319"/>
-            <ac:spMk id="2" creationId="{AA3A228F-61D0-D949-A5E7-F83756230BF8}"/>
-          </ac:spMkLst>
-        </pc:spChg>
-        <pc:spChg chg="mod">
-          <ac:chgData name="Long B Nguyen" userId="f59fb8f3-a021-417a-8bc1-65c8d471c621" providerId="ADAL" clId="{CC9C9D9A-5149-2947-86C0-576F501F60DC}" dt="2020-01-04T15:49:37.373" v="563" actId="20577"/>
-          <ac:spMkLst>
-            <pc:docMk/>
-            <pc:sldMk cId="924617162" sldId="319"/>
-            <ac:spMk id="9" creationId="{E3B2E017-30B2-884B-A113-B419A2ED51AD}"/>
-          </ac:spMkLst>
-        </pc:spChg>
-      </pc:sldChg>
-      <pc:sldChg chg="modSp add">
-        <pc:chgData name="Long B Nguyen" userId="f59fb8f3-a021-417a-8bc1-65c8d471c621" providerId="ADAL" clId="{CC9C9D9A-5149-2947-86C0-576F501F60DC}" dt="2020-01-04T15:57:55.835" v="789" actId="14100"/>
-        <pc:sldMkLst>
-          <pc:docMk/>
-          <pc:sldMk cId="3758830494" sldId="320"/>
-        </pc:sldMkLst>
-        <pc:spChg chg="mod">
-          <ac:chgData name="Long B Nguyen" userId="f59fb8f3-a021-417a-8bc1-65c8d471c621" providerId="ADAL" clId="{CC9C9D9A-5149-2947-86C0-576F501F60DC}" dt="2020-01-04T15:57:52.065" v="788" actId="1076"/>
-          <ac:spMkLst>
-            <pc:docMk/>
-            <pc:sldMk cId="3758830494" sldId="320"/>
-            <ac:spMk id="2" creationId="{AA3A228F-61D0-D949-A5E7-F83756230BF8}"/>
-          </ac:spMkLst>
-        </pc:spChg>
-        <pc:spChg chg="mod">
-          <ac:chgData name="Long B Nguyen" userId="f59fb8f3-a021-417a-8bc1-65c8d471c621" providerId="ADAL" clId="{CC9C9D9A-5149-2947-86C0-576F501F60DC}" dt="2020-01-04T15:57:55.835" v="789" actId="14100"/>
-          <ac:spMkLst>
-            <pc:docMk/>
-            <pc:sldMk cId="3758830494" sldId="320"/>
-            <ac:spMk id="9" creationId="{E3B2E017-30B2-884B-A113-B419A2ED51AD}"/>
-          </ac:spMkLst>
-        </pc:spChg>
-      </pc:sldChg>
-      <pc:sldChg chg="modSp add">
-        <pc:chgData name="Long B Nguyen" userId="f59fb8f3-a021-417a-8bc1-65c8d471c621" providerId="ADAL" clId="{CC9C9D9A-5149-2947-86C0-576F501F60DC}" dt="2020-01-05T21:51:37.442" v="2325" actId="20577"/>
-        <pc:sldMkLst>
-          <pc:docMk/>
-          <pc:sldMk cId="1022945305" sldId="321"/>
-        </pc:sldMkLst>
-        <pc:spChg chg="mod">
-          <ac:chgData name="Long B Nguyen" userId="f59fb8f3-a021-417a-8bc1-65c8d471c621" providerId="ADAL" clId="{CC9C9D9A-5149-2947-86C0-576F501F60DC}" dt="2020-01-05T21:51:37.442" v="2325" actId="20577"/>
-          <ac:spMkLst>
-            <pc:docMk/>
-            <pc:sldMk cId="1022945305" sldId="321"/>
-            <ac:spMk id="2" creationId="{AA3A228F-61D0-D949-A5E7-F83756230BF8}"/>
-          </ac:spMkLst>
-        </pc:spChg>
-        <pc:spChg chg="mod">
-          <ac:chgData name="Long B Nguyen" userId="f59fb8f3-a021-417a-8bc1-65c8d471c621" providerId="ADAL" clId="{CC9C9D9A-5149-2947-86C0-576F501F60DC}" dt="2020-01-05T21:33:21.485" v="2304" actId="20577"/>
-          <ac:spMkLst>
-            <pc:docMk/>
-            <pc:sldMk cId="1022945305" sldId="321"/>
-            <ac:spMk id="9" creationId="{E3B2E017-30B2-884B-A113-B419A2ED51AD}"/>
-          </ac:spMkLst>
-        </pc:spChg>
-      </pc:sldChg>
-      <pc:sldChg chg="modSp add">
-        <pc:chgData name="Long B Nguyen" userId="f59fb8f3-a021-417a-8bc1-65c8d471c621" providerId="ADAL" clId="{CC9C9D9A-5149-2947-86C0-576F501F60DC}" dt="2020-01-04T17:41:57.489" v="1203" actId="20577"/>
-        <pc:sldMkLst>
-          <pc:docMk/>
-          <pc:sldMk cId="3456840474" sldId="322"/>
-        </pc:sldMkLst>
-        <pc:spChg chg="mod">
-          <ac:chgData name="Long B Nguyen" userId="f59fb8f3-a021-417a-8bc1-65c8d471c621" providerId="ADAL" clId="{CC9C9D9A-5149-2947-86C0-576F501F60DC}" dt="2020-01-04T17:41:57.489" v="1203" actId="20577"/>
-          <ac:spMkLst>
-            <pc:docMk/>
-            <pc:sldMk cId="3456840474" sldId="322"/>
-            <ac:spMk id="9" creationId="{E3B2E017-30B2-884B-A113-B419A2ED51AD}"/>
-          </ac:spMkLst>
-        </pc:spChg>
-      </pc:sldChg>
-      <pc:sldChg chg="modSp add">
-        <pc:chgData name="Long B Nguyen" userId="f59fb8f3-a021-417a-8bc1-65c8d471c621" providerId="ADAL" clId="{CC9C9D9A-5149-2947-86C0-576F501F60DC}" dt="2020-01-04T18:38:26.241" v="1214" actId="113"/>
-        <pc:sldMkLst>
-          <pc:docMk/>
-          <pc:sldMk cId="1062075874" sldId="323"/>
-        </pc:sldMkLst>
-        <pc:spChg chg="mod">
-          <ac:chgData name="Long B Nguyen" userId="f59fb8f3-a021-417a-8bc1-65c8d471c621" providerId="ADAL" clId="{CC9C9D9A-5149-2947-86C0-576F501F60DC}" dt="2020-01-04T18:38:26.241" v="1214" actId="113"/>
-          <ac:spMkLst>
-            <pc:docMk/>
-            <pc:sldMk cId="1062075874" sldId="323"/>
-            <ac:spMk id="9" creationId="{E3B2E017-30B2-884B-A113-B419A2ED51AD}"/>
-          </ac:spMkLst>
-        </pc:spChg>
-      </pc:sldChg>
-      <pc:sldChg chg="modSp add">
-        <pc:chgData name="Long B Nguyen" userId="f59fb8f3-a021-417a-8bc1-65c8d471c621" providerId="ADAL" clId="{CC9C9D9A-5149-2947-86C0-576F501F60DC}" dt="2020-01-04T20:58:36.932" v="1972" actId="20577"/>
-        <pc:sldMkLst>
-          <pc:docMk/>
-          <pc:sldMk cId="1310010799" sldId="324"/>
-        </pc:sldMkLst>
-        <pc:spChg chg="mod">
-          <ac:chgData name="Long B Nguyen" userId="f59fb8f3-a021-417a-8bc1-65c8d471c621" providerId="ADAL" clId="{CC9C9D9A-5149-2947-86C0-576F501F60DC}" dt="2020-01-04T20:55:25.731" v="1962" actId="1076"/>
-          <ac:spMkLst>
-            <pc:docMk/>
-            <pc:sldMk cId="1310010799" sldId="324"/>
-            <ac:spMk id="2" creationId="{AA3A228F-61D0-D949-A5E7-F83756230BF8}"/>
-          </ac:spMkLst>
-        </pc:spChg>
-        <pc:spChg chg="mod">
-          <ac:chgData name="Long B Nguyen" userId="f59fb8f3-a021-417a-8bc1-65c8d471c621" providerId="ADAL" clId="{CC9C9D9A-5149-2947-86C0-576F501F60DC}" dt="2020-01-04T20:58:36.932" v="1972" actId="20577"/>
-          <ac:spMkLst>
-            <pc:docMk/>
-            <pc:sldMk cId="1310010799" sldId="324"/>
-            <ac:spMk id="9" creationId="{E3B2E017-30B2-884B-A113-B419A2ED51AD}"/>
-          </ac:spMkLst>
-        </pc:spChg>
-      </pc:sldChg>
-      <pc:sldChg chg="modSp add">
-        <pc:chgData name="Long B Nguyen" userId="f59fb8f3-a021-417a-8bc1-65c8d471c621" providerId="ADAL" clId="{CC9C9D9A-5149-2947-86C0-576F501F60DC}" dt="2020-01-05T21:27:04.952" v="2119" actId="20577"/>
-        <pc:sldMkLst>
-          <pc:docMk/>
-          <pc:sldMk cId="3314372952" sldId="325"/>
-        </pc:sldMkLst>
-        <pc:spChg chg="mod">
-          <ac:chgData name="Long B Nguyen" userId="f59fb8f3-a021-417a-8bc1-65c8d471c621" providerId="ADAL" clId="{CC9C9D9A-5149-2947-86C0-576F501F60DC}" dt="2020-01-05T21:26:41.210" v="2114" actId="20577"/>
-          <ac:spMkLst>
-            <pc:docMk/>
-            <pc:sldMk cId="3314372952" sldId="325"/>
-            <ac:spMk id="2" creationId="{AA3A228F-61D0-D949-A5E7-F83756230BF8}"/>
-          </ac:spMkLst>
-        </pc:spChg>
-        <pc:spChg chg="mod">
-          <ac:chgData name="Long B Nguyen" userId="f59fb8f3-a021-417a-8bc1-65c8d471c621" providerId="ADAL" clId="{CC9C9D9A-5149-2947-86C0-576F501F60DC}" dt="2020-01-05T21:27:04.952" v="2119" actId="20577"/>
-          <ac:spMkLst>
-            <pc:docMk/>
-            <pc:sldMk cId="3314372952" sldId="325"/>
-            <ac:spMk id="9" creationId="{E3B2E017-30B2-884B-A113-B419A2ED51AD}"/>
-          </ac:spMkLst>
-        </pc:spChg>
-      </pc:sldChg>
-      <pc:sldChg chg="modSp add">
-        <pc:chgData name="Long B Nguyen" userId="f59fb8f3-a021-417a-8bc1-65c8d471c621" providerId="ADAL" clId="{CC9C9D9A-5149-2947-86C0-576F501F60DC}" dt="2020-01-05T21:29:58.563" v="2178" actId="20577"/>
-        <pc:sldMkLst>
-          <pc:docMk/>
-          <pc:sldMk cId="3117943122" sldId="326"/>
-        </pc:sldMkLst>
-        <pc:spChg chg="mod">
-          <ac:chgData name="Long B Nguyen" userId="f59fb8f3-a021-417a-8bc1-65c8d471c621" providerId="ADAL" clId="{CC9C9D9A-5149-2947-86C0-576F501F60DC}" dt="2020-01-05T21:29:58.563" v="2178" actId="20577"/>
-          <ac:spMkLst>
-            <pc:docMk/>
-            <pc:sldMk cId="3117943122" sldId="326"/>
-            <ac:spMk id="9" creationId="{E3B2E017-30B2-884B-A113-B419A2ED51AD}"/>
-          </ac:spMkLst>
-        </pc:spChg>
-      </pc:sldChg>
-      <pc:sldChg chg="modSp add">
-        <pc:chgData name="Long B Nguyen" userId="f59fb8f3-a021-417a-8bc1-65c8d471c621" providerId="ADAL" clId="{CC9C9D9A-5149-2947-86C0-576F501F60DC}" dt="2020-01-05T21:59:55.597" v="2392" actId="14100"/>
-        <pc:sldMkLst>
-          <pc:docMk/>
-          <pc:sldMk cId="1025618360" sldId="327"/>
-        </pc:sldMkLst>
-        <pc:spChg chg="mod">
-          <ac:chgData name="Long B Nguyen" userId="f59fb8f3-a021-417a-8bc1-65c8d471c621" providerId="ADAL" clId="{CC9C9D9A-5149-2947-86C0-576F501F60DC}" dt="2020-01-05T21:59:55.597" v="2392" actId="14100"/>
-          <ac:spMkLst>
-            <pc:docMk/>
-            <pc:sldMk cId="1025618360" sldId="327"/>
-            <ac:spMk id="9" creationId="{E3B2E017-30B2-884B-A113-B419A2ED51AD}"/>
-          </ac:spMkLst>
-        </pc:spChg>
-      </pc:sldChg>
-      <pc:sldChg chg="modSp add">
-        <pc:chgData name="Long B Nguyen" userId="f59fb8f3-a021-417a-8bc1-65c8d471c621" providerId="ADAL" clId="{CC9C9D9A-5149-2947-86C0-576F501F60DC}" dt="2020-01-05T21:54:47.081" v="2356" actId="2711"/>
-        <pc:sldMkLst>
-          <pc:docMk/>
-          <pc:sldMk cId="3894299887" sldId="328"/>
-        </pc:sldMkLst>
-        <pc:spChg chg="mod">
-          <ac:chgData name="Long B Nguyen" userId="f59fb8f3-a021-417a-8bc1-65c8d471c621" providerId="ADAL" clId="{CC9C9D9A-5149-2947-86C0-576F501F60DC}" dt="2020-01-05T21:51:41.306" v="2327" actId="20577"/>
-          <ac:spMkLst>
-            <pc:docMk/>
-            <pc:sldMk cId="3894299887" sldId="328"/>
-            <ac:spMk id="2" creationId="{AA3A228F-61D0-D949-A5E7-F83756230BF8}"/>
-          </ac:spMkLst>
-        </pc:spChg>
-        <pc:spChg chg="mod">
-          <ac:chgData name="Long B Nguyen" userId="f59fb8f3-a021-417a-8bc1-65c8d471c621" providerId="ADAL" clId="{CC9C9D9A-5149-2947-86C0-576F501F60DC}" dt="2020-01-05T21:54:47.081" v="2356" actId="2711"/>
-          <ac:spMkLst>
-            <pc:docMk/>
-            <pc:sldMk cId="3894299887" sldId="328"/>
-            <ac:spMk id="9" creationId="{E3B2E017-30B2-884B-A113-B419A2ED51AD}"/>
-          </ac:spMkLst>
-        </pc:spChg>
-      </pc:sldChg>
-      <pc:sldChg chg="add">
-        <pc:chgData name="Long B Nguyen" userId="f59fb8f3-a021-417a-8bc1-65c8d471c621" providerId="ADAL" clId="{CC9C9D9A-5149-2947-86C0-576F501F60DC}" dt="2020-01-05T21:57:38.736" v="2357"/>
-        <pc:sldMkLst>
-          <pc:docMk/>
-          <pc:sldMk cId="4294143140" sldId="329"/>
-        </pc:sldMkLst>
-      </pc:sldChg>
-    </pc:docChg>
-  </pc:docChgLst>
-  <pc:docChgLst>
-    <pc:chgData name="Long B Nguyen" userId="f59fb8f3-a021-417a-8bc1-65c8d471c621" providerId="ADAL" clId="{34A2CF11-652E-6345-AC5C-A89FACA07C4E}"/>
-    <pc:docChg chg="custSel addSld delSld modSld">
-      <pc:chgData name="Long B Nguyen" userId="f59fb8f3-a021-417a-8bc1-65c8d471c621" providerId="ADAL" clId="{34A2CF11-652E-6345-AC5C-A89FACA07C4E}" dt="2020-03-05T10:05:57.927" v="1422" actId="20577"/>
-      <pc:docMkLst>
-        <pc:docMk/>
-      </pc:docMkLst>
-      <pc:sldChg chg="del">
-        <pc:chgData name="Long B Nguyen" userId="f59fb8f3-a021-417a-8bc1-65c8d471c621" providerId="ADAL" clId="{34A2CF11-652E-6345-AC5C-A89FACA07C4E}" dt="2020-02-25T16:20:06.450" v="1360" actId="2696"/>
-        <pc:sldMkLst>
-          <pc:docMk/>
-          <pc:sldMk cId="623736032" sldId="485"/>
-        </pc:sldMkLst>
-      </pc:sldChg>
-      <pc:sldChg chg="modSp modAnim">
-        <pc:chgData name="Long B Nguyen" userId="f59fb8f3-a021-417a-8bc1-65c8d471c621" providerId="ADAL" clId="{34A2CF11-652E-6345-AC5C-A89FACA07C4E}" dt="2020-02-28T13:54:19.243" v="1410" actId="20577"/>
-        <pc:sldMkLst>
-          <pc:docMk/>
-          <pc:sldMk cId="3813527744" sldId="527"/>
-        </pc:sldMkLst>
-        <pc:spChg chg="mod">
-          <ac:chgData name="Long B Nguyen" userId="f59fb8f3-a021-417a-8bc1-65c8d471c621" providerId="ADAL" clId="{34A2CF11-652E-6345-AC5C-A89FACA07C4E}" dt="2020-02-28T13:54:19.243" v="1410" actId="20577"/>
-          <ac:spMkLst>
-            <pc:docMk/>
-            <pc:sldMk cId="3813527744" sldId="527"/>
-            <ac:spMk id="17410" creationId="{C9772176-DC13-F64D-AC00-58F2A4791B97}"/>
-          </ac:spMkLst>
-        </pc:spChg>
-      </pc:sldChg>
-      <pc:sldChg chg="modSp">
-        <pc:chgData name="Long B Nguyen" userId="f59fb8f3-a021-417a-8bc1-65c8d471c621" providerId="ADAL" clId="{34A2CF11-652E-6345-AC5C-A89FACA07C4E}" dt="2020-02-25T15:08:00.858" v="55" actId="255"/>
-        <pc:sldMkLst>
-          <pc:docMk/>
-          <pc:sldMk cId="1445950413" sldId="528"/>
-        </pc:sldMkLst>
-        <pc:spChg chg="mod">
-          <ac:chgData name="Long B Nguyen" userId="f59fb8f3-a021-417a-8bc1-65c8d471c621" providerId="ADAL" clId="{34A2CF11-652E-6345-AC5C-A89FACA07C4E}" dt="2020-02-25T15:08:00.858" v="55" actId="255"/>
-          <ac:spMkLst>
-            <pc:docMk/>
-            <pc:sldMk cId="1445950413" sldId="528"/>
-            <ac:spMk id="27651" creationId="{DCF5F58B-FD97-FE43-BD35-9AA575595114}"/>
-          </ac:spMkLst>
-        </pc:spChg>
-      </pc:sldChg>
-      <pc:sldChg chg="modSp modAnim">
-        <pc:chgData name="Long B Nguyen" userId="f59fb8f3-a021-417a-8bc1-65c8d471c621" providerId="ADAL" clId="{34A2CF11-652E-6345-AC5C-A89FACA07C4E}" dt="2020-02-28T13:56:32.314" v="1412" actId="20577"/>
-        <pc:sldMkLst>
-          <pc:docMk/>
-          <pc:sldMk cId="1720314276" sldId="566"/>
-        </pc:sldMkLst>
-        <pc:spChg chg="mod">
-          <ac:chgData name="Long B Nguyen" userId="f59fb8f3-a021-417a-8bc1-65c8d471c621" providerId="ADAL" clId="{34A2CF11-652E-6345-AC5C-A89FACA07C4E}" dt="2020-02-25T15:07:35.151" v="50" actId="1076"/>
-          <ac:spMkLst>
-            <pc:docMk/>
-            <pc:sldMk cId="1720314276" sldId="566"/>
-            <ac:spMk id="25601" creationId="{DE009A6C-99D8-1641-8A8A-B18B81FC62CD}"/>
-          </ac:spMkLst>
-        </pc:spChg>
-        <pc:spChg chg="mod">
-          <ac:chgData name="Long B Nguyen" userId="f59fb8f3-a021-417a-8bc1-65c8d471c621" providerId="ADAL" clId="{34A2CF11-652E-6345-AC5C-A89FACA07C4E}" dt="2020-02-28T13:56:32.314" v="1412" actId="20577"/>
-          <ac:spMkLst>
-            <pc:docMk/>
-            <pc:sldMk cId="1720314276" sldId="566"/>
-            <ac:spMk id="25602" creationId="{CB052219-FFAE-0F41-8A86-C30BB9EF6F35}"/>
-          </ac:spMkLst>
-        </pc:spChg>
-      </pc:sldChg>
-      <pc:sldChg chg="modSp modAnim">
-        <pc:chgData name="Long B Nguyen" userId="f59fb8f3-a021-417a-8bc1-65c8d471c621" providerId="ADAL" clId="{34A2CF11-652E-6345-AC5C-A89FACA07C4E}" dt="2020-02-25T15:09:21.882" v="167" actId="20577"/>
-        <pc:sldMkLst>
-          <pc:docMk/>
-          <pc:sldMk cId="198395083" sldId="567"/>
-        </pc:sldMkLst>
-        <pc:spChg chg="mod">
-          <ac:chgData name="Long B Nguyen" userId="f59fb8f3-a021-417a-8bc1-65c8d471c621" providerId="ADAL" clId="{34A2CF11-652E-6345-AC5C-A89FACA07C4E}" dt="2020-02-25T15:04:29.039" v="8" actId="1076"/>
-          <ac:spMkLst>
-            <pc:docMk/>
-            <pc:sldMk cId="198395083" sldId="567"/>
-            <ac:spMk id="27649" creationId="{84C172EC-4FFF-674B-98FB-C1FB0C2BD605}"/>
-          </ac:spMkLst>
-        </pc:spChg>
-        <pc:spChg chg="mod">
-          <ac:chgData name="Long B Nguyen" userId="f59fb8f3-a021-417a-8bc1-65c8d471c621" providerId="ADAL" clId="{34A2CF11-652E-6345-AC5C-A89FACA07C4E}" dt="2020-02-25T15:09:21.882" v="167" actId="20577"/>
-          <ac:spMkLst>
-            <pc:docMk/>
-            <pc:sldMk cId="198395083" sldId="567"/>
-            <ac:spMk id="27650" creationId="{5760563D-95CB-F842-9A06-99DB9A606240}"/>
-          </ac:spMkLst>
-        </pc:spChg>
-      </pc:sldChg>
-      <pc:sldChg chg="modSp">
-        <pc:chgData name="Long B Nguyen" userId="f59fb8f3-a021-417a-8bc1-65c8d471c621" providerId="ADAL" clId="{34A2CF11-652E-6345-AC5C-A89FACA07C4E}" dt="2020-02-25T15:05:17.624" v="22" actId="1076"/>
-        <pc:sldMkLst>
-          <pc:docMk/>
-          <pc:sldMk cId="1070622160" sldId="568"/>
-        </pc:sldMkLst>
-        <pc:spChg chg="mod">
-          <ac:chgData name="Long B Nguyen" userId="f59fb8f3-a021-417a-8bc1-65c8d471c621" providerId="ADAL" clId="{34A2CF11-652E-6345-AC5C-A89FACA07C4E}" dt="2020-02-25T15:04:56.343" v="16" actId="1076"/>
-          <ac:spMkLst>
-            <pc:docMk/>
-            <pc:sldMk cId="1070622160" sldId="568"/>
-            <ac:spMk id="29697" creationId="{FE344302-6250-2241-8F6D-C448D16804F4}"/>
-          </ac:spMkLst>
-        </pc:spChg>
-        <pc:spChg chg="mod">
-          <ac:chgData name="Long B Nguyen" userId="f59fb8f3-a021-417a-8bc1-65c8d471c621" providerId="ADAL" clId="{34A2CF11-652E-6345-AC5C-A89FACA07C4E}" dt="2020-02-25T15:05:08.271" v="21" actId="5793"/>
-          <ac:spMkLst>
-            <pc:docMk/>
-            <pc:sldMk cId="1070622160" sldId="568"/>
-            <ac:spMk id="29698" creationId="{E66559DC-645B-874B-9A56-EC803A4B4B92}"/>
-          </ac:spMkLst>
-        </pc:spChg>
-        <pc:picChg chg="mod">
-          <ac:chgData name="Long B Nguyen" userId="f59fb8f3-a021-417a-8bc1-65c8d471c621" providerId="ADAL" clId="{34A2CF11-652E-6345-AC5C-A89FACA07C4E}" dt="2020-02-25T15:05:17.624" v="22" actId="1076"/>
-          <ac:picMkLst>
-            <pc:docMk/>
-            <pc:sldMk cId="1070622160" sldId="568"/>
-            <ac:picMk id="29699" creationId="{090A5754-8CAB-3747-8068-84BA02EDFD26}"/>
-          </ac:picMkLst>
-        </pc:picChg>
-      </pc:sldChg>
-      <pc:sldChg chg="modSp modAnim">
-        <pc:chgData name="Long B Nguyen" userId="f59fb8f3-a021-417a-8bc1-65c8d471c621" providerId="ADAL" clId="{34A2CF11-652E-6345-AC5C-A89FACA07C4E}" dt="2020-02-25T15:11:25.959" v="181" actId="20577"/>
-        <pc:sldMkLst>
-          <pc:docMk/>
-          <pc:sldMk cId="4001486838" sldId="570"/>
-        </pc:sldMkLst>
-        <pc:spChg chg="mod">
-          <ac:chgData name="Long B Nguyen" userId="f59fb8f3-a021-417a-8bc1-65c8d471c621" providerId="ADAL" clId="{34A2CF11-652E-6345-AC5C-A89FACA07C4E}" dt="2020-02-25T15:10:37.671" v="176" actId="1076"/>
-          <ac:spMkLst>
-            <pc:docMk/>
-            <pc:sldMk cId="4001486838" sldId="570"/>
-            <ac:spMk id="39937" creationId="{7CD89787-5856-7640-A8D5-FF2B48692349}"/>
-          </ac:spMkLst>
-        </pc:spChg>
-        <pc:spChg chg="mod">
-          <ac:chgData name="Long B Nguyen" userId="f59fb8f3-a021-417a-8bc1-65c8d471c621" providerId="ADAL" clId="{34A2CF11-652E-6345-AC5C-A89FACA07C4E}" dt="2020-02-25T15:11:25.959" v="181" actId="20577"/>
-          <ac:spMkLst>
-            <pc:docMk/>
-            <pc:sldMk cId="4001486838" sldId="570"/>
-            <ac:spMk id="39938" creationId="{6D60C863-7ABD-3143-ABF5-601EEB054571}"/>
-          </ac:spMkLst>
-        </pc:spChg>
-      </pc:sldChg>
-      <pc:sldChg chg="modSp">
-        <pc:chgData name="Long B Nguyen" userId="f59fb8f3-a021-417a-8bc1-65c8d471c621" providerId="ADAL" clId="{34A2CF11-652E-6345-AC5C-A89FACA07C4E}" dt="2020-02-25T15:05:41.826" v="30" actId="5793"/>
-        <pc:sldMkLst>
-          <pc:docMk/>
-          <pc:sldMk cId="2901569448" sldId="571"/>
-        </pc:sldMkLst>
-        <pc:spChg chg="mod">
-          <ac:chgData name="Long B Nguyen" userId="f59fb8f3-a021-417a-8bc1-65c8d471c621" providerId="ADAL" clId="{34A2CF11-652E-6345-AC5C-A89FACA07C4E}" dt="2020-02-25T15:05:31.134" v="26" actId="1076"/>
-          <ac:spMkLst>
-            <pc:docMk/>
-            <pc:sldMk cId="2901569448" sldId="571"/>
-            <ac:spMk id="31745" creationId="{C5308C83-3686-0243-B14A-C98C71EB681A}"/>
-          </ac:spMkLst>
-        </pc:spChg>
-        <pc:spChg chg="mod">
-          <ac:chgData name="Long B Nguyen" userId="f59fb8f3-a021-417a-8bc1-65c8d471c621" providerId="ADAL" clId="{34A2CF11-652E-6345-AC5C-A89FACA07C4E}" dt="2020-02-25T15:05:41.826" v="30" actId="5793"/>
-          <ac:spMkLst>
-            <pc:docMk/>
-            <pc:sldMk cId="2901569448" sldId="571"/>
-            <ac:spMk id="31746" creationId="{CA1C5CB3-5B3D-4641-9849-F15DD036946A}"/>
-          </ac:spMkLst>
-        </pc:spChg>
-      </pc:sldChg>
-      <pc:sldChg chg="modSp">
-        <pc:chgData name="Long B Nguyen" userId="f59fb8f3-a021-417a-8bc1-65c8d471c621" providerId="ADAL" clId="{34A2CF11-652E-6345-AC5C-A89FACA07C4E}" dt="2020-02-25T15:10:25.707" v="172" actId="14100"/>
-        <pc:sldMkLst>
-          <pc:docMk/>
-          <pc:sldMk cId="2135159274" sldId="573"/>
-        </pc:sldMkLst>
-        <pc:spChg chg="mod">
-          <ac:chgData name="Long B Nguyen" userId="f59fb8f3-a021-417a-8bc1-65c8d471c621" providerId="ADAL" clId="{34A2CF11-652E-6345-AC5C-A89FACA07C4E}" dt="2020-02-25T15:10:25.707" v="172" actId="14100"/>
-          <ac:spMkLst>
-            <pc:docMk/>
-            <pc:sldMk cId="2135159274" sldId="573"/>
-            <ac:spMk id="37890" creationId="{D5A7A0E7-48AA-5144-A3FE-3363DFC01CF5}"/>
-          </ac:spMkLst>
-        </pc:spChg>
-      </pc:sldChg>
-      <pc:sldChg chg="modSp">
-        <pc:chgData name="Long B Nguyen" userId="f59fb8f3-a021-417a-8bc1-65c8d471c621" providerId="ADAL" clId="{34A2CF11-652E-6345-AC5C-A89FACA07C4E}" dt="2020-02-25T15:15:06.511" v="228" actId="1076"/>
-        <pc:sldMkLst>
-          <pc:docMk/>
-          <pc:sldMk cId="3391101355" sldId="575"/>
-        </pc:sldMkLst>
-        <pc:spChg chg="mod">
-          <ac:chgData name="Long B Nguyen" userId="f59fb8f3-a021-417a-8bc1-65c8d471c621" providerId="ADAL" clId="{34A2CF11-652E-6345-AC5C-A89FACA07C4E}" dt="2020-02-25T15:15:00.887" v="226" actId="5793"/>
-          <ac:spMkLst>
-            <pc:docMk/>
-            <pc:sldMk cId="3391101355" sldId="575"/>
-            <ac:spMk id="27651" creationId="{47FD0DF8-5133-F34E-AB80-6AF0E271D1FF}"/>
-          </ac:spMkLst>
-        </pc:spChg>
-        <pc:spChg chg="mod">
-          <ac:chgData name="Long B Nguyen" userId="f59fb8f3-a021-417a-8bc1-65c8d471c621" providerId="ADAL" clId="{34A2CF11-652E-6345-AC5C-A89FACA07C4E}" dt="2020-02-25T15:15:06.511" v="228" actId="1076"/>
-          <ac:spMkLst>
-            <pc:docMk/>
-            <pc:sldMk cId="3391101355" sldId="575"/>
-            <ac:spMk id="59393" creationId="{0845453A-A29A-9A42-9905-72E41E15DA8F}"/>
-          </ac:spMkLst>
-        </pc:spChg>
-      </pc:sldChg>
-      <pc:sldChg chg="modSp">
-        <pc:chgData name="Long B Nguyen" userId="f59fb8f3-a021-417a-8bc1-65c8d471c621" providerId="ADAL" clId="{34A2CF11-652E-6345-AC5C-A89FACA07C4E}" dt="2020-02-25T15:13:13.689" v="198" actId="5793"/>
-        <pc:sldMkLst>
-          <pc:docMk/>
-          <pc:sldMk cId="3275116272" sldId="576"/>
-        </pc:sldMkLst>
-        <pc:spChg chg="mod">
-          <ac:chgData name="Long B Nguyen" userId="f59fb8f3-a021-417a-8bc1-65c8d471c621" providerId="ADAL" clId="{34A2CF11-652E-6345-AC5C-A89FACA07C4E}" dt="2020-02-25T15:13:13.689" v="198" actId="5793"/>
-          <ac:spMkLst>
-            <pc:docMk/>
-            <pc:sldMk cId="3275116272" sldId="576"/>
-            <ac:spMk id="54274" creationId="{6A77A454-E9F7-204D-9394-2BA466B041AA}"/>
-          </ac:spMkLst>
-        </pc:spChg>
-        <pc:spChg chg="mod">
-          <ac:chgData name="Long B Nguyen" userId="f59fb8f3-a021-417a-8bc1-65c8d471c621" providerId="ADAL" clId="{34A2CF11-652E-6345-AC5C-A89FACA07C4E}" dt="2020-02-25T15:13:00.991" v="192" actId="1076"/>
-          <ac:spMkLst>
-            <pc:docMk/>
-            <pc:sldMk cId="3275116272" sldId="576"/>
-            <ac:spMk id="55297" creationId="{D1309B3C-E6F6-2741-82EB-369B5DBEE833}"/>
-          </ac:spMkLst>
-        </pc:spChg>
-      </pc:sldChg>
-      <pc:sldChg chg="modSp modAnim">
-        <pc:chgData name="Long B Nguyen" userId="f59fb8f3-a021-417a-8bc1-65c8d471c621" providerId="ADAL" clId="{34A2CF11-652E-6345-AC5C-A89FACA07C4E}" dt="2020-02-25T15:06:05.921" v="39" actId="20577"/>
-        <pc:sldMkLst>
-          <pc:docMk/>
-          <pc:sldMk cId="1727266702" sldId="578"/>
-        </pc:sldMkLst>
-        <pc:spChg chg="mod">
-          <ac:chgData name="Long B Nguyen" userId="f59fb8f3-a021-417a-8bc1-65c8d471c621" providerId="ADAL" clId="{34A2CF11-652E-6345-AC5C-A89FACA07C4E}" dt="2020-02-25T15:05:51.316" v="32" actId="1076"/>
-          <ac:spMkLst>
-            <pc:docMk/>
-            <pc:sldMk cId="1727266702" sldId="578"/>
-            <ac:spMk id="33793" creationId="{3553DE6C-30A9-C943-BBC0-80F5551E5745}"/>
-          </ac:spMkLst>
-        </pc:spChg>
-        <pc:spChg chg="mod">
-          <ac:chgData name="Long B Nguyen" userId="f59fb8f3-a021-417a-8bc1-65c8d471c621" providerId="ADAL" clId="{34A2CF11-652E-6345-AC5C-A89FACA07C4E}" dt="2020-02-25T15:06:05.921" v="39" actId="20577"/>
-          <ac:spMkLst>
-            <pc:docMk/>
-            <pc:sldMk cId="1727266702" sldId="578"/>
-            <ac:spMk id="33794" creationId="{1B9931B8-23E4-C546-8529-25A8A3CB57FD}"/>
-          </ac:spMkLst>
-        </pc:spChg>
-      </pc:sldChg>
-      <pc:sldChg chg="modSp">
-        <pc:chgData name="Long B Nguyen" userId="f59fb8f3-a021-417a-8bc1-65c8d471c621" providerId="ADAL" clId="{34A2CF11-652E-6345-AC5C-A89FACA07C4E}" dt="2020-02-25T15:10:09.921" v="168" actId="2711"/>
-        <pc:sldMkLst>
-          <pc:docMk/>
-          <pc:sldMk cId="665490485" sldId="579"/>
-        </pc:sldMkLst>
-        <pc:spChg chg="mod">
-          <ac:chgData name="Long B Nguyen" userId="f59fb8f3-a021-417a-8bc1-65c8d471c621" providerId="ADAL" clId="{34A2CF11-652E-6345-AC5C-A89FACA07C4E}" dt="2020-02-25T15:06:19.876" v="43" actId="1076"/>
-          <ac:spMkLst>
-            <pc:docMk/>
-            <pc:sldMk cId="665490485" sldId="579"/>
-            <ac:spMk id="35841" creationId="{10C91E1B-6F62-5440-A8B3-71AEF2909C3E}"/>
-          </ac:spMkLst>
-        </pc:spChg>
-        <pc:spChg chg="mod">
-          <ac:chgData name="Long B Nguyen" userId="f59fb8f3-a021-417a-8bc1-65c8d471c621" providerId="ADAL" clId="{34A2CF11-652E-6345-AC5C-A89FACA07C4E}" dt="2020-02-25T15:10:09.921" v="168" actId="2711"/>
-          <ac:spMkLst>
-            <pc:docMk/>
-            <pc:sldMk cId="665490485" sldId="579"/>
-            <ac:spMk id="35842" creationId="{C6DC7E6C-DF38-9748-B0D1-7D7B63795E45}"/>
-          </ac:spMkLst>
-        </pc:spChg>
-      </pc:sldChg>
-      <pc:sldChg chg="addSp delSp modSp modAnim">
-        <pc:chgData name="Long B Nguyen" userId="f59fb8f3-a021-417a-8bc1-65c8d471c621" providerId="ADAL" clId="{34A2CF11-652E-6345-AC5C-A89FACA07C4E}" dt="2020-02-28T14:46:23.469" v="1418" actId="113"/>
-        <pc:sldMkLst>
-          <pc:docMk/>
-          <pc:sldMk cId="1237537268" sldId="583"/>
-        </pc:sldMkLst>
-        <pc:spChg chg="add del mod">
-          <ac:chgData name="Long B Nguyen" userId="f59fb8f3-a021-417a-8bc1-65c8d471c621" providerId="ADAL" clId="{34A2CF11-652E-6345-AC5C-A89FACA07C4E}" dt="2020-02-25T15:14:51.352" v="222"/>
-          <ac:spMkLst>
-            <pc:docMk/>
-            <pc:sldMk cId="1237537268" sldId="583"/>
-            <ac:spMk id="2" creationId="{ED646CD3-F452-494F-9C6B-294938DD2A28}"/>
-          </ac:spMkLst>
-        </pc:spChg>
-        <pc:spChg chg="mod">
-          <ac:chgData name="Long B Nguyen" userId="f59fb8f3-a021-417a-8bc1-65c8d471c621" providerId="ADAL" clId="{34A2CF11-652E-6345-AC5C-A89FACA07C4E}" dt="2020-02-28T14:46:23.469" v="1418" actId="113"/>
-          <ac:spMkLst>
-            <pc:docMk/>
-            <pc:sldMk cId="1237537268" sldId="583"/>
-            <ac:spMk id="56322" creationId="{C6A7743F-88FF-7C47-8B09-99222CD5E28E}"/>
-          </ac:spMkLst>
-        </pc:spChg>
-        <pc:spChg chg="mod">
-          <ac:chgData name="Long B Nguyen" userId="f59fb8f3-a021-417a-8bc1-65c8d471c621" providerId="ADAL" clId="{34A2CF11-652E-6345-AC5C-A89FACA07C4E}" dt="2020-02-25T15:14:05.982" v="209" actId="1076"/>
-          <ac:spMkLst>
-            <pc:docMk/>
-            <pc:sldMk cId="1237537268" sldId="583"/>
-            <ac:spMk id="57345" creationId="{CDA4A9B2-8639-C840-B975-2791E963EF68}"/>
-          </ac:spMkLst>
-        </pc:spChg>
-      </pc:sldChg>
-      <pc:sldChg chg="modSp">
-        <pc:chgData name="Long B Nguyen" userId="f59fb8f3-a021-417a-8bc1-65c8d471c621" providerId="ADAL" clId="{34A2CF11-652E-6345-AC5C-A89FACA07C4E}" dt="2020-02-25T15:15:56.112" v="245" actId="20577"/>
-        <pc:sldMkLst>
-          <pc:docMk/>
-          <pc:sldMk cId="4256317276" sldId="584"/>
-        </pc:sldMkLst>
-        <pc:spChg chg="mod">
-          <ac:chgData name="Long B Nguyen" userId="f59fb8f3-a021-417a-8bc1-65c8d471c621" providerId="ADAL" clId="{34A2CF11-652E-6345-AC5C-A89FACA07C4E}" dt="2020-02-25T15:15:56.112" v="245" actId="20577"/>
-          <ac:spMkLst>
-            <pc:docMk/>
-            <pc:sldMk cId="4256317276" sldId="584"/>
-            <ac:spMk id="62466" creationId="{000A13C9-560A-5C49-962A-A1D927D320E7}"/>
-          </ac:spMkLst>
-        </pc:spChg>
-        <pc:spChg chg="mod">
-          <ac:chgData name="Long B Nguyen" userId="f59fb8f3-a021-417a-8bc1-65c8d471c621" providerId="ADAL" clId="{34A2CF11-652E-6345-AC5C-A89FACA07C4E}" dt="2020-02-25T15:15:43.613" v="238" actId="1076"/>
-          <ac:spMkLst>
-            <pc:docMk/>
-            <pc:sldMk cId="4256317276" sldId="584"/>
-            <ac:spMk id="63489" creationId="{06AE9859-A2B0-6240-B232-7259A57B6F5E}"/>
-          </ac:spMkLst>
-        </pc:spChg>
-      </pc:sldChg>
-      <pc:sldChg chg="modSp modAnim">
-        <pc:chgData name="Long B Nguyen" userId="f59fb8f3-a021-417a-8bc1-65c8d471c621" providerId="ADAL" clId="{34A2CF11-652E-6345-AC5C-A89FACA07C4E}" dt="2020-02-25T15:23:21.337" v="341" actId="255"/>
-        <pc:sldMkLst>
-          <pc:docMk/>
-          <pc:sldMk cId="3977893820" sldId="585"/>
-        </pc:sldMkLst>
-        <pc:spChg chg="mod">
-          <ac:chgData name="Long B Nguyen" userId="f59fb8f3-a021-417a-8bc1-65c8d471c621" providerId="ADAL" clId="{34A2CF11-652E-6345-AC5C-A89FACA07C4E}" dt="2020-02-25T15:23:21.337" v="341" actId="255"/>
-          <ac:spMkLst>
-            <pc:docMk/>
-            <pc:sldMk cId="3977893820" sldId="585"/>
-            <ac:spMk id="64514" creationId="{7788F03B-8D64-E645-BC3F-DBD76C93C456}"/>
-          </ac:spMkLst>
-        </pc:spChg>
-        <pc:spChg chg="mod">
-          <ac:chgData name="Long B Nguyen" userId="f59fb8f3-a021-417a-8bc1-65c8d471c621" providerId="ADAL" clId="{34A2CF11-652E-6345-AC5C-A89FACA07C4E}" dt="2020-02-25T15:16:10.848" v="249" actId="1076"/>
-          <ac:spMkLst>
-            <pc:docMk/>
-            <pc:sldMk cId="3977893820" sldId="585"/>
-            <ac:spMk id="65537" creationId="{86430671-77D5-6E4C-94A5-D61EB184D3ED}"/>
-          </ac:spMkLst>
-        </pc:spChg>
-      </pc:sldChg>
-      <pc:sldChg chg="modSp modAnim">
-        <pc:chgData name="Long B Nguyen" userId="f59fb8f3-a021-417a-8bc1-65c8d471c621" providerId="ADAL" clId="{34A2CF11-652E-6345-AC5C-A89FACA07C4E}" dt="2020-02-25T15:47:51.312" v="428" actId="20577"/>
-        <pc:sldMkLst>
-          <pc:docMk/>
-          <pc:sldMk cId="1319289224" sldId="586"/>
-        </pc:sldMkLst>
-        <pc:spChg chg="mod">
-          <ac:chgData name="Long B Nguyen" userId="f59fb8f3-a021-417a-8bc1-65c8d471c621" providerId="ADAL" clId="{34A2CF11-652E-6345-AC5C-A89FACA07C4E}" dt="2020-02-25T15:47:51.312" v="428" actId="20577"/>
-          <ac:spMkLst>
-            <pc:docMk/>
-            <pc:sldMk cId="1319289224" sldId="586"/>
-            <ac:spMk id="66562" creationId="{6FAB6F92-236E-CB4C-AAB0-F158777360DD}"/>
-          </ac:spMkLst>
-        </pc:spChg>
-        <pc:spChg chg="mod">
-          <ac:chgData name="Long B Nguyen" userId="f59fb8f3-a021-417a-8bc1-65c8d471c621" providerId="ADAL" clId="{34A2CF11-652E-6345-AC5C-A89FACA07C4E}" dt="2020-02-25T15:46:37.078" v="420" actId="1076"/>
-          <ac:spMkLst>
-            <pc:docMk/>
-            <pc:sldMk cId="1319289224" sldId="586"/>
-            <ac:spMk id="67585" creationId="{6089FBFB-967C-FD45-992B-EB81E5CF2976}"/>
-          </ac:spMkLst>
-        </pc:spChg>
-      </pc:sldChg>
-      <pc:sldChg chg="modSp">
-        <pc:chgData name="Long B Nguyen" userId="f59fb8f3-a021-417a-8bc1-65c8d471c621" providerId="ADAL" clId="{34A2CF11-652E-6345-AC5C-A89FACA07C4E}" dt="2020-02-28T14:52:08.779" v="1420" actId="113"/>
-        <pc:sldMkLst>
-          <pc:docMk/>
-          <pc:sldMk cId="2894020677" sldId="587"/>
-        </pc:sldMkLst>
-        <pc:spChg chg="mod">
-          <ac:chgData name="Long B Nguyen" userId="f59fb8f3-a021-417a-8bc1-65c8d471c621" providerId="ADAL" clId="{34A2CF11-652E-6345-AC5C-A89FACA07C4E}" dt="2020-02-28T14:52:08.779" v="1420" actId="113"/>
-          <ac:spMkLst>
-            <pc:docMk/>
-            <pc:sldMk cId="2894020677" sldId="587"/>
-            <ac:spMk id="68610" creationId="{A4345070-62DC-4946-AD43-299FA9B490E0}"/>
-          </ac:spMkLst>
-        </pc:spChg>
-        <pc:spChg chg="mod">
-          <ac:chgData name="Long B Nguyen" userId="f59fb8f3-a021-417a-8bc1-65c8d471c621" providerId="ADAL" clId="{34A2CF11-652E-6345-AC5C-A89FACA07C4E}" dt="2020-02-25T15:48:01.085" v="430" actId="1076"/>
-          <ac:spMkLst>
-            <pc:docMk/>
-            <pc:sldMk cId="2894020677" sldId="587"/>
-            <ac:spMk id="69633" creationId="{8C113226-FF22-D946-A8D9-BF2B6BAC62D2}"/>
-          </ac:spMkLst>
-        </pc:spChg>
-      </pc:sldChg>
-      <pc:sldChg chg="modSp">
-        <pc:chgData name="Long B Nguyen" userId="f59fb8f3-a021-417a-8bc1-65c8d471c621" providerId="ADAL" clId="{34A2CF11-652E-6345-AC5C-A89FACA07C4E}" dt="2020-02-25T15:15:28.597" v="236" actId="5793"/>
-        <pc:sldMkLst>
-          <pc:docMk/>
-          <pc:sldMk cId="3609960584" sldId="588"/>
-        </pc:sldMkLst>
-        <pc:spChg chg="mod">
-          <ac:chgData name="Long B Nguyen" userId="f59fb8f3-a021-417a-8bc1-65c8d471c621" providerId="ADAL" clId="{34A2CF11-652E-6345-AC5C-A89FACA07C4E}" dt="2020-02-25T15:15:28.597" v="236" actId="5793"/>
-          <ac:spMkLst>
-            <pc:docMk/>
-            <pc:sldMk cId="3609960584" sldId="588"/>
-            <ac:spMk id="27651" creationId="{D2E8AD57-ED30-A247-A629-D196B221ADDD}"/>
-          </ac:spMkLst>
-        </pc:spChg>
-        <pc:spChg chg="mod">
-          <ac:chgData name="Long B Nguyen" userId="f59fb8f3-a021-417a-8bc1-65c8d471c621" providerId="ADAL" clId="{34A2CF11-652E-6345-AC5C-A89FACA07C4E}" dt="2020-02-25T15:15:15.892" v="230" actId="1076"/>
-          <ac:spMkLst>
-            <pc:docMk/>
-            <pc:sldMk cId="3609960584" sldId="588"/>
-            <ac:spMk id="61441" creationId="{5D868FC1-4364-924A-9574-ECC30E407753}"/>
-          </ac:spMkLst>
-        </pc:spChg>
-      </pc:sldChg>
-      <pc:sldChg chg="modSp">
-        <pc:chgData name="Long B Nguyen" userId="f59fb8f3-a021-417a-8bc1-65c8d471c621" providerId="ADAL" clId="{34A2CF11-652E-6345-AC5C-A89FACA07C4E}" dt="2020-02-25T15:49:00.714" v="453" actId="20577"/>
-        <pc:sldMkLst>
-          <pc:docMk/>
-          <pc:sldMk cId="2527578196" sldId="589"/>
-        </pc:sldMkLst>
-        <pc:spChg chg="mod">
-          <ac:chgData name="Long B Nguyen" userId="f59fb8f3-a021-417a-8bc1-65c8d471c621" providerId="ADAL" clId="{34A2CF11-652E-6345-AC5C-A89FACA07C4E}" dt="2020-02-25T15:49:00.714" v="453" actId="20577"/>
-          <ac:spMkLst>
-            <pc:docMk/>
-            <pc:sldMk cId="2527578196" sldId="589"/>
-            <ac:spMk id="75777" creationId="{188EB92C-DDEE-294E-96AE-5B2F5541A13E}"/>
-          </ac:spMkLst>
-        </pc:spChg>
-        <pc:spChg chg="mod">
-          <ac:chgData name="Long B Nguyen" userId="f59fb8f3-a021-417a-8bc1-65c8d471c621" providerId="ADAL" clId="{34A2CF11-652E-6345-AC5C-A89FACA07C4E}" dt="2020-02-25T15:48:49.697" v="436" actId="14100"/>
-          <ac:spMkLst>
-            <pc:docMk/>
-            <pc:sldMk cId="2527578196" sldId="589"/>
-            <ac:spMk id="75778" creationId="{23AB5E3C-D5D9-064C-9574-DFF97AF265D0}"/>
-          </ac:spMkLst>
-        </pc:spChg>
-      </pc:sldChg>
-      <pc:sldChg chg="modSp">
-        <pc:chgData name="Long B Nguyen" userId="f59fb8f3-a021-417a-8bc1-65c8d471c621" providerId="ADAL" clId="{34A2CF11-652E-6345-AC5C-A89FACA07C4E}" dt="2020-02-25T15:49:55.314" v="492" actId="1076"/>
-        <pc:sldMkLst>
-          <pc:docMk/>
-          <pc:sldMk cId="3609937493" sldId="590"/>
-        </pc:sldMkLst>
-        <pc:spChg chg="mod">
-          <ac:chgData name="Long B Nguyen" userId="f59fb8f3-a021-417a-8bc1-65c8d471c621" providerId="ADAL" clId="{34A2CF11-652E-6345-AC5C-A89FACA07C4E}" dt="2020-02-25T15:49:55.314" v="492" actId="1076"/>
-          <ac:spMkLst>
-            <pc:docMk/>
-            <pc:sldMk cId="3609937493" sldId="590"/>
-            <ac:spMk id="79873" creationId="{E8B36DA1-FD32-914E-8D09-91D267F39A7A}"/>
-          </ac:spMkLst>
-        </pc:spChg>
-        <pc:spChg chg="mod">
-          <ac:chgData name="Long B Nguyen" userId="f59fb8f3-a021-417a-8bc1-65c8d471c621" providerId="ADAL" clId="{34A2CF11-652E-6345-AC5C-A89FACA07C4E}" dt="2020-02-25T15:49:50.463" v="490" actId="14100"/>
-          <ac:spMkLst>
-            <pc:docMk/>
-            <pc:sldMk cId="3609937493" sldId="590"/>
-            <ac:spMk id="79874" creationId="{C365A828-14EF-694A-9BBF-E18CC423E31B}"/>
-          </ac:spMkLst>
-        </pc:spChg>
-        <pc:picChg chg="mod">
-          <ac:chgData name="Long B Nguyen" userId="f59fb8f3-a021-417a-8bc1-65c8d471c621" providerId="ADAL" clId="{34A2CF11-652E-6345-AC5C-A89FACA07C4E}" dt="2020-02-25T15:49:43.277" v="488" actId="14100"/>
-          <ac:picMkLst>
-            <pc:docMk/>
-            <pc:sldMk cId="3609937493" sldId="590"/>
-            <ac:picMk id="79875" creationId="{CE627FFA-2BD4-3244-9CFB-E9A8530A32E1}"/>
-          </ac:picMkLst>
-        </pc:picChg>
-      </pc:sldChg>
-      <pc:sldChg chg="modSp">
-        <pc:chgData name="Long B Nguyen" userId="f59fb8f3-a021-417a-8bc1-65c8d471c621" providerId="ADAL" clId="{34A2CF11-652E-6345-AC5C-A89FACA07C4E}" dt="2020-02-25T15:49:31.728" v="486" actId="1036"/>
-        <pc:sldMkLst>
-          <pc:docMk/>
-          <pc:sldMk cId="4266553646" sldId="591"/>
-        </pc:sldMkLst>
-        <pc:spChg chg="mod">
-          <ac:chgData name="Long B Nguyen" userId="f59fb8f3-a021-417a-8bc1-65c8d471c621" providerId="ADAL" clId="{34A2CF11-652E-6345-AC5C-A89FACA07C4E}" dt="2020-02-25T15:49:31.728" v="486" actId="1036"/>
-          <ac:spMkLst>
-            <pc:docMk/>
-            <pc:sldMk cId="4266553646" sldId="591"/>
-            <ac:spMk id="77825" creationId="{21CC4A42-EA8F-BF47-ADD5-B721E414F5F2}"/>
-          </ac:spMkLst>
-        </pc:spChg>
-        <pc:spChg chg="mod">
-          <ac:chgData name="Long B Nguyen" userId="f59fb8f3-a021-417a-8bc1-65c8d471c621" providerId="ADAL" clId="{34A2CF11-652E-6345-AC5C-A89FACA07C4E}" dt="2020-02-25T15:49:20.882" v="474" actId="14100"/>
-          <ac:spMkLst>
-            <pc:docMk/>
-            <pc:sldMk cId="4266553646" sldId="591"/>
-            <ac:spMk id="77826" creationId="{07CDE7D8-6D62-BA4B-8A6C-4F0744144459}"/>
-          </ac:spMkLst>
-        </pc:spChg>
-      </pc:sldChg>
-      <pc:sldChg chg="delSp modSp del">
-        <pc:chgData name="Long B Nguyen" userId="f59fb8f3-a021-417a-8bc1-65c8d471c621" providerId="ADAL" clId="{34A2CF11-652E-6345-AC5C-A89FACA07C4E}" dt="2020-02-28T14:52:21.453" v="1421" actId="2696"/>
-        <pc:sldMkLst>
-          <pc:docMk/>
-          <pc:sldMk cId="4126212206" sldId="592"/>
-        </pc:sldMkLst>
-        <pc:spChg chg="mod">
-          <ac:chgData name="Long B Nguyen" userId="f59fb8f3-a021-417a-8bc1-65c8d471c621" providerId="ADAL" clId="{34A2CF11-652E-6345-AC5C-A89FACA07C4E}" dt="2020-02-25T15:50:54.514" v="505" actId="1076"/>
-          <ac:spMkLst>
-            <pc:docMk/>
-            <pc:sldMk cId="4126212206" sldId="592"/>
-            <ac:spMk id="84993" creationId="{C169A412-E2F9-004D-A0EF-86F1C409823C}"/>
-          </ac:spMkLst>
-        </pc:spChg>
-        <pc:spChg chg="mod">
-          <ac:chgData name="Long B Nguyen" userId="f59fb8f3-a021-417a-8bc1-65c8d471c621" providerId="ADAL" clId="{34A2CF11-652E-6345-AC5C-A89FACA07C4E}" dt="2020-02-25T15:54:31.469" v="526" actId="113"/>
-          <ac:spMkLst>
-            <pc:docMk/>
-            <pc:sldMk cId="4126212206" sldId="592"/>
-            <ac:spMk id="84994" creationId="{6971D443-43C5-2E43-8019-712D595D62F2}"/>
-          </ac:spMkLst>
-        </pc:spChg>
-        <pc:picChg chg="del mod">
-          <ac:chgData name="Long B Nguyen" userId="f59fb8f3-a021-417a-8bc1-65c8d471c621" providerId="ADAL" clId="{34A2CF11-652E-6345-AC5C-A89FACA07C4E}" dt="2020-02-25T15:53:53.262" v="513" actId="478"/>
-          <ac:picMkLst>
-            <pc:docMk/>
-            <pc:sldMk cId="4126212206" sldId="592"/>
-            <ac:picMk id="84995" creationId="{D74B79FF-3957-A841-989F-1A7CCA0A7940}"/>
-          </ac:picMkLst>
-        </pc:picChg>
-      </pc:sldChg>
-      <pc:sldChg chg="del">
-        <pc:chgData name="Long B Nguyen" userId="f59fb8f3-a021-417a-8bc1-65c8d471c621" providerId="ADAL" clId="{34A2CF11-652E-6345-AC5C-A89FACA07C4E}" dt="2020-02-25T15:53:20.954" v="511" actId="2696"/>
-        <pc:sldMkLst>
-          <pc:docMk/>
-          <pc:sldMk cId="2279088232" sldId="595"/>
-        </pc:sldMkLst>
-      </pc:sldChg>
-      <pc:sldChg chg="del">
-        <pc:chgData name="Long B Nguyen" userId="f59fb8f3-a021-417a-8bc1-65c8d471c621" providerId="ADAL" clId="{34A2CF11-652E-6345-AC5C-A89FACA07C4E}" dt="2020-02-25T15:53:19.581" v="510" actId="2696"/>
-        <pc:sldMkLst>
-          <pc:docMk/>
-          <pc:sldMk cId="1584709501" sldId="596"/>
-        </pc:sldMkLst>
-      </pc:sldChg>
-      <pc:sldChg chg="modSp del modAnim">
-        <pc:chgData name="Long B Nguyen" userId="f59fb8f3-a021-417a-8bc1-65c8d471c621" providerId="ADAL" clId="{34A2CF11-652E-6345-AC5C-A89FACA07C4E}" dt="2020-02-25T15:12:52.196" v="190" actId="2696"/>
-        <pc:sldMkLst>
-          <pc:docMk/>
-          <pc:sldMk cId="3065633131" sldId="604"/>
-        </pc:sldMkLst>
-        <pc:spChg chg="mod">
-          <ac:chgData name="Long B Nguyen" userId="f59fb8f3-a021-417a-8bc1-65c8d471c621" providerId="ADAL" clId="{34A2CF11-652E-6345-AC5C-A89FACA07C4E}" dt="2020-02-25T15:12:43.957" v="189" actId="20577"/>
-          <ac:spMkLst>
-            <pc:docMk/>
-            <pc:sldMk cId="3065633131" sldId="604"/>
-            <ac:spMk id="50178" creationId="{14937878-A5BD-0443-8F34-B0A863A78864}"/>
-          </ac:spMkLst>
-        </pc:spChg>
-        <pc:spChg chg="mod">
-          <ac:chgData name="Long B Nguyen" userId="f59fb8f3-a021-417a-8bc1-65c8d471c621" providerId="ADAL" clId="{34A2CF11-652E-6345-AC5C-A89FACA07C4E}" dt="2020-02-25T15:12:31.849" v="183" actId="1076"/>
-          <ac:spMkLst>
-            <pc:docMk/>
-            <pc:sldMk cId="3065633131" sldId="604"/>
-            <ac:spMk id="51201" creationId="{197E898E-0251-DF4C-8E64-7B1D3BF0CA82}"/>
-          </ac:spMkLst>
-        </pc:spChg>
-      </pc:sldChg>
-      <pc:sldChg chg="modSp del">
-        <pc:chgData name="Long B Nguyen" userId="f59fb8f3-a021-417a-8bc1-65c8d471c621" providerId="ADAL" clId="{34A2CF11-652E-6345-AC5C-A89FACA07C4E}" dt="2020-02-25T15:13:53.707" v="206" actId="2696"/>
-        <pc:sldMkLst>
-          <pc:docMk/>
-          <pc:sldMk cId="2263416976" sldId="605"/>
-        </pc:sldMkLst>
-        <pc:spChg chg="mod">
-          <ac:chgData name="Long B Nguyen" userId="f59fb8f3-a021-417a-8bc1-65c8d471c621" providerId="ADAL" clId="{34A2CF11-652E-6345-AC5C-A89FACA07C4E}" dt="2020-02-25T15:13:34.457" v="205" actId="5793"/>
-          <ac:spMkLst>
-            <pc:docMk/>
-            <pc:sldMk cId="2263416976" sldId="605"/>
-            <ac:spMk id="27651" creationId="{8414F638-A0BF-1B4A-9444-E7D185E09B3C}"/>
-          </ac:spMkLst>
-        </pc:spChg>
-        <pc:spChg chg="mod">
-          <ac:chgData name="Long B Nguyen" userId="f59fb8f3-a021-417a-8bc1-65c8d471c621" providerId="ADAL" clId="{34A2CF11-652E-6345-AC5C-A89FACA07C4E}" dt="2020-02-25T15:13:32.062" v="204" actId="1076"/>
-          <ac:spMkLst>
-            <pc:docMk/>
-            <pc:sldMk cId="2263416976" sldId="605"/>
-            <ac:spMk id="53249" creationId="{E45DFD43-86E0-7C46-B672-4F88F0E2A548}"/>
-          </ac:spMkLst>
-        </pc:spChg>
-      </pc:sldChg>
-      <pc:sldChg chg="modSp">
-        <pc:chgData name="Long B Nguyen" userId="f59fb8f3-a021-417a-8bc1-65c8d471c621" providerId="ADAL" clId="{34A2CF11-652E-6345-AC5C-A89FACA07C4E}" dt="2020-02-25T16:21:01.033" v="1409"/>
-        <pc:sldMkLst>
-          <pc:docMk/>
-          <pc:sldMk cId="2319263073" sldId="610"/>
-        </pc:sldMkLst>
-        <pc:spChg chg="mod">
-          <ac:chgData name="Long B Nguyen" userId="f59fb8f3-a021-417a-8bc1-65c8d471c621" providerId="ADAL" clId="{34A2CF11-652E-6345-AC5C-A89FACA07C4E}" dt="2020-02-25T16:21:01.033" v="1409"/>
-          <ac:spMkLst>
-            <pc:docMk/>
-            <pc:sldMk cId="2319263073" sldId="610"/>
-            <ac:spMk id="92162" creationId="{DFA6F312-AB30-8341-AC59-361BA5365D65}"/>
-          </ac:spMkLst>
-        </pc:spChg>
-      </pc:sldChg>
-      <pc:sldChg chg="modSp add modAnim">
-        <pc:chgData name="Long B Nguyen" userId="f59fb8f3-a021-417a-8bc1-65c8d471c621" providerId="ADAL" clId="{34A2CF11-652E-6345-AC5C-A89FACA07C4E}" dt="2020-02-25T15:18:40.361" v="298" actId="20577"/>
-        <pc:sldMkLst>
-          <pc:docMk/>
-          <pc:sldMk cId="1558241323" sldId="613"/>
-        </pc:sldMkLst>
-        <pc:spChg chg="mod">
-          <ac:chgData name="Long B Nguyen" userId="f59fb8f3-a021-417a-8bc1-65c8d471c621" providerId="ADAL" clId="{34A2CF11-652E-6345-AC5C-A89FACA07C4E}" dt="2020-02-25T15:18:19.998" v="281" actId="20577"/>
-          <ac:spMkLst>
-            <pc:docMk/>
-            <pc:sldMk cId="1558241323" sldId="613"/>
-            <ac:spMk id="64514" creationId="{7788F03B-8D64-E645-BC3F-DBD76C93C456}"/>
-          </ac:spMkLst>
-        </pc:spChg>
-        <pc:spChg chg="mod">
-          <ac:chgData name="Long B Nguyen" userId="f59fb8f3-a021-417a-8bc1-65c8d471c621" providerId="ADAL" clId="{34A2CF11-652E-6345-AC5C-A89FACA07C4E}" dt="2020-02-25T15:18:40.361" v="298" actId="20577"/>
-          <ac:spMkLst>
-            <pc:docMk/>
-            <pc:sldMk cId="1558241323" sldId="613"/>
-            <ac:spMk id="65537" creationId="{86430671-77D5-6E4C-94A5-D61EB184D3ED}"/>
-          </ac:spMkLst>
-        </pc:spChg>
-      </pc:sldChg>
-      <pc:sldChg chg="modSp add del">
-        <pc:chgData name="Long B Nguyen" userId="f59fb8f3-a021-417a-8bc1-65c8d471c621" providerId="ADAL" clId="{34A2CF11-652E-6345-AC5C-A89FACA07C4E}" dt="2020-02-25T15:19:10.925" v="318" actId="2696"/>
-        <pc:sldMkLst>
-          <pc:docMk/>
-          <pc:sldMk cId="3595252648" sldId="614"/>
-        </pc:sldMkLst>
-        <pc:spChg chg="mod">
-          <ac:chgData name="Long B Nguyen" userId="f59fb8f3-a021-417a-8bc1-65c8d471c621" providerId="ADAL" clId="{34A2CF11-652E-6345-AC5C-A89FACA07C4E}" dt="2020-02-25T15:19:07.869" v="317"/>
-          <ac:spMkLst>
-            <pc:docMk/>
-            <pc:sldMk cId="3595252648" sldId="614"/>
-            <ac:spMk id="64514" creationId="{7788F03B-8D64-E645-BC3F-DBD76C93C456}"/>
-          </ac:spMkLst>
-        </pc:spChg>
-        <pc:spChg chg="mod">
-          <ac:chgData name="Long B Nguyen" userId="f59fb8f3-a021-417a-8bc1-65c8d471c621" providerId="ADAL" clId="{34A2CF11-652E-6345-AC5C-A89FACA07C4E}" dt="2020-02-25T15:18:46.486" v="310" actId="20577"/>
-          <ac:spMkLst>
-            <pc:docMk/>
-            <pc:sldMk cId="3595252648" sldId="614"/>
-            <ac:spMk id="65537" creationId="{86430671-77D5-6E4C-94A5-D61EB184D3ED}"/>
-          </ac:spMkLst>
-        </pc:spChg>
-      </pc:sldChg>
-      <pc:sldChg chg="modSp add">
-        <pc:chgData name="Long B Nguyen" userId="f59fb8f3-a021-417a-8bc1-65c8d471c621" providerId="ADAL" clId="{34A2CF11-652E-6345-AC5C-A89FACA07C4E}" dt="2020-02-25T15:21:23.981" v="339" actId="20577"/>
-        <pc:sldMkLst>
-          <pc:docMk/>
-          <pc:sldMk cId="1678415157" sldId="615"/>
-        </pc:sldMkLst>
-        <pc:spChg chg="mod">
-          <ac:chgData name="Long B Nguyen" userId="f59fb8f3-a021-417a-8bc1-65c8d471c621" providerId="ADAL" clId="{34A2CF11-652E-6345-AC5C-A89FACA07C4E}" dt="2020-02-25T15:19:50.819" v="327"/>
-          <ac:spMkLst>
-            <pc:docMk/>
-            <pc:sldMk cId="1678415157" sldId="615"/>
-            <ac:spMk id="64514" creationId="{7788F03B-8D64-E645-BC3F-DBD76C93C456}"/>
-          </ac:spMkLst>
-        </pc:spChg>
-        <pc:spChg chg="mod">
-          <ac:chgData name="Long B Nguyen" userId="f59fb8f3-a021-417a-8bc1-65c8d471c621" providerId="ADAL" clId="{34A2CF11-652E-6345-AC5C-A89FACA07C4E}" dt="2020-02-25T15:21:23.981" v="339" actId="20577"/>
-          <ac:spMkLst>
-            <pc:docMk/>
-            <pc:sldMk cId="1678415157" sldId="615"/>
-            <ac:spMk id="65537" creationId="{86430671-77D5-6E4C-94A5-D61EB184D3ED}"/>
-          </ac:spMkLst>
-        </pc:spChg>
-      </pc:sldChg>
-      <pc:sldChg chg="modSp add modAnim">
-        <pc:chgData name="Long B Nguyen" userId="f59fb8f3-a021-417a-8bc1-65c8d471c621" providerId="ADAL" clId="{34A2CF11-652E-6345-AC5C-A89FACA07C4E}" dt="2020-02-25T15:26:12.917" v="395" actId="20577"/>
-        <pc:sldMkLst>
-          <pc:docMk/>
-          <pc:sldMk cId="827202224" sldId="616"/>
-        </pc:sldMkLst>
-        <pc:spChg chg="mod">
-          <ac:chgData name="Long B Nguyen" userId="f59fb8f3-a021-417a-8bc1-65c8d471c621" providerId="ADAL" clId="{34A2CF11-652E-6345-AC5C-A89FACA07C4E}" dt="2020-02-25T15:25:36.066" v="381" actId="14100"/>
-          <ac:spMkLst>
-            <pc:docMk/>
-            <pc:sldMk cId="827202224" sldId="616"/>
-            <ac:spMk id="56322" creationId="{C6A7743F-88FF-7C47-8B09-99222CD5E28E}"/>
-          </ac:spMkLst>
-        </pc:spChg>
-        <pc:spChg chg="mod">
-          <ac:chgData name="Long B Nguyen" userId="f59fb8f3-a021-417a-8bc1-65c8d471c621" providerId="ADAL" clId="{34A2CF11-652E-6345-AC5C-A89FACA07C4E}" dt="2020-02-25T15:26:12.917" v="395" actId="20577"/>
-          <ac:spMkLst>
-            <pc:docMk/>
-            <pc:sldMk cId="827202224" sldId="616"/>
-            <ac:spMk id="57345" creationId="{CDA4A9B2-8639-C840-B975-2791E963EF68}"/>
-          </ac:spMkLst>
-        </pc:spChg>
-      </pc:sldChg>
-      <pc:sldChg chg="modSp add del">
-        <pc:chgData name="Long B Nguyen" userId="f59fb8f3-a021-417a-8bc1-65c8d471c621" providerId="ADAL" clId="{34A2CF11-652E-6345-AC5C-A89FACA07C4E}" dt="2020-02-25T15:24:04.912" v="356" actId="2696"/>
-        <pc:sldMkLst>
-          <pc:docMk/>
-          <pc:sldMk cId="2019408601" sldId="616"/>
-        </pc:sldMkLst>
-        <pc:spChg chg="mod">
-          <ac:chgData name="Long B Nguyen" userId="f59fb8f3-a021-417a-8bc1-65c8d471c621" providerId="ADAL" clId="{34A2CF11-652E-6345-AC5C-A89FACA07C4E}" dt="2020-02-25T15:23:49.972" v="355" actId="20577"/>
-          <ac:spMkLst>
-            <pc:docMk/>
-            <pc:sldMk cId="2019408601" sldId="616"/>
-            <ac:spMk id="57345" creationId="{CDA4A9B2-8639-C840-B975-2791E963EF68}"/>
-          </ac:spMkLst>
-        </pc:spChg>
-      </pc:sldChg>
-      <pc:sldChg chg="modSp add">
-        <pc:chgData name="Long B Nguyen" userId="f59fb8f3-a021-417a-8bc1-65c8d471c621" providerId="ADAL" clId="{34A2CF11-652E-6345-AC5C-A89FACA07C4E}" dt="2020-02-25T15:28:05.754" v="418" actId="14100"/>
-        <pc:sldMkLst>
-          <pc:docMk/>
-          <pc:sldMk cId="971732716" sldId="617"/>
-        </pc:sldMkLst>
-        <pc:spChg chg="mod">
-          <ac:chgData name="Long B Nguyen" userId="f59fb8f3-a021-417a-8bc1-65c8d471c621" providerId="ADAL" clId="{34A2CF11-652E-6345-AC5C-A89FACA07C4E}" dt="2020-02-25T15:28:05.754" v="418" actId="14100"/>
-          <ac:spMkLst>
-            <pc:docMk/>
-            <pc:sldMk cId="971732716" sldId="617"/>
-            <ac:spMk id="56322" creationId="{C6A7743F-88FF-7C47-8B09-99222CD5E28E}"/>
-          </ac:spMkLst>
-        </pc:spChg>
-        <pc:spChg chg="mod">
-          <ac:chgData name="Long B Nguyen" userId="f59fb8f3-a021-417a-8bc1-65c8d471c621" providerId="ADAL" clId="{34A2CF11-652E-6345-AC5C-A89FACA07C4E}" dt="2020-02-25T15:26:18.595" v="404" actId="20577"/>
-          <ac:spMkLst>
-            <pc:docMk/>
-            <pc:sldMk cId="971732716" sldId="617"/>
-            <ac:spMk id="57345" creationId="{CDA4A9B2-8639-C840-B975-2791E963EF68}"/>
-          </ac:spMkLst>
-        </pc:spChg>
-      </pc:sldChg>
-      <pc:sldChg chg="addSp modSp add">
-        <pc:chgData name="Long B Nguyen" userId="f59fb8f3-a021-417a-8bc1-65c8d471c621" providerId="ADAL" clId="{34A2CF11-652E-6345-AC5C-A89FACA07C4E}" dt="2020-02-25T16:13:27.291" v="1080" actId="692"/>
-        <pc:sldMkLst>
-          <pc:docMk/>
-          <pc:sldMk cId="1047995035" sldId="618"/>
-        </pc:sldMkLst>
-        <pc:spChg chg="add mod">
-          <ac:chgData name="Long B Nguyen" userId="f59fb8f3-a021-417a-8bc1-65c8d471c621" providerId="ADAL" clId="{34A2CF11-652E-6345-AC5C-A89FACA07C4E}" dt="2020-02-25T16:12:56.188" v="1066" actId="1076"/>
-          <ac:spMkLst>
-            <pc:docMk/>
-            <pc:sldMk cId="1047995035" sldId="618"/>
-            <ac:spMk id="2" creationId="{D2A0B21C-9D88-4849-A345-13DA31B7BEBE}"/>
-          </ac:spMkLst>
-        </pc:spChg>
-        <pc:cxnChg chg="add mod">
-          <ac:chgData name="Long B Nguyen" userId="f59fb8f3-a021-417a-8bc1-65c8d471c621" providerId="ADAL" clId="{34A2CF11-652E-6345-AC5C-A89FACA07C4E}" dt="2020-02-25T16:13:27.291" v="1080" actId="692"/>
-          <ac:cxnSpMkLst>
-            <pc:docMk/>
-            <pc:sldMk cId="1047995035" sldId="618"/>
-            <ac:cxnSpMk id="4" creationId="{804AE6D5-7B42-A24B-B53A-7220982FA483}"/>
-          </ac:cxnSpMkLst>
-        </pc:cxnChg>
-      </pc:sldChg>
-      <pc:sldChg chg="modSp add">
-        <pc:chgData name="Long B Nguyen" userId="f59fb8f3-a021-417a-8bc1-65c8d471c621" providerId="ADAL" clId="{34A2CF11-652E-6345-AC5C-A89FACA07C4E}" dt="2020-03-05T10:05:57.927" v="1422" actId="20577"/>
-        <pc:sldMkLst>
-          <pc:docMk/>
-          <pc:sldMk cId="1016158355" sldId="619"/>
-        </pc:sldMkLst>
-        <pc:spChg chg="mod">
-          <ac:chgData name="Long B Nguyen" userId="f59fb8f3-a021-417a-8bc1-65c8d471c621" providerId="ADAL" clId="{34A2CF11-652E-6345-AC5C-A89FACA07C4E}" dt="2020-03-05T10:05:57.927" v="1422" actId="20577"/>
-          <ac:spMkLst>
-            <pc:docMk/>
-            <pc:sldMk cId="1016158355" sldId="619"/>
-            <ac:spMk id="84994" creationId="{6971D443-43C5-2E43-8019-712D595D62F2}"/>
-          </ac:spMkLst>
-        </pc:spChg>
-      </pc:sldChg>
-      <pc:sldChg chg="modSp add">
-        <pc:chgData name="Long B Nguyen" userId="f59fb8f3-a021-417a-8bc1-65c8d471c621" providerId="ADAL" clId="{34A2CF11-652E-6345-AC5C-A89FACA07C4E}" dt="2020-02-25T16:00:03.623" v="759" actId="20577"/>
-        <pc:sldMkLst>
-          <pc:docMk/>
-          <pc:sldMk cId="4204323314" sldId="620"/>
-        </pc:sldMkLst>
-        <pc:spChg chg="mod">
-          <ac:chgData name="Long B Nguyen" userId="f59fb8f3-a021-417a-8bc1-65c8d471c621" providerId="ADAL" clId="{34A2CF11-652E-6345-AC5C-A89FACA07C4E}" dt="2020-02-25T16:00:03.623" v="759" actId="20577"/>
-          <ac:spMkLst>
-            <pc:docMk/>
-            <pc:sldMk cId="4204323314" sldId="620"/>
-            <ac:spMk id="84994" creationId="{6971D443-43C5-2E43-8019-712D595D62F2}"/>
-          </ac:spMkLst>
-        </pc:spChg>
-      </pc:sldChg>
-      <pc:sldChg chg="modSp add">
-        <pc:chgData name="Long B Nguyen" userId="f59fb8f3-a021-417a-8bc1-65c8d471c621" providerId="ADAL" clId="{34A2CF11-652E-6345-AC5C-A89FACA07C4E}" dt="2020-02-25T16:05:30.380" v="1035" actId="20577"/>
-        <pc:sldMkLst>
-          <pc:docMk/>
-          <pc:sldMk cId="1162857972" sldId="621"/>
-        </pc:sldMkLst>
-        <pc:spChg chg="mod">
-          <ac:chgData name="Long B Nguyen" userId="f59fb8f3-a021-417a-8bc1-65c8d471c621" providerId="ADAL" clId="{34A2CF11-652E-6345-AC5C-A89FACA07C4E}" dt="2020-02-25T16:05:30.380" v="1035" actId="20577"/>
-          <ac:spMkLst>
-            <pc:docMk/>
-            <pc:sldMk cId="1162857972" sldId="621"/>
-            <ac:spMk id="84994" creationId="{6971D443-43C5-2E43-8019-712D595D62F2}"/>
-          </ac:spMkLst>
-        </pc:spChg>
-      </pc:sldChg>
-      <pc:sldChg chg="add del">
-        <pc:chgData name="Long B Nguyen" userId="f59fb8f3-a021-417a-8bc1-65c8d471c621" providerId="ADAL" clId="{34A2CF11-652E-6345-AC5C-A89FACA07C4E}" dt="2020-02-25T16:03:03.964" v="864"/>
-        <pc:sldMkLst>
-          <pc:docMk/>
-          <pc:sldMk cId="800137632" sldId="622"/>
-        </pc:sldMkLst>
-      </pc:sldChg>
-      <pc:sldChg chg="add del">
-        <pc:chgData name="Long B Nguyen" userId="f59fb8f3-a021-417a-8bc1-65c8d471c621" providerId="ADAL" clId="{34A2CF11-652E-6345-AC5C-A89FACA07C4E}" dt="2020-02-25T16:03:17.168" v="866"/>
-        <pc:sldMkLst>
-          <pc:docMk/>
-          <pc:sldMk cId="2516517495" sldId="622"/>
-        </pc:sldMkLst>
-      </pc:sldChg>
-      <pc:sldChg chg="delSp modSp add">
-        <pc:chgData name="Long B Nguyen" userId="f59fb8f3-a021-417a-8bc1-65c8d471c621" providerId="ADAL" clId="{34A2CF11-652E-6345-AC5C-A89FACA07C4E}" dt="2020-02-25T16:19:48.413" v="1359" actId="20577"/>
-        <pc:sldMkLst>
-          <pc:docMk/>
-          <pc:sldMk cId="2765543401" sldId="622"/>
-        </pc:sldMkLst>
-        <pc:spChg chg="del">
-          <ac:chgData name="Long B Nguyen" userId="f59fb8f3-a021-417a-8bc1-65c8d471c621" providerId="ADAL" clId="{34A2CF11-652E-6345-AC5C-A89FACA07C4E}" dt="2020-02-25T16:14:55.037" v="1083" actId="478"/>
-          <ac:spMkLst>
-            <pc:docMk/>
-            <pc:sldMk cId="2765543401" sldId="622"/>
-            <ac:spMk id="2" creationId="{D2A0B21C-9D88-4849-A345-13DA31B7BEBE}"/>
-          </ac:spMkLst>
-        </pc:spChg>
-        <pc:spChg chg="mod">
-          <ac:chgData name="Long B Nguyen" userId="f59fb8f3-a021-417a-8bc1-65c8d471c621" providerId="ADAL" clId="{34A2CF11-652E-6345-AC5C-A89FACA07C4E}" dt="2020-02-25T16:19:48.413" v="1359" actId="20577"/>
-          <ac:spMkLst>
-            <pc:docMk/>
-            <pc:sldMk cId="2765543401" sldId="622"/>
-            <ac:spMk id="84993" creationId="{C169A412-E2F9-004D-A0EF-86F1C409823C}"/>
-          </ac:spMkLst>
-        </pc:spChg>
-        <pc:spChg chg="mod">
-          <ac:chgData name="Long B Nguyen" userId="f59fb8f3-a021-417a-8bc1-65c8d471c621" providerId="ADAL" clId="{34A2CF11-652E-6345-AC5C-A89FACA07C4E}" dt="2020-02-25T16:15:58.869" v="1141" actId="20577"/>
-          <ac:spMkLst>
-            <pc:docMk/>
-            <pc:sldMk cId="2765543401" sldId="622"/>
-            <ac:spMk id="84994" creationId="{6971D443-43C5-2E43-8019-712D595D62F2}"/>
-          </ac:spMkLst>
-        </pc:spChg>
-        <pc:picChg chg="del">
-          <ac:chgData name="Long B Nguyen" userId="f59fb8f3-a021-417a-8bc1-65c8d471c621" providerId="ADAL" clId="{34A2CF11-652E-6345-AC5C-A89FACA07C4E}" dt="2020-02-25T16:14:53.215" v="1082" actId="478"/>
-          <ac:picMkLst>
-            <pc:docMk/>
-            <pc:sldMk cId="2765543401" sldId="622"/>
-            <ac:picMk id="84995" creationId="{D74B79FF-3957-A841-989F-1A7CCA0A7940}"/>
-          </ac:picMkLst>
-        </pc:picChg>
-        <pc:cxnChg chg="del">
-          <ac:chgData name="Long B Nguyen" userId="f59fb8f3-a021-417a-8bc1-65c8d471c621" providerId="ADAL" clId="{34A2CF11-652E-6345-AC5C-A89FACA07C4E}" dt="2020-02-25T16:14:56.245" v="1084" actId="478"/>
-          <ac:cxnSpMkLst>
-            <pc:docMk/>
-            <pc:sldMk cId="2765543401" sldId="622"/>
-            <ac:cxnSpMk id="4" creationId="{804AE6D5-7B42-A24B-B53A-7220982FA483}"/>
-          </ac:cxnSpMkLst>
-        </pc:cxnChg>
-      </pc:sldChg>
-      <pc:sldChg chg="modSp add">
-        <pc:chgData name="Long B Nguyen" userId="f59fb8f3-a021-417a-8bc1-65c8d471c621" providerId="ADAL" clId="{34A2CF11-652E-6345-AC5C-A89FACA07C4E}" dt="2020-02-25T16:19:36.680" v="1349" actId="20577"/>
-        <pc:sldMkLst>
-          <pc:docMk/>
-          <pc:sldMk cId="3553270583" sldId="623"/>
-        </pc:sldMkLst>
-        <pc:spChg chg="mod">
-          <ac:chgData name="Long B Nguyen" userId="f59fb8f3-a021-417a-8bc1-65c8d471c621" providerId="ADAL" clId="{34A2CF11-652E-6345-AC5C-A89FACA07C4E}" dt="2020-02-25T16:19:36.680" v="1349" actId="20577"/>
-          <ac:spMkLst>
-            <pc:docMk/>
-            <pc:sldMk cId="3553270583" sldId="623"/>
-            <ac:spMk id="84993" creationId="{C169A412-E2F9-004D-A0EF-86F1C409823C}"/>
-          </ac:spMkLst>
-        </pc:spChg>
-        <pc:spChg chg="mod">
-          <ac:chgData name="Long B Nguyen" userId="f59fb8f3-a021-417a-8bc1-65c8d471c621" providerId="ADAL" clId="{34A2CF11-652E-6345-AC5C-A89FACA07C4E}" dt="2020-02-25T16:19:30.447" v="1328" actId="20577"/>
-          <ac:spMkLst>
-            <pc:docMk/>
-            <pc:sldMk cId="3553270583" sldId="623"/>
-            <ac:spMk id="84994" creationId="{6971D443-43C5-2E43-8019-712D595D62F2}"/>
-          </ac:spMkLst>
-        </pc:spChg>
-      </pc:sldChg>
-    </pc:docChg>
-  </pc:docChgLst>
-  <pc:docChgLst>
-    <pc:chgData name="Long Nguyen" userId="f59fb8f3-a021-417a-8bc1-65c8d471c621" providerId="ADAL" clId="{BFF36CE0-60EF-8B47-B70B-E2DD14C37FCA}"/>
-    <pc:docChg chg="modSld">
-      <pc:chgData name="Long Nguyen" userId="f59fb8f3-a021-417a-8bc1-65c8d471c621" providerId="ADAL" clId="{BFF36CE0-60EF-8B47-B70B-E2DD14C37FCA}" dt="2023-03-22T12:29:31.491" v="30" actId="255"/>
-      <pc:docMkLst>
-        <pc:docMk/>
-      </pc:docMkLst>
-      <pc:sldChg chg="modSp">
-        <pc:chgData name="Long Nguyen" userId="f59fb8f3-a021-417a-8bc1-65c8d471c621" providerId="ADAL" clId="{BFF36CE0-60EF-8B47-B70B-E2DD14C37FCA}" dt="2023-03-22T12:28:15.206" v="2" actId="255"/>
-        <pc:sldMkLst>
-          <pc:docMk/>
-          <pc:sldMk cId="316487430" sldId="619"/>
-        </pc:sldMkLst>
-        <pc:spChg chg="mod">
-          <ac:chgData name="Long Nguyen" userId="f59fb8f3-a021-417a-8bc1-65c8d471c621" providerId="ADAL" clId="{BFF36CE0-60EF-8B47-B70B-E2DD14C37FCA}" dt="2023-03-22T12:28:15.206" v="2" actId="255"/>
-          <ac:spMkLst>
-            <pc:docMk/>
-            <pc:sldMk cId="316487430" sldId="619"/>
-            <ac:spMk id="16386" creationId="{8A97D40A-E6BF-E14C-B07D-5BAE101CB071}"/>
-          </ac:spMkLst>
-        </pc:spChg>
-      </pc:sldChg>
-      <pc:sldChg chg="modSp">
-        <pc:chgData name="Long Nguyen" userId="f59fb8f3-a021-417a-8bc1-65c8d471c621" providerId="ADAL" clId="{BFF36CE0-60EF-8B47-B70B-E2DD14C37FCA}" dt="2023-03-22T12:28:56.220" v="28" actId="20577"/>
-        <pc:sldMkLst>
-          <pc:docMk/>
-          <pc:sldMk cId="655231489" sldId="620"/>
-        </pc:sldMkLst>
-        <pc:spChg chg="mod">
-          <ac:chgData name="Long Nguyen" userId="f59fb8f3-a021-417a-8bc1-65c8d471c621" providerId="ADAL" clId="{BFF36CE0-60EF-8B47-B70B-E2DD14C37FCA}" dt="2023-03-22T12:28:56.220" v="28" actId="20577"/>
-          <ac:spMkLst>
-            <pc:docMk/>
-            <pc:sldMk cId="655231489" sldId="620"/>
-            <ac:spMk id="16386" creationId="{8A97D40A-E6BF-E14C-B07D-5BAE101CB071}"/>
-          </ac:spMkLst>
-        </pc:spChg>
-      </pc:sldChg>
-      <pc:sldChg chg="modSp">
-        <pc:chgData name="Long Nguyen" userId="f59fb8f3-a021-417a-8bc1-65c8d471c621" providerId="ADAL" clId="{BFF36CE0-60EF-8B47-B70B-E2DD14C37FCA}" dt="2023-03-22T12:29:31.491" v="30" actId="255"/>
-        <pc:sldMkLst>
-          <pc:docMk/>
-          <pc:sldMk cId="3767073501" sldId="621"/>
-        </pc:sldMkLst>
-        <pc:spChg chg="mod">
-          <ac:chgData name="Long Nguyen" userId="f59fb8f3-a021-417a-8bc1-65c8d471c621" providerId="ADAL" clId="{BFF36CE0-60EF-8B47-B70B-E2DD14C37FCA}" dt="2023-03-22T12:29:31.491" v="30" actId="255"/>
-          <ac:spMkLst>
-            <pc:docMk/>
-            <pc:sldMk cId="3767073501" sldId="621"/>
-            <ac:spMk id="16386" creationId="{8AED6484-1413-8C45-B6F1-BD8A0459A082}"/>
-          </ac:spMkLst>
-        </pc:spChg>
       </pc:sldChg>
     </pc:docChg>
   </pc:docChgLst>
@@ -4855,7 +343,7 @@
           <a:p>
             <a:fld id="{6EDD99D2-A624-5E4F-A4E3-584054837B5A}" type="datetimeFigureOut">
               <a:rPr lang="en-US" smtClean="0"/>
-              <a:t>3/28/24</a:t>
+              <a:t>4/2/26</a:t>
             </a:fld>
             <a:endParaRPr lang="en-US"/>
           </a:p>
@@ -5578,7 +1066,7 @@
             <a:fld id="{C33FC2D0-CBC0-5042-B518-540042ADD777}" type="slidenum">
               <a:rPr lang="en-US" altLang="en-US"/>
               <a:pPr/>
-              <a:t>11</a:t>
+              <a:t>15</a:t>
             </a:fld>
             <a:endParaRPr lang="en-US" altLang="en-US"/>
           </a:p>
@@ -5866,7 +1354,7 @@
             <a:fld id="{FAB34E33-6D03-AA4F-B16B-52DEBA44FAAB}" type="slidenum">
               <a:rPr lang="en-US" altLang="en-US"/>
               <a:pPr/>
-              <a:t>12</a:t>
+              <a:t>16</a:t>
             </a:fld>
             <a:endParaRPr lang="en-US" altLang="en-US"/>
           </a:p>
@@ -6154,7 +1642,7 @@
             <a:fld id="{FAB34E33-6D03-AA4F-B16B-52DEBA44FAAB}" type="slidenum">
               <a:rPr lang="en-US" altLang="en-US"/>
               <a:pPr/>
-              <a:t>13</a:t>
+              <a:t>17</a:t>
             </a:fld>
             <a:endParaRPr lang="en-US" altLang="en-US"/>
           </a:p>
@@ -6442,7 +1930,7 @@
             <a:fld id="{0F8401DB-EAC2-4C4E-B168-4C791CA9E973}" type="slidenum">
               <a:rPr lang="en-US" altLang="en-US"/>
               <a:pPr/>
-              <a:t>14</a:t>
+              <a:t>18</a:t>
             </a:fld>
             <a:endParaRPr lang="en-US" altLang="en-US"/>
           </a:p>
@@ -6730,7 +2218,7 @@
             <a:fld id="{0FEB20D8-C73A-654E-BD29-5B231E1749D1}" type="slidenum">
               <a:rPr lang="en-US" altLang="en-US"/>
               <a:pPr/>
-              <a:t>15</a:t>
+              <a:t>19</a:t>
             </a:fld>
             <a:endParaRPr lang="en-US" altLang="en-US"/>
           </a:p>
@@ -7018,7 +2506,7 @@
             <a:fld id="{0FEB20D8-C73A-654E-BD29-5B231E1749D1}" type="slidenum">
               <a:rPr lang="en-US" altLang="en-US"/>
               <a:pPr/>
-              <a:t>16</a:t>
+              <a:t>20</a:t>
             </a:fld>
             <a:endParaRPr lang="en-US" altLang="en-US"/>
           </a:p>
@@ -7306,7 +2794,7 @@
             <a:fld id="{0FEB20D8-C73A-654E-BD29-5B231E1749D1}" type="slidenum">
               <a:rPr lang="en-US" altLang="en-US"/>
               <a:pPr/>
-              <a:t>17</a:t>
+              <a:t>21</a:t>
             </a:fld>
             <a:endParaRPr lang="en-US" altLang="en-US"/>
           </a:p>
@@ -7594,7 +3082,7 @@
             <a:fld id="{15B86C48-2F16-C440-BE26-4CAFB7E7AFD4}" type="slidenum">
               <a:rPr lang="en-US" altLang="en-US"/>
               <a:pPr/>
-              <a:t>18</a:t>
+              <a:t>22</a:t>
             </a:fld>
             <a:endParaRPr lang="en-US" altLang="en-US"/>
           </a:p>
@@ -7882,7 +3370,7 @@
             <a:fld id="{E05D556B-9122-724B-9637-98DA0CA8ED62}" type="slidenum">
               <a:rPr lang="en-US" altLang="en-US"/>
               <a:pPr/>
-              <a:t>19</a:t>
+              <a:t>23</a:t>
             </a:fld>
             <a:endParaRPr lang="en-US" altLang="en-US"/>
           </a:p>
@@ -8170,7 +3658,7 @@
             <a:fld id="{56BA4FB9-B587-BD4B-82AB-99B6B154B425}" type="slidenum">
               <a:rPr lang="en-US" altLang="en-US"/>
               <a:pPr/>
-              <a:t>20</a:t>
+              <a:t>24</a:t>
             </a:fld>
             <a:endParaRPr lang="en-US" altLang="en-US"/>
           </a:p>
@@ -8746,7 +4234,7 @@
             <a:fld id="{56BA4FB9-B587-BD4B-82AB-99B6B154B425}" type="slidenum">
               <a:rPr lang="en-US" altLang="en-US"/>
               <a:pPr/>
-              <a:t>21</a:t>
+              <a:t>25</a:t>
             </a:fld>
             <a:endParaRPr lang="en-US" altLang="en-US"/>
           </a:p>
@@ -9034,7 +4522,7 @@
             <a:fld id="{C825C384-8E18-6F44-8F91-FE1691EEAA40}" type="slidenum">
               <a:rPr lang="en-US" altLang="en-US"/>
               <a:pPr/>
-              <a:t>22</a:t>
+              <a:t>26</a:t>
             </a:fld>
             <a:endParaRPr lang="en-US" altLang="en-US"/>
           </a:p>
@@ -9322,7 +4810,7 @@
             <a:fld id="{6C724A3E-5EB8-2C48-BD5D-7E6B2DA2B5A1}" type="slidenum">
               <a:rPr lang="en-US" altLang="en-US"/>
               <a:pPr/>
-              <a:t>23</a:t>
+              <a:t>27</a:t>
             </a:fld>
             <a:endParaRPr lang="en-US" altLang="en-US"/>
           </a:p>
@@ -9610,7 +5098,7 @@
             <a:fld id="{8F3EEF2C-765F-DB41-80AC-B3E833B028D5}" type="slidenum">
               <a:rPr lang="en-US" altLang="en-US"/>
               <a:pPr/>
-              <a:t>24</a:t>
+              <a:t>28</a:t>
             </a:fld>
             <a:endParaRPr lang="en-US" altLang="en-US"/>
           </a:p>
@@ -9898,7 +5386,7 @@
             <a:fld id="{E6B3A3E4-211D-2844-87BB-000307B4D77F}" type="slidenum">
               <a:rPr lang="en-US" altLang="en-US"/>
               <a:pPr/>
-              <a:t>25</a:t>
+              <a:t>29</a:t>
             </a:fld>
             <a:endParaRPr lang="en-US" altLang="en-US"/>
           </a:p>
@@ -10186,7 +5674,7 @@
             <a:fld id="{623FA5CB-D51B-4B44-8997-2C395B9C3E15}" type="slidenum">
               <a:rPr lang="en-US" altLang="en-US"/>
               <a:pPr/>
-              <a:t>26</a:t>
+              <a:t>30</a:t>
             </a:fld>
             <a:endParaRPr lang="en-US" altLang="en-US"/>
           </a:p>
@@ -10474,7 +5962,7 @@
             <a:fld id="{0CE0612D-C3AA-8C4A-9C97-353BD2D67B07}" type="slidenum">
               <a:rPr lang="en-US" altLang="en-US"/>
               <a:pPr/>
-              <a:t>27</a:t>
+              <a:t>31</a:t>
             </a:fld>
             <a:endParaRPr lang="en-US" altLang="en-US"/>
           </a:p>
@@ -10762,7 +6250,7 @@
             <a:fld id="{432092AD-0944-5144-BE50-346F5716364B}" type="slidenum">
               <a:rPr lang="en-US" altLang="en-US"/>
               <a:pPr/>
-              <a:t>28</a:t>
+              <a:t>32</a:t>
             </a:fld>
             <a:endParaRPr lang="en-US" altLang="en-US"/>
           </a:p>
@@ -11050,7 +6538,7 @@
             <a:fld id="{8E5AD221-5FA2-A345-95A3-3FAB4ED816BE}" type="slidenum">
               <a:rPr lang="en-US" altLang="en-US"/>
               <a:pPr/>
-              <a:t>29</a:t>
+              <a:t>33</a:t>
             </a:fld>
             <a:endParaRPr lang="en-US" altLang="en-US"/>
           </a:p>
@@ -13066,7 +8554,7 @@
             <a:fld id="{C33FC2D0-CBC0-5042-B518-540042ADD777}" type="slidenum">
               <a:rPr lang="en-US" altLang="en-US"/>
               <a:pPr/>
-              <a:t>10</a:t>
+              <a:t>14</a:t>
             </a:fld>
             <a:endParaRPr lang="en-US" altLang="en-US"/>
           </a:p>
@@ -13317,7 +8805,7 @@
           <a:p>
             <a:fld id="{4AAD347D-5ACD-4C99-B74B-A9C85AD731AF}" type="datetimeFigureOut">
               <a:rPr lang="en-US" smtClean="0"/>
-              <a:t>3/28/24</a:t>
+              <a:t>4/2/26</a:t>
             </a:fld>
             <a:endParaRPr lang="en-US" dirty="0"/>
           </a:p>
@@ -13487,7 +8975,7 @@
           <a:p>
             <a:fld id="{4509A250-FF31-4206-8172-F9D3106AACB1}" type="datetimeFigureOut">
               <a:rPr lang="en-US" smtClean="0"/>
-              <a:t>3/28/24</a:t>
+              <a:t>4/2/26</a:t>
             </a:fld>
             <a:endParaRPr lang="en-US" dirty="0"/>
           </a:p>
@@ -13667,7 +9155,7 @@
           <a:p>
             <a:fld id="{4509A250-FF31-4206-8172-F9D3106AACB1}" type="datetimeFigureOut">
               <a:rPr lang="en-US" smtClean="0"/>
-              <a:t>3/28/24</a:t>
+              <a:t>4/2/26</a:t>
             </a:fld>
             <a:endParaRPr lang="en-US" dirty="0"/>
           </a:p>
@@ -13837,7 +9325,7 @@
           <a:p>
             <a:fld id="{4509A250-FF31-4206-8172-F9D3106AACB1}" type="datetimeFigureOut">
               <a:rPr lang="en-US" smtClean="0"/>
-              <a:t>3/28/24</a:t>
+              <a:t>4/2/26</a:t>
             </a:fld>
             <a:endParaRPr lang="en-US" dirty="0"/>
           </a:p>
@@ -14083,7 +9571,7 @@
           <a:p>
             <a:fld id="{9796027F-7875-4030-9381-8BD8C4F21935}" type="datetimeFigureOut">
               <a:rPr lang="en-US" smtClean="0"/>
-              <a:t>3/28/24</a:t>
+              <a:t>4/2/26</a:t>
             </a:fld>
             <a:endParaRPr lang="en-US" dirty="0"/>
           </a:p>
@@ -14315,7 +9803,7 @@
           <a:p>
             <a:fld id="{9796027F-7875-4030-9381-8BD8C4F21935}" type="datetimeFigureOut">
               <a:rPr lang="en-US" smtClean="0"/>
-              <a:t>3/28/24</a:t>
+              <a:t>4/2/26</a:t>
             </a:fld>
             <a:endParaRPr lang="en-US" dirty="0"/>
           </a:p>
@@ -14682,7 +10170,7 @@
           <a:p>
             <a:fld id="{9796027F-7875-4030-9381-8BD8C4F21935}" type="datetimeFigureOut">
               <a:rPr lang="en-US" smtClean="0"/>
-              <a:t>3/28/24</a:t>
+              <a:t>4/2/26</a:t>
             </a:fld>
             <a:endParaRPr lang="en-US" dirty="0"/>
           </a:p>
@@ -14800,7 +10288,7 @@
           <a:p>
             <a:fld id="{4509A250-FF31-4206-8172-F9D3106AACB1}" type="datetimeFigureOut">
               <a:rPr lang="en-US" smtClean="0"/>
-              <a:t>3/28/24</a:t>
+              <a:t>4/2/26</a:t>
             </a:fld>
             <a:endParaRPr lang="en-US" dirty="0"/>
           </a:p>
@@ -14895,7 +10383,7 @@
           <a:p>
             <a:fld id="{4509A250-FF31-4206-8172-F9D3106AACB1}" type="datetimeFigureOut">
               <a:rPr lang="en-US" smtClean="0"/>
-              <a:t>3/28/24</a:t>
+              <a:t>4/2/26</a:t>
             </a:fld>
             <a:endParaRPr lang="en-US" dirty="0"/>
           </a:p>
@@ -15172,7 +10660,7 @@
           <a:p>
             <a:fld id="{4509A250-FF31-4206-8172-F9D3106AACB1}" type="datetimeFigureOut">
               <a:rPr lang="en-US" smtClean="0"/>
-              <a:t>3/28/24</a:t>
+              <a:t>4/2/26</a:t>
             </a:fld>
             <a:endParaRPr lang="en-US" dirty="0"/>
           </a:p>
@@ -15429,7 +10917,7 @@
           <a:p>
             <a:fld id="{4509A250-FF31-4206-8172-F9D3106AACB1}" type="datetimeFigureOut">
               <a:rPr lang="en-US" smtClean="0"/>
-              <a:t>3/28/24</a:t>
+              <a:t>4/2/26</a:t>
             </a:fld>
             <a:endParaRPr lang="en-US" dirty="0"/>
           </a:p>
@@ -15642,7 +11130,7 @@
           <a:p>
             <a:fld id="{4AAD347D-5ACD-4C99-B74B-A9C85AD731AF}" type="datetimeFigureOut">
               <a:rPr lang="en-US" smtClean="0"/>
-              <a:t>3/28/24</a:t>
+              <a:t>4/2/26</a:t>
             </a:fld>
             <a:endParaRPr lang="en-US" dirty="0"/>
           </a:p>
@@ -16490,6 +11978,452 @@
       </p:grpSpPr>
       <p:sp>
         <p:nvSpPr>
+          <p:cNvPr id="2" name="Title 1">
+            <a:extLst>
+              <a:ext uri="{FF2B5EF4-FFF2-40B4-BE49-F238E27FC236}">
+                <a16:creationId xmlns:a16="http://schemas.microsoft.com/office/drawing/2014/main" id="{DF498DF2-5AE6-D8BA-7F82-EBC113BFBE28}"/>
+              </a:ext>
+            </a:extLst>
+          </p:cNvPr>
+          <p:cNvSpPr>
+            <a:spLocks noGrp="1"/>
+          </p:cNvSpPr>
+          <p:nvPr>
+            <p:ph type="title"/>
+          </p:nvPr>
+        </p:nvSpPr>
+        <p:spPr/>
+        <p:txBody>
+          <a:bodyPr/>
+          <a:lstStyle/>
+          <a:p>
+            <a:endParaRPr lang="en-US"/>
+          </a:p>
+        </p:txBody>
+      </p:sp>
+      <p:sp>
+        <p:nvSpPr>
+          <p:cNvPr id="3" name="Content Placeholder 2">
+            <a:extLst>
+              <a:ext uri="{FF2B5EF4-FFF2-40B4-BE49-F238E27FC236}">
+                <a16:creationId xmlns:a16="http://schemas.microsoft.com/office/drawing/2014/main" id="{37B7540F-2EBE-BA18-B22C-6456B2AE551F}"/>
+              </a:ext>
+            </a:extLst>
+          </p:cNvPr>
+          <p:cNvSpPr>
+            <a:spLocks noGrp="1"/>
+          </p:cNvSpPr>
+          <p:nvPr>
+            <p:ph idx="1"/>
+          </p:nvPr>
+        </p:nvSpPr>
+        <p:spPr/>
+        <p:txBody>
+          <a:bodyPr/>
+          <a:lstStyle/>
+          <a:p>
+            <a:endParaRPr lang="en-US"/>
+          </a:p>
+        </p:txBody>
+      </p:sp>
+      <p:pic>
+        <p:nvPicPr>
+          <p:cNvPr id="4" name="Picture 3">
+            <a:extLst>
+              <a:ext uri="{FF2B5EF4-FFF2-40B4-BE49-F238E27FC236}">
+                <a16:creationId xmlns:a16="http://schemas.microsoft.com/office/drawing/2014/main" id="{AE9E390D-4CE1-DDD3-BDC1-3E7FFDD3C700}"/>
+              </a:ext>
+            </a:extLst>
+          </p:cNvPr>
+          <p:cNvPicPr>
+            <a:picLocks noChangeAspect="1"/>
+          </p:cNvPicPr>
+          <p:nvPr/>
+        </p:nvPicPr>
+        <p:blipFill>
+          <a:blip r:embed="rId2"/>
+          <a:stretch>
+            <a:fillRect/>
+          </a:stretch>
+        </p:blipFill>
+        <p:spPr>
+          <a:xfrm>
+            <a:off x="1035050" y="952500"/>
+            <a:ext cx="7073900" cy="3810000"/>
+          </a:xfrm>
+          <a:prstGeom prst="rect">
+            <a:avLst/>
+          </a:prstGeom>
+        </p:spPr>
+      </p:pic>
+    </p:spTree>
+    <p:extLst>
+      <p:ext uri="{BB962C8B-B14F-4D97-AF65-F5344CB8AC3E}">
+        <p14:creationId xmlns:p14="http://schemas.microsoft.com/office/powerpoint/2010/main" val="3004482787"/>
+      </p:ext>
+    </p:extLst>
+  </p:cSld>
+  <p:clrMapOvr>
+    <a:masterClrMapping/>
+  </p:clrMapOvr>
+</p:sld>
+</file>
+
+<file path=ppt/slides/slide11.xml><?xml version="1.0" encoding="utf-8"?>
+<p:sld xmlns:a="http://schemas.openxmlformats.org/drawingml/2006/main" xmlns:r="http://schemas.openxmlformats.org/officeDocument/2006/relationships" xmlns:p="http://schemas.openxmlformats.org/presentationml/2006/main">
+  <p:cSld>
+    <p:spTree>
+      <p:nvGrpSpPr>
+        <p:cNvPr id="1" name="">
+          <a:extLst>
+            <a:ext uri="{FF2B5EF4-FFF2-40B4-BE49-F238E27FC236}">
+              <a16:creationId xmlns:a16="http://schemas.microsoft.com/office/drawing/2014/main" id="{F1A3AD05-7273-8052-E233-4AD31DB1F849}"/>
+            </a:ext>
+          </a:extLst>
+        </p:cNvPr>
+        <p:cNvGrpSpPr/>
+        <p:nvPr/>
+      </p:nvGrpSpPr>
+      <p:grpSpPr>
+        <a:xfrm>
+          <a:off x="0" y="0"/>
+          <a:ext cx="0" cy="0"/>
+          <a:chOff x="0" y="0"/>
+          <a:chExt cx="0" cy="0"/>
+        </a:xfrm>
+      </p:grpSpPr>
+      <p:sp>
+        <p:nvSpPr>
+          <p:cNvPr id="2" name="Title 1">
+            <a:extLst>
+              <a:ext uri="{FF2B5EF4-FFF2-40B4-BE49-F238E27FC236}">
+                <a16:creationId xmlns:a16="http://schemas.microsoft.com/office/drawing/2014/main" id="{7FE9A312-FCF7-8A54-A4B8-B7EF44C1127B}"/>
+              </a:ext>
+            </a:extLst>
+          </p:cNvPr>
+          <p:cNvSpPr>
+            <a:spLocks noGrp="1"/>
+          </p:cNvSpPr>
+          <p:nvPr>
+            <p:ph type="title"/>
+          </p:nvPr>
+        </p:nvSpPr>
+        <p:spPr/>
+        <p:txBody>
+          <a:bodyPr/>
+          <a:lstStyle/>
+          <a:p>
+            <a:endParaRPr lang="en-US"/>
+          </a:p>
+        </p:txBody>
+      </p:sp>
+      <p:sp>
+        <p:nvSpPr>
+          <p:cNvPr id="3" name="Content Placeholder 2">
+            <a:extLst>
+              <a:ext uri="{FF2B5EF4-FFF2-40B4-BE49-F238E27FC236}">
+                <a16:creationId xmlns:a16="http://schemas.microsoft.com/office/drawing/2014/main" id="{BE2B20DA-6822-1A8D-19B2-4776768FC4C9}"/>
+              </a:ext>
+            </a:extLst>
+          </p:cNvPr>
+          <p:cNvSpPr>
+            <a:spLocks noGrp="1"/>
+          </p:cNvSpPr>
+          <p:nvPr>
+            <p:ph idx="1"/>
+          </p:nvPr>
+        </p:nvSpPr>
+        <p:spPr/>
+        <p:txBody>
+          <a:bodyPr/>
+          <a:lstStyle/>
+          <a:p>
+            <a:endParaRPr lang="en-US"/>
+          </a:p>
+        </p:txBody>
+      </p:sp>
+      <p:pic>
+        <p:nvPicPr>
+          <p:cNvPr id="5" name="Picture 4">
+            <a:extLst>
+              <a:ext uri="{FF2B5EF4-FFF2-40B4-BE49-F238E27FC236}">
+                <a16:creationId xmlns:a16="http://schemas.microsoft.com/office/drawing/2014/main" id="{B8D50A5A-7054-5B58-FA01-2B673391F3DE}"/>
+              </a:ext>
+            </a:extLst>
+          </p:cNvPr>
+          <p:cNvPicPr>
+            <a:picLocks noChangeAspect="1"/>
+          </p:cNvPicPr>
+          <p:nvPr/>
+        </p:nvPicPr>
+        <p:blipFill>
+          <a:blip r:embed="rId2"/>
+          <a:stretch>
+            <a:fillRect/>
+          </a:stretch>
+        </p:blipFill>
+        <p:spPr>
+          <a:xfrm>
+            <a:off x="1708150" y="1517650"/>
+            <a:ext cx="5727700" cy="2679700"/>
+          </a:xfrm>
+          <a:prstGeom prst="rect">
+            <a:avLst/>
+          </a:prstGeom>
+        </p:spPr>
+      </p:pic>
+    </p:spTree>
+    <p:extLst>
+      <p:ext uri="{BB962C8B-B14F-4D97-AF65-F5344CB8AC3E}">
+        <p14:creationId xmlns:p14="http://schemas.microsoft.com/office/powerpoint/2010/main" val="3414285246"/>
+      </p:ext>
+    </p:extLst>
+  </p:cSld>
+  <p:clrMapOvr>
+    <a:masterClrMapping/>
+  </p:clrMapOvr>
+</p:sld>
+</file>
+
+<file path=ppt/slides/slide12.xml><?xml version="1.0" encoding="utf-8"?>
+<p:sld xmlns:a="http://schemas.openxmlformats.org/drawingml/2006/main" xmlns:r="http://schemas.openxmlformats.org/officeDocument/2006/relationships" xmlns:p="http://schemas.openxmlformats.org/presentationml/2006/main">
+  <p:cSld>
+    <p:spTree>
+      <p:nvGrpSpPr>
+        <p:cNvPr id="1" name=""/>
+        <p:cNvGrpSpPr/>
+        <p:nvPr/>
+      </p:nvGrpSpPr>
+      <p:grpSpPr>
+        <a:xfrm>
+          <a:off x="0" y="0"/>
+          <a:ext cx="0" cy="0"/>
+          <a:chOff x="0" y="0"/>
+          <a:chExt cx="0" cy="0"/>
+        </a:xfrm>
+      </p:grpSpPr>
+      <p:sp>
+        <p:nvSpPr>
+          <p:cNvPr id="2" name="Title 1">
+            <a:extLst>
+              <a:ext uri="{FF2B5EF4-FFF2-40B4-BE49-F238E27FC236}">
+                <a16:creationId xmlns:a16="http://schemas.microsoft.com/office/drawing/2014/main" id="{AD5770D1-342C-6953-9BCE-D57A958B7416}"/>
+              </a:ext>
+            </a:extLst>
+          </p:cNvPr>
+          <p:cNvSpPr>
+            <a:spLocks noGrp="1"/>
+          </p:cNvSpPr>
+          <p:nvPr>
+            <p:ph type="title"/>
+          </p:nvPr>
+        </p:nvSpPr>
+        <p:spPr/>
+        <p:txBody>
+          <a:bodyPr/>
+          <a:lstStyle/>
+          <a:p>
+            <a:endParaRPr lang="en-US"/>
+          </a:p>
+        </p:txBody>
+      </p:sp>
+      <p:sp>
+        <p:nvSpPr>
+          <p:cNvPr id="3" name="Content Placeholder 2">
+            <a:extLst>
+              <a:ext uri="{FF2B5EF4-FFF2-40B4-BE49-F238E27FC236}">
+                <a16:creationId xmlns:a16="http://schemas.microsoft.com/office/drawing/2014/main" id="{E1E983EC-B64D-43E3-588B-2E08261A8296}"/>
+              </a:ext>
+            </a:extLst>
+          </p:cNvPr>
+          <p:cNvSpPr>
+            <a:spLocks noGrp="1"/>
+          </p:cNvSpPr>
+          <p:nvPr>
+            <p:ph idx="1"/>
+          </p:nvPr>
+        </p:nvSpPr>
+        <p:spPr/>
+        <p:txBody>
+          <a:bodyPr/>
+          <a:lstStyle/>
+          <a:p>
+            <a:endParaRPr lang="en-US"/>
+          </a:p>
+        </p:txBody>
+      </p:sp>
+      <p:pic>
+        <p:nvPicPr>
+          <p:cNvPr id="5" name="Picture 4">
+            <a:extLst>
+              <a:ext uri="{FF2B5EF4-FFF2-40B4-BE49-F238E27FC236}">
+                <a16:creationId xmlns:a16="http://schemas.microsoft.com/office/drawing/2014/main" id="{7E9F7FAB-A030-72E0-F361-22F35C060712}"/>
+              </a:ext>
+            </a:extLst>
+          </p:cNvPr>
+          <p:cNvPicPr>
+            <a:picLocks noChangeAspect="1"/>
+          </p:cNvPicPr>
+          <p:nvPr/>
+        </p:nvPicPr>
+        <p:blipFill>
+          <a:blip r:embed="rId2"/>
+          <a:stretch>
+            <a:fillRect/>
+          </a:stretch>
+        </p:blipFill>
+        <p:spPr>
+          <a:xfrm>
+            <a:off x="1987550" y="1816100"/>
+            <a:ext cx="5168900" cy="2082800"/>
+          </a:xfrm>
+          <a:prstGeom prst="rect">
+            <a:avLst/>
+          </a:prstGeom>
+        </p:spPr>
+      </p:pic>
+    </p:spTree>
+    <p:extLst>
+      <p:ext uri="{BB962C8B-B14F-4D97-AF65-F5344CB8AC3E}">
+        <p14:creationId xmlns:p14="http://schemas.microsoft.com/office/powerpoint/2010/main" val="2944438595"/>
+      </p:ext>
+    </p:extLst>
+  </p:cSld>
+  <p:clrMapOvr>
+    <a:masterClrMapping/>
+  </p:clrMapOvr>
+</p:sld>
+</file>
+
+<file path=ppt/slides/slide13.xml><?xml version="1.0" encoding="utf-8"?>
+<p:sld xmlns:a="http://schemas.openxmlformats.org/drawingml/2006/main" xmlns:r="http://schemas.openxmlformats.org/officeDocument/2006/relationships" xmlns:p="http://schemas.openxmlformats.org/presentationml/2006/main">
+  <p:cSld>
+    <p:spTree>
+      <p:nvGrpSpPr>
+        <p:cNvPr id="1" name=""/>
+        <p:cNvGrpSpPr/>
+        <p:nvPr/>
+      </p:nvGrpSpPr>
+      <p:grpSpPr>
+        <a:xfrm>
+          <a:off x="0" y="0"/>
+          <a:ext cx="0" cy="0"/>
+          <a:chOff x="0" y="0"/>
+          <a:chExt cx="0" cy="0"/>
+        </a:xfrm>
+      </p:grpSpPr>
+      <p:sp>
+        <p:nvSpPr>
+          <p:cNvPr id="2" name="Title 1">
+            <a:extLst>
+              <a:ext uri="{FF2B5EF4-FFF2-40B4-BE49-F238E27FC236}">
+                <a16:creationId xmlns:a16="http://schemas.microsoft.com/office/drawing/2014/main" id="{A0AB8DA4-E491-3732-1603-A671624E4D31}"/>
+              </a:ext>
+            </a:extLst>
+          </p:cNvPr>
+          <p:cNvSpPr>
+            <a:spLocks noGrp="1"/>
+          </p:cNvSpPr>
+          <p:nvPr>
+            <p:ph type="title"/>
+          </p:nvPr>
+        </p:nvSpPr>
+        <p:spPr/>
+        <p:txBody>
+          <a:bodyPr/>
+          <a:lstStyle/>
+          <a:p>
+            <a:endParaRPr lang="en-US"/>
+          </a:p>
+        </p:txBody>
+      </p:sp>
+      <p:sp>
+        <p:nvSpPr>
+          <p:cNvPr id="3" name="Content Placeholder 2">
+            <a:extLst>
+              <a:ext uri="{FF2B5EF4-FFF2-40B4-BE49-F238E27FC236}">
+                <a16:creationId xmlns:a16="http://schemas.microsoft.com/office/drawing/2014/main" id="{2F691DFC-5FD5-04DF-49BD-3905B2AA902D}"/>
+              </a:ext>
+            </a:extLst>
+          </p:cNvPr>
+          <p:cNvSpPr>
+            <a:spLocks noGrp="1"/>
+          </p:cNvSpPr>
+          <p:nvPr>
+            <p:ph idx="1"/>
+          </p:nvPr>
+        </p:nvSpPr>
+        <p:spPr/>
+        <p:txBody>
+          <a:bodyPr/>
+          <a:lstStyle/>
+          <a:p>
+            <a:endParaRPr lang="en-US"/>
+          </a:p>
+        </p:txBody>
+      </p:sp>
+      <p:pic>
+        <p:nvPicPr>
+          <p:cNvPr id="4" name="Picture 3">
+            <a:extLst>
+              <a:ext uri="{FF2B5EF4-FFF2-40B4-BE49-F238E27FC236}">
+                <a16:creationId xmlns:a16="http://schemas.microsoft.com/office/drawing/2014/main" id="{6A2E8AFE-A934-FAAA-7097-58EF363C84C2}"/>
+              </a:ext>
+            </a:extLst>
+          </p:cNvPr>
+          <p:cNvPicPr>
+            <a:picLocks noChangeAspect="1"/>
+          </p:cNvPicPr>
+          <p:nvPr/>
+        </p:nvPicPr>
+        <p:blipFill>
+          <a:blip r:embed="rId2"/>
+          <a:stretch>
+            <a:fillRect/>
+          </a:stretch>
+        </p:blipFill>
+        <p:spPr>
+          <a:xfrm>
+            <a:off x="225705" y="1849500"/>
+            <a:ext cx="8228718" cy="2632559"/>
+          </a:xfrm>
+          <a:prstGeom prst="rect">
+            <a:avLst/>
+          </a:prstGeom>
+        </p:spPr>
+      </p:pic>
+    </p:spTree>
+    <p:extLst>
+      <p:ext uri="{BB962C8B-B14F-4D97-AF65-F5344CB8AC3E}">
+        <p14:creationId xmlns:p14="http://schemas.microsoft.com/office/powerpoint/2010/main" val="1671303719"/>
+      </p:ext>
+    </p:extLst>
+  </p:cSld>
+  <p:clrMapOvr>
+    <a:masterClrMapping/>
+  </p:clrMapOvr>
+</p:sld>
+</file>
+
+<file path=ppt/slides/slide14.xml><?xml version="1.0" encoding="utf-8"?>
+<p:sld xmlns:a="http://schemas.openxmlformats.org/drawingml/2006/main" xmlns:r="http://schemas.openxmlformats.org/officeDocument/2006/relationships" xmlns:p="http://schemas.openxmlformats.org/presentationml/2006/main">
+  <p:cSld>
+    <p:spTree>
+      <p:nvGrpSpPr>
+        <p:cNvPr id="1" name=""/>
+        <p:cNvGrpSpPr/>
+        <p:nvPr/>
+      </p:nvGrpSpPr>
+      <p:grpSpPr>
+        <a:xfrm>
+          <a:off x="0" y="0"/>
+          <a:ext cx="0" cy="0"/>
+          <a:chOff x="0" y="0"/>
+          <a:chExt cx="0" cy="0"/>
+        </a:xfrm>
+      </p:grpSpPr>
+      <p:sp>
+        <p:nvSpPr>
           <p:cNvPr id="22529" name="Rectangle 2">
             <a:extLst>
               <a:ext uri="{FF2B5EF4-FFF2-40B4-BE49-F238E27FC236}">
@@ -16943,7 +12877,7 @@
 </p:sld>
 </file>
 
-<file path=ppt/slides/slide11.xml><?xml version="1.0" encoding="utf-8"?>
+<file path=ppt/slides/slide15.xml><?xml version="1.0" encoding="utf-8"?>
 <p:sld xmlns:a="http://schemas.openxmlformats.org/drawingml/2006/main" xmlns:r="http://schemas.openxmlformats.org/officeDocument/2006/relationships" xmlns:p="http://schemas.openxmlformats.org/presentationml/2006/main">
   <p:cSld>
     <p:spTree>
@@ -17393,7 +13327,7 @@
 </p:sld>
 </file>
 
-<file path=ppt/slides/slide12.xml><?xml version="1.0" encoding="utf-8"?>
+<file path=ppt/slides/slide16.xml><?xml version="1.0" encoding="utf-8"?>
 <p:sld xmlns:a="http://schemas.openxmlformats.org/drawingml/2006/main" xmlns:r="http://schemas.openxmlformats.org/officeDocument/2006/relationships" xmlns:p="http://schemas.openxmlformats.org/presentationml/2006/main">
   <p:cSld>
     <p:spTree>
@@ -17917,7 +13851,7 @@
 </p:sld>
 </file>
 
-<file path=ppt/slides/slide13.xml><?xml version="1.0" encoding="utf-8"?>
+<file path=ppt/slides/slide17.xml><?xml version="1.0" encoding="utf-8"?>
 <p:sld xmlns:a="http://schemas.openxmlformats.org/drawingml/2006/main" xmlns:r="http://schemas.openxmlformats.org/officeDocument/2006/relationships" xmlns:p="http://schemas.openxmlformats.org/presentationml/2006/main">
   <p:cSld>
     <p:spTree>
@@ -18858,7 +14792,7 @@
 </p:sld>
 </file>
 
-<file path=ppt/slides/slide14.xml><?xml version="1.0" encoding="utf-8"?>
+<file path=ppt/slides/slide18.xml><?xml version="1.0" encoding="utf-8"?>
 <p:sld xmlns:a="http://schemas.openxmlformats.org/drawingml/2006/main" xmlns:r="http://schemas.openxmlformats.org/officeDocument/2006/relationships" xmlns:p="http://schemas.openxmlformats.org/presentationml/2006/main">
   <p:cSld>
     <p:spTree>
@@ -19349,7 +15283,7 @@
 </p:sld>
 </file>
 
-<file path=ppt/slides/slide15.xml><?xml version="1.0" encoding="utf-8"?>
+<file path=ppt/slides/slide19.xml><?xml version="1.0" encoding="utf-8"?>
 <p:sld xmlns:a="http://schemas.openxmlformats.org/drawingml/2006/main" xmlns:r="http://schemas.openxmlformats.org/officeDocument/2006/relationships" xmlns:p="http://schemas.openxmlformats.org/presentationml/2006/main">
   <p:cSld>
     <p:spTree>
@@ -20110,7 +16044,737 @@
 </p:sld>
 </file>
 
-<file path=ppt/slides/slide16.xml><?xml version="1.0" encoding="utf-8"?>
+<file path=ppt/slides/slide2.xml><?xml version="1.0" encoding="utf-8"?>
+<p:sld xmlns:a="http://schemas.openxmlformats.org/drawingml/2006/main" xmlns:r="http://schemas.openxmlformats.org/officeDocument/2006/relationships" xmlns:p="http://schemas.openxmlformats.org/presentationml/2006/main">
+  <p:cSld>
+    <p:bg>
+      <p:bgPr>
+        <a:solidFill>
+          <a:schemeClr val="bg1"/>
+        </a:solidFill>
+        <a:effectLst/>
+      </p:bgPr>
+    </p:bg>
+    <p:spTree>
+      <p:nvGrpSpPr>
+        <p:cNvPr id="1" name=""/>
+        <p:cNvGrpSpPr/>
+        <p:nvPr/>
+      </p:nvGrpSpPr>
+      <p:grpSpPr>
+        <a:xfrm>
+          <a:off x="0" y="0"/>
+          <a:ext cx="0" cy="0"/>
+          <a:chOff x="0" y="0"/>
+          <a:chExt cx="0" cy="0"/>
+        </a:xfrm>
+      </p:grpSpPr>
+      <p:sp useBgFill="1">
+        <p:nvSpPr>
+          <p:cNvPr id="16391" name="Rectangle 16390">
+            <a:extLst>
+              <a:ext uri="{FF2B5EF4-FFF2-40B4-BE49-F238E27FC236}">
+                <a16:creationId xmlns:a16="http://schemas.microsoft.com/office/drawing/2014/main" id="{B3684CCF-CEBB-4D8E-A366-95E43D4C790B}"/>
+              </a:ext>
+              <a:ext uri="{C183D7F6-B498-43B3-948B-1728B52AA6E4}">
+                <adec:decorative xmlns:adec="http://schemas.microsoft.com/office/drawing/2017/decorative" val="1"/>
+              </a:ext>
+            </a:extLst>
+          </p:cNvPr>
+          <p:cNvSpPr>
+            <a:spLocks noGrp="1" noRot="1" noChangeAspect="1" noMove="1" noResize="1" noEditPoints="1" noAdjustHandles="1" noChangeArrowheads="1" noChangeShapeType="1" noTextEdit="1"/>
+          </p:cNvSpPr>
+          <p:nvPr>
+            <p:extLst>
+              <p:ext uri="{386F3935-93C4-4BCD-93E2-E3B085C9AB24}">
+                <p16:designElem xmlns:p16="http://schemas.microsoft.com/office/powerpoint/2015/main" val="1"/>
+              </p:ext>
+            </p:extLst>
+          </p:nvPr>
+        </p:nvSpPr>
+        <p:spPr>
+          <a:xfrm>
+            <a:off x="0" y="0"/>
+            <a:ext cx="9141714" cy="5715000"/>
+          </a:xfrm>
+          <a:prstGeom prst="rect">
+            <a:avLst/>
+          </a:prstGeom>
+          <a:ln>
+            <a:noFill/>
+          </a:ln>
+        </p:spPr>
+        <p:style>
+          <a:lnRef idx="2">
+            <a:schemeClr val="accent1">
+              <a:shade val="50000"/>
+            </a:schemeClr>
+          </a:lnRef>
+          <a:fillRef idx="1">
+            <a:schemeClr val="accent1"/>
+          </a:fillRef>
+          <a:effectRef idx="0">
+            <a:schemeClr val="accent1"/>
+          </a:effectRef>
+          <a:fontRef idx="minor">
+            <a:schemeClr val="lt1"/>
+          </a:fontRef>
+        </p:style>
+        <p:txBody>
+          <a:bodyPr rtlCol="0" anchor="ctr"/>
+          <a:lstStyle/>
+          <a:p>
+            <a:pPr algn="ctr"/>
+            <a:endParaRPr lang="en-US"/>
+          </a:p>
+        </p:txBody>
+      </p:sp>
+      <p:sp>
+        <p:nvSpPr>
+          <p:cNvPr id="16385" name="Rectangle 2">
+            <a:extLst>
+              <a:ext uri="{FF2B5EF4-FFF2-40B4-BE49-F238E27FC236}">
+                <a16:creationId xmlns:a16="http://schemas.microsoft.com/office/drawing/2014/main" id="{8FAE8CA6-5EB1-544B-9637-4627ADA36986}"/>
+              </a:ext>
+            </a:extLst>
+          </p:cNvPr>
+          <p:cNvSpPr>
+            <a:spLocks noGrp="1" noChangeArrowheads="1"/>
+          </p:cNvSpPr>
+          <p:nvPr>
+            <p:ph type="title"/>
+          </p:nvPr>
+        </p:nvSpPr>
+        <p:spPr>
+          <a:xfrm>
+            <a:off x="628650" y="288175"/>
+            <a:ext cx="3720709" cy="1104635"/>
+          </a:xfrm>
+        </p:spPr>
+        <p:txBody>
+          <a:bodyPr>
+            <a:normAutofit/>
+          </a:bodyPr>
+          <a:lstStyle/>
+          <a:p>
+            <a:pPr eaLnBrk="1" hangingPunct="1"/>
+            <a:r>
+              <a:rPr lang="en-US" altLang="en-US">
+                <a:latin typeface="Tahoma" panose="020B0604030504040204" pitchFamily="34" charset="0"/>
+                <a:ea typeface="ＭＳ Ｐゴシック" panose="020B0600070205080204" pitchFamily="34" charset="-128"/>
+              </a:rPr>
+              <a:t>Computing Innovations</a:t>
+            </a:r>
+          </a:p>
+        </p:txBody>
+      </p:sp>
+      <p:sp>
+        <p:nvSpPr>
+          <p:cNvPr id="16386" name="Rectangle 3">
+            <a:extLst>
+              <a:ext uri="{FF2B5EF4-FFF2-40B4-BE49-F238E27FC236}">
+                <a16:creationId xmlns:a16="http://schemas.microsoft.com/office/drawing/2014/main" id="{AC84324A-3724-874B-82A1-71A36E0BBD8D}"/>
+              </a:ext>
+            </a:extLst>
+          </p:cNvPr>
+          <p:cNvSpPr>
+            <a:spLocks noGrp="1" noChangeArrowheads="1"/>
+          </p:cNvSpPr>
+          <p:nvPr>
+            <p:ph type="body" idx="1"/>
+          </p:nvPr>
+        </p:nvSpPr>
+        <p:spPr>
+          <a:xfrm>
+            <a:off x="248654" y="1392810"/>
+            <a:ext cx="4478415" cy="4134687"/>
+          </a:xfrm>
+        </p:spPr>
+        <p:txBody>
+          <a:bodyPr>
+            <a:noAutofit/>
+          </a:bodyPr>
+          <a:lstStyle/>
+          <a:p>
+            <a:pPr marL="0" indent="0">
+              <a:buNone/>
+            </a:pPr>
+            <a:r>
+              <a:rPr lang="en-US" sz="1400"/>
+              <a:t>A </a:t>
+            </a:r>
+            <a:r>
+              <a:rPr lang="en-US" sz="1400" b="1"/>
+              <a:t>computing innovation </a:t>
+            </a:r>
+            <a:r>
+              <a:rPr lang="en-US" sz="1400"/>
+              <a:t>includes a program as an integral part of its function. </a:t>
+            </a:r>
+          </a:p>
+          <a:p>
+            <a:pPr marL="0" indent="0">
+              <a:buNone/>
+            </a:pPr>
+            <a:endParaRPr lang="en-US" sz="1400"/>
+          </a:p>
+          <a:p>
+            <a:pPr marL="0" indent="0">
+              <a:buNone/>
+            </a:pPr>
+            <a:r>
+              <a:rPr lang="en-US" sz="1400"/>
+              <a:t>A </a:t>
+            </a:r>
+            <a:r>
+              <a:rPr lang="en-US" sz="1400" b="1"/>
+              <a:t>program</a:t>
+            </a:r>
+            <a:r>
+              <a:rPr lang="en-US" sz="1400" i="1"/>
+              <a:t> </a:t>
+            </a:r>
+            <a:r>
+              <a:rPr lang="en-US" sz="1400"/>
+              <a:t>is a collection of program statements that performs a specific task when run by a computer. A program is often referred to as </a:t>
+            </a:r>
+            <a:r>
+              <a:rPr lang="en-US" sz="1400" b="1"/>
+              <a:t>software</a:t>
+            </a:r>
+            <a:r>
+              <a:rPr lang="en-US" sz="1400"/>
+              <a:t>. It can be written in different programming languages like Python or Java. </a:t>
+            </a:r>
+          </a:p>
+          <a:p>
+            <a:pPr marL="0" indent="0">
+              <a:buNone/>
+            </a:pPr>
+            <a:endParaRPr lang="en-US" sz="1400"/>
+          </a:p>
+          <a:p>
+            <a:pPr marL="0" indent="0">
+              <a:buNone/>
+            </a:pPr>
+            <a:r>
+              <a:rPr lang="en-US" sz="1400"/>
+              <a:t>A </a:t>
+            </a:r>
+            <a:r>
+              <a:rPr lang="en-US" sz="1400" b="1"/>
+              <a:t>computing innovation </a:t>
+            </a:r>
+            <a:r>
+              <a:rPr lang="en-US" sz="1400"/>
+              <a:t>can be physical (e.g., self-driving car), nonphysical computing software (e.g., picture editing software), or a nonphysical computing concept (e.g., e-commerce). </a:t>
+            </a:r>
+          </a:p>
+          <a:p>
+            <a:pPr marL="0" indent="0">
+              <a:buNone/>
+            </a:pPr>
+            <a:endParaRPr lang="en-US" sz="1400"/>
+          </a:p>
+          <a:p>
+            <a:pPr marL="0" indent="0">
+              <a:buNone/>
+            </a:pPr>
+            <a:r>
+              <a:rPr lang="en-US" sz="1400"/>
+              <a:t>The purpose of computing innovations is to solve problems or to pursue interests through creative expression. An understanding of the purpose of a computing innovation provides developers with an improved ability to develop that computing innovation. </a:t>
+            </a:r>
+          </a:p>
+          <a:p>
+            <a:pPr marL="0" indent="0">
+              <a:buNone/>
+            </a:pPr>
+            <a:endParaRPr lang="en-US" sz="1400"/>
+          </a:p>
+          <a:p>
+            <a:pPr marL="0" indent="0">
+              <a:buNone/>
+            </a:pPr>
+            <a:endParaRPr lang="en-US" sz="1400"/>
+          </a:p>
+          <a:p>
+            <a:pPr marL="0" indent="0">
+              <a:buNone/>
+            </a:pPr>
+            <a:endParaRPr lang="en-US" sz="1400"/>
+          </a:p>
+          <a:p>
+            <a:pPr marL="0" indent="0" eaLnBrk="1" hangingPunct="1">
+              <a:buNone/>
+            </a:pPr>
+            <a:endParaRPr lang="en-US" altLang="en-US" sz="1400">
+              <a:latin typeface="Tahoma" panose="020B0604030504040204" pitchFamily="34" charset="0"/>
+            </a:endParaRPr>
+          </a:p>
+        </p:txBody>
+      </p:sp>
+      <p:pic>
+        <p:nvPicPr>
+          <p:cNvPr id="1028" name="Picture 4" descr="How Tesla Is Using Artificial Intelligence to Create The Autonomous Cars Of  The Future | Bernard Marr">
+            <a:extLst>
+              <a:ext uri="{FF2B5EF4-FFF2-40B4-BE49-F238E27FC236}">
+                <a16:creationId xmlns:a16="http://schemas.microsoft.com/office/drawing/2014/main" id="{4AF56718-418C-EDF9-8D6C-16CE854A15BE}"/>
+              </a:ext>
+            </a:extLst>
+          </p:cNvPr>
+          <p:cNvPicPr>
+            <a:picLocks noChangeAspect="1" noChangeArrowheads="1"/>
+          </p:cNvPicPr>
+          <p:nvPr/>
+        </p:nvPicPr>
+        <p:blipFill rotWithShape="1">
+          <a:blip r:embed="rId3">
+            <a:extLst>
+              <a:ext uri="{28A0092B-C50C-407E-A947-70E740481C1C}">
+                <a14:useLocalDpi xmlns:a14="http://schemas.microsoft.com/office/drawing/2010/main" val="0"/>
+              </a:ext>
+            </a:extLst>
+          </a:blip>
+          <a:srcRect l="19270" r="15344" b="1"/>
+          <a:stretch/>
+        </p:blipFill>
+        <p:spPr bwMode="auto">
+          <a:xfrm>
+            <a:off x="5147997" y="2629049"/>
+            <a:ext cx="3022934" cy="3085951"/>
+          </a:xfrm>
+          <a:custGeom>
+            <a:avLst/>
+            <a:gdLst/>
+            <a:ahLst/>
+            <a:cxnLst/>
+            <a:rect l="l" t="t" r="r" b="b"/>
+            <a:pathLst>
+              <a:path w="4030579" h="3703141">
+                <a:moveTo>
+                  <a:pt x="2015289" y="0"/>
+                </a:moveTo>
+                <a:cubicBezTo>
+                  <a:pt x="3128303" y="0"/>
+                  <a:pt x="4030579" y="902277"/>
+                  <a:pt x="4030579" y="2015290"/>
+                </a:cubicBezTo>
+                <a:cubicBezTo>
+                  <a:pt x="4030579" y="2710923"/>
+                  <a:pt x="3678127" y="3324237"/>
+                  <a:pt x="3142057" y="3686399"/>
+                </a:cubicBezTo>
+                <a:lnTo>
+                  <a:pt x="3114499" y="3703141"/>
+                </a:lnTo>
+                <a:lnTo>
+                  <a:pt x="916080" y="3703141"/>
+                </a:lnTo>
+                <a:lnTo>
+                  <a:pt x="888522" y="3686399"/>
+                </a:lnTo>
+                <a:cubicBezTo>
+                  <a:pt x="352452" y="3324237"/>
+                  <a:pt x="0" y="2710923"/>
+                  <a:pt x="0" y="2015290"/>
+                </a:cubicBezTo>
+                <a:cubicBezTo>
+                  <a:pt x="0" y="902277"/>
+                  <a:pt x="902277" y="0"/>
+                  <a:pt x="2015289" y="0"/>
+                </a:cubicBezTo>
+                <a:close/>
+              </a:path>
+            </a:pathLst>
+          </a:custGeom>
+          <a:noFill/>
+          <a:extLst>
+            <a:ext uri="{909E8E84-426E-40DD-AFC4-6F175D3DCCD1}">
+              <a14:hiddenFill xmlns:a14="http://schemas.microsoft.com/office/drawing/2010/main">
+                <a:solidFill>
+                  <a:srgbClr val="FFFFFF"/>
+                </a:solidFill>
+              </a14:hiddenFill>
+            </a:ext>
+          </a:extLst>
+        </p:spPr>
+      </p:pic>
+      <p:sp>
+        <p:nvSpPr>
+          <p:cNvPr id="16393" name="Arc 16392">
+            <a:extLst>
+              <a:ext uri="{FF2B5EF4-FFF2-40B4-BE49-F238E27FC236}">
+                <a16:creationId xmlns:a16="http://schemas.microsoft.com/office/drawing/2014/main" id="{70BEB1E7-2F88-40BC-B73D-42E5B6F80BFC}"/>
+              </a:ext>
+              <a:ext uri="{C183D7F6-B498-43B3-948B-1728B52AA6E4}">
+                <adec:decorative xmlns:adec="http://schemas.microsoft.com/office/drawing/2017/decorative" val="1"/>
+              </a:ext>
+            </a:extLst>
+          </p:cNvPr>
+          <p:cNvSpPr>
+            <a:spLocks noGrp="1" noRot="1" noChangeAspect="1" noMove="1" noResize="1" noEditPoints="1" noAdjustHandles="1" noChangeArrowheads="1" noChangeShapeType="1" noTextEdit="1"/>
+          </p:cNvSpPr>
+          <p:nvPr>
+            <p:extLst>
+              <p:ext uri="{386F3935-93C4-4BCD-93E2-E3B085C9AB24}">
+                <p16:designElem xmlns:p16="http://schemas.microsoft.com/office/powerpoint/2015/main" val="1"/>
+              </p:ext>
+            </p:extLst>
+          </p:nvPr>
+        </p:nvSpPr>
+        <p:spPr>
+          <a:xfrm rot="4759070" flipV="1">
+            <a:off x="4338009" y="-437417"/>
+            <a:ext cx="3402861" cy="3062575"/>
+          </a:xfrm>
+          <a:prstGeom prst="arc">
+            <a:avLst>
+              <a:gd name="adj1" fmla="val 16200000"/>
+              <a:gd name="adj2" fmla="val 20093138"/>
+            </a:avLst>
+          </a:prstGeom>
+          <a:ln w="127000" cap="rnd">
+            <a:solidFill>
+              <a:schemeClr val="accent4"/>
+            </a:solidFill>
+            <a:prstDash val="dash"/>
+          </a:ln>
+        </p:spPr>
+        <p:style>
+          <a:lnRef idx="1">
+            <a:schemeClr val="accent1"/>
+          </a:lnRef>
+          <a:fillRef idx="0">
+            <a:schemeClr val="accent1"/>
+          </a:fillRef>
+          <a:effectRef idx="0">
+            <a:schemeClr val="accent1"/>
+          </a:effectRef>
+          <a:fontRef idx="minor">
+            <a:schemeClr val="tx1"/>
+          </a:fontRef>
+        </p:style>
+        <p:txBody>
+          <a:bodyPr rtlCol="0" anchor="ctr"/>
+          <a:lstStyle/>
+          <a:p>
+            <a:pPr algn="ctr"/>
+            <a:endParaRPr lang="en-US" dirty="0"/>
+          </a:p>
+        </p:txBody>
+      </p:sp>
+      <p:pic>
+        <p:nvPicPr>
+          <p:cNvPr id="2052" name="Picture 4" descr="How to resize an image in Photoshop">
+            <a:extLst>
+              <a:ext uri="{FF2B5EF4-FFF2-40B4-BE49-F238E27FC236}">
+                <a16:creationId xmlns:a16="http://schemas.microsoft.com/office/drawing/2014/main" id="{0C30EF5C-3A00-3C78-3271-9D8788B8946B}"/>
+              </a:ext>
+            </a:extLst>
+          </p:cNvPr>
+          <p:cNvPicPr>
+            <a:picLocks noChangeAspect="1" noChangeArrowheads="1"/>
+          </p:cNvPicPr>
+          <p:nvPr/>
+        </p:nvPicPr>
+        <p:blipFill rotWithShape="1">
+          <a:blip r:embed="rId4">
+            <a:extLst>
+              <a:ext uri="{28A0092B-C50C-407E-A947-70E740481C1C}">
+                <a14:useLocalDpi xmlns:a14="http://schemas.microsoft.com/office/drawing/2010/main" val="0"/>
+              </a:ext>
+            </a:extLst>
+          </a:blip>
+          <a:srcRect l="12818" r="30929"/>
+          <a:stretch/>
+        </p:blipFill>
+        <p:spPr bwMode="auto">
+          <a:xfrm>
+            <a:off x="4729355" y="10"/>
+            <a:ext cx="2639484" cy="2506581"/>
+          </a:xfrm>
+          <a:custGeom>
+            <a:avLst/>
+            <a:gdLst/>
+            <a:ahLst/>
+            <a:cxnLst/>
+            <a:rect l="l" t="t" r="r" b="b"/>
+            <a:pathLst>
+              <a:path w="3519312" h="3007909">
+                <a:moveTo>
+                  <a:pt x="519780" y="0"/>
+                </a:moveTo>
+                <a:lnTo>
+                  <a:pt x="2999532" y="0"/>
+                </a:lnTo>
+                <a:lnTo>
+                  <a:pt x="3003921" y="3989"/>
+                </a:lnTo>
+                <a:cubicBezTo>
+                  <a:pt x="3322356" y="322424"/>
+                  <a:pt x="3519312" y="762338"/>
+                  <a:pt x="3519312" y="1248253"/>
+                </a:cubicBezTo>
+                <a:cubicBezTo>
+                  <a:pt x="3519312" y="2220084"/>
+                  <a:pt x="2731487" y="3007909"/>
+                  <a:pt x="1759656" y="3007909"/>
+                </a:cubicBezTo>
+                <a:cubicBezTo>
+                  <a:pt x="787826" y="3007909"/>
+                  <a:pt x="0" y="2220084"/>
+                  <a:pt x="0" y="1248253"/>
+                </a:cubicBezTo>
+                <a:cubicBezTo>
+                  <a:pt x="0" y="762338"/>
+                  <a:pt x="196957" y="322424"/>
+                  <a:pt x="515392" y="3989"/>
+                </a:cubicBezTo>
+                <a:close/>
+              </a:path>
+            </a:pathLst>
+          </a:custGeom>
+          <a:noFill/>
+          <a:extLst>
+            <a:ext uri="{909E8E84-426E-40DD-AFC4-6F175D3DCCD1}">
+              <a14:hiddenFill xmlns:a14="http://schemas.microsoft.com/office/drawing/2010/main">
+                <a:solidFill>
+                  <a:srgbClr val="FFFFFF"/>
+                </a:solidFill>
+              </a14:hiddenFill>
+            </a:ext>
+          </a:extLst>
+        </p:spPr>
+      </p:pic>
+      <p:pic>
+        <p:nvPicPr>
+          <p:cNvPr id="2050" name="Picture 2" descr="E-commerce Illustration - Free Stock Photo by mohamed hassan on  Stockvault.net">
+            <a:extLst>
+              <a:ext uri="{FF2B5EF4-FFF2-40B4-BE49-F238E27FC236}">
+                <a16:creationId xmlns:a16="http://schemas.microsoft.com/office/drawing/2014/main" id="{019AEEC8-C022-7FBE-9380-E0CD5B933E6B}"/>
+              </a:ext>
+            </a:extLst>
+          </p:cNvPr>
+          <p:cNvPicPr>
+            <a:picLocks noChangeAspect="1" noChangeArrowheads="1"/>
+          </p:cNvPicPr>
+          <p:nvPr/>
+        </p:nvPicPr>
+        <p:blipFill rotWithShape="1">
+          <a:blip r:embed="rId5">
+            <a:extLst>
+              <a:ext uri="{28A0092B-C50C-407E-A947-70E740481C1C}">
+                <a14:useLocalDpi xmlns:a14="http://schemas.microsoft.com/office/drawing/2010/main" val="0"/>
+              </a:ext>
+            </a:extLst>
+          </a:blip>
+          <a:srcRect l="13152" r="48306"/>
+          <a:stretch/>
+        </p:blipFill>
+        <p:spPr bwMode="auto">
+          <a:xfrm>
+            <a:off x="7450096" y="310180"/>
+            <a:ext cx="1693904" cy="2962224"/>
+          </a:xfrm>
+          <a:custGeom>
+            <a:avLst/>
+            <a:gdLst/>
+            <a:ahLst/>
+            <a:cxnLst/>
+            <a:rect l="l" t="t" r="r" b="b"/>
+            <a:pathLst>
+              <a:path w="2258539" h="3554668">
+                <a:moveTo>
+                  <a:pt x="1777334" y="0"/>
+                </a:moveTo>
+                <a:cubicBezTo>
+                  <a:pt x="1900033" y="0"/>
+                  <a:pt x="2019829" y="12434"/>
+                  <a:pt x="2135529" y="36109"/>
+                </a:cubicBezTo>
+                <a:lnTo>
+                  <a:pt x="2258539" y="67738"/>
+                </a:lnTo>
+                <a:lnTo>
+                  <a:pt x="2258539" y="3486930"/>
+                </a:lnTo>
+                <a:lnTo>
+                  <a:pt x="2135529" y="3518559"/>
+                </a:lnTo>
+                <a:cubicBezTo>
+                  <a:pt x="2019829" y="3542235"/>
+                  <a:pt x="1900033" y="3554668"/>
+                  <a:pt x="1777334" y="3554668"/>
+                </a:cubicBezTo>
+                <a:cubicBezTo>
+                  <a:pt x="795739" y="3554668"/>
+                  <a:pt x="0" y="2758929"/>
+                  <a:pt x="0" y="1777334"/>
+                </a:cubicBezTo>
+                <a:cubicBezTo>
+                  <a:pt x="0" y="795740"/>
+                  <a:pt x="795739" y="0"/>
+                  <a:pt x="1777334" y="0"/>
+                </a:cubicBezTo>
+                <a:close/>
+              </a:path>
+            </a:pathLst>
+          </a:custGeom>
+          <a:noFill/>
+          <a:extLst>
+            <a:ext uri="{909E8E84-426E-40DD-AFC4-6F175D3DCCD1}">
+              <a14:hiddenFill xmlns:a14="http://schemas.microsoft.com/office/drawing/2010/main">
+                <a:solidFill>
+                  <a:srgbClr val="FFFFFF"/>
+                </a:solidFill>
+              </a14:hiddenFill>
+            </a:ext>
+          </a:extLst>
+        </p:spPr>
+      </p:pic>
+    </p:spTree>
+    <p:extLst>
+      <p:ext uri="{BB962C8B-B14F-4D97-AF65-F5344CB8AC3E}">
+        <p14:creationId xmlns:p14="http://schemas.microsoft.com/office/powerpoint/2010/main" val="797022506"/>
+      </p:ext>
+    </p:extLst>
+  </p:cSld>
+  <p:clrMapOvr>
+    <a:masterClrMapping/>
+  </p:clrMapOvr>
+  <p:transition/>
+  <p:timing>
+    <p:tnLst>
+      <p:par>
+        <p:cTn id="1" dur="indefinite" restart="never" nodeType="tmRoot">
+          <p:childTnLst>
+            <p:seq concurrent="1" nextAc="seek">
+              <p:cTn id="2" dur="indefinite" nodeType="mainSeq">
+                <p:childTnLst>
+                  <p:par>
+                    <p:cTn id="3" fill="hold">
+                      <p:stCondLst>
+                        <p:cond delay="indefinite"/>
+                      </p:stCondLst>
+                      <p:childTnLst>
+                        <p:par>
+                          <p:cTn id="4" fill="hold">
+                            <p:stCondLst>
+                              <p:cond delay="0"/>
+                            </p:stCondLst>
+                            <p:childTnLst>
+                              <p:par>
+                                <p:cTn id="5" presetID="1" presetClass="entr" presetSubtype="0" fill="hold" nodeType="clickEffect">
+                                  <p:stCondLst>
+                                    <p:cond delay="0"/>
+                                  </p:stCondLst>
+                                  <p:childTnLst>
+                                    <p:set>
+                                      <p:cBhvr>
+                                        <p:cTn id="6" dur="1" fill="hold">
+                                          <p:stCondLst>
+                                            <p:cond delay="0"/>
+                                          </p:stCondLst>
+                                        </p:cTn>
+                                        <p:tgtEl>
+                                          <p:spTgt spid="16386">
+                                            <p:txEl>
+                                              <p:pRg st="4" end="4"/>
+                                            </p:txEl>
+                                          </p:spTgt>
+                                        </p:tgtEl>
+                                        <p:attrNameLst>
+                                          <p:attrName>style.visibility</p:attrName>
+                                        </p:attrNameLst>
+                                      </p:cBhvr>
+                                      <p:to>
+                                        <p:strVal val="visible"/>
+                                      </p:to>
+                                    </p:set>
+                                  </p:childTnLst>
+                                </p:cTn>
+                              </p:par>
+                            </p:childTnLst>
+                          </p:cTn>
+                        </p:par>
+                      </p:childTnLst>
+                    </p:cTn>
+                  </p:par>
+                  <p:par>
+                    <p:cTn id="7" fill="hold">
+                      <p:stCondLst>
+                        <p:cond delay="indefinite"/>
+                      </p:stCondLst>
+                      <p:childTnLst>
+                        <p:par>
+                          <p:cTn id="8" fill="hold">
+                            <p:stCondLst>
+                              <p:cond delay="0"/>
+                            </p:stCondLst>
+                            <p:childTnLst>
+                              <p:par>
+                                <p:cTn id="9" presetID="1" presetClass="entr" presetSubtype="0" fill="hold" nodeType="clickEffect">
+                                  <p:stCondLst>
+                                    <p:cond delay="0"/>
+                                  </p:stCondLst>
+                                  <p:childTnLst>
+                                    <p:set>
+                                      <p:cBhvr>
+                                        <p:cTn id="10" dur="1" fill="hold">
+                                          <p:stCondLst>
+                                            <p:cond delay="0"/>
+                                          </p:stCondLst>
+                                        </p:cTn>
+                                        <p:tgtEl>
+                                          <p:spTgt spid="16386">
+                                            <p:txEl>
+                                              <p:pRg st="6" end="6"/>
+                                            </p:txEl>
+                                          </p:spTgt>
+                                        </p:tgtEl>
+                                        <p:attrNameLst>
+                                          <p:attrName>style.visibility</p:attrName>
+                                        </p:attrNameLst>
+                                      </p:cBhvr>
+                                      <p:to>
+                                        <p:strVal val="visible"/>
+                                      </p:to>
+                                    </p:set>
+                                  </p:childTnLst>
+                                </p:cTn>
+                              </p:par>
+                            </p:childTnLst>
+                          </p:cTn>
+                        </p:par>
+                      </p:childTnLst>
+                    </p:cTn>
+                  </p:par>
+                </p:childTnLst>
+              </p:cTn>
+              <p:prevCondLst>
+                <p:cond evt="onPrev" delay="0">
+                  <p:tgtEl>
+                    <p:sldTgt/>
+                  </p:tgtEl>
+                </p:cond>
+              </p:prevCondLst>
+              <p:nextCondLst>
+                <p:cond evt="onNext" delay="0">
+                  <p:tgtEl>
+                    <p:sldTgt/>
+                  </p:tgtEl>
+                </p:cond>
+              </p:nextCondLst>
+            </p:seq>
+          </p:childTnLst>
+        </p:cTn>
+      </p:par>
+    </p:tnLst>
+  </p:timing>
+</p:sld>
+</file>
+
+<file path=ppt/slides/slide20.xml><?xml version="1.0" encoding="utf-8"?>
 <p:sld xmlns:a="http://schemas.openxmlformats.org/drawingml/2006/main" xmlns:r="http://schemas.openxmlformats.org/officeDocument/2006/relationships" xmlns:p="http://schemas.openxmlformats.org/presentationml/2006/main">
   <p:cSld>
     <p:spTree>
@@ -20590,7 +17254,7 @@
 </p:sld>
 </file>
 
-<file path=ppt/slides/slide17.xml><?xml version="1.0" encoding="utf-8"?>
+<file path=ppt/slides/slide21.xml><?xml version="1.0" encoding="utf-8"?>
 <p:sld xmlns:a="http://schemas.openxmlformats.org/drawingml/2006/main" xmlns:r="http://schemas.openxmlformats.org/officeDocument/2006/relationships" xmlns:p="http://schemas.openxmlformats.org/presentationml/2006/main">
   <p:cSld>
     <p:spTree>
@@ -21005,7 +17669,7 @@
 </p:sld>
 </file>
 
-<file path=ppt/slides/slide18.xml><?xml version="1.0" encoding="utf-8"?>
+<file path=ppt/slides/slide22.xml><?xml version="1.0" encoding="utf-8"?>
 <p:sld xmlns:a="http://schemas.openxmlformats.org/drawingml/2006/main" xmlns:r="http://schemas.openxmlformats.org/officeDocument/2006/relationships" xmlns:p="http://schemas.openxmlformats.org/presentationml/2006/main">
   <p:cSld>
     <p:spTree>
@@ -21498,7 +18162,7 @@
 </p:sld>
 </file>
 
-<file path=ppt/slides/slide19.xml><?xml version="1.0" encoding="utf-8"?>
+<file path=ppt/slides/slide23.xml><?xml version="1.0" encoding="utf-8"?>
 <p:sld xmlns:a="http://schemas.openxmlformats.org/drawingml/2006/main" xmlns:r="http://schemas.openxmlformats.org/officeDocument/2006/relationships" xmlns:p="http://schemas.openxmlformats.org/presentationml/2006/main">
   <p:cSld>
     <p:spTree>
@@ -22002,737 +18666,7 @@
 </p:sld>
 </file>
 
-<file path=ppt/slides/slide2.xml><?xml version="1.0" encoding="utf-8"?>
-<p:sld xmlns:a="http://schemas.openxmlformats.org/drawingml/2006/main" xmlns:r="http://schemas.openxmlformats.org/officeDocument/2006/relationships" xmlns:p="http://schemas.openxmlformats.org/presentationml/2006/main">
-  <p:cSld>
-    <p:bg>
-      <p:bgPr>
-        <a:solidFill>
-          <a:schemeClr val="bg1"/>
-        </a:solidFill>
-        <a:effectLst/>
-      </p:bgPr>
-    </p:bg>
-    <p:spTree>
-      <p:nvGrpSpPr>
-        <p:cNvPr id="1" name=""/>
-        <p:cNvGrpSpPr/>
-        <p:nvPr/>
-      </p:nvGrpSpPr>
-      <p:grpSpPr>
-        <a:xfrm>
-          <a:off x="0" y="0"/>
-          <a:ext cx="0" cy="0"/>
-          <a:chOff x="0" y="0"/>
-          <a:chExt cx="0" cy="0"/>
-        </a:xfrm>
-      </p:grpSpPr>
-      <p:sp useBgFill="1">
-        <p:nvSpPr>
-          <p:cNvPr id="16391" name="Rectangle 16390">
-            <a:extLst>
-              <a:ext uri="{FF2B5EF4-FFF2-40B4-BE49-F238E27FC236}">
-                <a16:creationId xmlns:a16="http://schemas.microsoft.com/office/drawing/2014/main" id="{B3684CCF-CEBB-4D8E-A366-95E43D4C790B}"/>
-              </a:ext>
-              <a:ext uri="{C183D7F6-B498-43B3-948B-1728B52AA6E4}">
-                <adec:decorative xmlns:adec="http://schemas.microsoft.com/office/drawing/2017/decorative" val="1"/>
-              </a:ext>
-            </a:extLst>
-          </p:cNvPr>
-          <p:cNvSpPr>
-            <a:spLocks noGrp="1" noRot="1" noChangeAspect="1" noMove="1" noResize="1" noEditPoints="1" noAdjustHandles="1" noChangeArrowheads="1" noChangeShapeType="1" noTextEdit="1"/>
-          </p:cNvSpPr>
-          <p:nvPr>
-            <p:extLst>
-              <p:ext uri="{386F3935-93C4-4BCD-93E2-E3B085C9AB24}">
-                <p16:designElem xmlns:p16="http://schemas.microsoft.com/office/powerpoint/2015/main" val="1"/>
-              </p:ext>
-            </p:extLst>
-          </p:nvPr>
-        </p:nvSpPr>
-        <p:spPr>
-          <a:xfrm>
-            <a:off x="0" y="0"/>
-            <a:ext cx="9141714" cy="5715000"/>
-          </a:xfrm>
-          <a:prstGeom prst="rect">
-            <a:avLst/>
-          </a:prstGeom>
-          <a:ln>
-            <a:noFill/>
-          </a:ln>
-        </p:spPr>
-        <p:style>
-          <a:lnRef idx="2">
-            <a:schemeClr val="accent1">
-              <a:shade val="50000"/>
-            </a:schemeClr>
-          </a:lnRef>
-          <a:fillRef idx="1">
-            <a:schemeClr val="accent1"/>
-          </a:fillRef>
-          <a:effectRef idx="0">
-            <a:schemeClr val="accent1"/>
-          </a:effectRef>
-          <a:fontRef idx="minor">
-            <a:schemeClr val="lt1"/>
-          </a:fontRef>
-        </p:style>
-        <p:txBody>
-          <a:bodyPr rtlCol="0" anchor="ctr"/>
-          <a:lstStyle/>
-          <a:p>
-            <a:pPr algn="ctr"/>
-            <a:endParaRPr lang="en-US"/>
-          </a:p>
-        </p:txBody>
-      </p:sp>
-      <p:sp>
-        <p:nvSpPr>
-          <p:cNvPr id="16385" name="Rectangle 2">
-            <a:extLst>
-              <a:ext uri="{FF2B5EF4-FFF2-40B4-BE49-F238E27FC236}">
-                <a16:creationId xmlns:a16="http://schemas.microsoft.com/office/drawing/2014/main" id="{8FAE8CA6-5EB1-544B-9637-4627ADA36986}"/>
-              </a:ext>
-            </a:extLst>
-          </p:cNvPr>
-          <p:cNvSpPr>
-            <a:spLocks noGrp="1" noChangeArrowheads="1"/>
-          </p:cNvSpPr>
-          <p:nvPr>
-            <p:ph type="title"/>
-          </p:nvPr>
-        </p:nvSpPr>
-        <p:spPr>
-          <a:xfrm>
-            <a:off x="628650" y="288175"/>
-            <a:ext cx="3720709" cy="1104635"/>
-          </a:xfrm>
-        </p:spPr>
-        <p:txBody>
-          <a:bodyPr>
-            <a:normAutofit/>
-          </a:bodyPr>
-          <a:lstStyle/>
-          <a:p>
-            <a:pPr eaLnBrk="1" hangingPunct="1"/>
-            <a:r>
-              <a:rPr lang="en-US" altLang="en-US">
-                <a:latin typeface="Tahoma" panose="020B0604030504040204" pitchFamily="34" charset="0"/>
-                <a:ea typeface="ＭＳ Ｐゴシック" panose="020B0600070205080204" pitchFamily="34" charset="-128"/>
-              </a:rPr>
-              <a:t>Computing Innovations</a:t>
-            </a:r>
-          </a:p>
-        </p:txBody>
-      </p:sp>
-      <p:sp>
-        <p:nvSpPr>
-          <p:cNvPr id="16386" name="Rectangle 3">
-            <a:extLst>
-              <a:ext uri="{FF2B5EF4-FFF2-40B4-BE49-F238E27FC236}">
-                <a16:creationId xmlns:a16="http://schemas.microsoft.com/office/drawing/2014/main" id="{AC84324A-3724-874B-82A1-71A36E0BBD8D}"/>
-              </a:ext>
-            </a:extLst>
-          </p:cNvPr>
-          <p:cNvSpPr>
-            <a:spLocks noGrp="1" noChangeArrowheads="1"/>
-          </p:cNvSpPr>
-          <p:nvPr>
-            <p:ph type="body" idx="1"/>
-          </p:nvPr>
-        </p:nvSpPr>
-        <p:spPr>
-          <a:xfrm>
-            <a:off x="248654" y="1392810"/>
-            <a:ext cx="4478415" cy="4134687"/>
-          </a:xfrm>
-        </p:spPr>
-        <p:txBody>
-          <a:bodyPr>
-            <a:noAutofit/>
-          </a:bodyPr>
-          <a:lstStyle/>
-          <a:p>
-            <a:pPr marL="0" indent="0">
-              <a:buNone/>
-            </a:pPr>
-            <a:r>
-              <a:rPr lang="en-US" sz="1400"/>
-              <a:t>A </a:t>
-            </a:r>
-            <a:r>
-              <a:rPr lang="en-US" sz="1400" b="1"/>
-              <a:t>computing innovation </a:t>
-            </a:r>
-            <a:r>
-              <a:rPr lang="en-US" sz="1400"/>
-              <a:t>includes a program as an integral part of its function. </a:t>
-            </a:r>
-          </a:p>
-          <a:p>
-            <a:pPr marL="0" indent="0">
-              <a:buNone/>
-            </a:pPr>
-            <a:endParaRPr lang="en-US" sz="1400"/>
-          </a:p>
-          <a:p>
-            <a:pPr marL="0" indent="0">
-              <a:buNone/>
-            </a:pPr>
-            <a:r>
-              <a:rPr lang="en-US" sz="1400"/>
-              <a:t>A </a:t>
-            </a:r>
-            <a:r>
-              <a:rPr lang="en-US" sz="1400" b="1"/>
-              <a:t>program</a:t>
-            </a:r>
-            <a:r>
-              <a:rPr lang="en-US" sz="1400" i="1"/>
-              <a:t> </a:t>
-            </a:r>
-            <a:r>
-              <a:rPr lang="en-US" sz="1400"/>
-              <a:t>is a collection of program statements that performs a specific task when run by a computer. A program is often referred to as </a:t>
-            </a:r>
-            <a:r>
-              <a:rPr lang="en-US" sz="1400" b="1"/>
-              <a:t>software</a:t>
-            </a:r>
-            <a:r>
-              <a:rPr lang="en-US" sz="1400"/>
-              <a:t>. It can be written in different programming languages like Python or Java. </a:t>
-            </a:r>
-          </a:p>
-          <a:p>
-            <a:pPr marL="0" indent="0">
-              <a:buNone/>
-            </a:pPr>
-            <a:endParaRPr lang="en-US" sz="1400"/>
-          </a:p>
-          <a:p>
-            <a:pPr marL="0" indent="0">
-              <a:buNone/>
-            </a:pPr>
-            <a:r>
-              <a:rPr lang="en-US" sz="1400"/>
-              <a:t>A </a:t>
-            </a:r>
-            <a:r>
-              <a:rPr lang="en-US" sz="1400" b="1"/>
-              <a:t>computing innovation </a:t>
-            </a:r>
-            <a:r>
-              <a:rPr lang="en-US" sz="1400"/>
-              <a:t>can be physical (e.g., self-driving car), nonphysical computing software (e.g., picture editing software), or a nonphysical computing concept (e.g., e-commerce). </a:t>
-            </a:r>
-          </a:p>
-          <a:p>
-            <a:pPr marL="0" indent="0">
-              <a:buNone/>
-            </a:pPr>
-            <a:endParaRPr lang="en-US" sz="1400"/>
-          </a:p>
-          <a:p>
-            <a:pPr marL="0" indent="0">
-              <a:buNone/>
-            </a:pPr>
-            <a:r>
-              <a:rPr lang="en-US" sz="1400"/>
-              <a:t>The purpose of computing innovations is to solve problems or to pursue interests through creative expression. An understanding of the purpose of a computing innovation provides developers with an improved ability to develop that computing innovation. </a:t>
-            </a:r>
-          </a:p>
-          <a:p>
-            <a:pPr marL="0" indent="0">
-              <a:buNone/>
-            </a:pPr>
-            <a:endParaRPr lang="en-US" sz="1400"/>
-          </a:p>
-          <a:p>
-            <a:pPr marL="0" indent="0">
-              <a:buNone/>
-            </a:pPr>
-            <a:endParaRPr lang="en-US" sz="1400"/>
-          </a:p>
-          <a:p>
-            <a:pPr marL="0" indent="0">
-              <a:buNone/>
-            </a:pPr>
-            <a:endParaRPr lang="en-US" sz="1400"/>
-          </a:p>
-          <a:p>
-            <a:pPr marL="0" indent="0" eaLnBrk="1" hangingPunct="1">
-              <a:buNone/>
-            </a:pPr>
-            <a:endParaRPr lang="en-US" altLang="en-US" sz="1400">
-              <a:latin typeface="Tahoma" panose="020B0604030504040204" pitchFamily="34" charset="0"/>
-            </a:endParaRPr>
-          </a:p>
-        </p:txBody>
-      </p:sp>
-      <p:pic>
-        <p:nvPicPr>
-          <p:cNvPr id="1028" name="Picture 4" descr="How Tesla Is Using Artificial Intelligence to Create The Autonomous Cars Of  The Future | Bernard Marr">
-            <a:extLst>
-              <a:ext uri="{FF2B5EF4-FFF2-40B4-BE49-F238E27FC236}">
-                <a16:creationId xmlns:a16="http://schemas.microsoft.com/office/drawing/2014/main" id="{4AF56718-418C-EDF9-8D6C-16CE854A15BE}"/>
-              </a:ext>
-            </a:extLst>
-          </p:cNvPr>
-          <p:cNvPicPr>
-            <a:picLocks noChangeAspect="1" noChangeArrowheads="1"/>
-          </p:cNvPicPr>
-          <p:nvPr/>
-        </p:nvPicPr>
-        <p:blipFill rotWithShape="1">
-          <a:blip r:embed="rId3">
-            <a:extLst>
-              <a:ext uri="{28A0092B-C50C-407E-A947-70E740481C1C}">
-                <a14:useLocalDpi xmlns:a14="http://schemas.microsoft.com/office/drawing/2010/main" val="0"/>
-              </a:ext>
-            </a:extLst>
-          </a:blip>
-          <a:srcRect l="19270" r="15344" b="1"/>
-          <a:stretch/>
-        </p:blipFill>
-        <p:spPr bwMode="auto">
-          <a:xfrm>
-            <a:off x="5147997" y="2629049"/>
-            <a:ext cx="3022934" cy="3085951"/>
-          </a:xfrm>
-          <a:custGeom>
-            <a:avLst/>
-            <a:gdLst/>
-            <a:ahLst/>
-            <a:cxnLst/>
-            <a:rect l="l" t="t" r="r" b="b"/>
-            <a:pathLst>
-              <a:path w="4030579" h="3703141">
-                <a:moveTo>
-                  <a:pt x="2015289" y="0"/>
-                </a:moveTo>
-                <a:cubicBezTo>
-                  <a:pt x="3128303" y="0"/>
-                  <a:pt x="4030579" y="902277"/>
-                  <a:pt x="4030579" y="2015290"/>
-                </a:cubicBezTo>
-                <a:cubicBezTo>
-                  <a:pt x="4030579" y="2710923"/>
-                  <a:pt x="3678127" y="3324237"/>
-                  <a:pt x="3142057" y="3686399"/>
-                </a:cubicBezTo>
-                <a:lnTo>
-                  <a:pt x="3114499" y="3703141"/>
-                </a:lnTo>
-                <a:lnTo>
-                  <a:pt x="916080" y="3703141"/>
-                </a:lnTo>
-                <a:lnTo>
-                  <a:pt x="888522" y="3686399"/>
-                </a:lnTo>
-                <a:cubicBezTo>
-                  <a:pt x="352452" y="3324237"/>
-                  <a:pt x="0" y="2710923"/>
-                  <a:pt x="0" y="2015290"/>
-                </a:cubicBezTo>
-                <a:cubicBezTo>
-                  <a:pt x="0" y="902277"/>
-                  <a:pt x="902277" y="0"/>
-                  <a:pt x="2015289" y="0"/>
-                </a:cubicBezTo>
-                <a:close/>
-              </a:path>
-            </a:pathLst>
-          </a:custGeom>
-          <a:noFill/>
-          <a:extLst>
-            <a:ext uri="{909E8E84-426E-40DD-AFC4-6F175D3DCCD1}">
-              <a14:hiddenFill xmlns:a14="http://schemas.microsoft.com/office/drawing/2010/main">
-                <a:solidFill>
-                  <a:srgbClr val="FFFFFF"/>
-                </a:solidFill>
-              </a14:hiddenFill>
-            </a:ext>
-          </a:extLst>
-        </p:spPr>
-      </p:pic>
-      <p:sp>
-        <p:nvSpPr>
-          <p:cNvPr id="16393" name="Arc 16392">
-            <a:extLst>
-              <a:ext uri="{FF2B5EF4-FFF2-40B4-BE49-F238E27FC236}">
-                <a16:creationId xmlns:a16="http://schemas.microsoft.com/office/drawing/2014/main" id="{70BEB1E7-2F88-40BC-B73D-42E5B6F80BFC}"/>
-              </a:ext>
-              <a:ext uri="{C183D7F6-B498-43B3-948B-1728B52AA6E4}">
-                <adec:decorative xmlns:adec="http://schemas.microsoft.com/office/drawing/2017/decorative" val="1"/>
-              </a:ext>
-            </a:extLst>
-          </p:cNvPr>
-          <p:cNvSpPr>
-            <a:spLocks noGrp="1" noRot="1" noChangeAspect="1" noMove="1" noResize="1" noEditPoints="1" noAdjustHandles="1" noChangeArrowheads="1" noChangeShapeType="1" noTextEdit="1"/>
-          </p:cNvSpPr>
-          <p:nvPr>
-            <p:extLst>
-              <p:ext uri="{386F3935-93C4-4BCD-93E2-E3B085C9AB24}">
-                <p16:designElem xmlns:p16="http://schemas.microsoft.com/office/powerpoint/2015/main" val="1"/>
-              </p:ext>
-            </p:extLst>
-          </p:nvPr>
-        </p:nvSpPr>
-        <p:spPr>
-          <a:xfrm rot="4759070" flipV="1">
-            <a:off x="4338009" y="-437417"/>
-            <a:ext cx="3402861" cy="3062575"/>
-          </a:xfrm>
-          <a:prstGeom prst="arc">
-            <a:avLst>
-              <a:gd name="adj1" fmla="val 16200000"/>
-              <a:gd name="adj2" fmla="val 20093138"/>
-            </a:avLst>
-          </a:prstGeom>
-          <a:ln w="127000" cap="rnd">
-            <a:solidFill>
-              <a:schemeClr val="accent4"/>
-            </a:solidFill>
-            <a:prstDash val="dash"/>
-          </a:ln>
-        </p:spPr>
-        <p:style>
-          <a:lnRef idx="1">
-            <a:schemeClr val="accent1"/>
-          </a:lnRef>
-          <a:fillRef idx="0">
-            <a:schemeClr val="accent1"/>
-          </a:fillRef>
-          <a:effectRef idx="0">
-            <a:schemeClr val="accent1"/>
-          </a:effectRef>
-          <a:fontRef idx="minor">
-            <a:schemeClr val="tx1"/>
-          </a:fontRef>
-        </p:style>
-        <p:txBody>
-          <a:bodyPr rtlCol="0" anchor="ctr"/>
-          <a:lstStyle/>
-          <a:p>
-            <a:pPr algn="ctr"/>
-            <a:endParaRPr lang="en-US" dirty="0"/>
-          </a:p>
-        </p:txBody>
-      </p:sp>
-      <p:pic>
-        <p:nvPicPr>
-          <p:cNvPr id="2052" name="Picture 4" descr="How to resize an image in Photoshop">
-            <a:extLst>
-              <a:ext uri="{FF2B5EF4-FFF2-40B4-BE49-F238E27FC236}">
-                <a16:creationId xmlns:a16="http://schemas.microsoft.com/office/drawing/2014/main" id="{0C30EF5C-3A00-3C78-3271-9D8788B8946B}"/>
-              </a:ext>
-            </a:extLst>
-          </p:cNvPr>
-          <p:cNvPicPr>
-            <a:picLocks noChangeAspect="1" noChangeArrowheads="1"/>
-          </p:cNvPicPr>
-          <p:nvPr/>
-        </p:nvPicPr>
-        <p:blipFill rotWithShape="1">
-          <a:blip r:embed="rId4">
-            <a:extLst>
-              <a:ext uri="{28A0092B-C50C-407E-A947-70E740481C1C}">
-                <a14:useLocalDpi xmlns:a14="http://schemas.microsoft.com/office/drawing/2010/main" val="0"/>
-              </a:ext>
-            </a:extLst>
-          </a:blip>
-          <a:srcRect l="12818" r="30929"/>
-          <a:stretch/>
-        </p:blipFill>
-        <p:spPr bwMode="auto">
-          <a:xfrm>
-            <a:off x="4729355" y="10"/>
-            <a:ext cx="2639484" cy="2506581"/>
-          </a:xfrm>
-          <a:custGeom>
-            <a:avLst/>
-            <a:gdLst/>
-            <a:ahLst/>
-            <a:cxnLst/>
-            <a:rect l="l" t="t" r="r" b="b"/>
-            <a:pathLst>
-              <a:path w="3519312" h="3007909">
-                <a:moveTo>
-                  <a:pt x="519780" y="0"/>
-                </a:moveTo>
-                <a:lnTo>
-                  <a:pt x="2999532" y="0"/>
-                </a:lnTo>
-                <a:lnTo>
-                  <a:pt x="3003921" y="3989"/>
-                </a:lnTo>
-                <a:cubicBezTo>
-                  <a:pt x="3322356" y="322424"/>
-                  <a:pt x="3519312" y="762338"/>
-                  <a:pt x="3519312" y="1248253"/>
-                </a:cubicBezTo>
-                <a:cubicBezTo>
-                  <a:pt x="3519312" y="2220084"/>
-                  <a:pt x="2731487" y="3007909"/>
-                  <a:pt x="1759656" y="3007909"/>
-                </a:cubicBezTo>
-                <a:cubicBezTo>
-                  <a:pt x="787826" y="3007909"/>
-                  <a:pt x="0" y="2220084"/>
-                  <a:pt x="0" y="1248253"/>
-                </a:cubicBezTo>
-                <a:cubicBezTo>
-                  <a:pt x="0" y="762338"/>
-                  <a:pt x="196957" y="322424"/>
-                  <a:pt x="515392" y="3989"/>
-                </a:cubicBezTo>
-                <a:close/>
-              </a:path>
-            </a:pathLst>
-          </a:custGeom>
-          <a:noFill/>
-          <a:extLst>
-            <a:ext uri="{909E8E84-426E-40DD-AFC4-6F175D3DCCD1}">
-              <a14:hiddenFill xmlns:a14="http://schemas.microsoft.com/office/drawing/2010/main">
-                <a:solidFill>
-                  <a:srgbClr val="FFFFFF"/>
-                </a:solidFill>
-              </a14:hiddenFill>
-            </a:ext>
-          </a:extLst>
-        </p:spPr>
-      </p:pic>
-      <p:pic>
-        <p:nvPicPr>
-          <p:cNvPr id="2050" name="Picture 2" descr="E-commerce Illustration - Free Stock Photo by mohamed hassan on  Stockvault.net">
-            <a:extLst>
-              <a:ext uri="{FF2B5EF4-FFF2-40B4-BE49-F238E27FC236}">
-                <a16:creationId xmlns:a16="http://schemas.microsoft.com/office/drawing/2014/main" id="{019AEEC8-C022-7FBE-9380-E0CD5B933E6B}"/>
-              </a:ext>
-            </a:extLst>
-          </p:cNvPr>
-          <p:cNvPicPr>
-            <a:picLocks noChangeAspect="1" noChangeArrowheads="1"/>
-          </p:cNvPicPr>
-          <p:nvPr/>
-        </p:nvPicPr>
-        <p:blipFill rotWithShape="1">
-          <a:blip r:embed="rId5">
-            <a:extLst>
-              <a:ext uri="{28A0092B-C50C-407E-A947-70E740481C1C}">
-                <a14:useLocalDpi xmlns:a14="http://schemas.microsoft.com/office/drawing/2010/main" val="0"/>
-              </a:ext>
-            </a:extLst>
-          </a:blip>
-          <a:srcRect l="13152" r="48306"/>
-          <a:stretch/>
-        </p:blipFill>
-        <p:spPr bwMode="auto">
-          <a:xfrm>
-            <a:off x="7450096" y="310180"/>
-            <a:ext cx="1693904" cy="2962224"/>
-          </a:xfrm>
-          <a:custGeom>
-            <a:avLst/>
-            <a:gdLst/>
-            <a:ahLst/>
-            <a:cxnLst/>
-            <a:rect l="l" t="t" r="r" b="b"/>
-            <a:pathLst>
-              <a:path w="2258539" h="3554668">
-                <a:moveTo>
-                  <a:pt x="1777334" y="0"/>
-                </a:moveTo>
-                <a:cubicBezTo>
-                  <a:pt x="1900033" y="0"/>
-                  <a:pt x="2019829" y="12434"/>
-                  <a:pt x="2135529" y="36109"/>
-                </a:cubicBezTo>
-                <a:lnTo>
-                  <a:pt x="2258539" y="67738"/>
-                </a:lnTo>
-                <a:lnTo>
-                  <a:pt x="2258539" y="3486930"/>
-                </a:lnTo>
-                <a:lnTo>
-                  <a:pt x="2135529" y="3518559"/>
-                </a:lnTo>
-                <a:cubicBezTo>
-                  <a:pt x="2019829" y="3542235"/>
-                  <a:pt x="1900033" y="3554668"/>
-                  <a:pt x="1777334" y="3554668"/>
-                </a:cubicBezTo>
-                <a:cubicBezTo>
-                  <a:pt x="795739" y="3554668"/>
-                  <a:pt x="0" y="2758929"/>
-                  <a:pt x="0" y="1777334"/>
-                </a:cubicBezTo>
-                <a:cubicBezTo>
-                  <a:pt x="0" y="795740"/>
-                  <a:pt x="795739" y="0"/>
-                  <a:pt x="1777334" y="0"/>
-                </a:cubicBezTo>
-                <a:close/>
-              </a:path>
-            </a:pathLst>
-          </a:custGeom>
-          <a:noFill/>
-          <a:extLst>
-            <a:ext uri="{909E8E84-426E-40DD-AFC4-6F175D3DCCD1}">
-              <a14:hiddenFill xmlns:a14="http://schemas.microsoft.com/office/drawing/2010/main">
-                <a:solidFill>
-                  <a:srgbClr val="FFFFFF"/>
-                </a:solidFill>
-              </a14:hiddenFill>
-            </a:ext>
-          </a:extLst>
-        </p:spPr>
-      </p:pic>
-    </p:spTree>
-    <p:extLst>
-      <p:ext uri="{BB962C8B-B14F-4D97-AF65-F5344CB8AC3E}">
-        <p14:creationId xmlns:p14="http://schemas.microsoft.com/office/powerpoint/2010/main" val="797022506"/>
-      </p:ext>
-    </p:extLst>
-  </p:cSld>
-  <p:clrMapOvr>
-    <a:masterClrMapping/>
-  </p:clrMapOvr>
-  <p:transition/>
-  <p:timing>
-    <p:tnLst>
-      <p:par>
-        <p:cTn id="1" dur="indefinite" restart="never" nodeType="tmRoot">
-          <p:childTnLst>
-            <p:seq concurrent="1" nextAc="seek">
-              <p:cTn id="2" dur="indefinite" nodeType="mainSeq">
-                <p:childTnLst>
-                  <p:par>
-                    <p:cTn id="3" fill="hold">
-                      <p:stCondLst>
-                        <p:cond delay="indefinite"/>
-                      </p:stCondLst>
-                      <p:childTnLst>
-                        <p:par>
-                          <p:cTn id="4" fill="hold">
-                            <p:stCondLst>
-                              <p:cond delay="0"/>
-                            </p:stCondLst>
-                            <p:childTnLst>
-                              <p:par>
-                                <p:cTn id="5" presetID="1" presetClass="entr" presetSubtype="0" fill="hold" nodeType="clickEffect">
-                                  <p:stCondLst>
-                                    <p:cond delay="0"/>
-                                  </p:stCondLst>
-                                  <p:childTnLst>
-                                    <p:set>
-                                      <p:cBhvr>
-                                        <p:cTn id="6" dur="1" fill="hold">
-                                          <p:stCondLst>
-                                            <p:cond delay="0"/>
-                                          </p:stCondLst>
-                                        </p:cTn>
-                                        <p:tgtEl>
-                                          <p:spTgt spid="16386">
-                                            <p:txEl>
-                                              <p:pRg st="4" end="4"/>
-                                            </p:txEl>
-                                          </p:spTgt>
-                                        </p:tgtEl>
-                                        <p:attrNameLst>
-                                          <p:attrName>style.visibility</p:attrName>
-                                        </p:attrNameLst>
-                                      </p:cBhvr>
-                                      <p:to>
-                                        <p:strVal val="visible"/>
-                                      </p:to>
-                                    </p:set>
-                                  </p:childTnLst>
-                                </p:cTn>
-                              </p:par>
-                            </p:childTnLst>
-                          </p:cTn>
-                        </p:par>
-                      </p:childTnLst>
-                    </p:cTn>
-                  </p:par>
-                  <p:par>
-                    <p:cTn id="7" fill="hold">
-                      <p:stCondLst>
-                        <p:cond delay="indefinite"/>
-                      </p:stCondLst>
-                      <p:childTnLst>
-                        <p:par>
-                          <p:cTn id="8" fill="hold">
-                            <p:stCondLst>
-                              <p:cond delay="0"/>
-                            </p:stCondLst>
-                            <p:childTnLst>
-                              <p:par>
-                                <p:cTn id="9" presetID="1" presetClass="entr" presetSubtype="0" fill="hold" nodeType="clickEffect">
-                                  <p:stCondLst>
-                                    <p:cond delay="0"/>
-                                  </p:stCondLst>
-                                  <p:childTnLst>
-                                    <p:set>
-                                      <p:cBhvr>
-                                        <p:cTn id="10" dur="1" fill="hold">
-                                          <p:stCondLst>
-                                            <p:cond delay="0"/>
-                                          </p:stCondLst>
-                                        </p:cTn>
-                                        <p:tgtEl>
-                                          <p:spTgt spid="16386">
-                                            <p:txEl>
-                                              <p:pRg st="6" end="6"/>
-                                            </p:txEl>
-                                          </p:spTgt>
-                                        </p:tgtEl>
-                                        <p:attrNameLst>
-                                          <p:attrName>style.visibility</p:attrName>
-                                        </p:attrNameLst>
-                                      </p:cBhvr>
-                                      <p:to>
-                                        <p:strVal val="visible"/>
-                                      </p:to>
-                                    </p:set>
-                                  </p:childTnLst>
-                                </p:cTn>
-                              </p:par>
-                            </p:childTnLst>
-                          </p:cTn>
-                        </p:par>
-                      </p:childTnLst>
-                    </p:cTn>
-                  </p:par>
-                </p:childTnLst>
-              </p:cTn>
-              <p:prevCondLst>
-                <p:cond evt="onPrev" delay="0">
-                  <p:tgtEl>
-                    <p:sldTgt/>
-                  </p:tgtEl>
-                </p:cond>
-              </p:prevCondLst>
-              <p:nextCondLst>
-                <p:cond evt="onNext" delay="0">
-                  <p:tgtEl>
-                    <p:sldTgt/>
-                  </p:tgtEl>
-                </p:cond>
-              </p:nextCondLst>
-            </p:seq>
-          </p:childTnLst>
-        </p:cTn>
-      </p:par>
-    </p:tnLst>
-  </p:timing>
-</p:sld>
-</file>
-
-<file path=ppt/slides/slide20.xml><?xml version="1.0" encoding="utf-8"?>
+<file path=ppt/slides/slide24.xml><?xml version="1.0" encoding="utf-8"?>
 <p:sld xmlns:a="http://schemas.openxmlformats.org/drawingml/2006/main" xmlns:r="http://schemas.openxmlformats.org/officeDocument/2006/relationships" xmlns:p="http://schemas.openxmlformats.org/presentationml/2006/main">
   <p:cSld>
     <p:spTree>
@@ -23055,7 +18989,7 @@
 </p:sld>
 </file>
 
-<file path=ppt/slides/slide21.xml><?xml version="1.0" encoding="utf-8"?>
+<file path=ppt/slides/slide25.xml><?xml version="1.0" encoding="utf-8"?>
 <p:sld xmlns:a="http://schemas.openxmlformats.org/drawingml/2006/main" xmlns:r="http://schemas.openxmlformats.org/officeDocument/2006/relationships" xmlns:p="http://schemas.openxmlformats.org/presentationml/2006/main">
   <p:cSld>
     <p:spTree>
@@ -23573,7 +19507,7 @@
 </p:sld>
 </file>
 
-<file path=ppt/slides/slide22.xml><?xml version="1.0" encoding="utf-8"?>
+<file path=ppt/slides/slide26.xml><?xml version="1.0" encoding="utf-8"?>
 <p:sld xmlns:a="http://schemas.openxmlformats.org/drawingml/2006/main" xmlns:r="http://schemas.openxmlformats.org/officeDocument/2006/relationships" xmlns:p="http://schemas.openxmlformats.org/presentationml/2006/main">
   <p:cSld>
     <p:spTree>
@@ -23973,7 +19907,7 @@
 </p:sld>
 </file>
 
-<file path=ppt/slides/slide23.xml><?xml version="1.0" encoding="utf-8"?>
+<file path=ppt/slides/slide27.xml><?xml version="1.0" encoding="utf-8"?>
 <p:sld xmlns:a="http://schemas.openxmlformats.org/drawingml/2006/main" xmlns:r="http://schemas.openxmlformats.org/officeDocument/2006/relationships" xmlns:p="http://schemas.openxmlformats.org/presentationml/2006/main">
   <p:cSld>
     <p:spTree>
@@ -24437,7 +20371,7 @@
 </p:sld>
 </file>
 
-<file path=ppt/slides/slide24.xml><?xml version="1.0" encoding="utf-8"?>
+<file path=ppt/slides/slide28.xml><?xml version="1.0" encoding="utf-8"?>
 <p:sld xmlns:a="http://schemas.openxmlformats.org/drawingml/2006/main" xmlns:r="http://schemas.openxmlformats.org/officeDocument/2006/relationships" xmlns:p="http://schemas.openxmlformats.org/presentationml/2006/main">
   <p:cSld>
     <p:spTree>
@@ -24952,7 +20886,7 @@
 </p:sld>
 </file>
 
-<file path=ppt/slides/slide25.xml><?xml version="1.0" encoding="utf-8"?>
+<file path=ppt/slides/slide29.xml><?xml version="1.0" encoding="utf-8"?>
 <p:sld xmlns:a="http://schemas.openxmlformats.org/drawingml/2006/main" xmlns:r="http://schemas.openxmlformats.org/officeDocument/2006/relationships" xmlns:p="http://schemas.openxmlformats.org/presentationml/2006/main">
   <p:cSld>
     <p:spTree>
@@ -25364,7 +21298,499 @@
 </p:sld>
 </file>
 
-<file path=ppt/slides/slide26.xml><?xml version="1.0" encoding="utf-8"?>
+<file path=ppt/slides/slide3.xml><?xml version="1.0" encoding="utf-8"?>
+<p:sld xmlns:a="http://schemas.openxmlformats.org/drawingml/2006/main" xmlns:r="http://schemas.openxmlformats.org/officeDocument/2006/relationships" xmlns:p="http://schemas.openxmlformats.org/presentationml/2006/main">
+  <p:cSld>
+    <p:spTree>
+      <p:nvGrpSpPr>
+        <p:cNvPr id="1" name=""/>
+        <p:cNvGrpSpPr/>
+        <p:nvPr/>
+      </p:nvGrpSpPr>
+      <p:grpSpPr>
+        <a:xfrm>
+          <a:off x="0" y="0"/>
+          <a:ext cx="0" cy="0"/>
+          <a:chOff x="0" y="0"/>
+          <a:chExt cx="0" cy="0"/>
+        </a:xfrm>
+      </p:grpSpPr>
+      <p:sp>
+        <p:nvSpPr>
+          <p:cNvPr id="16385" name="Rectangle 2">
+            <a:extLst>
+              <a:ext uri="{FF2B5EF4-FFF2-40B4-BE49-F238E27FC236}">
+                <a16:creationId xmlns:a16="http://schemas.microsoft.com/office/drawing/2014/main" id="{8FAE8CA6-5EB1-544B-9637-4627ADA36986}"/>
+              </a:ext>
+            </a:extLst>
+          </p:cNvPr>
+          <p:cNvSpPr>
+            <a:spLocks noGrp="1" noChangeArrowheads="1"/>
+          </p:cNvSpPr>
+          <p:nvPr>
+            <p:ph type="title"/>
+          </p:nvPr>
+        </p:nvSpPr>
+        <p:spPr>
+          <a:xfrm>
+            <a:off x="0" y="3710"/>
+            <a:ext cx="7886700" cy="755315"/>
+          </a:xfrm>
+        </p:spPr>
+        <p:txBody>
+          <a:bodyPr/>
+          <a:lstStyle/>
+          <a:p>
+            <a:pPr eaLnBrk="1" hangingPunct="1"/>
+            <a:r>
+              <a:rPr lang="en-US" altLang="en-US" dirty="0">
+                <a:latin typeface="Tahoma" panose="020B0604030504040204" pitchFamily="34" charset="0"/>
+                <a:ea typeface="ＭＳ Ｐゴシック" panose="020B0600070205080204" pitchFamily="34" charset="-128"/>
+              </a:rPr>
+              <a:t>Effects of Computing Innovations</a:t>
+            </a:r>
+          </a:p>
+        </p:txBody>
+      </p:sp>
+      <p:sp>
+        <p:nvSpPr>
+          <p:cNvPr id="16386" name="Rectangle 3">
+            <a:extLst>
+              <a:ext uri="{FF2B5EF4-FFF2-40B4-BE49-F238E27FC236}">
+                <a16:creationId xmlns:a16="http://schemas.microsoft.com/office/drawing/2014/main" id="{AC84324A-3724-874B-82A1-71A36E0BBD8D}"/>
+              </a:ext>
+            </a:extLst>
+          </p:cNvPr>
+          <p:cNvSpPr>
+            <a:spLocks noGrp="1" noChangeArrowheads="1"/>
+          </p:cNvSpPr>
+          <p:nvPr>
+            <p:ph type="body" idx="1"/>
+          </p:nvPr>
+        </p:nvSpPr>
+        <p:spPr>
+          <a:xfrm>
+            <a:off x="135491" y="719191"/>
+            <a:ext cx="8873018" cy="4868809"/>
+          </a:xfrm>
+        </p:spPr>
+        <p:txBody>
+          <a:bodyPr/>
+          <a:lstStyle/>
+          <a:p>
+            <a:pPr marL="0" indent="0">
+              <a:buNone/>
+            </a:pPr>
+            <a:r>
+              <a:rPr lang="en-US" dirty="0"/>
+              <a:t>Not every effect of a computing innovation is anticipated in advance. Some effects are harmful.</a:t>
+            </a:r>
+          </a:p>
+          <a:p>
+            <a:pPr marL="0" indent="0">
+              <a:buNone/>
+            </a:pPr>
+            <a:endParaRPr lang="en-US" dirty="0"/>
+          </a:p>
+          <a:p>
+            <a:pPr marL="0" indent="0">
+              <a:buNone/>
+            </a:pPr>
+            <a:r>
+              <a:rPr lang="en-US" dirty="0"/>
+              <a:t>For example, inventors of television, computers, mobile devices, and social media did not intend to unleash a slew of negative consequences for children.</a:t>
+            </a:r>
+          </a:p>
+          <a:p>
+            <a:r>
+              <a:rPr lang="en-US" dirty="0"/>
+              <a:t>shortened attention spans</a:t>
+            </a:r>
+          </a:p>
+          <a:p>
+            <a:r>
+              <a:rPr lang="en-US" dirty="0"/>
+              <a:t>lack of connection to nature</a:t>
+            </a:r>
+          </a:p>
+          <a:p>
+            <a:r>
+              <a:rPr lang="en-US" dirty="0"/>
+              <a:t>bullying and hate groups</a:t>
+            </a:r>
+          </a:p>
+          <a:p>
+            <a:r>
+              <a:rPr lang="en-US" dirty="0"/>
+              <a:t>using computing innovations as tools for deploying fake news</a:t>
+            </a:r>
+          </a:p>
+          <a:p>
+            <a:pPr marL="0" indent="0" eaLnBrk="1" hangingPunct="1">
+              <a:buNone/>
+            </a:pPr>
+            <a:endParaRPr lang="en-US" altLang="en-US" dirty="0">
+              <a:latin typeface="Tahoma" panose="020B0604030504040204" pitchFamily="34" charset="0"/>
+            </a:endParaRPr>
+          </a:p>
+          <a:p>
+            <a:pPr marL="0" indent="0">
+              <a:buNone/>
+            </a:pPr>
+            <a:r>
+              <a:rPr lang="en-US" dirty="0"/>
+              <a:t>A single effect can be viewed as both beneficial and harmful by different people, or even by the same person. For example, video game makers will disagree about the "lack of connection to nature" argument above. </a:t>
+            </a:r>
+          </a:p>
+          <a:p>
+            <a:pPr marL="0" indent="0" eaLnBrk="1" hangingPunct="1">
+              <a:buNone/>
+            </a:pPr>
+            <a:endParaRPr lang="en-US" altLang="en-US" dirty="0">
+              <a:latin typeface="Tahoma" panose="020B0604030504040204" pitchFamily="34" charset="0"/>
+            </a:endParaRPr>
+          </a:p>
+        </p:txBody>
+      </p:sp>
+    </p:spTree>
+    <p:extLst>
+      <p:ext uri="{BB962C8B-B14F-4D97-AF65-F5344CB8AC3E}">
+        <p14:creationId xmlns:p14="http://schemas.microsoft.com/office/powerpoint/2010/main" val="3965959204"/>
+      </p:ext>
+    </p:extLst>
+  </p:cSld>
+  <p:clrMapOvr>
+    <a:masterClrMapping/>
+  </p:clrMapOvr>
+  <p:transition/>
+  <p:timing>
+    <p:tnLst>
+      <p:par>
+        <p:cTn id="1" dur="indefinite" restart="never" nodeType="tmRoot">
+          <p:childTnLst>
+            <p:seq concurrent="1" nextAc="seek">
+              <p:cTn id="2" dur="indefinite" nodeType="mainSeq">
+                <p:childTnLst>
+                  <p:par>
+                    <p:cTn id="3" fill="hold">
+                      <p:stCondLst>
+                        <p:cond delay="indefinite"/>
+                      </p:stCondLst>
+                      <p:childTnLst>
+                        <p:par>
+                          <p:cTn id="4" fill="hold">
+                            <p:stCondLst>
+                              <p:cond delay="0"/>
+                            </p:stCondLst>
+                            <p:childTnLst>
+                              <p:par>
+                                <p:cTn id="5" presetID="1" presetClass="entr" presetSubtype="0" fill="hold" nodeType="clickEffect">
+                                  <p:stCondLst>
+                                    <p:cond delay="0"/>
+                                  </p:stCondLst>
+                                  <p:childTnLst>
+                                    <p:set>
+                                      <p:cBhvr>
+                                        <p:cTn id="6" dur="1" fill="hold">
+                                          <p:stCondLst>
+                                            <p:cond delay="0"/>
+                                          </p:stCondLst>
+                                        </p:cTn>
+                                        <p:tgtEl>
+                                          <p:spTgt spid="16386">
+                                            <p:txEl>
+                                              <p:pRg st="2" end="2"/>
+                                            </p:txEl>
+                                          </p:spTgt>
+                                        </p:tgtEl>
+                                        <p:attrNameLst>
+                                          <p:attrName>style.visibility</p:attrName>
+                                        </p:attrNameLst>
+                                      </p:cBhvr>
+                                      <p:to>
+                                        <p:strVal val="visible"/>
+                                      </p:to>
+                                    </p:set>
+                                  </p:childTnLst>
+                                </p:cTn>
+                              </p:par>
+                            </p:childTnLst>
+                          </p:cTn>
+                        </p:par>
+                      </p:childTnLst>
+                    </p:cTn>
+                  </p:par>
+                  <p:par>
+                    <p:cTn id="7" fill="hold">
+                      <p:stCondLst>
+                        <p:cond delay="indefinite"/>
+                      </p:stCondLst>
+                      <p:childTnLst>
+                        <p:par>
+                          <p:cTn id="8" fill="hold">
+                            <p:stCondLst>
+                              <p:cond delay="0"/>
+                            </p:stCondLst>
+                            <p:childTnLst>
+                              <p:par>
+                                <p:cTn id="9" presetID="1" presetClass="entr" presetSubtype="0" fill="hold" nodeType="clickEffect">
+                                  <p:stCondLst>
+                                    <p:cond delay="0"/>
+                                  </p:stCondLst>
+                                  <p:childTnLst>
+                                    <p:set>
+                                      <p:cBhvr>
+                                        <p:cTn id="10" dur="1" fill="hold">
+                                          <p:stCondLst>
+                                            <p:cond delay="0"/>
+                                          </p:stCondLst>
+                                        </p:cTn>
+                                        <p:tgtEl>
+                                          <p:spTgt spid="16386">
+                                            <p:txEl>
+                                              <p:pRg st="3" end="3"/>
+                                            </p:txEl>
+                                          </p:spTgt>
+                                        </p:tgtEl>
+                                        <p:attrNameLst>
+                                          <p:attrName>style.visibility</p:attrName>
+                                        </p:attrNameLst>
+                                      </p:cBhvr>
+                                      <p:to>
+                                        <p:strVal val="visible"/>
+                                      </p:to>
+                                    </p:set>
+                                  </p:childTnLst>
+                                </p:cTn>
+                              </p:par>
+                            </p:childTnLst>
+                          </p:cTn>
+                        </p:par>
+                      </p:childTnLst>
+                    </p:cTn>
+                  </p:par>
+                  <p:par>
+                    <p:cTn id="11" fill="hold">
+                      <p:stCondLst>
+                        <p:cond delay="indefinite"/>
+                      </p:stCondLst>
+                      <p:childTnLst>
+                        <p:par>
+                          <p:cTn id="12" fill="hold">
+                            <p:stCondLst>
+                              <p:cond delay="0"/>
+                            </p:stCondLst>
+                            <p:childTnLst>
+                              <p:par>
+                                <p:cTn id="13" presetID="1" presetClass="entr" presetSubtype="0" fill="hold" nodeType="clickEffect">
+                                  <p:stCondLst>
+                                    <p:cond delay="0"/>
+                                  </p:stCondLst>
+                                  <p:childTnLst>
+                                    <p:set>
+                                      <p:cBhvr>
+                                        <p:cTn id="14" dur="1" fill="hold">
+                                          <p:stCondLst>
+                                            <p:cond delay="0"/>
+                                          </p:stCondLst>
+                                        </p:cTn>
+                                        <p:tgtEl>
+                                          <p:spTgt spid="16386">
+                                            <p:txEl>
+                                              <p:pRg st="4" end="4"/>
+                                            </p:txEl>
+                                          </p:spTgt>
+                                        </p:tgtEl>
+                                        <p:attrNameLst>
+                                          <p:attrName>style.visibility</p:attrName>
+                                        </p:attrNameLst>
+                                      </p:cBhvr>
+                                      <p:to>
+                                        <p:strVal val="visible"/>
+                                      </p:to>
+                                    </p:set>
+                                  </p:childTnLst>
+                                </p:cTn>
+                              </p:par>
+                            </p:childTnLst>
+                          </p:cTn>
+                        </p:par>
+                      </p:childTnLst>
+                    </p:cTn>
+                  </p:par>
+                  <p:par>
+                    <p:cTn id="15" fill="hold">
+                      <p:stCondLst>
+                        <p:cond delay="indefinite"/>
+                      </p:stCondLst>
+                      <p:childTnLst>
+                        <p:par>
+                          <p:cTn id="16" fill="hold">
+                            <p:stCondLst>
+                              <p:cond delay="0"/>
+                            </p:stCondLst>
+                            <p:childTnLst>
+                              <p:par>
+                                <p:cTn id="17" presetID="1" presetClass="entr" presetSubtype="0" fill="hold" nodeType="clickEffect">
+                                  <p:stCondLst>
+                                    <p:cond delay="0"/>
+                                  </p:stCondLst>
+                                  <p:childTnLst>
+                                    <p:set>
+                                      <p:cBhvr>
+                                        <p:cTn id="18" dur="1" fill="hold">
+                                          <p:stCondLst>
+                                            <p:cond delay="0"/>
+                                          </p:stCondLst>
+                                        </p:cTn>
+                                        <p:tgtEl>
+                                          <p:spTgt spid="16386">
+                                            <p:txEl>
+                                              <p:pRg st="5" end="5"/>
+                                            </p:txEl>
+                                          </p:spTgt>
+                                        </p:tgtEl>
+                                        <p:attrNameLst>
+                                          <p:attrName>style.visibility</p:attrName>
+                                        </p:attrNameLst>
+                                      </p:cBhvr>
+                                      <p:to>
+                                        <p:strVal val="visible"/>
+                                      </p:to>
+                                    </p:set>
+                                  </p:childTnLst>
+                                </p:cTn>
+                              </p:par>
+                            </p:childTnLst>
+                          </p:cTn>
+                        </p:par>
+                      </p:childTnLst>
+                    </p:cTn>
+                  </p:par>
+                  <p:par>
+                    <p:cTn id="19" fill="hold">
+                      <p:stCondLst>
+                        <p:cond delay="indefinite"/>
+                      </p:stCondLst>
+                      <p:childTnLst>
+                        <p:par>
+                          <p:cTn id="20" fill="hold">
+                            <p:stCondLst>
+                              <p:cond delay="0"/>
+                            </p:stCondLst>
+                            <p:childTnLst>
+                              <p:par>
+                                <p:cTn id="21" presetID="1" presetClass="entr" presetSubtype="0" fill="hold" nodeType="clickEffect">
+                                  <p:stCondLst>
+                                    <p:cond delay="0"/>
+                                  </p:stCondLst>
+                                  <p:childTnLst>
+                                    <p:set>
+                                      <p:cBhvr>
+                                        <p:cTn id="22" dur="1" fill="hold">
+                                          <p:stCondLst>
+                                            <p:cond delay="0"/>
+                                          </p:stCondLst>
+                                        </p:cTn>
+                                        <p:tgtEl>
+                                          <p:spTgt spid="16386">
+                                            <p:txEl>
+                                              <p:pRg st="6" end="6"/>
+                                            </p:txEl>
+                                          </p:spTgt>
+                                        </p:tgtEl>
+                                        <p:attrNameLst>
+                                          <p:attrName>style.visibility</p:attrName>
+                                        </p:attrNameLst>
+                                      </p:cBhvr>
+                                      <p:to>
+                                        <p:strVal val="visible"/>
+                                      </p:to>
+                                    </p:set>
+                                  </p:childTnLst>
+                                </p:cTn>
+                              </p:par>
+                            </p:childTnLst>
+                          </p:cTn>
+                        </p:par>
+                      </p:childTnLst>
+                    </p:cTn>
+                  </p:par>
+                  <p:par>
+                    <p:cTn id="23" fill="hold">
+                      <p:stCondLst>
+                        <p:cond delay="indefinite"/>
+                      </p:stCondLst>
+                      <p:childTnLst>
+                        <p:par>
+                          <p:cTn id="24" fill="hold">
+                            <p:stCondLst>
+                              <p:cond delay="0"/>
+                            </p:stCondLst>
+                            <p:childTnLst>
+                              <p:par>
+                                <p:cTn id="25" presetID="1" presetClass="entr" presetSubtype="0" fill="hold" nodeType="clickEffect">
+                                  <p:stCondLst>
+                                    <p:cond delay="0"/>
+                                  </p:stCondLst>
+                                  <p:childTnLst>
+                                    <p:set>
+                                      <p:cBhvr>
+                                        <p:cTn id="26" dur="1" fill="hold">
+                                          <p:stCondLst>
+                                            <p:cond delay="0"/>
+                                          </p:stCondLst>
+                                        </p:cTn>
+                                        <p:tgtEl>
+                                          <p:spTgt spid="16386">
+                                            <p:txEl>
+                                              <p:pRg st="8" end="8"/>
+                                            </p:txEl>
+                                          </p:spTgt>
+                                        </p:tgtEl>
+                                        <p:attrNameLst>
+                                          <p:attrName>style.visibility</p:attrName>
+                                        </p:attrNameLst>
+                                      </p:cBhvr>
+                                      <p:to>
+                                        <p:strVal val="visible"/>
+                                      </p:to>
+                                    </p:set>
+                                  </p:childTnLst>
+                                </p:cTn>
+                              </p:par>
+                            </p:childTnLst>
+                          </p:cTn>
+                        </p:par>
+                      </p:childTnLst>
+                    </p:cTn>
+                  </p:par>
+                </p:childTnLst>
+              </p:cTn>
+              <p:prevCondLst>
+                <p:cond evt="onPrev" delay="0">
+                  <p:tgtEl>
+                    <p:sldTgt/>
+                  </p:tgtEl>
+                </p:cond>
+              </p:prevCondLst>
+              <p:nextCondLst>
+                <p:cond evt="onNext" delay="0">
+                  <p:tgtEl>
+                    <p:sldTgt/>
+                  </p:tgtEl>
+                </p:cond>
+              </p:nextCondLst>
+            </p:seq>
+          </p:childTnLst>
+        </p:cTn>
+      </p:par>
+    </p:tnLst>
+  </p:timing>
+</p:sld>
+</file>
+
+<file path=ppt/slides/slide30.xml><?xml version="1.0" encoding="utf-8"?>
 <p:sld xmlns:a="http://schemas.openxmlformats.org/drawingml/2006/main" xmlns:r="http://schemas.openxmlformats.org/officeDocument/2006/relationships" xmlns:p="http://schemas.openxmlformats.org/presentationml/2006/main">
   <p:cSld>
     <p:spTree>
@@ -25741,7 +22167,7 @@
 </p:sld>
 </file>
 
-<file path=ppt/slides/slide27.xml><?xml version="1.0" encoding="utf-8"?>
+<file path=ppt/slides/slide31.xml><?xml version="1.0" encoding="utf-8"?>
 <p:sld xmlns:a="http://schemas.openxmlformats.org/drawingml/2006/main" xmlns:r="http://schemas.openxmlformats.org/officeDocument/2006/relationships" xmlns:p="http://schemas.openxmlformats.org/presentationml/2006/main">
   <p:cSld>
     <p:spTree>
@@ -26237,7 +22663,7 @@
 </p:sld>
 </file>
 
-<file path=ppt/slides/slide28.xml><?xml version="1.0" encoding="utf-8"?>
+<file path=ppt/slides/slide32.xml><?xml version="1.0" encoding="utf-8"?>
 <p:sld xmlns:a="http://schemas.openxmlformats.org/drawingml/2006/main" xmlns:r="http://schemas.openxmlformats.org/officeDocument/2006/relationships" xmlns:p="http://schemas.openxmlformats.org/presentationml/2006/main">
   <p:cSld>
     <p:spTree>
@@ -27014,7 +23440,7 @@
 </p:sld>
 </file>
 
-<file path=ppt/slides/slide29.xml><?xml version="1.0" encoding="utf-8"?>
+<file path=ppt/slides/slide33.xml><?xml version="1.0" encoding="utf-8"?>
 <p:sld xmlns:a="http://schemas.openxmlformats.org/drawingml/2006/main" xmlns:r="http://schemas.openxmlformats.org/officeDocument/2006/relationships" xmlns:p="http://schemas.openxmlformats.org/presentationml/2006/main">
   <p:cSld>
     <p:spTree>
@@ -27580,499 +24006,7 @@
 </p:sld>
 </file>
 
-<file path=ppt/slides/slide3.xml><?xml version="1.0" encoding="utf-8"?>
-<p:sld xmlns:a="http://schemas.openxmlformats.org/drawingml/2006/main" xmlns:r="http://schemas.openxmlformats.org/officeDocument/2006/relationships" xmlns:p="http://schemas.openxmlformats.org/presentationml/2006/main">
-  <p:cSld>
-    <p:spTree>
-      <p:nvGrpSpPr>
-        <p:cNvPr id="1" name=""/>
-        <p:cNvGrpSpPr/>
-        <p:nvPr/>
-      </p:nvGrpSpPr>
-      <p:grpSpPr>
-        <a:xfrm>
-          <a:off x="0" y="0"/>
-          <a:ext cx="0" cy="0"/>
-          <a:chOff x="0" y="0"/>
-          <a:chExt cx="0" cy="0"/>
-        </a:xfrm>
-      </p:grpSpPr>
-      <p:sp>
-        <p:nvSpPr>
-          <p:cNvPr id="16385" name="Rectangle 2">
-            <a:extLst>
-              <a:ext uri="{FF2B5EF4-FFF2-40B4-BE49-F238E27FC236}">
-                <a16:creationId xmlns:a16="http://schemas.microsoft.com/office/drawing/2014/main" id="{8FAE8CA6-5EB1-544B-9637-4627ADA36986}"/>
-              </a:ext>
-            </a:extLst>
-          </p:cNvPr>
-          <p:cNvSpPr>
-            <a:spLocks noGrp="1" noChangeArrowheads="1"/>
-          </p:cNvSpPr>
-          <p:nvPr>
-            <p:ph type="title"/>
-          </p:nvPr>
-        </p:nvSpPr>
-        <p:spPr>
-          <a:xfrm>
-            <a:off x="0" y="3710"/>
-            <a:ext cx="7886700" cy="755315"/>
-          </a:xfrm>
-        </p:spPr>
-        <p:txBody>
-          <a:bodyPr/>
-          <a:lstStyle/>
-          <a:p>
-            <a:pPr eaLnBrk="1" hangingPunct="1"/>
-            <a:r>
-              <a:rPr lang="en-US" altLang="en-US" dirty="0">
-                <a:latin typeface="Tahoma" panose="020B0604030504040204" pitchFamily="34" charset="0"/>
-                <a:ea typeface="ＭＳ Ｐゴシック" panose="020B0600070205080204" pitchFamily="34" charset="-128"/>
-              </a:rPr>
-              <a:t>Effects of Computing Innovations</a:t>
-            </a:r>
-          </a:p>
-        </p:txBody>
-      </p:sp>
-      <p:sp>
-        <p:nvSpPr>
-          <p:cNvPr id="16386" name="Rectangle 3">
-            <a:extLst>
-              <a:ext uri="{FF2B5EF4-FFF2-40B4-BE49-F238E27FC236}">
-                <a16:creationId xmlns:a16="http://schemas.microsoft.com/office/drawing/2014/main" id="{AC84324A-3724-874B-82A1-71A36E0BBD8D}"/>
-              </a:ext>
-            </a:extLst>
-          </p:cNvPr>
-          <p:cNvSpPr>
-            <a:spLocks noGrp="1" noChangeArrowheads="1"/>
-          </p:cNvSpPr>
-          <p:nvPr>
-            <p:ph type="body" idx="1"/>
-          </p:nvPr>
-        </p:nvSpPr>
-        <p:spPr>
-          <a:xfrm>
-            <a:off x="135491" y="719191"/>
-            <a:ext cx="8873018" cy="4868809"/>
-          </a:xfrm>
-        </p:spPr>
-        <p:txBody>
-          <a:bodyPr/>
-          <a:lstStyle/>
-          <a:p>
-            <a:pPr marL="0" indent="0">
-              <a:buNone/>
-            </a:pPr>
-            <a:r>
-              <a:rPr lang="en-US" dirty="0"/>
-              <a:t>Not every effect of a computing innovation is anticipated in advance. Some effects are harmful.</a:t>
-            </a:r>
-          </a:p>
-          <a:p>
-            <a:pPr marL="0" indent="0">
-              <a:buNone/>
-            </a:pPr>
-            <a:endParaRPr lang="en-US" dirty="0"/>
-          </a:p>
-          <a:p>
-            <a:pPr marL="0" indent="0">
-              <a:buNone/>
-            </a:pPr>
-            <a:r>
-              <a:rPr lang="en-US" dirty="0"/>
-              <a:t>For example, inventors of television, computers, mobile devices, and social media did not intend to unleash a slew of negative consequences for children.</a:t>
-            </a:r>
-          </a:p>
-          <a:p>
-            <a:r>
-              <a:rPr lang="en-US" dirty="0"/>
-              <a:t>shortened attention spans</a:t>
-            </a:r>
-          </a:p>
-          <a:p>
-            <a:r>
-              <a:rPr lang="en-US" dirty="0"/>
-              <a:t>lack of connection to nature</a:t>
-            </a:r>
-          </a:p>
-          <a:p>
-            <a:r>
-              <a:rPr lang="en-US" dirty="0"/>
-              <a:t>bullying and hate groups</a:t>
-            </a:r>
-          </a:p>
-          <a:p>
-            <a:r>
-              <a:rPr lang="en-US" dirty="0"/>
-              <a:t>using computing innovations as tools for deploying fake news</a:t>
-            </a:r>
-          </a:p>
-          <a:p>
-            <a:pPr marL="0" indent="0" eaLnBrk="1" hangingPunct="1">
-              <a:buNone/>
-            </a:pPr>
-            <a:endParaRPr lang="en-US" altLang="en-US" dirty="0">
-              <a:latin typeface="Tahoma" panose="020B0604030504040204" pitchFamily="34" charset="0"/>
-            </a:endParaRPr>
-          </a:p>
-          <a:p>
-            <a:pPr marL="0" indent="0">
-              <a:buNone/>
-            </a:pPr>
-            <a:r>
-              <a:rPr lang="en-US" dirty="0"/>
-              <a:t>A single effect can be viewed as both beneficial and harmful by different people, or even by the same person. For example, video game makers will disagree about the "lack of connection to nature" argument above. </a:t>
-            </a:r>
-          </a:p>
-          <a:p>
-            <a:pPr marL="0" indent="0" eaLnBrk="1" hangingPunct="1">
-              <a:buNone/>
-            </a:pPr>
-            <a:endParaRPr lang="en-US" altLang="en-US" dirty="0">
-              <a:latin typeface="Tahoma" panose="020B0604030504040204" pitchFamily="34" charset="0"/>
-            </a:endParaRPr>
-          </a:p>
-        </p:txBody>
-      </p:sp>
-    </p:spTree>
-    <p:extLst>
-      <p:ext uri="{BB962C8B-B14F-4D97-AF65-F5344CB8AC3E}">
-        <p14:creationId xmlns:p14="http://schemas.microsoft.com/office/powerpoint/2010/main" val="3965959204"/>
-      </p:ext>
-    </p:extLst>
-  </p:cSld>
-  <p:clrMapOvr>
-    <a:masterClrMapping/>
-  </p:clrMapOvr>
-  <p:transition/>
-  <p:timing>
-    <p:tnLst>
-      <p:par>
-        <p:cTn id="1" dur="indefinite" restart="never" nodeType="tmRoot">
-          <p:childTnLst>
-            <p:seq concurrent="1" nextAc="seek">
-              <p:cTn id="2" dur="indefinite" nodeType="mainSeq">
-                <p:childTnLst>
-                  <p:par>
-                    <p:cTn id="3" fill="hold">
-                      <p:stCondLst>
-                        <p:cond delay="indefinite"/>
-                      </p:stCondLst>
-                      <p:childTnLst>
-                        <p:par>
-                          <p:cTn id="4" fill="hold">
-                            <p:stCondLst>
-                              <p:cond delay="0"/>
-                            </p:stCondLst>
-                            <p:childTnLst>
-                              <p:par>
-                                <p:cTn id="5" presetID="1" presetClass="entr" presetSubtype="0" fill="hold" nodeType="clickEffect">
-                                  <p:stCondLst>
-                                    <p:cond delay="0"/>
-                                  </p:stCondLst>
-                                  <p:childTnLst>
-                                    <p:set>
-                                      <p:cBhvr>
-                                        <p:cTn id="6" dur="1" fill="hold">
-                                          <p:stCondLst>
-                                            <p:cond delay="0"/>
-                                          </p:stCondLst>
-                                        </p:cTn>
-                                        <p:tgtEl>
-                                          <p:spTgt spid="16386">
-                                            <p:txEl>
-                                              <p:pRg st="2" end="2"/>
-                                            </p:txEl>
-                                          </p:spTgt>
-                                        </p:tgtEl>
-                                        <p:attrNameLst>
-                                          <p:attrName>style.visibility</p:attrName>
-                                        </p:attrNameLst>
-                                      </p:cBhvr>
-                                      <p:to>
-                                        <p:strVal val="visible"/>
-                                      </p:to>
-                                    </p:set>
-                                  </p:childTnLst>
-                                </p:cTn>
-                              </p:par>
-                            </p:childTnLst>
-                          </p:cTn>
-                        </p:par>
-                      </p:childTnLst>
-                    </p:cTn>
-                  </p:par>
-                  <p:par>
-                    <p:cTn id="7" fill="hold">
-                      <p:stCondLst>
-                        <p:cond delay="indefinite"/>
-                      </p:stCondLst>
-                      <p:childTnLst>
-                        <p:par>
-                          <p:cTn id="8" fill="hold">
-                            <p:stCondLst>
-                              <p:cond delay="0"/>
-                            </p:stCondLst>
-                            <p:childTnLst>
-                              <p:par>
-                                <p:cTn id="9" presetID="1" presetClass="entr" presetSubtype="0" fill="hold" nodeType="clickEffect">
-                                  <p:stCondLst>
-                                    <p:cond delay="0"/>
-                                  </p:stCondLst>
-                                  <p:childTnLst>
-                                    <p:set>
-                                      <p:cBhvr>
-                                        <p:cTn id="10" dur="1" fill="hold">
-                                          <p:stCondLst>
-                                            <p:cond delay="0"/>
-                                          </p:stCondLst>
-                                        </p:cTn>
-                                        <p:tgtEl>
-                                          <p:spTgt spid="16386">
-                                            <p:txEl>
-                                              <p:pRg st="3" end="3"/>
-                                            </p:txEl>
-                                          </p:spTgt>
-                                        </p:tgtEl>
-                                        <p:attrNameLst>
-                                          <p:attrName>style.visibility</p:attrName>
-                                        </p:attrNameLst>
-                                      </p:cBhvr>
-                                      <p:to>
-                                        <p:strVal val="visible"/>
-                                      </p:to>
-                                    </p:set>
-                                  </p:childTnLst>
-                                </p:cTn>
-                              </p:par>
-                            </p:childTnLst>
-                          </p:cTn>
-                        </p:par>
-                      </p:childTnLst>
-                    </p:cTn>
-                  </p:par>
-                  <p:par>
-                    <p:cTn id="11" fill="hold">
-                      <p:stCondLst>
-                        <p:cond delay="indefinite"/>
-                      </p:stCondLst>
-                      <p:childTnLst>
-                        <p:par>
-                          <p:cTn id="12" fill="hold">
-                            <p:stCondLst>
-                              <p:cond delay="0"/>
-                            </p:stCondLst>
-                            <p:childTnLst>
-                              <p:par>
-                                <p:cTn id="13" presetID="1" presetClass="entr" presetSubtype="0" fill="hold" nodeType="clickEffect">
-                                  <p:stCondLst>
-                                    <p:cond delay="0"/>
-                                  </p:stCondLst>
-                                  <p:childTnLst>
-                                    <p:set>
-                                      <p:cBhvr>
-                                        <p:cTn id="14" dur="1" fill="hold">
-                                          <p:stCondLst>
-                                            <p:cond delay="0"/>
-                                          </p:stCondLst>
-                                        </p:cTn>
-                                        <p:tgtEl>
-                                          <p:spTgt spid="16386">
-                                            <p:txEl>
-                                              <p:pRg st="4" end="4"/>
-                                            </p:txEl>
-                                          </p:spTgt>
-                                        </p:tgtEl>
-                                        <p:attrNameLst>
-                                          <p:attrName>style.visibility</p:attrName>
-                                        </p:attrNameLst>
-                                      </p:cBhvr>
-                                      <p:to>
-                                        <p:strVal val="visible"/>
-                                      </p:to>
-                                    </p:set>
-                                  </p:childTnLst>
-                                </p:cTn>
-                              </p:par>
-                            </p:childTnLst>
-                          </p:cTn>
-                        </p:par>
-                      </p:childTnLst>
-                    </p:cTn>
-                  </p:par>
-                  <p:par>
-                    <p:cTn id="15" fill="hold">
-                      <p:stCondLst>
-                        <p:cond delay="indefinite"/>
-                      </p:stCondLst>
-                      <p:childTnLst>
-                        <p:par>
-                          <p:cTn id="16" fill="hold">
-                            <p:stCondLst>
-                              <p:cond delay="0"/>
-                            </p:stCondLst>
-                            <p:childTnLst>
-                              <p:par>
-                                <p:cTn id="17" presetID="1" presetClass="entr" presetSubtype="0" fill="hold" nodeType="clickEffect">
-                                  <p:stCondLst>
-                                    <p:cond delay="0"/>
-                                  </p:stCondLst>
-                                  <p:childTnLst>
-                                    <p:set>
-                                      <p:cBhvr>
-                                        <p:cTn id="18" dur="1" fill="hold">
-                                          <p:stCondLst>
-                                            <p:cond delay="0"/>
-                                          </p:stCondLst>
-                                        </p:cTn>
-                                        <p:tgtEl>
-                                          <p:spTgt spid="16386">
-                                            <p:txEl>
-                                              <p:pRg st="5" end="5"/>
-                                            </p:txEl>
-                                          </p:spTgt>
-                                        </p:tgtEl>
-                                        <p:attrNameLst>
-                                          <p:attrName>style.visibility</p:attrName>
-                                        </p:attrNameLst>
-                                      </p:cBhvr>
-                                      <p:to>
-                                        <p:strVal val="visible"/>
-                                      </p:to>
-                                    </p:set>
-                                  </p:childTnLst>
-                                </p:cTn>
-                              </p:par>
-                            </p:childTnLst>
-                          </p:cTn>
-                        </p:par>
-                      </p:childTnLst>
-                    </p:cTn>
-                  </p:par>
-                  <p:par>
-                    <p:cTn id="19" fill="hold">
-                      <p:stCondLst>
-                        <p:cond delay="indefinite"/>
-                      </p:stCondLst>
-                      <p:childTnLst>
-                        <p:par>
-                          <p:cTn id="20" fill="hold">
-                            <p:stCondLst>
-                              <p:cond delay="0"/>
-                            </p:stCondLst>
-                            <p:childTnLst>
-                              <p:par>
-                                <p:cTn id="21" presetID="1" presetClass="entr" presetSubtype="0" fill="hold" nodeType="clickEffect">
-                                  <p:stCondLst>
-                                    <p:cond delay="0"/>
-                                  </p:stCondLst>
-                                  <p:childTnLst>
-                                    <p:set>
-                                      <p:cBhvr>
-                                        <p:cTn id="22" dur="1" fill="hold">
-                                          <p:stCondLst>
-                                            <p:cond delay="0"/>
-                                          </p:stCondLst>
-                                        </p:cTn>
-                                        <p:tgtEl>
-                                          <p:spTgt spid="16386">
-                                            <p:txEl>
-                                              <p:pRg st="6" end="6"/>
-                                            </p:txEl>
-                                          </p:spTgt>
-                                        </p:tgtEl>
-                                        <p:attrNameLst>
-                                          <p:attrName>style.visibility</p:attrName>
-                                        </p:attrNameLst>
-                                      </p:cBhvr>
-                                      <p:to>
-                                        <p:strVal val="visible"/>
-                                      </p:to>
-                                    </p:set>
-                                  </p:childTnLst>
-                                </p:cTn>
-                              </p:par>
-                            </p:childTnLst>
-                          </p:cTn>
-                        </p:par>
-                      </p:childTnLst>
-                    </p:cTn>
-                  </p:par>
-                  <p:par>
-                    <p:cTn id="23" fill="hold">
-                      <p:stCondLst>
-                        <p:cond delay="indefinite"/>
-                      </p:stCondLst>
-                      <p:childTnLst>
-                        <p:par>
-                          <p:cTn id="24" fill="hold">
-                            <p:stCondLst>
-                              <p:cond delay="0"/>
-                            </p:stCondLst>
-                            <p:childTnLst>
-                              <p:par>
-                                <p:cTn id="25" presetID="1" presetClass="entr" presetSubtype="0" fill="hold" nodeType="clickEffect">
-                                  <p:stCondLst>
-                                    <p:cond delay="0"/>
-                                  </p:stCondLst>
-                                  <p:childTnLst>
-                                    <p:set>
-                                      <p:cBhvr>
-                                        <p:cTn id="26" dur="1" fill="hold">
-                                          <p:stCondLst>
-                                            <p:cond delay="0"/>
-                                          </p:stCondLst>
-                                        </p:cTn>
-                                        <p:tgtEl>
-                                          <p:spTgt spid="16386">
-                                            <p:txEl>
-                                              <p:pRg st="8" end="8"/>
-                                            </p:txEl>
-                                          </p:spTgt>
-                                        </p:tgtEl>
-                                        <p:attrNameLst>
-                                          <p:attrName>style.visibility</p:attrName>
-                                        </p:attrNameLst>
-                                      </p:cBhvr>
-                                      <p:to>
-                                        <p:strVal val="visible"/>
-                                      </p:to>
-                                    </p:set>
-                                  </p:childTnLst>
-                                </p:cTn>
-                              </p:par>
-                            </p:childTnLst>
-                          </p:cTn>
-                        </p:par>
-                      </p:childTnLst>
-                    </p:cTn>
-                  </p:par>
-                </p:childTnLst>
-              </p:cTn>
-              <p:prevCondLst>
-                <p:cond evt="onPrev" delay="0">
-                  <p:tgtEl>
-                    <p:sldTgt/>
-                  </p:tgtEl>
-                </p:cond>
-              </p:prevCondLst>
-              <p:nextCondLst>
-                <p:cond evt="onNext" delay="0">
-                  <p:tgtEl>
-                    <p:sldTgt/>
-                  </p:tgtEl>
-                </p:cond>
-              </p:nextCondLst>
-            </p:seq>
-          </p:childTnLst>
-        </p:cTn>
-      </p:par>
-    </p:tnLst>
-  </p:timing>
-</p:sld>
-</file>
-
-<file path=ppt/slides/slide30.xml><?xml version="1.0" encoding="utf-8"?>
+<file path=ppt/slides/slide34.xml><?xml version="1.0" encoding="utf-8"?>
 <p:sld xmlns:a="http://schemas.openxmlformats.org/drawingml/2006/main" xmlns:r="http://schemas.openxmlformats.org/officeDocument/2006/relationships" xmlns:p="http://schemas.openxmlformats.org/presentationml/2006/main">
   <p:cSld>
     <p:spTree>
